--- a/docs/downloads/en/DRX_Ministerial_Presentation_EN.pptx
+++ b/docs/downloads/en/DRX_Ministerial_Presentation_EN.pptx
@@ -2,28 +2,28 @@
 <file path=ppt/presentation.xml><?xml version="1.0" encoding="utf-8"?>
 <p:presentation xmlns:p="http://schemas.openxmlformats.org/presentationml/2006/main">
   <p:sldMasterIdLst>
-    <p:sldMasterId xmlns:r="http://schemas.openxmlformats.org/officeDocument/2006/relationships" id="2147483648" r:id="Re3e6345771bf4957"/>
+    <p:sldMasterId xmlns:r="http://schemas.openxmlformats.org/officeDocument/2006/relationships" id="2147483648" r:id="Rdd3506b5b9554767"/>
   </p:sldMasterIdLst>
   <p:notesMasterIdLst>
-    <p:notesMasterId xmlns:r="http://schemas.openxmlformats.org/officeDocument/2006/relationships" r:id="R85e8d03f2fb94ea4"/>
+    <p:notesMasterId xmlns:r="http://schemas.openxmlformats.org/officeDocument/2006/relationships" r:id="R98833ce014fa4005"/>
   </p:notesMasterIdLst>
   <p:sldIdLst>
-    <p:sldId xmlns:r="http://schemas.openxmlformats.org/officeDocument/2006/relationships" id="256" r:id="R88288c896cc945ea"/>
-    <p:sldId xmlns:r="http://schemas.openxmlformats.org/officeDocument/2006/relationships" id="257" r:id="Rd96c103b4c6a40f8"/>
-    <p:sldId xmlns:r="http://schemas.openxmlformats.org/officeDocument/2006/relationships" id="258" r:id="R7fd48c29d68c42d8"/>
-    <p:sldId xmlns:r="http://schemas.openxmlformats.org/officeDocument/2006/relationships" id="259" r:id="R0e203660c8cd4559"/>
-    <p:sldId xmlns:r="http://schemas.openxmlformats.org/officeDocument/2006/relationships" id="260" r:id="Re0e50882dc9d4c9c"/>
-    <p:sldId xmlns:r="http://schemas.openxmlformats.org/officeDocument/2006/relationships" id="261" r:id="Rc52c457205f74df6"/>
-    <p:sldId xmlns:r="http://schemas.openxmlformats.org/officeDocument/2006/relationships" id="262" r:id="Rdf414bd0b9ba4d09"/>
-    <p:sldId xmlns:r="http://schemas.openxmlformats.org/officeDocument/2006/relationships" id="263" r:id="Rfd316e51cbc249fa"/>
-    <p:sldId xmlns:r="http://schemas.openxmlformats.org/officeDocument/2006/relationships" id="264" r:id="R2cfee11088df4ce6"/>
-    <p:sldId xmlns:r="http://schemas.openxmlformats.org/officeDocument/2006/relationships" id="265" r:id="R705192da60e84f14"/>
-    <p:sldId xmlns:r="http://schemas.openxmlformats.org/officeDocument/2006/relationships" id="266" r:id="Rd11c71fbfe9340f1"/>
-    <p:sldId xmlns:r="http://schemas.openxmlformats.org/officeDocument/2006/relationships" id="267" r:id="R854d439a1ce2448c"/>
-    <p:sldId xmlns:r="http://schemas.openxmlformats.org/officeDocument/2006/relationships" id="268" r:id="R7fa9961362da494b"/>
-    <p:sldId xmlns:r="http://schemas.openxmlformats.org/officeDocument/2006/relationships" id="269" r:id="R273384c57a8a4f50"/>
-    <p:sldId xmlns:r="http://schemas.openxmlformats.org/officeDocument/2006/relationships" id="270" r:id="R1daba95645e14f3c"/>
-    <p:sldId xmlns:r="http://schemas.openxmlformats.org/officeDocument/2006/relationships" id="271" r:id="Rbd543eb6b9c949c1"/>
+    <p:sldId xmlns:r="http://schemas.openxmlformats.org/officeDocument/2006/relationships" id="256" r:id="R1f329a8159db4c56"/>
+    <p:sldId xmlns:r="http://schemas.openxmlformats.org/officeDocument/2006/relationships" id="257" r:id="R0200a626bda94bc1"/>
+    <p:sldId xmlns:r="http://schemas.openxmlformats.org/officeDocument/2006/relationships" id="258" r:id="Rfd87fa141ce34c75"/>
+    <p:sldId xmlns:r="http://schemas.openxmlformats.org/officeDocument/2006/relationships" id="259" r:id="R38ebe20af33e4557"/>
+    <p:sldId xmlns:r="http://schemas.openxmlformats.org/officeDocument/2006/relationships" id="260" r:id="R2c6c34e5f1ac42f8"/>
+    <p:sldId xmlns:r="http://schemas.openxmlformats.org/officeDocument/2006/relationships" id="261" r:id="R33323722e2c64210"/>
+    <p:sldId xmlns:r="http://schemas.openxmlformats.org/officeDocument/2006/relationships" id="262" r:id="Ra0bd6a2945cd4b53"/>
+    <p:sldId xmlns:r="http://schemas.openxmlformats.org/officeDocument/2006/relationships" id="263" r:id="R7bde1471bc164f3a"/>
+    <p:sldId xmlns:r="http://schemas.openxmlformats.org/officeDocument/2006/relationships" id="264" r:id="R71bbac8a91ce42b5"/>
+    <p:sldId xmlns:r="http://schemas.openxmlformats.org/officeDocument/2006/relationships" id="265" r:id="Rf294f0ad96da4c04"/>
+    <p:sldId xmlns:r="http://schemas.openxmlformats.org/officeDocument/2006/relationships" id="266" r:id="R48f89f58159c457b"/>
+    <p:sldId xmlns:r="http://schemas.openxmlformats.org/officeDocument/2006/relationships" id="267" r:id="R15807642a17c4ecb"/>
+    <p:sldId xmlns:r="http://schemas.openxmlformats.org/officeDocument/2006/relationships" id="268" r:id="R93f65749eb84430b"/>
+    <p:sldId xmlns:r="http://schemas.openxmlformats.org/officeDocument/2006/relationships" id="269" r:id="R30cb5610194a43f2"/>
+    <p:sldId xmlns:r="http://schemas.openxmlformats.org/officeDocument/2006/relationships" id="270" r:id="Rddd0c6a3e3734e9c"/>
+    <p:sldId xmlns:r="http://schemas.openxmlformats.org/officeDocument/2006/relationships" id="271" r:id="Rc54a0878931e424c"/>
   </p:sldIdLst>
   <p:sldSz cx="12192000" cy="6858000"/>
   <p:notesSz cx="6858000" cy="9144000"/>
@@ -1701,7 +1701,7 @@
   </p:cSld>
   <p:clrMap bg1="lt1" tx1="dk1" bg2="lt2" tx2="dk2" accent1="accent1" accent2="accent2" accent3="accent3" accent4="accent4" accent5="accent5" accent6="accent6" hlink="hlink" folHlink="folHlink"/>
   <p:sldLayoutIdLst>
-    <p:sldLayoutId xmlns:r="http://schemas.openxmlformats.org/officeDocument/2006/relationships" id="2147483649" r:id="R7fea7d2c272f4876"/>
+    <p:sldLayoutId xmlns:r="http://schemas.openxmlformats.org/officeDocument/2006/relationships" id="2147483649" r:id="Rf2cf3c95c0404d5a"/>
   </p:sldLayoutIdLst>
   <p:txStyles>
     <p:titleStyle>
@@ -2252,7 +2252,7 @@
           <p:cNvPr id="12" name="">
             <a:extLst xmlns:a="http://schemas.openxmlformats.org/drawingml/2006/main">
               <a:ext uri="{FF2B5EF4-FFF2-40B4-BE49-F238E27FC236}">
-                <a16:creationId xmlns:a16="http://schemas.microsoft.com/office/drawing/2014/main" id="{92EEC93B-491D-40F2-A428-D3D1329F4571}"/>
+                <a16:creationId xmlns:a16="http://schemas.microsoft.com/office/drawing/2014/main" id="{E83C1F23-5D49-427F-9318-27BDF8E11A35}"/>
               </a:ext>
             </a:extLst>
           </p:cNvPr>
@@ -2283,7 +2283,7 @@
           <p:cNvPr id="2" name="">
             <a:extLst xmlns:a="http://schemas.openxmlformats.org/drawingml/2006/main">
               <a:ext uri="{FF2B5EF4-FFF2-40B4-BE49-F238E27FC236}">
-                <a16:creationId xmlns:a16="http://schemas.microsoft.com/office/drawing/2014/main" id="{D719F9CC-F8F3-4AC1-81D5-DFDAB4BD99E7}"/>
+                <a16:creationId xmlns:a16="http://schemas.microsoft.com/office/drawing/2014/main" id="{EEF63C3B-2E5F-4501-BE7A-01233668879E}"/>
               </a:ext>
             </a:extLst>
           </p:cNvPr>
@@ -2314,7 +2314,7 @@
           <p:cNvPr id="3" name="">
             <a:extLst xmlns:a="http://schemas.openxmlformats.org/drawingml/2006/main">
               <a:ext uri="{FF2B5EF4-FFF2-40B4-BE49-F238E27FC236}">
-                <a16:creationId xmlns:a16="http://schemas.microsoft.com/office/drawing/2014/main" id="{D3954CC7-8ABC-4273-8A94-3BA0A413D2F1}"/>
+                <a16:creationId xmlns:a16="http://schemas.microsoft.com/office/drawing/2014/main" id="{D012B3DA-7D0B-4771-8024-21686FF013B3}"/>
               </a:ext>
             </a:extLst>
           </p:cNvPr>
@@ -2376,7 +2376,7 @@
           <p:cNvPr id="4" name="">
             <a:extLst xmlns:a="http://schemas.openxmlformats.org/drawingml/2006/main">
               <a:ext uri="{FF2B5EF4-FFF2-40B4-BE49-F238E27FC236}">
-                <a16:creationId xmlns:a16="http://schemas.microsoft.com/office/drawing/2014/main" id="{2870EACF-F0BD-4FAD-A3BB-0756A36583AC}"/>
+                <a16:creationId xmlns:a16="http://schemas.microsoft.com/office/drawing/2014/main" id="{A1D81EAB-F9D6-4BB7-960D-0551F30AA0F9}"/>
               </a:ext>
             </a:extLst>
           </p:cNvPr>
@@ -2438,7 +2438,7 @@
           <p:cNvPr id="5" name="">
             <a:extLst xmlns:a="http://schemas.openxmlformats.org/drawingml/2006/main">
               <a:ext uri="{FF2B5EF4-FFF2-40B4-BE49-F238E27FC236}">
-                <a16:creationId xmlns:a16="http://schemas.microsoft.com/office/drawing/2014/main" id="{EFA55E41-6CF4-41B0-8905-61594A78A27E}"/>
+                <a16:creationId xmlns:a16="http://schemas.microsoft.com/office/drawing/2014/main" id="{94338E69-6784-403F-96CF-4B5879D01FEA}"/>
               </a:ext>
             </a:extLst>
           </p:cNvPr>
@@ -2500,7 +2500,7 @@
           <p:cNvPr id="6" name="">
             <a:extLst xmlns:a="http://schemas.openxmlformats.org/drawingml/2006/main">
               <a:ext uri="{FF2B5EF4-FFF2-40B4-BE49-F238E27FC236}">
-                <a16:creationId xmlns:a16="http://schemas.microsoft.com/office/drawing/2014/main" id="{EFD972F8-2A8B-47FD-87B3-A0069562CC5D}"/>
+                <a16:creationId xmlns:a16="http://schemas.microsoft.com/office/drawing/2014/main" id="{47C09093-815B-4553-BC99-0B0667E996E3}"/>
               </a:ext>
             </a:extLst>
           </p:cNvPr>
@@ -2562,7 +2562,7 @@
           <p:cNvPr id="7" name="">
             <a:extLst xmlns:a="http://schemas.openxmlformats.org/drawingml/2006/main">
               <a:ext uri="{FF2B5EF4-FFF2-40B4-BE49-F238E27FC236}">
-                <a16:creationId xmlns:a16="http://schemas.microsoft.com/office/drawing/2014/main" id="{BA31EE3B-9B1A-4428-A03E-19A8769F6F98}"/>
+                <a16:creationId xmlns:a16="http://schemas.microsoft.com/office/drawing/2014/main" id="{A3B352CC-7363-4E6F-9227-E1A17E3AF11C}"/>
               </a:ext>
             </a:extLst>
           </p:cNvPr>
@@ -2624,7 +2624,7 @@
           <p:cNvPr id="8" name="">
             <a:extLst xmlns:a="http://schemas.openxmlformats.org/drawingml/2006/main">
               <a:ext uri="{FF2B5EF4-FFF2-40B4-BE49-F238E27FC236}">
-                <a16:creationId xmlns:a16="http://schemas.microsoft.com/office/drawing/2014/main" id="{2630A09B-0B53-4621-84B7-EA81E537F8C0}"/>
+                <a16:creationId xmlns:a16="http://schemas.microsoft.com/office/drawing/2014/main" id="{F6E6210B-9BBF-4428-8414-B7758A5F80F4}"/>
               </a:ext>
             </a:extLst>
           </p:cNvPr>
@@ -2686,7 +2686,7 @@
           <p:cNvPr id="9" name="">
             <a:extLst xmlns:a="http://schemas.openxmlformats.org/drawingml/2006/main">
               <a:ext uri="{FF2B5EF4-FFF2-40B4-BE49-F238E27FC236}">
-                <a16:creationId xmlns:a16="http://schemas.microsoft.com/office/drawing/2014/main" id="{BCF23DC5-CFDE-40D0-A552-4EB9D00807CF}"/>
+                <a16:creationId xmlns:a16="http://schemas.microsoft.com/office/drawing/2014/main" id="{CDAF2770-6690-4C99-A30F-6D4455E4D55E}"/>
               </a:ext>
             </a:extLst>
           </p:cNvPr>
@@ -2752,7 +2752,7 @@
           <p:nvPr/>
         </p:nvPicPr>
         <p:blipFill>
-          <a:blip xmlns:r="http://schemas.openxmlformats.org/officeDocument/2006/relationships" xmlns:a="http://schemas.openxmlformats.org/drawingml/2006/main" r:embed="R81c8b641792641ba"/>
+          <a:blip xmlns:r="http://schemas.openxmlformats.org/officeDocument/2006/relationships" xmlns:a="http://schemas.openxmlformats.org/drawingml/2006/main" r:embed="R621c7b6618ff4bd1"/>
           <a:srcRect xmlns:a="http://schemas.openxmlformats.org/drawingml/2006/main" l="0" t="0" r="0" b="0"/>
           <a:stretch xmlns:a="http://schemas.openxmlformats.org/drawingml/2006/main">
             <a:fillRect l="0" t="0" r="0" b="0"/>
@@ -2773,7 +2773,7 @@
           <p:cNvPr id="11" name="">
             <a:extLst xmlns:a="http://schemas.openxmlformats.org/drawingml/2006/main">
               <a:ext uri="{FF2B5EF4-FFF2-40B4-BE49-F238E27FC236}">
-                <a16:creationId xmlns:a16="http://schemas.microsoft.com/office/drawing/2014/main" id="{D23CD190-DE53-4B9B-8F7D-DC7A66D6B881}"/>
+                <a16:creationId xmlns:a16="http://schemas.microsoft.com/office/drawing/2014/main" id="{106CB1B3-473D-43C7-85EA-6AF65377B7CF}"/>
               </a:ext>
             </a:extLst>
           </p:cNvPr>
@@ -2833,7 +2833,7 @@
     </p:spTree>
     <p:extLst>
       <p:ext uri="{BB962C8B-B14F-4D97-AF65-F5344CB8AC3E}">
-        <p14:creationId xmlns:p14="http://schemas.microsoft.com/office/powerpoint/2010/main" val="1403919937"/>
+        <p14:creationId xmlns:p14="http://schemas.microsoft.com/office/powerpoint/2010/main" val="628478171"/>
       </p:ext>
     </p:extLst>
   </p:cSld>
@@ -2864,7 +2864,7 @@
           <p:cNvPr id="17" name="">
             <a:extLst xmlns:a="http://schemas.openxmlformats.org/drawingml/2006/main">
               <a:ext uri="{FF2B5EF4-FFF2-40B4-BE49-F238E27FC236}">
-                <a16:creationId xmlns:a16="http://schemas.microsoft.com/office/drawing/2014/main" id="{A8CA027F-257D-4E51-A2B9-F786D17E6C0C}"/>
+                <a16:creationId xmlns:a16="http://schemas.microsoft.com/office/drawing/2014/main" id="{238E9550-69B0-4C5E-963A-0598E6F4BE77}"/>
               </a:ext>
             </a:extLst>
           </p:cNvPr>
@@ -2895,7 +2895,7 @@
           <p:cNvPr id="2" name="">
             <a:extLst xmlns:a="http://schemas.openxmlformats.org/drawingml/2006/main">
               <a:ext uri="{FF2B5EF4-FFF2-40B4-BE49-F238E27FC236}">
-                <a16:creationId xmlns:a16="http://schemas.microsoft.com/office/drawing/2014/main" id="{6CD2E40E-4ED3-4688-852D-5A260BD98997}"/>
+                <a16:creationId xmlns:a16="http://schemas.microsoft.com/office/drawing/2014/main" id="{59DC3055-3B31-4251-B309-7F795BF2D7DE}"/>
               </a:ext>
             </a:extLst>
           </p:cNvPr>
@@ -2957,7 +2957,7 @@
           <p:cNvPr id="3" name="">
             <a:extLst xmlns:a="http://schemas.openxmlformats.org/drawingml/2006/main">
               <a:ext uri="{FF2B5EF4-FFF2-40B4-BE49-F238E27FC236}">
-                <a16:creationId xmlns:a16="http://schemas.microsoft.com/office/drawing/2014/main" id="{045090E8-2051-46CA-BFCC-3EAADCF6F38C}"/>
+                <a16:creationId xmlns:a16="http://schemas.microsoft.com/office/drawing/2014/main" id="{89966E59-375B-4F45-B207-EA977280473B}"/>
               </a:ext>
             </a:extLst>
           </p:cNvPr>
@@ -2991,7 +2991,7 @@
                 <a:spcPct val="108000"/>
               </a:lnSpc>
               <a:buNone/>
-              <a:defRPr sz="3150" b="1">
+              <a:defRPr sz="2250" b="1">
                 <a:solidFill>
                   <a:srgbClr val="071426"/>
                 </a:solidFill>
@@ -3001,7 +3001,7 @@
               </a:defRPr>
             </a:pPr>
             <a:r>
-              <a:rPr sz="3150" b="1">
+              <a:rPr sz="2250" b="1">
                 <a:solidFill>
                   <a:srgbClr val="071426"/>
                 </a:solidFill>
@@ -3019,7 +3019,7 @@
           <p:cNvPr id="4" name="">
             <a:extLst xmlns:a="http://schemas.openxmlformats.org/drawingml/2006/main">
               <a:ext uri="{FF2B5EF4-FFF2-40B4-BE49-F238E27FC236}">
-                <a16:creationId xmlns:a16="http://schemas.microsoft.com/office/drawing/2014/main" id="{533B7959-658F-44E3-9C3B-40090C92D347}"/>
+                <a16:creationId xmlns:a16="http://schemas.microsoft.com/office/drawing/2014/main" id="{7A71E406-28CF-4892-9C2A-3FBF245D956D}"/>
               </a:ext>
             </a:extLst>
           </p:cNvPr>
@@ -3054,7 +3054,7 @@
           <p:nvPr/>
         </p:nvPicPr>
         <p:blipFill>
-          <a:blip xmlns:r="http://schemas.openxmlformats.org/officeDocument/2006/relationships" xmlns:a="http://schemas.openxmlformats.org/drawingml/2006/main" r:embed="R368473390a874dab"/>
+          <a:blip xmlns:r="http://schemas.openxmlformats.org/officeDocument/2006/relationships" xmlns:a="http://schemas.openxmlformats.org/drawingml/2006/main" r:embed="R00325f0948db4459"/>
           <a:srcRect xmlns:a="http://schemas.openxmlformats.org/drawingml/2006/main" l="0" t="0" r="0" b="0"/>
           <a:stretch xmlns:a="http://schemas.openxmlformats.org/drawingml/2006/main">
             <a:fillRect l="0" t="0" r="0" b="0"/>
@@ -3075,7 +3075,7 @@
           <p:cNvPr id="6" name="">
             <a:extLst xmlns:a="http://schemas.openxmlformats.org/drawingml/2006/main">
               <a:ext uri="{FF2B5EF4-FFF2-40B4-BE49-F238E27FC236}">
-                <a16:creationId xmlns:a16="http://schemas.microsoft.com/office/drawing/2014/main" id="{55E00859-9E97-4F19-BEA0-0195E8819ABC}"/>
+                <a16:creationId xmlns:a16="http://schemas.microsoft.com/office/drawing/2014/main" id="{DA846B5A-9286-43F9-9EE2-E8BC3B2CA05F}"/>
               </a:ext>
             </a:extLst>
           </p:cNvPr>
@@ -3137,7 +3137,7 @@
           <p:cNvPr id="7" name="">
             <a:extLst xmlns:a="http://schemas.openxmlformats.org/drawingml/2006/main">
               <a:ext uri="{FF2B5EF4-FFF2-40B4-BE49-F238E27FC236}">
-                <a16:creationId xmlns:a16="http://schemas.microsoft.com/office/drawing/2014/main" id="{8C09B562-EC0D-4832-B4C6-803571AA6203}"/>
+                <a16:creationId xmlns:a16="http://schemas.microsoft.com/office/drawing/2014/main" id="{92667A51-A0C6-46E5-8891-1415D67EAD84}"/>
               </a:ext>
             </a:extLst>
           </p:cNvPr>
@@ -3199,7 +3199,7 @@
           <p:cNvPr id="8" name="">
             <a:extLst xmlns:a="http://schemas.openxmlformats.org/drawingml/2006/main">
               <a:ext uri="{FF2B5EF4-FFF2-40B4-BE49-F238E27FC236}">
-                <a16:creationId xmlns:a16="http://schemas.microsoft.com/office/drawing/2014/main" id="{B38F9339-B117-4B3B-8F25-C3A81F6AF053}"/>
+                <a16:creationId xmlns:a16="http://schemas.microsoft.com/office/drawing/2014/main" id="{4A45F578-23A6-47A8-9056-1E17125EAC76}"/>
               </a:ext>
             </a:extLst>
           </p:cNvPr>
@@ -3234,7 +3234,7 @@
           <p:cNvPr id="9" name="">
             <a:extLst xmlns:a="http://schemas.openxmlformats.org/drawingml/2006/main">
               <a:ext uri="{FF2B5EF4-FFF2-40B4-BE49-F238E27FC236}">
-                <a16:creationId xmlns:a16="http://schemas.microsoft.com/office/drawing/2014/main" id="{E50CED58-4A09-44F8-9C38-8DB3E91B345A}"/>
+                <a16:creationId xmlns:a16="http://schemas.microsoft.com/office/drawing/2014/main" id="{CBE99D9A-6B95-4B4D-8E9C-C6DD38B57C37}"/>
               </a:ext>
             </a:extLst>
           </p:cNvPr>
@@ -3265,7 +3265,7 @@
           <p:cNvPr id="10" name="">
             <a:extLst xmlns:a="http://schemas.openxmlformats.org/drawingml/2006/main">
               <a:ext uri="{FF2B5EF4-FFF2-40B4-BE49-F238E27FC236}">
-                <a16:creationId xmlns:a16="http://schemas.microsoft.com/office/drawing/2014/main" id="{1AAE1692-D195-4E27-AEA3-E937FCA8BA12}"/>
+                <a16:creationId xmlns:a16="http://schemas.microsoft.com/office/drawing/2014/main" id="{A8B64F11-3034-4177-B0B4-1A9DA23D0F2D}"/>
               </a:ext>
             </a:extLst>
           </p:cNvPr>
@@ -3327,7 +3327,7 @@
           <p:cNvPr id="11" name="">
             <a:extLst xmlns:a="http://schemas.openxmlformats.org/drawingml/2006/main">
               <a:ext uri="{FF2B5EF4-FFF2-40B4-BE49-F238E27FC236}">
-                <a16:creationId xmlns:a16="http://schemas.microsoft.com/office/drawing/2014/main" id="{1D7D97A6-F8F8-4468-978F-BB94650B532D}"/>
+                <a16:creationId xmlns:a16="http://schemas.microsoft.com/office/drawing/2014/main" id="{F73FEC12-7D51-407B-B890-6C759815DAF5}"/>
               </a:ext>
             </a:extLst>
           </p:cNvPr>
@@ -3443,7 +3443,7 @@
           <p:cNvPr id="12" name="">
             <a:extLst xmlns:a="http://schemas.openxmlformats.org/drawingml/2006/main">
               <a:ext uri="{FF2B5EF4-FFF2-40B4-BE49-F238E27FC236}">
-                <a16:creationId xmlns:a16="http://schemas.microsoft.com/office/drawing/2014/main" id="{71C3B397-F998-4154-87B2-76532E8A43C0}"/>
+                <a16:creationId xmlns:a16="http://schemas.microsoft.com/office/drawing/2014/main" id="{F79A62C8-ACF5-458E-8DC8-B7082509F99C}"/>
               </a:ext>
             </a:extLst>
           </p:cNvPr>
@@ -3478,7 +3478,7 @@
           <p:cNvPr id="13" name="">
             <a:extLst xmlns:a="http://schemas.openxmlformats.org/drawingml/2006/main">
               <a:ext uri="{FF2B5EF4-FFF2-40B4-BE49-F238E27FC236}">
-                <a16:creationId xmlns:a16="http://schemas.microsoft.com/office/drawing/2014/main" id="{BF8C0BC3-BD30-42B5-8284-9A91560B7183}"/>
+                <a16:creationId xmlns:a16="http://schemas.microsoft.com/office/drawing/2014/main" id="{094EF116-C585-4758-ACC9-3D60D2199056}"/>
               </a:ext>
             </a:extLst>
           </p:cNvPr>
@@ -3509,7 +3509,7 @@
           <p:cNvPr id="14" name="">
             <a:extLst xmlns:a="http://schemas.openxmlformats.org/drawingml/2006/main">
               <a:ext uri="{FF2B5EF4-FFF2-40B4-BE49-F238E27FC236}">
-                <a16:creationId xmlns:a16="http://schemas.microsoft.com/office/drawing/2014/main" id="{BA315E3B-A51E-4EF5-B195-718AF3DF6C67}"/>
+                <a16:creationId xmlns:a16="http://schemas.microsoft.com/office/drawing/2014/main" id="{C54BB05F-33C3-4A27-A668-925C14A8E041}"/>
               </a:ext>
             </a:extLst>
           </p:cNvPr>
@@ -3571,7 +3571,7 @@
           <p:cNvPr id="15" name="">
             <a:extLst xmlns:a="http://schemas.openxmlformats.org/drawingml/2006/main">
               <a:ext uri="{FF2B5EF4-FFF2-40B4-BE49-F238E27FC236}">
-                <a16:creationId xmlns:a16="http://schemas.microsoft.com/office/drawing/2014/main" id="{7390B46F-E808-4EF0-A44F-5BA8589CFAF5}"/>
+                <a16:creationId xmlns:a16="http://schemas.microsoft.com/office/drawing/2014/main" id="{5DE9EAE0-7815-4B39-8955-54F7FDBF2D19}"/>
               </a:ext>
             </a:extLst>
           </p:cNvPr>
@@ -3687,7 +3687,7 @@
           <p:cNvPr id="16" name="">
             <a:extLst xmlns:a="http://schemas.openxmlformats.org/drawingml/2006/main">
               <a:ext uri="{FF2B5EF4-FFF2-40B4-BE49-F238E27FC236}">
-                <a16:creationId xmlns:a16="http://schemas.microsoft.com/office/drawing/2014/main" id="{9ADC2E1B-BE9D-4906-9D8B-30A0A612B553}"/>
+                <a16:creationId xmlns:a16="http://schemas.microsoft.com/office/drawing/2014/main" id="{01DA7AB0-6FBE-45F0-A9EB-EE1DDCC99823}"/>
               </a:ext>
             </a:extLst>
           </p:cNvPr>
@@ -3749,7 +3749,7 @@
     </p:spTree>
     <p:extLst>
       <p:ext uri="{BB962C8B-B14F-4D97-AF65-F5344CB8AC3E}">
-        <p14:creationId xmlns:p14="http://schemas.microsoft.com/office/powerpoint/2010/main" val="1964202432"/>
+        <p14:creationId xmlns:p14="http://schemas.microsoft.com/office/powerpoint/2010/main" val="1237414473"/>
       </p:ext>
     </p:extLst>
   </p:cSld>
@@ -3780,7 +3780,7 @@
           <p:cNvPr id="25" name="">
             <a:extLst xmlns:a="http://schemas.openxmlformats.org/drawingml/2006/main">
               <a:ext uri="{FF2B5EF4-FFF2-40B4-BE49-F238E27FC236}">
-                <a16:creationId xmlns:a16="http://schemas.microsoft.com/office/drawing/2014/main" id="{007956CC-6E28-438E-973F-563A83B317D6}"/>
+                <a16:creationId xmlns:a16="http://schemas.microsoft.com/office/drawing/2014/main" id="{7F7FD888-F7D6-4789-AA55-922BAB576B70}"/>
               </a:ext>
             </a:extLst>
           </p:cNvPr>
@@ -3811,7 +3811,7 @@
           <p:cNvPr id="2" name="">
             <a:extLst xmlns:a="http://schemas.openxmlformats.org/drawingml/2006/main">
               <a:ext uri="{FF2B5EF4-FFF2-40B4-BE49-F238E27FC236}">
-                <a16:creationId xmlns:a16="http://schemas.microsoft.com/office/drawing/2014/main" id="{1D74717F-CFAE-44EC-803F-8BEC06715390}"/>
+                <a16:creationId xmlns:a16="http://schemas.microsoft.com/office/drawing/2014/main" id="{6E3A743D-E234-476D-B1A9-6C1F25CBC460}"/>
               </a:ext>
             </a:extLst>
           </p:cNvPr>
@@ -3863,7 +3863,7 @@
                 <a:ea typeface="Aptos"/>
                 <a:cs typeface="Aptos"/>
               </a:rPr>
-              <a:t>BANKING</a:t>
+              <a:t>GLOBAL ECONOMY</a:t>
             </a:r>
           </a:p>
         </p:txBody>
@@ -3873,7 +3873,7 @@
           <p:cNvPr id="3" name="">
             <a:extLst xmlns:a="http://schemas.openxmlformats.org/drawingml/2006/main">
               <a:ext uri="{FF2B5EF4-FFF2-40B4-BE49-F238E27FC236}">
-                <a16:creationId xmlns:a16="http://schemas.microsoft.com/office/drawing/2014/main" id="{F3595A59-1290-48B6-8EBF-E6D810FED290}"/>
+                <a16:creationId xmlns:a16="http://schemas.microsoft.com/office/drawing/2014/main" id="{1E4660EB-4882-4F07-9990-DD2488FFD329}"/>
               </a:ext>
             </a:extLst>
           </p:cNvPr>
@@ -3907,7 +3907,7 @@
                 <a:spcPct val="108000"/>
               </a:lnSpc>
               <a:buNone/>
-              <a:defRPr sz="3150" b="1">
+              <a:defRPr sz="2550" b="1">
                 <a:solidFill>
                   <a:srgbClr val="071426"/>
                 </a:solidFill>
@@ -3917,7 +3917,7 @@
               </a:defRPr>
             </a:pPr>
             <a:r>
-              <a:rPr sz="3150" b="1">
+              <a:rPr sz="2550" b="1">
                 <a:solidFill>
                   <a:srgbClr val="071426"/>
                 </a:solidFill>
@@ -3935,7 +3935,7 @@
           <p:cNvPr id="4" name="">
             <a:extLst xmlns:a="http://schemas.openxmlformats.org/drawingml/2006/main">
               <a:ext uri="{FF2B5EF4-FFF2-40B4-BE49-F238E27FC236}">
-                <a16:creationId xmlns:a16="http://schemas.microsoft.com/office/drawing/2014/main" id="{9101C734-4562-4E06-9BFC-43F16B9CCA83}"/>
+                <a16:creationId xmlns:a16="http://schemas.microsoft.com/office/drawing/2014/main" id="{E5EC06C4-081F-4EB5-A0C3-61CF88E0B5C7}"/>
               </a:ext>
             </a:extLst>
           </p:cNvPr>
@@ -3970,7 +3970,7 @@
           <p:nvPr/>
         </p:nvPicPr>
         <p:blipFill>
-          <a:blip xmlns:r="http://schemas.openxmlformats.org/officeDocument/2006/relationships" xmlns:a="http://schemas.openxmlformats.org/drawingml/2006/main" r:embed="R39262e6798834fb0"/>
+          <a:blip xmlns:r="http://schemas.openxmlformats.org/officeDocument/2006/relationships" xmlns:a="http://schemas.openxmlformats.org/drawingml/2006/main" r:embed="R1cbeeb19f6a14542"/>
           <a:srcRect xmlns:a="http://schemas.openxmlformats.org/drawingml/2006/main" l="0" t="0" r="0" b="0"/>
           <a:stretch xmlns:a="http://schemas.openxmlformats.org/drawingml/2006/main">
             <a:fillRect l="0" t="0" r="0" b="0"/>
@@ -3991,7 +3991,7 @@
           <p:cNvPr id="6" name="">
             <a:extLst xmlns:a="http://schemas.openxmlformats.org/drawingml/2006/main">
               <a:ext uri="{FF2B5EF4-FFF2-40B4-BE49-F238E27FC236}">
-                <a16:creationId xmlns:a16="http://schemas.microsoft.com/office/drawing/2014/main" id="{3FAD279E-C402-468D-A7E1-E6DB43B945C2}"/>
+                <a16:creationId xmlns:a16="http://schemas.microsoft.com/office/drawing/2014/main" id="{1F6731E6-85C0-4683-8E36-2176A676B82F}"/>
               </a:ext>
             </a:extLst>
           </p:cNvPr>
@@ -4053,7 +4053,7 @@
           <p:cNvPr id="7" name="">
             <a:extLst xmlns:a="http://schemas.openxmlformats.org/drawingml/2006/main">
               <a:ext uri="{FF2B5EF4-FFF2-40B4-BE49-F238E27FC236}">
-                <a16:creationId xmlns:a16="http://schemas.microsoft.com/office/drawing/2014/main" id="{BDA29D74-62FD-4B92-9261-F79062730A45}"/>
+                <a16:creationId xmlns:a16="http://schemas.microsoft.com/office/drawing/2014/main" id="{25373E6D-119C-4FB9-9502-2A4D32027D72}"/>
               </a:ext>
             </a:extLst>
           </p:cNvPr>
@@ -4115,7 +4115,7 @@
           <p:cNvPr id="8" name="">
             <a:extLst xmlns:a="http://schemas.openxmlformats.org/drawingml/2006/main">
               <a:ext uri="{FF2B5EF4-FFF2-40B4-BE49-F238E27FC236}">
-                <a16:creationId xmlns:a16="http://schemas.microsoft.com/office/drawing/2014/main" id="{FDFBF4B6-20F2-4208-8020-F63601EEB914}"/>
+                <a16:creationId xmlns:a16="http://schemas.microsoft.com/office/drawing/2014/main" id="{907BD222-F1EB-4584-BE7A-05D743222F70}"/>
               </a:ext>
             </a:extLst>
           </p:cNvPr>
@@ -4150,7 +4150,7 @@
           <p:cNvPr id="9" name="">
             <a:extLst xmlns:a="http://schemas.openxmlformats.org/drawingml/2006/main">
               <a:ext uri="{FF2B5EF4-FFF2-40B4-BE49-F238E27FC236}">
-                <a16:creationId xmlns:a16="http://schemas.microsoft.com/office/drawing/2014/main" id="{9E06A2BD-390F-4907-8676-6FBB3EDFB601}"/>
+                <a16:creationId xmlns:a16="http://schemas.microsoft.com/office/drawing/2014/main" id="{2FD45FB2-603F-4B3B-89E3-E171A19F1369}"/>
               </a:ext>
             </a:extLst>
           </p:cNvPr>
@@ -4181,7 +4181,7 @@
           <p:cNvPr id="10" name="">
             <a:extLst xmlns:a="http://schemas.openxmlformats.org/drawingml/2006/main">
               <a:ext uri="{FF2B5EF4-FFF2-40B4-BE49-F238E27FC236}">
-                <a16:creationId xmlns:a16="http://schemas.microsoft.com/office/drawing/2014/main" id="{AE85DE34-8589-4C6C-AE06-FB7CF40288BA}"/>
+                <a16:creationId xmlns:a16="http://schemas.microsoft.com/office/drawing/2014/main" id="{C52BC7FB-5BB4-42D5-BD83-064DD62E3E56}"/>
               </a:ext>
             </a:extLst>
           </p:cNvPr>
@@ -4243,7 +4243,7 @@
           <p:cNvPr id="11" name="">
             <a:extLst xmlns:a="http://schemas.openxmlformats.org/drawingml/2006/main">
               <a:ext uri="{FF2B5EF4-FFF2-40B4-BE49-F238E27FC236}">
-                <a16:creationId xmlns:a16="http://schemas.microsoft.com/office/drawing/2014/main" id="{9C0B9D40-53F6-454E-9647-FFF405976282}"/>
+                <a16:creationId xmlns:a16="http://schemas.microsoft.com/office/drawing/2014/main" id="{86D393B7-FEA7-4851-91B0-3DF4D89F816C}"/>
               </a:ext>
             </a:extLst>
           </p:cNvPr>
@@ -4305,7 +4305,7 @@
           <p:cNvPr id="12" name="">
             <a:extLst xmlns:a="http://schemas.openxmlformats.org/drawingml/2006/main">
               <a:ext uri="{FF2B5EF4-FFF2-40B4-BE49-F238E27FC236}">
-                <a16:creationId xmlns:a16="http://schemas.microsoft.com/office/drawing/2014/main" id="{78E8686D-83D3-45D3-812B-23A86F8EC3D4}"/>
+                <a16:creationId xmlns:a16="http://schemas.microsoft.com/office/drawing/2014/main" id="{3B4C5BD2-E2DD-4F5B-839B-F4CC5B673755}"/>
               </a:ext>
             </a:extLst>
           </p:cNvPr>
@@ -4340,7 +4340,7 @@
           <p:cNvPr id="13" name="">
             <a:extLst xmlns:a="http://schemas.openxmlformats.org/drawingml/2006/main">
               <a:ext uri="{FF2B5EF4-FFF2-40B4-BE49-F238E27FC236}">
-                <a16:creationId xmlns:a16="http://schemas.microsoft.com/office/drawing/2014/main" id="{33D55308-644D-461D-841E-B2303CA66CDF}"/>
+                <a16:creationId xmlns:a16="http://schemas.microsoft.com/office/drawing/2014/main" id="{AE07454E-8A10-4741-9488-93146B0C5CD9}"/>
               </a:ext>
             </a:extLst>
           </p:cNvPr>
@@ -4371,7 +4371,7 @@
           <p:cNvPr id="14" name="">
             <a:extLst xmlns:a="http://schemas.openxmlformats.org/drawingml/2006/main">
               <a:ext uri="{FF2B5EF4-FFF2-40B4-BE49-F238E27FC236}">
-                <a16:creationId xmlns:a16="http://schemas.microsoft.com/office/drawing/2014/main" id="{CC612BB2-CC03-4EBC-97D6-0E9F7107BE31}"/>
+                <a16:creationId xmlns:a16="http://schemas.microsoft.com/office/drawing/2014/main" id="{B2A3057D-9F4F-4F17-BAAE-2B4CF4482F7A}"/>
               </a:ext>
             </a:extLst>
           </p:cNvPr>
@@ -4433,7 +4433,7 @@
           <p:cNvPr id="15" name="">
             <a:extLst xmlns:a="http://schemas.openxmlformats.org/drawingml/2006/main">
               <a:ext uri="{FF2B5EF4-FFF2-40B4-BE49-F238E27FC236}">
-                <a16:creationId xmlns:a16="http://schemas.microsoft.com/office/drawing/2014/main" id="{B9BAE9A7-5102-4E86-B57F-DD2F69DC0D88}"/>
+                <a16:creationId xmlns:a16="http://schemas.microsoft.com/office/drawing/2014/main" id="{FE7A9489-8FAA-42BE-88AC-67CE7E0B95F7}"/>
               </a:ext>
             </a:extLst>
           </p:cNvPr>
@@ -4485,7 +4485,7 @@
                 <a:ea typeface="Aptos"/>
                 <a:cs typeface="Aptos"/>
               </a:rPr>
-              <a:t>travel receipts 2025</a:t>
+              <a:t>travel receipts 2025: EUR 23.6268 billion.</a:t>
             </a:r>
           </a:p>
         </p:txBody>
@@ -4495,7 +4495,7 @@
           <p:cNvPr id="16" name="">
             <a:extLst xmlns:a="http://schemas.openxmlformats.org/drawingml/2006/main">
               <a:ext uri="{FF2B5EF4-FFF2-40B4-BE49-F238E27FC236}">
-                <a16:creationId xmlns:a16="http://schemas.microsoft.com/office/drawing/2014/main" id="{07FEBC46-207A-4037-944E-60F528EA3304}"/>
+                <a16:creationId xmlns:a16="http://schemas.microsoft.com/office/drawing/2014/main" id="{AD95752B-15D4-44D7-A6CE-9AC6BD02DA58}"/>
               </a:ext>
             </a:extLst>
           </p:cNvPr>
@@ -4530,7 +4530,7 @@
           <p:cNvPr id="17" name="">
             <a:extLst xmlns:a="http://schemas.openxmlformats.org/drawingml/2006/main">
               <a:ext uri="{FF2B5EF4-FFF2-40B4-BE49-F238E27FC236}">
-                <a16:creationId xmlns:a16="http://schemas.microsoft.com/office/drawing/2014/main" id="{30F22BFA-ED18-4ECE-9CCB-B5BF2DEA7129}"/>
+                <a16:creationId xmlns:a16="http://schemas.microsoft.com/office/drawing/2014/main" id="{509F04E8-306B-4D50-A019-3147DA4C69C3}"/>
               </a:ext>
             </a:extLst>
           </p:cNvPr>
@@ -4561,7 +4561,7 @@
           <p:cNvPr id="18" name="">
             <a:extLst xmlns:a="http://schemas.openxmlformats.org/drawingml/2006/main">
               <a:ext uri="{FF2B5EF4-FFF2-40B4-BE49-F238E27FC236}">
-                <a16:creationId xmlns:a16="http://schemas.microsoft.com/office/drawing/2014/main" id="{266D7458-3FA1-4CF4-A965-13C6858AD392}"/>
+                <a16:creationId xmlns:a16="http://schemas.microsoft.com/office/drawing/2014/main" id="{C59A1A28-37B7-4CA6-9F2E-DC0EC8AA92DD}"/>
               </a:ext>
             </a:extLst>
           </p:cNvPr>
@@ -4623,7 +4623,7 @@
           <p:cNvPr id="19" name="">
             <a:extLst xmlns:a="http://schemas.openxmlformats.org/drawingml/2006/main">
               <a:ext uri="{FF2B5EF4-FFF2-40B4-BE49-F238E27FC236}">
-                <a16:creationId xmlns:a16="http://schemas.microsoft.com/office/drawing/2014/main" id="{90DAEE50-47AA-446D-B918-9CA6CE2DAF5E}"/>
+                <a16:creationId xmlns:a16="http://schemas.microsoft.com/office/drawing/2014/main" id="{09B86CD6-469B-41BC-AB69-58CCC794EB44}"/>
               </a:ext>
             </a:extLst>
           </p:cNvPr>
@@ -4685,7 +4685,7 @@
           <p:cNvPr id="20" name="">
             <a:extLst xmlns:a="http://schemas.openxmlformats.org/drawingml/2006/main">
               <a:ext uri="{FF2B5EF4-FFF2-40B4-BE49-F238E27FC236}">
-                <a16:creationId xmlns:a16="http://schemas.microsoft.com/office/drawing/2014/main" id="{C99FFF21-7E48-429D-BAF4-524EFFB0E792}"/>
+                <a16:creationId xmlns:a16="http://schemas.microsoft.com/office/drawing/2014/main" id="{4ADFF3A2-53D0-4D38-8A3D-7086629FD700}"/>
               </a:ext>
             </a:extLst>
           </p:cNvPr>
@@ -4720,7 +4720,7 @@
           <p:cNvPr id="21" name="">
             <a:extLst xmlns:a="http://schemas.openxmlformats.org/drawingml/2006/main">
               <a:ext uri="{FF2B5EF4-FFF2-40B4-BE49-F238E27FC236}">
-                <a16:creationId xmlns:a16="http://schemas.microsoft.com/office/drawing/2014/main" id="{59D03CDE-B7AB-4930-9C47-2DDD8CAAA07D}"/>
+                <a16:creationId xmlns:a16="http://schemas.microsoft.com/office/drawing/2014/main" id="{5E450B0F-E5CA-4D47-A59F-2C36403F364A}"/>
               </a:ext>
             </a:extLst>
           </p:cNvPr>
@@ -4751,7 +4751,7 @@
           <p:cNvPr id="22" name="">
             <a:extLst xmlns:a="http://schemas.openxmlformats.org/drawingml/2006/main">
               <a:ext uri="{FF2B5EF4-FFF2-40B4-BE49-F238E27FC236}">
-                <a16:creationId xmlns:a16="http://schemas.microsoft.com/office/drawing/2014/main" id="{830F8D8E-E6AE-44CF-BCB4-49381A4A9F4F}"/>
+                <a16:creationId xmlns:a16="http://schemas.microsoft.com/office/drawing/2014/main" id="{FF031B69-7B0A-45CC-A94B-C136165D9347}"/>
               </a:ext>
             </a:extLst>
           </p:cNvPr>
@@ -4813,7 +4813,7 @@
           <p:cNvPr id="23" name="">
             <a:extLst xmlns:a="http://schemas.openxmlformats.org/drawingml/2006/main">
               <a:ext uri="{FF2B5EF4-FFF2-40B4-BE49-F238E27FC236}">
-                <a16:creationId xmlns:a16="http://schemas.microsoft.com/office/drawing/2014/main" id="{A7435E58-FD2F-4332-885A-9E238D6BFE77}"/>
+                <a16:creationId xmlns:a16="http://schemas.microsoft.com/office/drawing/2014/main" id="{8C2F51F9-11E9-4667-B559-129A7D75A0A4}"/>
               </a:ext>
             </a:extLst>
           </p:cNvPr>
@@ -4875,7 +4875,7 @@
           <p:cNvPr id="24" name="">
             <a:extLst xmlns:a="http://schemas.openxmlformats.org/drawingml/2006/main">
               <a:ext uri="{FF2B5EF4-FFF2-40B4-BE49-F238E27FC236}">
-                <a16:creationId xmlns:a16="http://schemas.microsoft.com/office/drawing/2014/main" id="{B9F6966C-B6CE-48D1-93A2-64D990EB2F60}"/>
+                <a16:creationId xmlns:a16="http://schemas.microsoft.com/office/drawing/2014/main" id="{455E3CD2-B7B6-4C6F-8779-825963A96E66}"/>
               </a:ext>
             </a:extLst>
           </p:cNvPr>
@@ -4937,7 +4937,7 @@
     </p:spTree>
     <p:extLst>
       <p:ext uri="{BB962C8B-B14F-4D97-AF65-F5344CB8AC3E}">
-        <p14:creationId xmlns:p14="http://schemas.microsoft.com/office/powerpoint/2010/main" val="382536719"/>
+        <p14:creationId xmlns:p14="http://schemas.microsoft.com/office/powerpoint/2010/main" val="807609471"/>
       </p:ext>
     </p:extLst>
   </p:cSld>
@@ -4968,7 +4968,7 @@
           <p:cNvPr id="17" name="">
             <a:extLst xmlns:a="http://schemas.openxmlformats.org/drawingml/2006/main">
               <a:ext uri="{FF2B5EF4-FFF2-40B4-BE49-F238E27FC236}">
-                <a16:creationId xmlns:a16="http://schemas.microsoft.com/office/drawing/2014/main" id="{EF560196-30F6-43BB-83DE-8ADB05E85A64}"/>
+                <a16:creationId xmlns:a16="http://schemas.microsoft.com/office/drawing/2014/main" id="{835F65A0-7E1B-4E88-BE38-1421D037A05A}"/>
               </a:ext>
             </a:extLst>
           </p:cNvPr>
@@ -4999,7 +4999,7 @@
           <p:cNvPr id="2" name="">
             <a:extLst xmlns:a="http://schemas.openxmlformats.org/drawingml/2006/main">
               <a:ext uri="{FF2B5EF4-FFF2-40B4-BE49-F238E27FC236}">
-                <a16:creationId xmlns:a16="http://schemas.microsoft.com/office/drawing/2014/main" id="{1EFA323D-F2D9-4DDF-B5C9-E2DD932CC45A}"/>
+                <a16:creationId xmlns:a16="http://schemas.microsoft.com/office/drawing/2014/main" id="{AEDB3795-F1DA-41AD-B94A-134831F3D423}"/>
               </a:ext>
             </a:extLst>
           </p:cNvPr>
@@ -5051,7 +5051,7 @@
                 <a:ea typeface="Aptos"/>
                 <a:cs typeface="Aptos"/>
               </a:rPr>
-              <a:t>GLOBAL ECONOMY</a:t>
+              <a:t>LAW</a:t>
             </a:r>
           </a:p>
         </p:txBody>
@@ -5061,7 +5061,7 @@
           <p:cNvPr id="3" name="">
             <a:extLst xmlns:a="http://schemas.openxmlformats.org/drawingml/2006/main">
               <a:ext uri="{FF2B5EF4-FFF2-40B4-BE49-F238E27FC236}">
-                <a16:creationId xmlns:a16="http://schemas.microsoft.com/office/drawing/2014/main" id="{1821F1A4-57E7-40BB-97BF-B94742C9E18E}"/>
+                <a16:creationId xmlns:a16="http://schemas.microsoft.com/office/drawing/2014/main" id="{C3843809-9332-4E2A-8776-7C5FC194EF11}"/>
               </a:ext>
             </a:extLst>
           </p:cNvPr>
@@ -5095,7 +5095,7 @@
                 <a:spcPct val="108000"/>
               </a:lnSpc>
               <a:buNone/>
-              <a:defRPr sz="3150" b="1">
+              <a:defRPr sz="2550" b="1">
                 <a:solidFill>
                   <a:srgbClr val="071426"/>
                 </a:solidFill>
@@ -5105,7 +5105,7 @@
               </a:defRPr>
             </a:pPr>
             <a:r>
-              <a:rPr sz="3150" b="1">
+              <a:rPr sz="2550" b="1">
                 <a:solidFill>
                   <a:srgbClr val="071426"/>
                 </a:solidFill>
@@ -5123,7 +5123,7 @@
           <p:cNvPr id="4" name="">
             <a:extLst xmlns:a="http://schemas.openxmlformats.org/drawingml/2006/main">
               <a:ext uri="{FF2B5EF4-FFF2-40B4-BE49-F238E27FC236}">
-                <a16:creationId xmlns:a16="http://schemas.microsoft.com/office/drawing/2014/main" id="{61EBD217-AC20-48C6-BFEF-2DFAAA37AF8D}"/>
+                <a16:creationId xmlns:a16="http://schemas.microsoft.com/office/drawing/2014/main" id="{D894B9E5-1CD7-4C14-938C-55E79B53937A}"/>
               </a:ext>
             </a:extLst>
           </p:cNvPr>
@@ -5158,7 +5158,7 @@
           <p:nvPr/>
         </p:nvPicPr>
         <p:blipFill>
-          <a:blip xmlns:r="http://schemas.openxmlformats.org/officeDocument/2006/relationships" xmlns:a="http://schemas.openxmlformats.org/drawingml/2006/main" r:embed="R708e4fddc43f4143"/>
+          <a:blip xmlns:r="http://schemas.openxmlformats.org/officeDocument/2006/relationships" xmlns:a="http://schemas.openxmlformats.org/drawingml/2006/main" r:embed="R16a130b4cda64e93"/>
           <a:srcRect xmlns:a="http://schemas.openxmlformats.org/drawingml/2006/main" l="0" t="0" r="0" b="0"/>
           <a:stretch xmlns:a="http://schemas.openxmlformats.org/drawingml/2006/main">
             <a:fillRect l="0" t="0" r="0" b="0"/>
@@ -5179,7 +5179,7 @@
           <p:cNvPr id="6" name="">
             <a:extLst xmlns:a="http://schemas.openxmlformats.org/drawingml/2006/main">
               <a:ext uri="{FF2B5EF4-FFF2-40B4-BE49-F238E27FC236}">
-                <a16:creationId xmlns:a16="http://schemas.microsoft.com/office/drawing/2014/main" id="{A6BA60C3-2379-46F5-B8E8-01508631EC8F}"/>
+                <a16:creationId xmlns:a16="http://schemas.microsoft.com/office/drawing/2014/main" id="{0B25F2AA-4CA2-4F96-998E-7CA534AFFAA0}"/>
               </a:ext>
             </a:extLst>
           </p:cNvPr>
@@ -5241,7 +5241,7 @@
           <p:cNvPr id="7" name="">
             <a:extLst xmlns:a="http://schemas.openxmlformats.org/drawingml/2006/main">
               <a:ext uri="{FF2B5EF4-FFF2-40B4-BE49-F238E27FC236}">
-                <a16:creationId xmlns:a16="http://schemas.microsoft.com/office/drawing/2014/main" id="{3CAD59A8-45B1-4711-91B6-DADA967B35A7}"/>
+                <a16:creationId xmlns:a16="http://schemas.microsoft.com/office/drawing/2014/main" id="{F3ECD59B-8DD0-4E0D-923C-9882F5947C37}"/>
               </a:ext>
             </a:extLst>
           </p:cNvPr>
@@ -5303,7 +5303,7 @@
           <p:cNvPr id="8" name="">
             <a:extLst xmlns:a="http://schemas.openxmlformats.org/drawingml/2006/main">
               <a:ext uri="{FF2B5EF4-FFF2-40B4-BE49-F238E27FC236}">
-                <a16:creationId xmlns:a16="http://schemas.microsoft.com/office/drawing/2014/main" id="{8758C3C3-BBBE-4CEC-94B0-6F723DF1BA14}"/>
+                <a16:creationId xmlns:a16="http://schemas.microsoft.com/office/drawing/2014/main" id="{F1AA13F6-9728-45E2-89DA-1CE067CB79A6}"/>
               </a:ext>
             </a:extLst>
           </p:cNvPr>
@@ -5338,7 +5338,7 @@
           <p:cNvPr id="9" name="">
             <a:extLst xmlns:a="http://schemas.openxmlformats.org/drawingml/2006/main">
               <a:ext uri="{FF2B5EF4-FFF2-40B4-BE49-F238E27FC236}">
-                <a16:creationId xmlns:a16="http://schemas.microsoft.com/office/drawing/2014/main" id="{FACC1EFB-23A1-4694-B151-07F87951B50A}"/>
+                <a16:creationId xmlns:a16="http://schemas.microsoft.com/office/drawing/2014/main" id="{41539EDE-123B-4618-881C-1E536DF0E4D2}"/>
               </a:ext>
             </a:extLst>
           </p:cNvPr>
@@ -5369,7 +5369,7 @@
           <p:cNvPr id="10" name="">
             <a:extLst xmlns:a="http://schemas.openxmlformats.org/drawingml/2006/main">
               <a:ext uri="{FF2B5EF4-FFF2-40B4-BE49-F238E27FC236}">
-                <a16:creationId xmlns:a16="http://schemas.microsoft.com/office/drawing/2014/main" id="{7447F2F4-255D-43F8-BCA0-A1944FF228FF}"/>
+                <a16:creationId xmlns:a16="http://schemas.microsoft.com/office/drawing/2014/main" id="{38A2663B-EFF5-4175-804C-3D401D176953}"/>
               </a:ext>
             </a:extLst>
           </p:cNvPr>
@@ -5431,7 +5431,7 @@
           <p:cNvPr id="11" name="">
             <a:extLst xmlns:a="http://schemas.openxmlformats.org/drawingml/2006/main">
               <a:ext uri="{FF2B5EF4-FFF2-40B4-BE49-F238E27FC236}">
-                <a16:creationId xmlns:a16="http://schemas.microsoft.com/office/drawing/2014/main" id="{80D1A96F-E185-4612-BE75-13FE03A8C8FF}"/>
+                <a16:creationId xmlns:a16="http://schemas.microsoft.com/office/drawing/2014/main" id="{97E404D6-3F45-466A-B4BF-55E5ED2ED7A5}"/>
               </a:ext>
             </a:extLst>
           </p:cNvPr>
@@ -5547,7 +5547,7 @@
           <p:cNvPr id="12" name="">
             <a:extLst xmlns:a="http://schemas.openxmlformats.org/drawingml/2006/main">
               <a:ext uri="{FF2B5EF4-FFF2-40B4-BE49-F238E27FC236}">
-                <a16:creationId xmlns:a16="http://schemas.microsoft.com/office/drawing/2014/main" id="{D547E5E8-53FF-42EC-991E-ED740C5DC725}"/>
+                <a16:creationId xmlns:a16="http://schemas.microsoft.com/office/drawing/2014/main" id="{043B9D3E-A30E-43C3-9A66-B9C5ED2590DB}"/>
               </a:ext>
             </a:extLst>
           </p:cNvPr>
@@ -5582,7 +5582,7 @@
           <p:cNvPr id="13" name="">
             <a:extLst xmlns:a="http://schemas.openxmlformats.org/drawingml/2006/main">
               <a:ext uri="{FF2B5EF4-FFF2-40B4-BE49-F238E27FC236}">
-                <a16:creationId xmlns:a16="http://schemas.microsoft.com/office/drawing/2014/main" id="{3E15A58F-6960-4225-8149-D21883ECB7F5}"/>
+                <a16:creationId xmlns:a16="http://schemas.microsoft.com/office/drawing/2014/main" id="{D24AD064-630F-450C-B434-99213B596979}"/>
               </a:ext>
             </a:extLst>
           </p:cNvPr>
@@ -5613,7 +5613,7 @@
           <p:cNvPr id="14" name="">
             <a:extLst xmlns:a="http://schemas.openxmlformats.org/drawingml/2006/main">
               <a:ext uri="{FF2B5EF4-FFF2-40B4-BE49-F238E27FC236}">
-                <a16:creationId xmlns:a16="http://schemas.microsoft.com/office/drawing/2014/main" id="{5FE9B183-0789-4B5A-B0AC-DC5E85F484A7}"/>
+                <a16:creationId xmlns:a16="http://schemas.microsoft.com/office/drawing/2014/main" id="{D741BE04-1F58-40B3-AED3-78A7CCCAA804}"/>
               </a:ext>
             </a:extLst>
           </p:cNvPr>
@@ -5675,7 +5675,7 @@
           <p:cNvPr id="15" name="">
             <a:extLst xmlns:a="http://schemas.openxmlformats.org/drawingml/2006/main">
               <a:ext uri="{FF2B5EF4-FFF2-40B4-BE49-F238E27FC236}">
-                <a16:creationId xmlns:a16="http://schemas.microsoft.com/office/drawing/2014/main" id="{16E4104D-A45B-43A0-A5C6-FF15E04B6D86}"/>
+                <a16:creationId xmlns:a16="http://schemas.microsoft.com/office/drawing/2014/main" id="{A0A04C7D-7D9E-444F-9790-A3CB39795C26}"/>
               </a:ext>
             </a:extLst>
           </p:cNvPr>
@@ -5764,7 +5764,7 @@
           <p:cNvPr id="16" name="">
             <a:extLst xmlns:a="http://schemas.openxmlformats.org/drawingml/2006/main">
               <a:ext uri="{FF2B5EF4-FFF2-40B4-BE49-F238E27FC236}">
-                <a16:creationId xmlns:a16="http://schemas.microsoft.com/office/drawing/2014/main" id="{69F1557E-0187-49F6-93C2-86398DCB2EC3}"/>
+                <a16:creationId xmlns:a16="http://schemas.microsoft.com/office/drawing/2014/main" id="{2E1CA25F-145C-452A-B9DF-A1498F7EE4E1}"/>
               </a:ext>
             </a:extLst>
           </p:cNvPr>
@@ -5826,7 +5826,7 @@
     </p:spTree>
     <p:extLst>
       <p:ext uri="{BB962C8B-B14F-4D97-AF65-F5344CB8AC3E}">
-        <p14:creationId xmlns:p14="http://schemas.microsoft.com/office/powerpoint/2010/main" val="755216541"/>
+        <p14:creationId xmlns:p14="http://schemas.microsoft.com/office/powerpoint/2010/main" val="2031556864"/>
       </p:ext>
     </p:extLst>
   </p:cSld>
@@ -5857,7 +5857,7 @@
           <p:cNvPr id="32" name="">
             <a:extLst xmlns:a="http://schemas.openxmlformats.org/drawingml/2006/main">
               <a:ext uri="{FF2B5EF4-FFF2-40B4-BE49-F238E27FC236}">
-                <a16:creationId xmlns:a16="http://schemas.microsoft.com/office/drawing/2014/main" id="{5A842FF6-691D-4456-9260-6849B69DAD96}"/>
+                <a16:creationId xmlns:a16="http://schemas.microsoft.com/office/drawing/2014/main" id="{6A6EFCF1-EF27-46CF-8D14-250D978A228D}"/>
               </a:ext>
             </a:extLst>
           </p:cNvPr>
@@ -5888,7 +5888,7 @@
           <p:cNvPr id="2" name="">
             <a:extLst xmlns:a="http://schemas.openxmlformats.org/drawingml/2006/main">
               <a:ext uri="{FF2B5EF4-FFF2-40B4-BE49-F238E27FC236}">
-                <a16:creationId xmlns:a16="http://schemas.microsoft.com/office/drawing/2014/main" id="{CC879D63-6AA1-4C17-AEED-530420AE9902}"/>
+                <a16:creationId xmlns:a16="http://schemas.microsoft.com/office/drawing/2014/main" id="{3681A8D1-E057-447F-B229-58CCB78A4A15}"/>
               </a:ext>
             </a:extLst>
           </p:cNvPr>
@@ -5940,7 +5940,7 @@
                 <a:ea typeface="Aptos"/>
                 <a:cs typeface="Aptos"/>
               </a:rPr>
-              <a:t>GLOBAL ECONOMY</a:t>
+              <a:t>RISKS</a:t>
             </a:r>
           </a:p>
         </p:txBody>
@@ -5950,7 +5950,7 @@
           <p:cNvPr id="3" name="">
             <a:extLst xmlns:a="http://schemas.openxmlformats.org/drawingml/2006/main">
               <a:ext uri="{FF2B5EF4-FFF2-40B4-BE49-F238E27FC236}">
-                <a16:creationId xmlns:a16="http://schemas.microsoft.com/office/drawing/2014/main" id="{EE2CFADB-EA06-4FBB-8FBA-0DA61A7FAF8D}"/>
+                <a16:creationId xmlns:a16="http://schemas.microsoft.com/office/drawing/2014/main" id="{16038F1E-2ED4-4C71-9DAC-929BAED0E689}"/>
               </a:ext>
             </a:extLst>
           </p:cNvPr>
@@ -5984,7 +5984,7 @@
                 <a:spcPct val="108000"/>
               </a:lnSpc>
               <a:buNone/>
-              <a:defRPr sz="3150" b="1">
+              <a:defRPr sz="2550" b="1">
                 <a:solidFill>
                   <a:srgbClr val="071426"/>
                 </a:solidFill>
@@ -5994,7 +5994,7 @@
               </a:defRPr>
             </a:pPr>
             <a:r>
-              <a:rPr sz="3150" b="1">
+              <a:rPr sz="2550" b="1">
                 <a:solidFill>
                   <a:srgbClr val="071426"/>
                 </a:solidFill>
@@ -6012,7 +6012,7 @@
           <p:cNvPr id="4" name="">
             <a:extLst xmlns:a="http://schemas.openxmlformats.org/drawingml/2006/main">
               <a:ext uri="{FF2B5EF4-FFF2-40B4-BE49-F238E27FC236}">
-                <a16:creationId xmlns:a16="http://schemas.microsoft.com/office/drawing/2014/main" id="{134D7953-C5D0-41A5-8C3F-1E72472DFFBF}"/>
+                <a16:creationId xmlns:a16="http://schemas.microsoft.com/office/drawing/2014/main" id="{7FC77FB3-CE24-475B-BF9D-821A43C47A61}"/>
               </a:ext>
             </a:extLst>
           </p:cNvPr>
@@ -6047,7 +6047,7 @@
           <p:nvPr/>
         </p:nvPicPr>
         <p:blipFill>
-          <a:blip xmlns:r="http://schemas.openxmlformats.org/officeDocument/2006/relationships" xmlns:a="http://schemas.openxmlformats.org/drawingml/2006/main" r:embed="R4651da9290f94064"/>
+          <a:blip xmlns:r="http://schemas.openxmlformats.org/officeDocument/2006/relationships" xmlns:a="http://schemas.openxmlformats.org/drawingml/2006/main" r:embed="Refc8dae250dd4060"/>
           <a:srcRect xmlns:a="http://schemas.openxmlformats.org/drawingml/2006/main" l="0" t="0" r="0" b="0"/>
           <a:stretch xmlns:a="http://schemas.openxmlformats.org/drawingml/2006/main">
             <a:fillRect l="0" t="0" r="0" b="0"/>
@@ -6068,7 +6068,7 @@
           <p:cNvPr id="6" name="">
             <a:extLst xmlns:a="http://schemas.openxmlformats.org/drawingml/2006/main">
               <a:ext uri="{FF2B5EF4-FFF2-40B4-BE49-F238E27FC236}">
-                <a16:creationId xmlns:a16="http://schemas.microsoft.com/office/drawing/2014/main" id="{23517537-7BFB-478D-BC33-DD1DD2EF9B62}"/>
+                <a16:creationId xmlns:a16="http://schemas.microsoft.com/office/drawing/2014/main" id="{DAD2D5C0-FAB1-43EA-A2B6-68C0B977505D}"/>
               </a:ext>
             </a:extLst>
           </p:cNvPr>
@@ -6130,7 +6130,7 @@
           <p:cNvPr id="7" name="">
             <a:extLst xmlns:a="http://schemas.openxmlformats.org/drawingml/2006/main">
               <a:ext uri="{FF2B5EF4-FFF2-40B4-BE49-F238E27FC236}">
-                <a16:creationId xmlns:a16="http://schemas.microsoft.com/office/drawing/2014/main" id="{C4A2EB0C-D8ED-45F3-BB6A-576FBA3AE6B7}"/>
+                <a16:creationId xmlns:a16="http://schemas.microsoft.com/office/drawing/2014/main" id="{EE0509A8-FAEC-4AB0-A953-D921C3114ADE}"/>
               </a:ext>
             </a:extLst>
           </p:cNvPr>
@@ -6192,7 +6192,7 @@
           <p:cNvPr id="8" name="">
             <a:extLst xmlns:a="http://schemas.openxmlformats.org/drawingml/2006/main">
               <a:ext uri="{FF2B5EF4-FFF2-40B4-BE49-F238E27FC236}">
-                <a16:creationId xmlns:a16="http://schemas.microsoft.com/office/drawing/2014/main" id="{10212942-CAF9-47E6-9763-A0259347661D}"/>
+                <a16:creationId xmlns:a16="http://schemas.microsoft.com/office/drawing/2014/main" id="{5589B321-9C2D-4DA0-9662-5BC89809653B}"/>
               </a:ext>
             </a:extLst>
           </p:cNvPr>
@@ -6227,7 +6227,7 @@
           <p:cNvPr id="9" name="">
             <a:extLst xmlns:a="http://schemas.openxmlformats.org/drawingml/2006/main">
               <a:ext uri="{FF2B5EF4-FFF2-40B4-BE49-F238E27FC236}">
-                <a16:creationId xmlns:a16="http://schemas.microsoft.com/office/drawing/2014/main" id="{5CEC843D-DDD4-4D13-9166-B63C656977E3}"/>
+                <a16:creationId xmlns:a16="http://schemas.microsoft.com/office/drawing/2014/main" id="{388175A6-DD0A-49D8-8C78-B4203C7C2B86}"/>
               </a:ext>
             </a:extLst>
           </p:cNvPr>
@@ -6258,7 +6258,7 @@
           <p:cNvPr id="10" name="">
             <a:extLst xmlns:a="http://schemas.openxmlformats.org/drawingml/2006/main">
               <a:ext uri="{FF2B5EF4-FFF2-40B4-BE49-F238E27FC236}">
-                <a16:creationId xmlns:a16="http://schemas.microsoft.com/office/drawing/2014/main" id="{3BD3B300-ED5D-4FD4-AD01-2009E3C1540D}"/>
+                <a16:creationId xmlns:a16="http://schemas.microsoft.com/office/drawing/2014/main" id="{DE5BD31A-3AD8-4979-845B-2C4A4FD8B706}"/>
               </a:ext>
             </a:extLst>
           </p:cNvPr>
@@ -6320,7 +6320,7 @@
           <p:cNvPr id="11" name="">
             <a:extLst xmlns:a="http://schemas.openxmlformats.org/drawingml/2006/main">
               <a:ext uri="{FF2B5EF4-FFF2-40B4-BE49-F238E27FC236}">
-                <a16:creationId xmlns:a16="http://schemas.microsoft.com/office/drawing/2014/main" id="{941C054F-BD2B-46BA-8E2F-41215B8152FD}"/>
+                <a16:creationId xmlns:a16="http://schemas.microsoft.com/office/drawing/2014/main" id="{9C006AA3-E101-412E-9908-DBAA4581279D}"/>
               </a:ext>
             </a:extLst>
           </p:cNvPr>
@@ -6382,7 +6382,7 @@
           <p:cNvPr id="12" name="">
             <a:extLst xmlns:a="http://schemas.openxmlformats.org/drawingml/2006/main">
               <a:ext uri="{FF2B5EF4-FFF2-40B4-BE49-F238E27FC236}">
-                <a16:creationId xmlns:a16="http://schemas.microsoft.com/office/drawing/2014/main" id="{45C7B6AE-127A-49A0-8929-8501C86C17CD}"/>
+                <a16:creationId xmlns:a16="http://schemas.microsoft.com/office/drawing/2014/main" id="{D3D01081-45FD-482F-AB47-2500660FA021}"/>
               </a:ext>
             </a:extLst>
           </p:cNvPr>
@@ -6417,7 +6417,7 @@
           <p:cNvPr id="13" name="">
             <a:extLst xmlns:a="http://schemas.openxmlformats.org/drawingml/2006/main">
               <a:ext uri="{FF2B5EF4-FFF2-40B4-BE49-F238E27FC236}">
-                <a16:creationId xmlns:a16="http://schemas.microsoft.com/office/drawing/2014/main" id="{90B4624E-CA36-402A-9B1C-C6A594D53F51}"/>
+                <a16:creationId xmlns:a16="http://schemas.microsoft.com/office/drawing/2014/main" id="{FA01EF4F-388D-4C3F-B9F5-680AA594AEA6}"/>
               </a:ext>
             </a:extLst>
           </p:cNvPr>
@@ -6448,7 +6448,7 @@
           <p:cNvPr id="14" name="">
             <a:extLst xmlns:a="http://schemas.openxmlformats.org/drawingml/2006/main">
               <a:ext uri="{FF2B5EF4-FFF2-40B4-BE49-F238E27FC236}">
-                <a16:creationId xmlns:a16="http://schemas.microsoft.com/office/drawing/2014/main" id="{EBB8E8CB-1641-47C9-9CA5-030923D1FD94}"/>
+                <a16:creationId xmlns:a16="http://schemas.microsoft.com/office/drawing/2014/main" id="{15B937B8-076E-4AEE-ADB3-E3AAB8079936}"/>
               </a:ext>
             </a:extLst>
           </p:cNvPr>
@@ -6510,7 +6510,7 @@
           <p:cNvPr id="15" name="">
             <a:extLst xmlns:a="http://schemas.openxmlformats.org/drawingml/2006/main">
               <a:ext uri="{FF2B5EF4-FFF2-40B4-BE49-F238E27FC236}">
-                <a16:creationId xmlns:a16="http://schemas.microsoft.com/office/drawing/2014/main" id="{4776C205-242D-4876-A5FD-84E8BA476CDB}"/>
+                <a16:creationId xmlns:a16="http://schemas.microsoft.com/office/drawing/2014/main" id="{7DB9DC42-9D14-43B9-BD13-94B2DA73350D}"/>
               </a:ext>
             </a:extLst>
           </p:cNvPr>
@@ -6572,7 +6572,7 @@
           <p:cNvPr id="16" name="">
             <a:extLst xmlns:a="http://schemas.openxmlformats.org/drawingml/2006/main">
               <a:ext uri="{FF2B5EF4-FFF2-40B4-BE49-F238E27FC236}">
-                <a16:creationId xmlns:a16="http://schemas.microsoft.com/office/drawing/2014/main" id="{236E8B42-F012-411B-A708-38BDF0BADC9A}"/>
+                <a16:creationId xmlns:a16="http://schemas.microsoft.com/office/drawing/2014/main" id="{61728785-29FB-4B22-BC64-1C2A1BFBA2BE}"/>
               </a:ext>
             </a:extLst>
           </p:cNvPr>
@@ -6607,7 +6607,7 @@
           <p:cNvPr id="17" name="">
             <a:extLst xmlns:a="http://schemas.openxmlformats.org/drawingml/2006/main">
               <a:ext uri="{FF2B5EF4-FFF2-40B4-BE49-F238E27FC236}">
-                <a16:creationId xmlns:a16="http://schemas.microsoft.com/office/drawing/2014/main" id="{F165241E-183C-43AD-98CE-4591ABCD2249}"/>
+                <a16:creationId xmlns:a16="http://schemas.microsoft.com/office/drawing/2014/main" id="{CBA6CF74-F14E-4186-B944-9F82A6EE24BD}"/>
               </a:ext>
             </a:extLst>
           </p:cNvPr>
@@ -6638,7 +6638,7 @@
           <p:cNvPr id="18" name="">
             <a:extLst xmlns:a="http://schemas.openxmlformats.org/drawingml/2006/main">
               <a:ext uri="{FF2B5EF4-FFF2-40B4-BE49-F238E27FC236}">
-                <a16:creationId xmlns:a16="http://schemas.microsoft.com/office/drawing/2014/main" id="{A1A57E6F-92A2-435F-9C0F-9563DA6C6A68}"/>
+                <a16:creationId xmlns:a16="http://schemas.microsoft.com/office/drawing/2014/main" id="{0290C546-4FEE-405D-9533-F6D7C3D6A988}"/>
               </a:ext>
             </a:extLst>
           </p:cNvPr>
@@ -6700,7 +6700,7 @@
           <p:cNvPr id="19" name="">
             <a:extLst xmlns:a="http://schemas.openxmlformats.org/drawingml/2006/main">
               <a:ext uri="{FF2B5EF4-FFF2-40B4-BE49-F238E27FC236}">
-                <a16:creationId xmlns:a16="http://schemas.microsoft.com/office/drawing/2014/main" id="{3D2E10D0-621E-4677-869D-D72B87AB265A}"/>
+                <a16:creationId xmlns:a16="http://schemas.microsoft.com/office/drawing/2014/main" id="{BFF597CF-79D6-465E-AE55-79EBA07D6A0F}"/>
               </a:ext>
             </a:extLst>
           </p:cNvPr>
@@ -6762,7 +6762,7 @@
           <p:cNvPr id="20" name="">
             <a:extLst xmlns:a="http://schemas.openxmlformats.org/drawingml/2006/main">
               <a:ext uri="{FF2B5EF4-FFF2-40B4-BE49-F238E27FC236}">
-                <a16:creationId xmlns:a16="http://schemas.microsoft.com/office/drawing/2014/main" id="{52F730A0-CE36-46E5-8D5B-FA257A3CD707}"/>
+                <a16:creationId xmlns:a16="http://schemas.microsoft.com/office/drawing/2014/main" id="{4977E1D6-0FB3-4FCD-9BD9-EC0BCD17B1C1}"/>
               </a:ext>
             </a:extLst>
           </p:cNvPr>
@@ -6797,7 +6797,7 @@
           <p:cNvPr id="21" name="">
             <a:extLst xmlns:a="http://schemas.openxmlformats.org/drawingml/2006/main">
               <a:ext uri="{FF2B5EF4-FFF2-40B4-BE49-F238E27FC236}">
-                <a16:creationId xmlns:a16="http://schemas.microsoft.com/office/drawing/2014/main" id="{2700956C-2E09-4F3B-B189-0E1138B97619}"/>
+                <a16:creationId xmlns:a16="http://schemas.microsoft.com/office/drawing/2014/main" id="{72E005FD-5097-4684-B245-9CEFC949F799}"/>
               </a:ext>
             </a:extLst>
           </p:cNvPr>
@@ -6828,7 +6828,7 @@
           <p:cNvPr id="22" name="">
             <a:extLst xmlns:a="http://schemas.openxmlformats.org/drawingml/2006/main">
               <a:ext uri="{FF2B5EF4-FFF2-40B4-BE49-F238E27FC236}">
-                <a16:creationId xmlns:a16="http://schemas.microsoft.com/office/drawing/2014/main" id="{AFD0EDDE-4D7E-4A49-A497-4B262D9B79A6}"/>
+                <a16:creationId xmlns:a16="http://schemas.microsoft.com/office/drawing/2014/main" id="{12F21F6C-1440-4773-9E70-43B67355C2F1}"/>
               </a:ext>
             </a:extLst>
           </p:cNvPr>
@@ -6890,7 +6890,7 @@
           <p:cNvPr id="23" name="">
             <a:extLst xmlns:a="http://schemas.openxmlformats.org/drawingml/2006/main">
               <a:ext uri="{FF2B5EF4-FFF2-40B4-BE49-F238E27FC236}">
-                <a16:creationId xmlns:a16="http://schemas.microsoft.com/office/drawing/2014/main" id="{5A05817E-A1BC-45D6-9CB6-C0CFA96E0675}"/>
+                <a16:creationId xmlns:a16="http://schemas.microsoft.com/office/drawing/2014/main" id="{A86DC65E-5EEB-4579-95E8-6405D541F826}"/>
               </a:ext>
             </a:extLst>
           </p:cNvPr>
@@ -6952,7 +6952,7 @@
           <p:cNvPr id="24" name="">
             <a:extLst xmlns:a="http://schemas.openxmlformats.org/drawingml/2006/main">
               <a:ext uri="{FF2B5EF4-FFF2-40B4-BE49-F238E27FC236}">
-                <a16:creationId xmlns:a16="http://schemas.microsoft.com/office/drawing/2014/main" id="{9F9550B5-8797-4077-ABA1-7F009071696A}"/>
+                <a16:creationId xmlns:a16="http://schemas.microsoft.com/office/drawing/2014/main" id="{9D51AB49-79FB-4BBD-8B04-9E255C920D91}"/>
               </a:ext>
             </a:extLst>
           </p:cNvPr>
@@ -6987,7 +6987,7 @@
           <p:cNvPr id="25" name="">
             <a:extLst xmlns:a="http://schemas.openxmlformats.org/drawingml/2006/main">
               <a:ext uri="{FF2B5EF4-FFF2-40B4-BE49-F238E27FC236}">
-                <a16:creationId xmlns:a16="http://schemas.microsoft.com/office/drawing/2014/main" id="{CB242949-8B80-4CAF-AFBB-879466B062B8}"/>
+                <a16:creationId xmlns:a16="http://schemas.microsoft.com/office/drawing/2014/main" id="{088A0E9D-2E12-4496-9100-7B70BDFB878D}"/>
               </a:ext>
             </a:extLst>
           </p:cNvPr>
@@ -7018,7 +7018,7 @@
           <p:cNvPr id="26" name="">
             <a:extLst xmlns:a="http://schemas.openxmlformats.org/drawingml/2006/main">
               <a:ext uri="{FF2B5EF4-FFF2-40B4-BE49-F238E27FC236}">
-                <a16:creationId xmlns:a16="http://schemas.microsoft.com/office/drawing/2014/main" id="{AEEBF718-B316-4B2B-9470-92146A634576}"/>
+                <a16:creationId xmlns:a16="http://schemas.microsoft.com/office/drawing/2014/main" id="{9BFD1D39-0DD2-4522-8703-7CE76C10251C}"/>
               </a:ext>
             </a:extLst>
           </p:cNvPr>
@@ -7080,7 +7080,7 @@
           <p:cNvPr id="27" name="">
             <a:extLst xmlns:a="http://schemas.openxmlformats.org/drawingml/2006/main">
               <a:ext uri="{FF2B5EF4-FFF2-40B4-BE49-F238E27FC236}">
-                <a16:creationId xmlns:a16="http://schemas.microsoft.com/office/drawing/2014/main" id="{349C70C4-3F20-4BE3-BF47-220D176BFCE4}"/>
+                <a16:creationId xmlns:a16="http://schemas.microsoft.com/office/drawing/2014/main" id="{644B581F-44B6-4805-ACC3-1C3EDF272ED0}"/>
               </a:ext>
             </a:extLst>
           </p:cNvPr>
@@ -7142,7 +7142,7 @@
           <p:cNvPr id="28" name="">
             <a:extLst xmlns:a="http://schemas.openxmlformats.org/drawingml/2006/main">
               <a:ext uri="{FF2B5EF4-FFF2-40B4-BE49-F238E27FC236}">
-                <a16:creationId xmlns:a16="http://schemas.microsoft.com/office/drawing/2014/main" id="{FA84ED53-303D-4A64-B0F2-DDEF8B57B725}"/>
+                <a16:creationId xmlns:a16="http://schemas.microsoft.com/office/drawing/2014/main" id="{3A1E4BDC-AE97-4AE0-B7D4-3F4822A604CD}"/>
               </a:ext>
             </a:extLst>
           </p:cNvPr>
@@ -7177,7 +7177,7 @@
           <p:cNvPr id="29" name="">
             <a:extLst xmlns:a="http://schemas.openxmlformats.org/drawingml/2006/main">
               <a:ext uri="{FF2B5EF4-FFF2-40B4-BE49-F238E27FC236}">
-                <a16:creationId xmlns:a16="http://schemas.microsoft.com/office/drawing/2014/main" id="{111DB756-5BCA-4D5E-9FCD-2345541C0FA8}"/>
+                <a16:creationId xmlns:a16="http://schemas.microsoft.com/office/drawing/2014/main" id="{C5466C51-90F9-4C2E-A982-A16DE645271E}"/>
               </a:ext>
             </a:extLst>
           </p:cNvPr>
@@ -7208,7 +7208,7 @@
           <p:cNvPr id="30" name="">
             <a:extLst xmlns:a="http://schemas.openxmlformats.org/drawingml/2006/main">
               <a:ext uri="{FF2B5EF4-FFF2-40B4-BE49-F238E27FC236}">
-                <a16:creationId xmlns:a16="http://schemas.microsoft.com/office/drawing/2014/main" id="{2F9BBE09-C0A6-438F-9BCF-09F8E691A55E}"/>
+                <a16:creationId xmlns:a16="http://schemas.microsoft.com/office/drawing/2014/main" id="{CAC2AC7E-7CE5-4CCE-BEFB-DAC0A68E7185}"/>
               </a:ext>
             </a:extLst>
           </p:cNvPr>
@@ -7270,7 +7270,7 @@
           <p:cNvPr id="31" name="">
             <a:extLst xmlns:a="http://schemas.openxmlformats.org/drawingml/2006/main">
               <a:ext uri="{FF2B5EF4-FFF2-40B4-BE49-F238E27FC236}">
-                <a16:creationId xmlns:a16="http://schemas.microsoft.com/office/drawing/2014/main" id="{52048D76-9BE9-41A5-BE50-615BEB205DAD}"/>
+                <a16:creationId xmlns:a16="http://schemas.microsoft.com/office/drawing/2014/main" id="{38CE4261-43C1-49F7-BAD3-E4E38E22EAD6}"/>
               </a:ext>
             </a:extLst>
           </p:cNvPr>
@@ -7330,7 +7330,7 @@
     </p:spTree>
     <p:extLst>
       <p:ext uri="{BB962C8B-B14F-4D97-AF65-F5344CB8AC3E}">
-        <p14:creationId xmlns:p14="http://schemas.microsoft.com/office/powerpoint/2010/main" val="860841488"/>
+        <p14:creationId xmlns:p14="http://schemas.microsoft.com/office/powerpoint/2010/main" val="594473684"/>
       </p:ext>
     </p:extLst>
   </p:cSld>
@@ -7361,7 +7361,7 @@
           <p:cNvPr id="26" name="">
             <a:extLst xmlns:a="http://schemas.openxmlformats.org/drawingml/2006/main">
               <a:ext uri="{FF2B5EF4-FFF2-40B4-BE49-F238E27FC236}">
-                <a16:creationId xmlns:a16="http://schemas.microsoft.com/office/drawing/2014/main" id="{02BAA093-C921-42D4-9F73-AD471E12ABBA}"/>
+                <a16:creationId xmlns:a16="http://schemas.microsoft.com/office/drawing/2014/main" id="{78CB59ED-73C5-4C78-9BE5-E3616DF49F36}"/>
               </a:ext>
             </a:extLst>
           </p:cNvPr>
@@ -7392,7 +7392,7 @@
           <p:cNvPr id="2" name="">
             <a:extLst xmlns:a="http://schemas.openxmlformats.org/drawingml/2006/main">
               <a:ext uri="{FF2B5EF4-FFF2-40B4-BE49-F238E27FC236}">
-                <a16:creationId xmlns:a16="http://schemas.microsoft.com/office/drawing/2014/main" id="{9A7A496D-C97A-4BFD-991D-CD2087E3DCF6}"/>
+                <a16:creationId xmlns:a16="http://schemas.microsoft.com/office/drawing/2014/main" id="{C1BA9EEF-4EB2-477A-8F13-4E98D9FCA1BC}"/>
               </a:ext>
             </a:extLst>
           </p:cNvPr>
@@ -7444,7 +7444,7 @@
                 <a:ea typeface="Aptos"/>
                 <a:cs typeface="Aptos"/>
               </a:rPr>
-              <a:t>RISKS</a:t>
+              <a:t>PHASE 0</a:t>
             </a:r>
           </a:p>
         </p:txBody>
@@ -7454,7 +7454,7 @@
           <p:cNvPr id="3" name="">
             <a:extLst xmlns:a="http://schemas.openxmlformats.org/drawingml/2006/main">
               <a:ext uri="{FF2B5EF4-FFF2-40B4-BE49-F238E27FC236}">
-                <a16:creationId xmlns:a16="http://schemas.microsoft.com/office/drawing/2014/main" id="{68E63C62-3691-4D14-81E0-D9A0F29C3CE1}"/>
+                <a16:creationId xmlns:a16="http://schemas.microsoft.com/office/drawing/2014/main" id="{28D19F4A-946F-4093-A723-28F60A48D393}"/>
               </a:ext>
             </a:extLst>
           </p:cNvPr>
@@ -7488,7 +7488,7 @@
                 <a:spcPct val="108000"/>
               </a:lnSpc>
               <a:buNone/>
-              <a:defRPr sz="3150" b="1">
+              <a:defRPr sz="2250" b="1">
                 <a:solidFill>
                   <a:srgbClr val="071426"/>
                 </a:solidFill>
@@ -7498,7 +7498,7 @@
               </a:defRPr>
             </a:pPr>
             <a:r>
-              <a:rPr sz="3150" b="1">
+              <a:rPr sz="2250" b="1">
                 <a:solidFill>
                   <a:srgbClr val="071426"/>
                 </a:solidFill>
@@ -7516,7 +7516,7 @@
           <p:cNvPr id="4" name="">
             <a:extLst xmlns:a="http://schemas.openxmlformats.org/drawingml/2006/main">
               <a:ext uri="{FF2B5EF4-FFF2-40B4-BE49-F238E27FC236}">
-                <a16:creationId xmlns:a16="http://schemas.microsoft.com/office/drawing/2014/main" id="{D75245BF-5C93-4FF8-BAD9-31EA4563B61F}"/>
+                <a16:creationId xmlns:a16="http://schemas.microsoft.com/office/drawing/2014/main" id="{B35DF430-68B4-4C73-B99C-F54FA862D980}"/>
               </a:ext>
             </a:extLst>
           </p:cNvPr>
@@ -7551,7 +7551,7 @@
           <p:nvPr/>
         </p:nvPicPr>
         <p:blipFill>
-          <a:blip xmlns:r="http://schemas.openxmlformats.org/officeDocument/2006/relationships" xmlns:a="http://schemas.openxmlformats.org/drawingml/2006/main" r:embed="R543e02bbff2e4906"/>
+          <a:blip xmlns:r="http://schemas.openxmlformats.org/officeDocument/2006/relationships" xmlns:a="http://schemas.openxmlformats.org/drawingml/2006/main" r:embed="Re2744cc4458e4abd"/>
           <a:srcRect xmlns:a="http://schemas.openxmlformats.org/drawingml/2006/main" l="0" t="0" r="0" b="0"/>
           <a:stretch xmlns:a="http://schemas.openxmlformats.org/drawingml/2006/main">
             <a:fillRect l="0" t="0" r="0" b="0"/>
@@ -7572,7 +7572,7 @@
           <p:cNvPr id="6" name="">
             <a:extLst xmlns:a="http://schemas.openxmlformats.org/drawingml/2006/main">
               <a:ext uri="{FF2B5EF4-FFF2-40B4-BE49-F238E27FC236}">
-                <a16:creationId xmlns:a16="http://schemas.microsoft.com/office/drawing/2014/main" id="{A7F34851-D1D1-4766-82E7-A6207C2397DE}"/>
+                <a16:creationId xmlns:a16="http://schemas.microsoft.com/office/drawing/2014/main" id="{B4810356-D349-4C3B-AF80-BC8A9FDC6EED}"/>
               </a:ext>
             </a:extLst>
           </p:cNvPr>
@@ -7634,7 +7634,7 @@
           <p:cNvPr id="7" name="">
             <a:extLst xmlns:a="http://schemas.openxmlformats.org/drawingml/2006/main">
               <a:ext uri="{FF2B5EF4-FFF2-40B4-BE49-F238E27FC236}">
-                <a16:creationId xmlns:a16="http://schemas.microsoft.com/office/drawing/2014/main" id="{EE1ADA47-7F61-4924-AFB7-BF58DCD95ECA}"/>
+                <a16:creationId xmlns:a16="http://schemas.microsoft.com/office/drawing/2014/main" id="{64218663-5CB2-403E-B18C-63310A826F3C}"/>
               </a:ext>
             </a:extLst>
           </p:cNvPr>
@@ -7696,7 +7696,7 @@
           <p:cNvPr id="8" name="">
             <a:extLst xmlns:a="http://schemas.openxmlformats.org/drawingml/2006/main">
               <a:ext uri="{FF2B5EF4-FFF2-40B4-BE49-F238E27FC236}">
-                <a16:creationId xmlns:a16="http://schemas.microsoft.com/office/drawing/2014/main" id="{94DE103C-282B-4EF3-AA99-9FE3DCFA6F9A}"/>
+                <a16:creationId xmlns:a16="http://schemas.microsoft.com/office/drawing/2014/main" id="{5CD2890A-7709-48D9-8E44-7D6EDD6C5974}"/>
               </a:ext>
             </a:extLst>
           </p:cNvPr>
@@ -7731,7 +7731,7 @@
           <p:cNvPr id="9" name="">
             <a:extLst xmlns:a="http://schemas.openxmlformats.org/drawingml/2006/main">
               <a:ext uri="{FF2B5EF4-FFF2-40B4-BE49-F238E27FC236}">
-                <a16:creationId xmlns:a16="http://schemas.microsoft.com/office/drawing/2014/main" id="{50356D05-ED7D-4D40-8E7C-3B48EA45E61F}"/>
+                <a16:creationId xmlns:a16="http://schemas.microsoft.com/office/drawing/2014/main" id="{96FD1D2B-E451-4F2F-9A8C-A48FEEF551F4}"/>
               </a:ext>
             </a:extLst>
           </p:cNvPr>
@@ -7793,7 +7793,7 @@
           <p:cNvPr id="10" name="">
             <a:extLst xmlns:a="http://schemas.openxmlformats.org/drawingml/2006/main">
               <a:ext uri="{FF2B5EF4-FFF2-40B4-BE49-F238E27FC236}">
-                <a16:creationId xmlns:a16="http://schemas.microsoft.com/office/drawing/2014/main" id="{20CB4BBF-3892-431D-8045-88C8F721DF2F}"/>
+                <a16:creationId xmlns:a16="http://schemas.microsoft.com/office/drawing/2014/main" id="{3BAFCE8F-4C0A-464C-ACF7-04FCB375E26B}"/>
               </a:ext>
             </a:extLst>
           </p:cNvPr>
@@ -7855,7 +7855,7 @@
           <p:cNvPr id="11" name="">
             <a:extLst xmlns:a="http://schemas.openxmlformats.org/drawingml/2006/main">
               <a:ext uri="{FF2B5EF4-FFF2-40B4-BE49-F238E27FC236}">
-                <a16:creationId xmlns:a16="http://schemas.microsoft.com/office/drawing/2014/main" id="{3F9508F8-E6E1-4D0D-A8C9-EF8B7DFA7B6C}"/>
+                <a16:creationId xmlns:a16="http://schemas.microsoft.com/office/drawing/2014/main" id="{830D26AC-02CA-4850-990A-787BACC3C815}"/>
               </a:ext>
             </a:extLst>
           </p:cNvPr>
@@ -7890,7 +7890,7 @@
           <p:cNvPr id="12" name="">
             <a:extLst xmlns:a="http://schemas.openxmlformats.org/drawingml/2006/main">
               <a:ext uri="{FF2B5EF4-FFF2-40B4-BE49-F238E27FC236}">
-                <a16:creationId xmlns:a16="http://schemas.microsoft.com/office/drawing/2014/main" id="{482EA09F-1047-423A-AB04-8A63044F453B}"/>
+                <a16:creationId xmlns:a16="http://schemas.microsoft.com/office/drawing/2014/main" id="{768340B0-ADE4-4BC7-9F1E-FFFF1485D846}"/>
               </a:ext>
             </a:extLst>
           </p:cNvPr>
@@ -7952,7 +7952,7 @@
           <p:cNvPr id="13" name="">
             <a:extLst xmlns:a="http://schemas.openxmlformats.org/drawingml/2006/main">
               <a:ext uri="{FF2B5EF4-FFF2-40B4-BE49-F238E27FC236}">
-                <a16:creationId xmlns:a16="http://schemas.microsoft.com/office/drawing/2014/main" id="{CAC8C938-E842-41B3-960B-D171633F541A}"/>
+                <a16:creationId xmlns:a16="http://schemas.microsoft.com/office/drawing/2014/main" id="{3608A4CF-A22F-4211-BED2-1151510CC6BB}"/>
               </a:ext>
             </a:extLst>
           </p:cNvPr>
@@ -8014,7 +8014,7 @@
           <p:cNvPr id="14" name="">
             <a:extLst xmlns:a="http://schemas.openxmlformats.org/drawingml/2006/main">
               <a:ext uri="{FF2B5EF4-FFF2-40B4-BE49-F238E27FC236}">
-                <a16:creationId xmlns:a16="http://schemas.microsoft.com/office/drawing/2014/main" id="{E4BFE6EB-A640-4388-9A53-1C68685C7972}"/>
+                <a16:creationId xmlns:a16="http://schemas.microsoft.com/office/drawing/2014/main" id="{CEE74F86-287A-43B7-AEC8-96CCA6EFFF8A}"/>
               </a:ext>
             </a:extLst>
           </p:cNvPr>
@@ -8049,7 +8049,7 @@
           <p:cNvPr id="15" name="">
             <a:extLst xmlns:a="http://schemas.openxmlformats.org/drawingml/2006/main">
               <a:ext uri="{FF2B5EF4-FFF2-40B4-BE49-F238E27FC236}">
-                <a16:creationId xmlns:a16="http://schemas.microsoft.com/office/drawing/2014/main" id="{2D65BDC5-30D8-487E-BE4A-BE9E49F49FF0}"/>
+                <a16:creationId xmlns:a16="http://schemas.microsoft.com/office/drawing/2014/main" id="{D3AEEB70-AD9C-41E4-B019-6F778F26E413}"/>
               </a:ext>
             </a:extLst>
           </p:cNvPr>
@@ -8111,7 +8111,7 @@
           <p:cNvPr id="16" name="">
             <a:extLst xmlns:a="http://schemas.openxmlformats.org/drawingml/2006/main">
               <a:ext uri="{FF2B5EF4-FFF2-40B4-BE49-F238E27FC236}">
-                <a16:creationId xmlns:a16="http://schemas.microsoft.com/office/drawing/2014/main" id="{34D5B9B9-718A-4733-AC1E-DF3EFEDEC02B}"/>
+                <a16:creationId xmlns:a16="http://schemas.microsoft.com/office/drawing/2014/main" id="{AF30D2BA-8D70-49B2-9AE7-6AC0FBCA1289}"/>
               </a:ext>
             </a:extLst>
           </p:cNvPr>
@@ -8173,7 +8173,7 @@
           <p:cNvPr id="17" name="">
             <a:extLst xmlns:a="http://schemas.openxmlformats.org/drawingml/2006/main">
               <a:ext uri="{FF2B5EF4-FFF2-40B4-BE49-F238E27FC236}">
-                <a16:creationId xmlns:a16="http://schemas.microsoft.com/office/drawing/2014/main" id="{687B1AAE-578B-4A28-9142-4610B5F1EDC4}"/>
+                <a16:creationId xmlns:a16="http://schemas.microsoft.com/office/drawing/2014/main" id="{7B7D3445-13E6-4E6A-B397-111624499585}"/>
               </a:ext>
             </a:extLst>
           </p:cNvPr>
@@ -8208,7 +8208,7 @@
           <p:cNvPr id="18" name="">
             <a:extLst xmlns:a="http://schemas.openxmlformats.org/drawingml/2006/main">
               <a:ext uri="{FF2B5EF4-FFF2-40B4-BE49-F238E27FC236}">
-                <a16:creationId xmlns:a16="http://schemas.microsoft.com/office/drawing/2014/main" id="{397626F6-1043-4CF4-A41A-A183E05357EF}"/>
+                <a16:creationId xmlns:a16="http://schemas.microsoft.com/office/drawing/2014/main" id="{408012CD-0B95-435B-A67C-E88F17FE2988}"/>
               </a:ext>
             </a:extLst>
           </p:cNvPr>
@@ -8270,7 +8270,7 @@
           <p:cNvPr id="19" name="">
             <a:extLst xmlns:a="http://schemas.openxmlformats.org/drawingml/2006/main">
               <a:ext uri="{FF2B5EF4-FFF2-40B4-BE49-F238E27FC236}">
-                <a16:creationId xmlns:a16="http://schemas.microsoft.com/office/drawing/2014/main" id="{64CF90A0-BF93-4179-972B-6A20C8B7C441}"/>
+                <a16:creationId xmlns:a16="http://schemas.microsoft.com/office/drawing/2014/main" id="{726423E7-0363-4D62-9F2D-799E696DE5A3}"/>
               </a:ext>
             </a:extLst>
           </p:cNvPr>
@@ -8332,7 +8332,7 @@
           <p:cNvPr id="20" name="">
             <a:extLst xmlns:a="http://schemas.openxmlformats.org/drawingml/2006/main">
               <a:ext uri="{FF2B5EF4-FFF2-40B4-BE49-F238E27FC236}">
-                <a16:creationId xmlns:a16="http://schemas.microsoft.com/office/drawing/2014/main" id="{FFD10D88-B159-4C2C-A833-6A91DBCD8758}"/>
+                <a16:creationId xmlns:a16="http://schemas.microsoft.com/office/drawing/2014/main" id="{008A5153-607B-431C-933C-A99B31DBB0CB}"/>
               </a:ext>
             </a:extLst>
           </p:cNvPr>
@@ -8367,7 +8367,7 @@
           <p:cNvPr id="21" name="">
             <a:extLst xmlns:a="http://schemas.openxmlformats.org/drawingml/2006/main">
               <a:ext uri="{FF2B5EF4-FFF2-40B4-BE49-F238E27FC236}">
-                <a16:creationId xmlns:a16="http://schemas.microsoft.com/office/drawing/2014/main" id="{7A64B9B2-E48B-4375-B73D-557ED6F06E8E}"/>
+                <a16:creationId xmlns:a16="http://schemas.microsoft.com/office/drawing/2014/main" id="{FE3F3253-DE58-48D0-A506-1AEA618ADC0C}"/>
               </a:ext>
             </a:extLst>
           </p:cNvPr>
@@ -8429,7 +8429,7 @@
           <p:cNvPr id="22" name="">
             <a:extLst xmlns:a="http://schemas.openxmlformats.org/drawingml/2006/main">
               <a:ext uri="{FF2B5EF4-FFF2-40B4-BE49-F238E27FC236}">
-                <a16:creationId xmlns:a16="http://schemas.microsoft.com/office/drawing/2014/main" id="{F3B070F5-CBE2-461C-94DC-283342CBC423}"/>
+                <a16:creationId xmlns:a16="http://schemas.microsoft.com/office/drawing/2014/main" id="{449F71B0-C4CC-4CE3-A88B-2AD78A1EB7B2}"/>
               </a:ext>
             </a:extLst>
           </p:cNvPr>
@@ -8491,7 +8491,7 @@
           <p:cNvPr id="23" name="">
             <a:extLst xmlns:a="http://schemas.openxmlformats.org/drawingml/2006/main">
               <a:ext uri="{FF2B5EF4-FFF2-40B4-BE49-F238E27FC236}">
-                <a16:creationId xmlns:a16="http://schemas.microsoft.com/office/drawing/2014/main" id="{4D1324CB-14F0-44E4-9C71-5004DF6FA8DD}"/>
+                <a16:creationId xmlns:a16="http://schemas.microsoft.com/office/drawing/2014/main" id="{13FE9214-0CBB-416E-9B13-E78D76793496}"/>
               </a:ext>
             </a:extLst>
           </p:cNvPr>
@@ -8526,7 +8526,7 @@
           <p:cNvPr id="24" name="">
             <a:extLst xmlns:a="http://schemas.openxmlformats.org/drawingml/2006/main">
               <a:ext uri="{FF2B5EF4-FFF2-40B4-BE49-F238E27FC236}">
-                <a16:creationId xmlns:a16="http://schemas.microsoft.com/office/drawing/2014/main" id="{CAD8D7B6-7AC6-42DB-B9D5-4B124F88F1C7}"/>
+                <a16:creationId xmlns:a16="http://schemas.microsoft.com/office/drawing/2014/main" id="{4DEFDD70-D71A-427A-93D5-25819FF08C9B}"/>
               </a:ext>
             </a:extLst>
           </p:cNvPr>
@@ -8588,7 +8588,7 @@
           <p:cNvPr id="25" name="">
             <a:extLst xmlns:a="http://schemas.openxmlformats.org/drawingml/2006/main">
               <a:ext uri="{FF2B5EF4-FFF2-40B4-BE49-F238E27FC236}">
-                <a16:creationId xmlns:a16="http://schemas.microsoft.com/office/drawing/2014/main" id="{FBC95C85-0C2F-4446-84CD-673D712AEE61}"/>
+                <a16:creationId xmlns:a16="http://schemas.microsoft.com/office/drawing/2014/main" id="{E9D9D43F-042D-4161-AADB-2B0E98CF0446}"/>
               </a:ext>
             </a:extLst>
           </p:cNvPr>
@@ -8648,7 +8648,7 @@
     </p:spTree>
     <p:extLst>
       <p:ext uri="{BB962C8B-B14F-4D97-AF65-F5344CB8AC3E}">
-        <p14:creationId xmlns:p14="http://schemas.microsoft.com/office/powerpoint/2010/main" val="129732403"/>
+        <p14:creationId xmlns:p14="http://schemas.microsoft.com/office/powerpoint/2010/main" val="1487403013"/>
       </p:ext>
     </p:extLst>
   </p:cSld>
@@ -8679,7 +8679,7 @@
           <p:cNvPr id="26" name="">
             <a:extLst xmlns:a="http://schemas.openxmlformats.org/drawingml/2006/main">
               <a:ext uri="{FF2B5EF4-FFF2-40B4-BE49-F238E27FC236}">
-                <a16:creationId xmlns:a16="http://schemas.microsoft.com/office/drawing/2014/main" id="{5CEC2149-0FE9-4737-AF04-8A95C52CA6D0}"/>
+                <a16:creationId xmlns:a16="http://schemas.microsoft.com/office/drawing/2014/main" id="{2365F988-9B0B-492E-A05D-C1A723DC2B41}"/>
               </a:ext>
             </a:extLst>
           </p:cNvPr>
@@ -8710,7 +8710,7 @@
           <p:cNvPr id="2" name="">
             <a:extLst xmlns:a="http://schemas.openxmlformats.org/drawingml/2006/main">
               <a:ext uri="{FF2B5EF4-FFF2-40B4-BE49-F238E27FC236}">
-                <a16:creationId xmlns:a16="http://schemas.microsoft.com/office/drawing/2014/main" id="{D802266C-D6A6-4083-B645-58D9B0FA9A2C}"/>
+                <a16:creationId xmlns:a16="http://schemas.microsoft.com/office/drawing/2014/main" id="{759BB432-D9F5-4F37-8B79-09CBC001720C}"/>
               </a:ext>
             </a:extLst>
           </p:cNvPr>
@@ -8762,7 +8762,7 @@
                 <a:ea typeface="Aptos"/>
                 <a:cs typeface="Aptos"/>
               </a:rPr>
-              <a:t>RISKS</a:t>
+              <a:t>PHASE 0</a:t>
             </a:r>
           </a:p>
         </p:txBody>
@@ -8772,7 +8772,7 @@
           <p:cNvPr id="3" name="">
             <a:extLst xmlns:a="http://schemas.openxmlformats.org/drawingml/2006/main">
               <a:ext uri="{FF2B5EF4-FFF2-40B4-BE49-F238E27FC236}">
-                <a16:creationId xmlns:a16="http://schemas.microsoft.com/office/drawing/2014/main" id="{53918928-4A69-4725-A38C-E686631692F8}"/>
+                <a16:creationId xmlns:a16="http://schemas.microsoft.com/office/drawing/2014/main" id="{0F231F3E-3AF8-4275-8E30-31D3B3502C83}"/>
               </a:ext>
             </a:extLst>
           </p:cNvPr>
@@ -8834,7 +8834,7 @@
           <p:cNvPr id="4" name="">
             <a:extLst xmlns:a="http://schemas.openxmlformats.org/drawingml/2006/main">
               <a:ext uri="{FF2B5EF4-FFF2-40B4-BE49-F238E27FC236}">
-                <a16:creationId xmlns:a16="http://schemas.microsoft.com/office/drawing/2014/main" id="{D99A4466-CDBA-4839-BE2D-6CAF4A944CB3}"/>
+                <a16:creationId xmlns:a16="http://schemas.microsoft.com/office/drawing/2014/main" id="{441CE365-D56A-49C1-B4DB-F3B08773D246}"/>
               </a:ext>
             </a:extLst>
           </p:cNvPr>
@@ -8869,7 +8869,7 @@
           <p:nvPr/>
         </p:nvPicPr>
         <p:blipFill>
-          <a:blip xmlns:r="http://schemas.openxmlformats.org/officeDocument/2006/relationships" xmlns:a="http://schemas.openxmlformats.org/drawingml/2006/main" r:embed="R8e38914ca7c8453a"/>
+          <a:blip xmlns:r="http://schemas.openxmlformats.org/officeDocument/2006/relationships" xmlns:a="http://schemas.openxmlformats.org/drawingml/2006/main" r:embed="R5f189d3f118c4501"/>
           <a:srcRect xmlns:a="http://schemas.openxmlformats.org/drawingml/2006/main" l="0" t="0" r="0" b="0"/>
           <a:stretch xmlns:a="http://schemas.openxmlformats.org/drawingml/2006/main">
             <a:fillRect l="0" t="0" r="0" b="0"/>
@@ -8890,7 +8890,7 @@
           <p:cNvPr id="6" name="">
             <a:extLst xmlns:a="http://schemas.openxmlformats.org/drawingml/2006/main">
               <a:ext uri="{FF2B5EF4-FFF2-40B4-BE49-F238E27FC236}">
-                <a16:creationId xmlns:a16="http://schemas.microsoft.com/office/drawing/2014/main" id="{12EF9D3A-EC3B-4279-A226-8383856582C0}"/>
+                <a16:creationId xmlns:a16="http://schemas.microsoft.com/office/drawing/2014/main" id="{77025FB0-A5BE-426F-AEB8-E45BBFB4F1AD}"/>
               </a:ext>
             </a:extLst>
           </p:cNvPr>
@@ -8952,7 +8952,7 @@
           <p:cNvPr id="7" name="">
             <a:extLst xmlns:a="http://schemas.openxmlformats.org/drawingml/2006/main">
               <a:ext uri="{FF2B5EF4-FFF2-40B4-BE49-F238E27FC236}">
-                <a16:creationId xmlns:a16="http://schemas.microsoft.com/office/drawing/2014/main" id="{C790C9F3-085A-477D-A205-D4E8040F45FE}"/>
+                <a16:creationId xmlns:a16="http://schemas.microsoft.com/office/drawing/2014/main" id="{CF3E0AF9-8D6F-4A04-87AB-625398E03204}"/>
               </a:ext>
             </a:extLst>
           </p:cNvPr>
@@ -9014,19 +9014,19 @@
           <p:cNvPr id="8" name="">
             <a:extLst xmlns:a="http://schemas.openxmlformats.org/drawingml/2006/main">
               <a:ext uri="{FF2B5EF4-FFF2-40B4-BE49-F238E27FC236}">
-                <a16:creationId xmlns:a16="http://schemas.microsoft.com/office/drawing/2014/main" id="{23D64E3A-63EA-40A2-B79B-ED1C9D61A378}"/>
-              </a:ext>
-            </a:extLst>
-          </p:cNvPr>
-          <p:cNvSpPr>
-            <a:spLocks xmlns:a="http://schemas.openxmlformats.org/drawingml/2006/main" noGrp="1"/>
-          </p:cNvSpPr>
-          <p:nvPr/>
-        </p:nvSpPr>
-        <p:spPr>
-          <a:xfrm xmlns:a="http://schemas.openxmlformats.org/drawingml/2006/main">
-            <a:off x="609600" y="1847850"/>
-            <a:ext cx="10972800" cy="495300"/>
+                <a16:creationId xmlns:a16="http://schemas.microsoft.com/office/drawing/2014/main" id="{B2CF21AA-E0B3-420B-BD4B-944B406901C4}"/>
+              </a:ext>
+            </a:extLst>
+          </p:cNvPr>
+          <p:cNvSpPr>
+            <a:spLocks xmlns:a="http://schemas.openxmlformats.org/drawingml/2006/main" noGrp="1"/>
+          </p:cNvSpPr>
+          <p:nvPr/>
+        </p:nvSpPr>
+        <p:spPr>
+          <a:xfrm xmlns:a="http://schemas.openxmlformats.org/drawingml/2006/main">
+            <a:off x="609600" y="1752600"/>
+            <a:ext cx="10972800" cy="438150"/>
           </a:xfrm>
           <a:prstGeom xmlns:a="http://schemas.openxmlformats.org/drawingml/2006/main" prst="rect">
             <a:avLst/>
@@ -9048,7 +9048,7 @@
                 <a:spcPct val="108000"/>
               </a:lnSpc>
               <a:buNone/>
-              <a:defRPr sz="1800" b="1">
+              <a:defRPr sz="1650" b="1">
                 <a:solidFill>
                   <a:srgbClr val="1B4F78"/>
                 </a:solidFill>
@@ -9058,7 +9058,7 @@
               </a:defRPr>
             </a:pPr>
             <a:r>
-              <a:rPr sz="1800" b="1">
+              <a:rPr sz="1650" b="1">
                 <a:solidFill>
                   <a:srgbClr val="1B4F78"/>
                 </a:solidFill>
@@ -9076,23 +9076,23 @@
           <p:cNvPr id="9" name="">
             <a:extLst xmlns:a="http://schemas.openxmlformats.org/drawingml/2006/main">
               <a:ext uri="{FF2B5EF4-FFF2-40B4-BE49-F238E27FC236}">
-                <a16:creationId xmlns:a16="http://schemas.microsoft.com/office/drawing/2014/main" id="{3EC3D5CE-C3D6-423B-BD1A-E20084103C34}"/>
-              </a:ext>
-            </a:extLst>
-          </p:cNvPr>
-          <p:cNvSpPr>
-            <a:spLocks xmlns:a="http://schemas.openxmlformats.org/drawingml/2006/main" noGrp="1"/>
-          </p:cNvSpPr>
-          <p:nvPr/>
-        </p:nvSpPr>
-        <p:spPr>
-          <a:xfrm xmlns:a="http://schemas.openxmlformats.org/drawingml/2006/main">
-            <a:off x="609600" y="1885950"/>
-            <a:ext cx="5400675" cy="1962150"/>
+                <a16:creationId xmlns:a16="http://schemas.microsoft.com/office/drawing/2014/main" id="{C58DE805-950C-4496-A729-07EF04A77BBB}"/>
+              </a:ext>
+            </a:extLst>
+          </p:cNvPr>
+          <p:cNvSpPr>
+            <a:spLocks xmlns:a="http://schemas.openxmlformats.org/drawingml/2006/main" noGrp="1"/>
+          </p:cNvSpPr>
+          <p:nvPr/>
+        </p:nvSpPr>
+        <p:spPr>
+          <a:xfrm xmlns:a="http://schemas.openxmlformats.org/drawingml/2006/main">
+            <a:off x="609600" y="2343150"/>
+            <a:ext cx="5400675" cy="1485900"/>
           </a:xfrm>
           <a:prstGeom xmlns:a="http://schemas.openxmlformats.org/drawingml/2006/main" prst="roundRect">
             <a:avLst>
-              <a:gd name="adj" fmla="val 8738"/>
+              <a:gd name="adj" fmla="val 11538"/>
             </a:avLst>
           </a:prstGeom>
           <a:solidFill xmlns:a="http://schemas.openxmlformats.org/drawingml/2006/main">
@@ -9111,19 +9111,19 @@
           <p:cNvPr id="10" name="">
             <a:extLst xmlns:a="http://schemas.openxmlformats.org/drawingml/2006/main">
               <a:ext uri="{FF2B5EF4-FFF2-40B4-BE49-F238E27FC236}">
-                <a16:creationId xmlns:a16="http://schemas.microsoft.com/office/drawing/2014/main" id="{BA8D601E-386A-4154-A6CF-97FFC12A065D}"/>
-              </a:ext>
-            </a:extLst>
-          </p:cNvPr>
-          <p:cNvSpPr>
-            <a:spLocks xmlns:a="http://schemas.openxmlformats.org/drawingml/2006/main" noGrp="1"/>
-          </p:cNvSpPr>
-          <p:nvPr/>
-        </p:nvSpPr>
-        <p:spPr>
-          <a:xfrm xmlns:a="http://schemas.openxmlformats.org/drawingml/2006/main">
-            <a:off x="609600" y="1885950"/>
-            <a:ext cx="66675" cy="1962150"/>
+                <a16:creationId xmlns:a16="http://schemas.microsoft.com/office/drawing/2014/main" id="{6232F01D-1984-45BB-BE44-2BB34BCC2371}"/>
+              </a:ext>
+            </a:extLst>
+          </p:cNvPr>
+          <p:cNvSpPr>
+            <a:spLocks xmlns:a="http://schemas.openxmlformats.org/drawingml/2006/main" noGrp="1"/>
+          </p:cNvSpPr>
+          <p:nvPr/>
+        </p:nvSpPr>
+        <p:spPr>
+          <a:xfrm xmlns:a="http://schemas.openxmlformats.org/drawingml/2006/main">
+            <a:off x="609600" y="2343150"/>
+            <a:ext cx="66675" cy="1485900"/>
           </a:xfrm>
           <a:prstGeom xmlns:a="http://schemas.openxmlformats.org/drawingml/2006/main" prst="rect">
             <a:avLst/>
@@ -9142,18 +9142,18 @@
           <p:cNvPr id="11" name="">
             <a:extLst xmlns:a="http://schemas.openxmlformats.org/drawingml/2006/main">
               <a:ext uri="{FF2B5EF4-FFF2-40B4-BE49-F238E27FC236}">
-                <a16:creationId xmlns:a16="http://schemas.microsoft.com/office/drawing/2014/main" id="{366E1ADE-D0B7-46DC-98B9-F5BF80C7C628}"/>
-              </a:ext>
-            </a:extLst>
-          </p:cNvPr>
-          <p:cNvSpPr>
-            <a:spLocks xmlns:a="http://schemas.openxmlformats.org/drawingml/2006/main" noGrp="1"/>
-          </p:cNvSpPr>
-          <p:nvPr/>
-        </p:nvSpPr>
-        <p:spPr>
-          <a:xfrm xmlns:a="http://schemas.openxmlformats.org/drawingml/2006/main">
-            <a:off x="819150" y="2038350"/>
+                <a16:creationId xmlns:a16="http://schemas.microsoft.com/office/drawing/2014/main" id="{8B161FB6-559C-43E7-8FCD-75DFBF6D9E44}"/>
+              </a:ext>
+            </a:extLst>
+          </p:cNvPr>
+          <p:cNvSpPr>
+            <a:spLocks xmlns:a="http://schemas.openxmlformats.org/drawingml/2006/main" noGrp="1"/>
+          </p:cNvSpPr>
+          <p:nvPr/>
+        </p:nvSpPr>
+        <p:spPr>
+          <a:xfrm xmlns:a="http://schemas.openxmlformats.org/drawingml/2006/main">
+            <a:off x="819150" y="2495550"/>
             <a:ext cx="5038725" cy="419100"/>
           </a:xfrm>
           <a:prstGeom xmlns:a="http://schemas.openxmlformats.org/drawingml/2006/main" prst="rect">
@@ -9204,19 +9204,19 @@
           <p:cNvPr id="12" name="">
             <a:extLst xmlns:a="http://schemas.openxmlformats.org/drawingml/2006/main">
               <a:ext uri="{FF2B5EF4-FFF2-40B4-BE49-F238E27FC236}">
-                <a16:creationId xmlns:a16="http://schemas.microsoft.com/office/drawing/2014/main" id="{09668CA9-D1CE-4C3B-A657-5AAB83AA63B4}"/>
-              </a:ext>
-            </a:extLst>
-          </p:cNvPr>
-          <p:cNvSpPr>
-            <a:spLocks xmlns:a="http://schemas.openxmlformats.org/drawingml/2006/main" noGrp="1"/>
-          </p:cNvSpPr>
-          <p:nvPr/>
-        </p:nvSpPr>
-        <p:spPr>
-          <a:xfrm xmlns:a="http://schemas.openxmlformats.org/drawingml/2006/main">
-            <a:off x="819150" y="2466975"/>
-            <a:ext cx="5038725" cy="1257300"/>
+                <a16:creationId xmlns:a16="http://schemas.microsoft.com/office/drawing/2014/main" id="{3B0F25E5-7014-4F02-865B-A7DA12651B33}"/>
+              </a:ext>
+            </a:extLst>
+          </p:cNvPr>
+          <p:cNvSpPr>
+            <a:spLocks xmlns:a="http://schemas.openxmlformats.org/drawingml/2006/main" noGrp="1"/>
+          </p:cNvSpPr>
+          <p:nvPr/>
+        </p:nvSpPr>
+        <p:spPr>
+          <a:xfrm xmlns:a="http://schemas.openxmlformats.org/drawingml/2006/main">
+            <a:off x="819150" y="2924175"/>
+            <a:ext cx="5038725" cy="781050"/>
           </a:xfrm>
           <a:prstGeom xmlns:a="http://schemas.openxmlformats.org/drawingml/2006/main" prst="rect">
             <a:avLst/>
@@ -9266,23 +9266,23 @@
           <p:cNvPr id="13" name="">
             <a:extLst xmlns:a="http://schemas.openxmlformats.org/drawingml/2006/main">
               <a:ext uri="{FF2B5EF4-FFF2-40B4-BE49-F238E27FC236}">
-                <a16:creationId xmlns:a16="http://schemas.microsoft.com/office/drawing/2014/main" id="{8CA8B033-C466-4BCB-9AA9-7D464D110ACE}"/>
-              </a:ext>
-            </a:extLst>
-          </p:cNvPr>
-          <p:cNvSpPr>
-            <a:spLocks xmlns:a="http://schemas.openxmlformats.org/drawingml/2006/main" noGrp="1"/>
-          </p:cNvSpPr>
-          <p:nvPr/>
-        </p:nvSpPr>
-        <p:spPr>
-          <a:xfrm xmlns:a="http://schemas.openxmlformats.org/drawingml/2006/main">
-            <a:off x="6181725" y="1885950"/>
-            <a:ext cx="5400675" cy="1962150"/>
+                <a16:creationId xmlns:a16="http://schemas.microsoft.com/office/drawing/2014/main" id="{CDE9074C-C89B-4F26-A855-475E2298D222}"/>
+              </a:ext>
+            </a:extLst>
+          </p:cNvPr>
+          <p:cNvSpPr>
+            <a:spLocks xmlns:a="http://schemas.openxmlformats.org/drawingml/2006/main" noGrp="1"/>
+          </p:cNvSpPr>
+          <p:nvPr/>
+        </p:nvSpPr>
+        <p:spPr>
+          <a:xfrm xmlns:a="http://schemas.openxmlformats.org/drawingml/2006/main">
+            <a:off x="6181725" y="2343150"/>
+            <a:ext cx="5400675" cy="1485900"/>
           </a:xfrm>
           <a:prstGeom xmlns:a="http://schemas.openxmlformats.org/drawingml/2006/main" prst="roundRect">
             <a:avLst>
-              <a:gd name="adj" fmla="val 8738"/>
+              <a:gd name="adj" fmla="val 11538"/>
             </a:avLst>
           </a:prstGeom>
           <a:solidFill xmlns:a="http://schemas.openxmlformats.org/drawingml/2006/main">
@@ -9301,19 +9301,19 @@
           <p:cNvPr id="14" name="">
             <a:extLst xmlns:a="http://schemas.openxmlformats.org/drawingml/2006/main">
               <a:ext uri="{FF2B5EF4-FFF2-40B4-BE49-F238E27FC236}">
-                <a16:creationId xmlns:a16="http://schemas.microsoft.com/office/drawing/2014/main" id="{2D27F925-5720-4379-A75B-95BDF79EDD04}"/>
-              </a:ext>
-            </a:extLst>
-          </p:cNvPr>
-          <p:cNvSpPr>
-            <a:spLocks xmlns:a="http://schemas.openxmlformats.org/drawingml/2006/main" noGrp="1"/>
-          </p:cNvSpPr>
-          <p:nvPr/>
-        </p:nvSpPr>
-        <p:spPr>
-          <a:xfrm xmlns:a="http://schemas.openxmlformats.org/drawingml/2006/main">
-            <a:off x="6181725" y="1885950"/>
-            <a:ext cx="66675" cy="1962150"/>
+                <a16:creationId xmlns:a16="http://schemas.microsoft.com/office/drawing/2014/main" id="{10ED28C7-287E-4FB8-9609-560EB6461CEE}"/>
+              </a:ext>
+            </a:extLst>
+          </p:cNvPr>
+          <p:cNvSpPr>
+            <a:spLocks xmlns:a="http://schemas.openxmlformats.org/drawingml/2006/main" noGrp="1"/>
+          </p:cNvSpPr>
+          <p:nvPr/>
+        </p:nvSpPr>
+        <p:spPr>
+          <a:xfrm xmlns:a="http://schemas.openxmlformats.org/drawingml/2006/main">
+            <a:off x="6181725" y="2343150"/>
+            <a:ext cx="66675" cy="1485900"/>
           </a:xfrm>
           <a:prstGeom xmlns:a="http://schemas.openxmlformats.org/drawingml/2006/main" prst="rect">
             <a:avLst/>
@@ -9332,18 +9332,18 @@
           <p:cNvPr id="15" name="">
             <a:extLst xmlns:a="http://schemas.openxmlformats.org/drawingml/2006/main">
               <a:ext uri="{FF2B5EF4-FFF2-40B4-BE49-F238E27FC236}">
-                <a16:creationId xmlns:a16="http://schemas.microsoft.com/office/drawing/2014/main" id="{077AB85D-2D86-4F84-8BF6-E9A4B77A7F4E}"/>
-              </a:ext>
-            </a:extLst>
-          </p:cNvPr>
-          <p:cNvSpPr>
-            <a:spLocks xmlns:a="http://schemas.openxmlformats.org/drawingml/2006/main" noGrp="1"/>
-          </p:cNvSpPr>
-          <p:nvPr/>
-        </p:nvSpPr>
-        <p:spPr>
-          <a:xfrm xmlns:a="http://schemas.openxmlformats.org/drawingml/2006/main">
-            <a:off x="6391275" y="2038350"/>
+                <a16:creationId xmlns:a16="http://schemas.microsoft.com/office/drawing/2014/main" id="{088D0CE0-928E-494B-A440-F71C2736F0F4}"/>
+              </a:ext>
+            </a:extLst>
+          </p:cNvPr>
+          <p:cNvSpPr>
+            <a:spLocks xmlns:a="http://schemas.openxmlformats.org/drawingml/2006/main" noGrp="1"/>
+          </p:cNvSpPr>
+          <p:nvPr/>
+        </p:nvSpPr>
+        <p:spPr>
+          <a:xfrm xmlns:a="http://schemas.openxmlformats.org/drawingml/2006/main">
+            <a:off x="6391275" y="2495550"/>
             <a:ext cx="5038725" cy="419100"/>
           </a:xfrm>
           <a:prstGeom xmlns:a="http://schemas.openxmlformats.org/drawingml/2006/main" prst="rect">
@@ -9394,19 +9394,19 @@
           <p:cNvPr id="16" name="">
             <a:extLst xmlns:a="http://schemas.openxmlformats.org/drawingml/2006/main">
               <a:ext uri="{FF2B5EF4-FFF2-40B4-BE49-F238E27FC236}">
-                <a16:creationId xmlns:a16="http://schemas.microsoft.com/office/drawing/2014/main" id="{A66CFA33-B947-4F72-B2D5-5F98CD8551CB}"/>
-              </a:ext>
-            </a:extLst>
-          </p:cNvPr>
-          <p:cNvSpPr>
-            <a:spLocks xmlns:a="http://schemas.openxmlformats.org/drawingml/2006/main" noGrp="1"/>
-          </p:cNvSpPr>
-          <p:nvPr/>
-        </p:nvSpPr>
-        <p:spPr>
-          <a:xfrm xmlns:a="http://schemas.openxmlformats.org/drawingml/2006/main">
-            <a:off x="6391275" y="2466975"/>
-            <a:ext cx="5038725" cy="1257300"/>
+                <a16:creationId xmlns:a16="http://schemas.microsoft.com/office/drawing/2014/main" id="{7FAB5443-EECD-4C23-9303-AA2D6DA59B61}"/>
+              </a:ext>
+            </a:extLst>
+          </p:cNvPr>
+          <p:cNvSpPr>
+            <a:spLocks xmlns:a="http://schemas.openxmlformats.org/drawingml/2006/main" noGrp="1"/>
+          </p:cNvSpPr>
+          <p:nvPr/>
+        </p:nvSpPr>
+        <p:spPr>
+          <a:xfrm xmlns:a="http://schemas.openxmlformats.org/drawingml/2006/main">
+            <a:off x="6391275" y="2924175"/>
+            <a:ext cx="5038725" cy="781050"/>
           </a:xfrm>
           <a:prstGeom xmlns:a="http://schemas.openxmlformats.org/drawingml/2006/main" prst="rect">
             <a:avLst/>
@@ -9456,23 +9456,23 @@
           <p:cNvPr id="17" name="">
             <a:extLst xmlns:a="http://schemas.openxmlformats.org/drawingml/2006/main">
               <a:ext uri="{FF2B5EF4-FFF2-40B4-BE49-F238E27FC236}">
-                <a16:creationId xmlns:a16="http://schemas.microsoft.com/office/drawing/2014/main" id="{DC8B1538-C20E-4FDF-BCF7-D9634BEB77CA}"/>
-              </a:ext>
-            </a:extLst>
-          </p:cNvPr>
-          <p:cNvSpPr>
-            <a:spLocks xmlns:a="http://schemas.openxmlformats.org/drawingml/2006/main" noGrp="1"/>
-          </p:cNvSpPr>
-          <p:nvPr/>
-        </p:nvSpPr>
-        <p:spPr>
-          <a:xfrm xmlns:a="http://schemas.openxmlformats.org/drawingml/2006/main">
-            <a:off x="609600" y="4019550"/>
-            <a:ext cx="5400675" cy="1962150"/>
+                <a16:creationId xmlns:a16="http://schemas.microsoft.com/office/drawing/2014/main" id="{D615320E-4A1A-4909-8AA1-FD85C5A885F7}"/>
+              </a:ext>
+            </a:extLst>
+          </p:cNvPr>
+          <p:cNvSpPr>
+            <a:spLocks xmlns:a="http://schemas.openxmlformats.org/drawingml/2006/main" noGrp="1"/>
+          </p:cNvSpPr>
+          <p:nvPr/>
+        </p:nvSpPr>
+        <p:spPr>
+          <a:xfrm xmlns:a="http://schemas.openxmlformats.org/drawingml/2006/main">
+            <a:off x="609600" y="4000500"/>
+            <a:ext cx="5400675" cy="1485900"/>
           </a:xfrm>
           <a:prstGeom xmlns:a="http://schemas.openxmlformats.org/drawingml/2006/main" prst="roundRect">
             <a:avLst>
-              <a:gd name="adj" fmla="val 8738"/>
+              <a:gd name="adj" fmla="val 11538"/>
             </a:avLst>
           </a:prstGeom>
           <a:solidFill xmlns:a="http://schemas.openxmlformats.org/drawingml/2006/main">
@@ -9491,19 +9491,19 @@
           <p:cNvPr id="18" name="">
             <a:extLst xmlns:a="http://schemas.openxmlformats.org/drawingml/2006/main">
               <a:ext uri="{FF2B5EF4-FFF2-40B4-BE49-F238E27FC236}">
-                <a16:creationId xmlns:a16="http://schemas.microsoft.com/office/drawing/2014/main" id="{17AD9806-6803-4133-8AD1-DE0A0BA63EBF}"/>
-              </a:ext>
-            </a:extLst>
-          </p:cNvPr>
-          <p:cNvSpPr>
-            <a:spLocks xmlns:a="http://schemas.openxmlformats.org/drawingml/2006/main" noGrp="1"/>
-          </p:cNvSpPr>
-          <p:nvPr/>
-        </p:nvSpPr>
-        <p:spPr>
-          <a:xfrm xmlns:a="http://schemas.openxmlformats.org/drawingml/2006/main">
-            <a:off x="609600" y="4019550"/>
-            <a:ext cx="66675" cy="1962150"/>
+                <a16:creationId xmlns:a16="http://schemas.microsoft.com/office/drawing/2014/main" id="{B13A609B-8BF5-421E-8813-1BB2EB582C35}"/>
+              </a:ext>
+            </a:extLst>
+          </p:cNvPr>
+          <p:cNvSpPr>
+            <a:spLocks xmlns:a="http://schemas.openxmlformats.org/drawingml/2006/main" noGrp="1"/>
+          </p:cNvSpPr>
+          <p:nvPr/>
+        </p:nvSpPr>
+        <p:spPr>
+          <a:xfrm xmlns:a="http://schemas.openxmlformats.org/drawingml/2006/main">
+            <a:off x="609600" y="4000500"/>
+            <a:ext cx="66675" cy="1485900"/>
           </a:xfrm>
           <a:prstGeom xmlns:a="http://schemas.openxmlformats.org/drawingml/2006/main" prst="rect">
             <a:avLst/>
@@ -9522,18 +9522,18 @@
           <p:cNvPr id="19" name="">
             <a:extLst xmlns:a="http://schemas.openxmlformats.org/drawingml/2006/main">
               <a:ext uri="{FF2B5EF4-FFF2-40B4-BE49-F238E27FC236}">
-                <a16:creationId xmlns:a16="http://schemas.microsoft.com/office/drawing/2014/main" id="{71E106FB-1C11-4FB8-8D7B-DD2182378209}"/>
-              </a:ext>
-            </a:extLst>
-          </p:cNvPr>
-          <p:cNvSpPr>
-            <a:spLocks xmlns:a="http://schemas.openxmlformats.org/drawingml/2006/main" noGrp="1"/>
-          </p:cNvSpPr>
-          <p:nvPr/>
-        </p:nvSpPr>
-        <p:spPr>
-          <a:xfrm xmlns:a="http://schemas.openxmlformats.org/drawingml/2006/main">
-            <a:off x="819150" y="4171950"/>
+                <a16:creationId xmlns:a16="http://schemas.microsoft.com/office/drawing/2014/main" id="{7E93D668-B1E1-4099-93C5-459577466ADF}"/>
+              </a:ext>
+            </a:extLst>
+          </p:cNvPr>
+          <p:cNvSpPr>
+            <a:spLocks xmlns:a="http://schemas.openxmlformats.org/drawingml/2006/main" noGrp="1"/>
+          </p:cNvSpPr>
+          <p:nvPr/>
+        </p:nvSpPr>
+        <p:spPr>
+          <a:xfrm xmlns:a="http://schemas.openxmlformats.org/drawingml/2006/main">
+            <a:off x="819150" y="4152900"/>
             <a:ext cx="5038725" cy="419100"/>
           </a:xfrm>
           <a:prstGeom xmlns:a="http://schemas.openxmlformats.org/drawingml/2006/main" prst="rect">
@@ -9584,19 +9584,19 @@
           <p:cNvPr id="20" name="">
             <a:extLst xmlns:a="http://schemas.openxmlformats.org/drawingml/2006/main">
               <a:ext uri="{FF2B5EF4-FFF2-40B4-BE49-F238E27FC236}">
-                <a16:creationId xmlns:a16="http://schemas.microsoft.com/office/drawing/2014/main" id="{C1A6878E-31FB-4422-A0C4-D6CA282DB6A8}"/>
-              </a:ext>
-            </a:extLst>
-          </p:cNvPr>
-          <p:cNvSpPr>
-            <a:spLocks xmlns:a="http://schemas.openxmlformats.org/drawingml/2006/main" noGrp="1"/>
-          </p:cNvSpPr>
-          <p:nvPr/>
-        </p:nvSpPr>
-        <p:spPr>
-          <a:xfrm xmlns:a="http://schemas.openxmlformats.org/drawingml/2006/main">
-            <a:off x="819150" y="4600575"/>
-            <a:ext cx="5038725" cy="1257300"/>
+                <a16:creationId xmlns:a16="http://schemas.microsoft.com/office/drawing/2014/main" id="{CF0B2EC6-D422-427F-9B07-F77B56EB7166}"/>
+              </a:ext>
+            </a:extLst>
+          </p:cNvPr>
+          <p:cNvSpPr>
+            <a:spLocks xmlns:a="http://schemas.openxmlformats.org/drawingml/2006/main" noGrp="1"/>
+          </p:cNvSpPr>
+          <p:nvPr/>
+        </p:nvSpPr>
+        <p:spPr>
+          <a:xfrm xmlns:a="http://schemas.openxmlformats.org/drawingml/2006/main">
+            <a:off x="819150" y="4581525"/>
+            <a:ext cx="5038725" cy="781050"/>
           </a:xfrm>
           <a:prstGeom xmlns:a="http://schemas.openxmlformats.org/drawingml/2006/main" prst="rect">
             <a:avLst/>
@@ -9646,23 +9646,23 @@
           <p:cNvPr id="21" name="">
             <a:extLst xmlns:a="http://schemas.openxmlformats.org/drawingml/2006/main">
               <a:ext uri="{FF2B5EF4-FFF2-40B4-BE49-F238E27FC236}">
-                <a16:creationId xmlns:a16="http://schemas.microsoft.com/office/drawing/2014/main" id="{AF34EEB2-02E2-48D1-A726-2767EBEBED92}"/>
-              </a:ext>
-            </a:extLst>
-          </p:cNvPr>
-          <p:cNvSpPr>
-            <a:spLocks xmlns:a="http://schemas.openxmlformats.org/drawingml/2006/main" noGrp="1"/>
-          </p:cNvSpPr>
-          <p:nvPr/>
-        </p:nvSpPr>
-        <p:spPr>
-          <a:xfrm xmlns:a="http://schemas.openxmlformats.org/drawingml/2006/main">
-            <a:off x="6181725" y="4019550"/>
-            <a:ext cx="5400675" cy="1962150"/>
+                <a16:creationId xmlns:a16="http://schemas.microsoft.com/office/drawing/2014/main" id="{1E6F50CF-574C-4986-8F28-88D5B8AE9BAF}"/>
+              </a:ext>
+            </a:extLst>
+          </p:cNvPr>
+          <p:cNvSpPr>
+            <a:spLocks xmlns:a="http://schemas.openxmlformats.org/drawingml/2006/main" noGrp="1"/>
+          </p:cNvSpPr>
+          <p:nvPr/>
+        </p:nvSpPr>
+        <p:spPr>
+          <a:xfrm xmlns:a="http://schemas.openxmlformats.org/drawingml/2006/main">
+            <a:off x="6181725" y="4000500"/>
+            <a:ext cx="5400675" cy="1485900"/>
           </a:xfrm>
           <a:prstGeom xmlns:a="http://schemas.openxmlformats.org/drawingml/2006/main" prst="roundRect">
             <a:avLst>
-              <a:gd name="adj" fmla="val 8738"/>
+              <a:gd name="adj" fmla="val 11538"/>
             </a:avLst>
           </a:prstGeom>
           <a:solidFill xmlns:a="http://schemas.openxmlformats.org/drawingml/2006/main">
@@ -9681,19 +9681,19 @@
           <p:cNvPr id="22" name="">
             <a:extLst xmlns:a="http://schemas.openxmlformats.org/drawingml/2006/main">
               <a:ext uri="{FF2B5EF4-FFF2-40B4-BE49-F238E27FC236}">
-                <a16:creationId xmlns:a16="http://schemas.microsoft.com/office/drawing/2014/main" id="{278337C7-2DD9-4D2B-8EA9-5531E4CAF5ED}"/>
-              </a:ext>
-            </a:extLst>
-          </p:cNvPr>
-          <p:cNvSpPr>
-            <a:spLocks xmlns:a="http://schemas.openxmlformats.org/drawingml/2006/main" noGrp="1"/>
-          </p:cNvSpPr>
-          <p:nvPr/>
-        </p:nvSpPr>
-        <p:spPr>
-          <a:xfrm xmlns:a="http://schemas.openxmlformats.org/drawingml/2006/main">
-            <a:off x="6181725" y="4019550"/>
-            <a:ext cx="66675" cy="1962150"/>
+                <a16:creationId xmlns:a16="http://schemas.microsoft.com/office/drawing/2014/main" id="{955F3DE9-6FF0-4F49-B65E-5534CA9DE9DA}"/>
+              </a:ext>
+            </a:extLst>
+          </p:cNvPr>
+          <p:cNvSpPr>
+            <a:spLocks xmlns:a="http://schemas.openxmlformats.org/drawingml/2006/main" noGrp="1"/>
+          </p:cNvSpPr>
+          <p:nvPr/>
+        </p:nvSpPr>
+        <p:spPr>
+          <a:xfrm xmlns:a="http://schemas.openxmlformats.org/drawingml/2006/main">
+            <a:off x="6181725" y="4000500"/>
+            <a:ext cx="66675" cy="1485900"/>
           </a:xfrm>
           <a:prstGeom xmlns:a="http://schemas.openxmlformats.org/drawingml/2006/main" prst="rect">
             <a:avLst/>
@@ -9712,18 +9712,18 @@
           <p:cNvPr id="23" name="">
             <a:extLst xmlns:a="http://schemas.openxmlformats.org/drawingml/2006/main">
               <a:ext uri="{FF2B5EF4-FFF2-40B4-BE49-F238E27FC236}">
-                <a16:creationId xmlns:a16="http://schemas.microsoft.com/office/drawing/2014/main" id="{2DBAC9FD-F400-4646-9B57-BACAF9C83817}"/>
-              </a:ext>
-            </a:extLst>
-          </p:cNvPr>
-          <p:cNvSpPr>
-            <a:spLocks xmlns:a="http://schemas.openxmlformats.org/drawingml/2006/main" noGrp="1"/>
-          </p:cNvSpPr>
-          <p:nvPr/>
-        </p:nvSpPr>
-        <p:spPr>
-          <a:xfrm xmlns:a="http://schemas.openxmlformats.org/drawingml/2006/main">
-            <a:off x="6391275" y="4171950"/>
+                <a16:creationId xmlns:a16="http://schemas.microsoft.com/office/drawing/2014/main" id="{B629695C-0EBD-4533-A8E3-9E7A2E914BA2}"/>
+              </a:ext>
+            </a:extLst>
+          </p:cNvPr>
+          <p:cNvSpPr>
+            <a:spLocks xmlns:a="http://schemas.openxmlformats.org/drawingml/2006/main" noGrp="1"/>
+          </p:cNvSpPr>
+          <p:nvPr/>
+        </p:nvSpPr>
+        <p:spPr>
+          <a:xfrm xmlns:a="http://schemas.openxmlformats.org/drawingml/2006/main">
+            <a:off x="6391275" y="4152900"/>
             <a:ext cx="5038725" cy="419100"/>
           </a:xfrm>
           <a:prstGeom xmlns:a="http://schemas.openxmlformats.org/drawingml/2006/main" prst="rect">
@@ -9774,19 +9774,19 @@
           <p:cNvPr id="24" name="">
             <a:extLst xmlns:a="http://schemas.openxmlformats.org/drawingml/2006/main">
               <a:ext uri="{FF2B5EF4-FFF2-40B4-BE49-F238E27FC236}">
-                <a16:creationId xmlns:a16="http://schemas.microsoft.com/office/drawing/2014/main" id="{FDF5B8CC-D14D-4D60-92A7-E3FB36A082DA}"/>
-              </a:ext>
-            </a:extLst>
-          </p:cNvPr>
-          <p:cNvSpPr>
-            <a:spLocks xmlns:a="http://schemas.openxmlformats.org/drawingml/2006/main" noGrp="1"/>
-          </p:cNvSpPr>
-          <p:nvPr/>
-        </p:nvSpPr>
-        <p:spPr>
-          <a:xfrm xmlns:a="http://schemas.openxmlformats.org/drawingml/2006/main">
-            <a:off x="6391275" y="4600575"/>
-            <a:ext cx="5038725" cy="1257300"/>
+                <a16:creationId xmlns:a16="http://schemas.microsoft.com/office/drawing/2014/main" id="{1D0D5BA3-6D72-4C6E-95F2-208AB180DD32}"/>
+              </a:ext>
+            </a:extLst>
+          </p:cNvPr>
+          <p:cNvSpPr>
+            <a:spLocks xmlns:a="http://schemas.openxmlformats.org/drawingml/2006/main" noGrp="1"/>
+          </p:cNvSpPr>
+          <p:nvPr/>
+        </p:nvSpPr>
+        <p:spPr>
+          <a:xfrm xmlns:a="http://schemas.openxmlformats.org/drawingml/2006/main">
+            <a:off x="6391275" y="4581525"/>
+            <a:ext cx="5038725" cy="781050"/>
           </a:xfrm>
           <a:prstGeom xmlns:a="http://schemas.openxmlformats.org/drawingml/2006/main" prst="rect">
             <a:avLst/>
@@ -9836,19 +9836,19 @@
           <p:cNvPr id="25" name="">
             <a:extLst xmlns:a="http://schemas.openxmlformats.org/drawingml/2006/main">
               <a:ext uri="{FF2B5EF4-FFF2-40B4-BE49-F238E27FC236}">
-                <a16:creationId xmlns:a16="http://schemas.microsoft.com/office/drawing/2014/main" id="{7A1B9D40-9DB0-4A4C-B3EA-974A7489DF9E}"/>
-              </a:ext>
-            </a:extLst>
-          </p:cNvPr>
-          <p:cNvSpPr>
-            <a:spLocks xmlns:a="http://schemas.openxmlformats.org/drawingml/2006/main" noGrp="1"/>
-          </p:cNvSpPr>
-          <p:nvPr/>
-        </p:nvSpPr>
-        <p:spPr>
-          <a:xfrm xmlns:a="http://schemas.openxmlformats.org/drawingml/2006/main">
-            <a:off x="609600" y="5829300"/>
-            <a:ext cx="10972800" cy="457200"/>
+                <a16:creationId xmlns:a16="http://schemas.microsoft.com/office/drawing/2014/main" id="{AAE5E531-9744-458E-9223-CA213E9C6DD5}"/>
+              </a:ext>
+            </a:extLst>
+          </p:cNvPr>
+          <p:cNvSpPr>
+            <a:spLocks xmlns:a="http://schemas.openxmlformats.org/drawingml/2006/main" noGrp="1"/>
+          </p:cNvSpPr>
+          <p:nvPr/>
+        </p:nvSpPr>
+        <p:spPr>
+          <a:xfrm xmlns:a="http://schemas.openxmlformats.org/drawingml/2006/main">
+            <a:off x="609600" y="5676900"/>
+            <a:ext cx="10972800" cy="590550"/>
           </a:xfrm>
           <a:prstGeom xmlns:a="http://schemas.openxmlformats.org/drawingml/2006/main" prst="rect">
             <a:avLst/>
@@ -9898,7 +9898,7 @@
     </p:spTree>
     <p:extLst>
       <p:ext uri="{BB962C8B-B14F-4D97-AF65-F5344CB8AC3E}">
-        <p14:creationId xmlns:p14="http://schemas.microsoft.com/office/powerpoint/2010/main" val="962413850"/>
+        <p14:creationId xmlns:p14="http://schemas.microsoft.com/office/powerpoint/2010/main" val="2019628294"/>
       </p:ext>
     </p:extLst>
   </p:cSld>
@@ -9929,7 +9929,7 @@
           <p:cNvPr id="24" name="">
             <a:extLst xmlns:a="http://schemas.openxmlformats.org/drawingml/2006/main">
               <a:ext uri="{FF2B5EF4-FFF2-40B4-BE49-F238E27FC236}">
-                <a16:creationId xmlns:a16="http://schemas.microsoft.com/office/drawing/2014/main" id="{57BEDDD7-38CC-47C7-ABCE-CD9467EAD7A4}"/>
+                <a16:creationId xmlns:a16="http://schemas.microsoft.com/office/drawing/2014/main" id="{5B01EFFB-4FA0-4302-AD1B-35F684A50637}"/>
               </a:ext>
             </a:extLst>
           </p:cNvPr>
@@ -9960,7 +9960,7 @@
           <p:cNvPr id="2" name="">
             <a:extLst xmlns:a="http://schemas.openxmlformats.org/drawingml/2006/main">
               <a:ext uri="{FF2B5EF4-FFF2-40B4-BE49-F238E27FC236}">
-                <a16:creationId xmlns:a16="http://schemas.microsoft.com/office/drawing/2014/main" id="{B13F187F-4F75-492C-AC8C-2D58581CCA3F}"/>
+                <a16:creationId xmlns:a16="http://schemas.microsoft.com/office/drawing/2014/main" id="{6A1F7327-195C-4EDD-8F8D-0F489ACC9873}"/>
               </a:ext>
             </a:extLst>
           </p:cNvPr>
@@ -10012,7 +10012,7 @@
                 <a:ea typeface="Aptos"/>
                 <a:cs typeface="Aptos"/>
               </a:rPr>
-              <a:t>PHASE 0</a:t>
+              <a:t>DECISION</a:t>
             </a:r>
           </a:p>
         </p:txBody>
@@ -10022,7 +10022,7 @@
           <p:cNvPr id="3" name="">
             <a:extLst xmlns:a="http://schemas.openxmlformats.org/drawingml/2006/main">
               <a:ext uri="{FF2B5EF4-FFF2-40B4-BE49-F238E27FC236}">
-                <a16:creationId xmlns:a16="http://schemas.microsoft.com/office/drawing/2014/main" id="{DFAA3408-6DAA-42A4-ACD1-54034A5D2894}"/>
+                <a16:creationId xmlns:a16="http://schemas.microsoft.com/office/drawing/2014/main" id="{66C0FD62-FFE2-4FAC-80CC-C1125B1A5680}"/>
               </a:ext>
             </a:extLst>
           </p:cNvPr>
@@ -10056,7 +10056,7 @@
                 <a:spcPct val="108000"/>
               </a:lnSpc>
               <a:buNone/>
-              <a:defRPr sz="3150" b="1">
+              <a:defRPr sz="2550" b="1">
                 <a:solidFill>
                   <a:srgbClr val="071426"/>
                 </a:solidFill>
@@ -10066,7 +10066,7 @@
               </a:defRPr>
             </a:pPr>
             <a:r>
-              <a:rPr sz="3150" b="1">
+              <a:rPr sz="2550" b="1">
                 <a:solidFill>
                   <a:srgbClr val="071426"/>
                 </a:solidFill>
@@ -10084,7 +10084,7 @@
           <p:cNvPr id="4" name="">
             <a:extLst xmlns:a="http://schemas.openxmlformats.org/drawingml/2006/main">
               <a:ext uri="{FF2B5EF4-FFF2-40B4-BE49-F238E27FC236}">
-                <a16:creationId xmlns:a16="http://schemas.microsoft.com/office/drawing/2014/main" id="{1963E8A5-78B1-4BEA-8FE7-61843DBBBC90}"/>
+                <a16:creationId xmlns:a16="http://schemas.microsoft.com/office/drawing/2014/main" id="{FEBDF067-B62D-4FB2-9EA4-FA1DB646E876}"/>
               </a:ext>
             </a:extLst>
           </p:cNvPr>
@@ -10119,7 +10119,7 @@
           <p:nvPr/>
         </p:nvPicPr>
         <p:blipFill>
-          <a:blip xmlns:r="http://schemas.openxmlformats.org/officeDocument/2006/relationships" xmlns:a="http://schemas.openxmlformats.org/drawingml/2006/main" r:embed="R3216f8cbcfda450e"/>
+          <a:blip xmlns:r="http://schemas.openxmlformats.org/officeDocument/2006/relationships" xmlns:a="http://schemas.openxmlformats.org/drawingml/2006/main" r:embed="R04823da0fca94fd9"/>
           <a:srcRect xmlns:a="http://schemas.openxmlformats.org/drawingml/2006/main" l="0" t="0" r="0" b="0"/>
           <a:stretch xmlns:a="http://schemas.openxmlformats.org/drawingml/2006/main">
             <a:fillRect l="0" t="0" r="0" b="0"/>
@@ -10140,7 +10140,7 @@
           <p:cNvPr id="6" name="">
             <a:extLst xmlns:a="http://schemas.openxmlformats.org/drawingml/2006/main">
               <a:ext uri="{FF2B5EF4-FFF2-40B4-BE49-F238E27FC236}">
-                <a16:creationId xmlns:a16="http://schemas.microsoft.com/office/drawing/2014/main" id="{25B63C59-4217-4BC6-B7CF-D7A2147DD26C}"/>
+                <a16:creationId xmlns:a16="http://schemas.microsoft.com/office/drawing/2014/main" id="{9184FA38-873C-46E1-B2DB-B4ABA91694D7}"/>
               </a:ext>
             </a:extLst>
           </p:cNvPr>
@@ -10202,7 +10202,7 @@
           <p:cNvPr id="7" name="">
             <a:extLst xmlns:a="http://schemas.openxmlformats.org/drawingml/2006/main">
               <a:ext uri="{FF2B5EF4-FFF2-40B4-BE49-F238E27FC236}">
-                <a16:creationId xmlns:a16="http://schemas.microsoft.com/office/drawing/2014/main" id="{BED98E5B-B9B6-41E2-891C-1FCE41EF320A}"/>
+                <a16:creationId xmlns:a16="http://schemas.microsoft.com/office/drawing/2014/main" id="{818A221C-D3CA-4317-AA66-BC91040E06AB}"/>
               </a:ext>
             </a:extLst>
           </p:cNvPr>
@@ -10264,7 +10264,7 @@
           <p:cNvPr id="8" name="">
             <a:extLst xmlns:a="http://schemas.openxmlformats.org/drawingml/2006/main">
               <a:ext uri="{FF2B5EF4-FFF2-40B4-BE49-F238E27FC236}">
-                <a16:creationId xmlns:a16="http://schemas.microsoft.com/office/drawing/2014/main" id="{B1DD2946-7B33-4596-B5CA-D66DD14FDD8C}"/>
+                <a16:creationId xmlns:a16="http://schemas.microsoft.com/office/drawing/2014/main" id="{77D29529-ED47-42F7-81B2-F0C9F1FE945F}"/>
               </a:ext>
             </a:extLst>
           </p:cNvPr>
@@ -10295,7 +10295,7 @@
           <p:cNvPr id="9" name="">
             <a:extLst xmlns:a="http://schemas.openxmlformats.org/drawingml/2006/main">
               <a:ext uri="{FF2B5EF4-FFF2-40B4-BE49-F238E27FC236}">
-                <a16:creationId xmlns:a16="http://schemas.microsoft.com/office/drawing/2014/main" id="{202882CD-E1FF-4289-9851-7F07E782B5E4}"/>
+                <a16:creationId xmlns:a16="http://schemas.microsoft.com/office/drawing/2014/main" id="{54EE0E9A-A39A-4A49-8C98-140866428B32}"/>
               </a:ext>
             </a:extLst>
           </p:cNvPr>
@@ -10357,7 +10357,7 @@
           <p:cNvPr id="10" name="">
             <a:extLst xmlns:a="http://schemas.openxmlformats.org/drawingml/2006/main">
               <a:ext uri="{FF2B5EF4-FFF2-40B4-BE49-F238E27FC236}">
-                <a16:creationId xmlns:a16="http://schemas.microsoft.com/office/drawing/2014/main" id="{8368487B-5DFC-45B1-85A9-40F8DC8F5867}"/>
+                <a16:creationId xmlns:a16="http://schemas.microsoft.com/office/drawing/2014/main" id="{6E820B88-029B-473E-9B0C-D63486E8C8C9}"/>
               </a:ext>
             </a:extLst>
           </p:cNvPr>
@@ -10419,7 +10419,7 @@
           <p:cNvPr id="11" name="">
             <a:extLst xmlns:a="http://schemas.openxmlformats.org/drawingml/2006/main">
               <a:ext uri="{FF2B5EF4-FFF2-40B4-BE49-F238E27FC236}">
-                <a16:creationId xmlns:a16="http://schemas.microsoft.com/office/drawing/2014/main" id="{623E7B8F-487B-41C8-85A5-851CF67811AC}"/>
+                <a16:creationId xmlns:a16="http://schemas.microsoft.com/office/drawing/2014/main" id="{2C228294-F011-400F-A2C5-F43D20022132}"/>
               </a:ext>
             </a:extLst>
           </p:cNvPr>
@@ -10450,7 +10450,7 @@
           <p:cNvPr id="12" name="">
             <a:extLst xmlns:a="http://schemas.openxmlformats.org/drawingml/2006/main">
               <a:ext uri="{FF2B5EF4-FFF2-40B4-BE49-F238E27FC236}">
-                <a16:creationId xmlns:a16="http://schemas.microsoft.com/office/drawing/2014/main" id="{FE1A0322-2DDF-4F09-B194-8855926FC942}"/>
+                <a16:creationId xmlns:a16="http://schemas.microsoft.com/office/drawing/2014/main" id="{C60D8292-1D98-45BE-9E2E-CB0BB87EC424}"/>
               </a:ext>
             </a:extLst>
           </p:cNvPr>
@@ -10512,7 +10512,7 @@
           <p:cNvPr id="13" name="">
             <a:extLst xmlns:a="http://schemas.openxmlformats.org/drawingml/2006/main">
               <a:ext uri="{FF2B5EF4-FFF2-40B4-BE49-F238E27FC236}">
-                <a16:creationId xmlns:a16="http://schemas.microsoft.com/office/drawing/2014/main" id="{D2BC3390-388D-4E8F-81D1-5457E9B54E5C}"/>
+                <a16:creationId xmlns:a16="http://schemas.microsoft.com/office/drawing/2014/main" id="{7899688B-57C8-45D5-A1E6-5738EF80169F}"/>
               </a:ext>
             </a:extLst>
           </p:cNvPr>
@@ -10574,7 +10574,7 @@
           <p:cNvPr id="14" name="">
             <a:extLst xmlns:a="http://schemas.openxmlformats.org/drawingml/2006/main">
               <a:ext uri="{FF2B5EF4-FFF2-40B4-BE49-F238E27FC236}">
-                <a16:creationId xmlns:a16="http://schemas.microsoft.com/office/drawing/2014/main" id="{915CF793-E201-41D2-BC71-64535BDD2B1F}"/>
+                <a16:creationId xmlns:a16="http://schemas.microsoft.com/office/drawing/2014/main" id="{EA6C6569-1C76-41CC-AA7A-A24FBC900937}"/>
               </a:ext>
             </a:extLst>
           </p:cNvPr>
@@ -10605,7 +10605,7 @@
           <p:cNvPr id="15" name="">
             <a:extLst xmlns:a="http://schemas.openxmlformats.org/drawingml/2006/main">
               <a:ext uri="{FF2B5EF4-FFF2-40B4-BE49-F238E27FC236}">
-                <a16:creationId xmlns:a16="http://schemas.microsoft.com/office/drawing/2014/main" id="{71B459EC-E9AE-4741-8B5B-EC01BFED74D9}"/>
+                <a16:creationId xmlns:a16="http://schemas.microsoft.com/office/drawing/2014/main" id="{1D231E49-90FD-422D-B59B-37166F12D3A3}"/>
               </a:ext>
             </a:extLst>
           </p:cNvPr>
@@ -10667,7 +10667,7 @@
           <p:cNvPr id="16" name="">
             <a:extLst xmlns:a="http://schemas.openxmlformats.org/drawingml/2006/main">
               <a:ext uri="{FF2B5EF4-FFF2-40B4-BE49-F238E27FC236}">
-                <a16:creationId xmlns:a16="http://schemas.microsoft.com/office/drawing/2014/main" id="{1B9A50C1-E137-499D-8724-3A33E611240E}"/>
+                <a16:creationId xmlns:a16="http://schemas.microsoft.com/office/drawing/2014/main" id="{5766F944-5D7A-4B7D-B7FE-050F404AA9DE}"/>
               </a:ext>
             </a:extLst>
           </p:cNvPr>
@@ -10729,7 +10729,7 @@
           <p:cNvPr id="17" name="">
             <a:extLst xmlns:a="http://schemas.openxmlformats.org/drawingml/2006/main">
               <a:ext uri="{FF2B5EF4-FFF2-40B4-BE49-F238E27FC236}">
-                <a16:creationId xmlns:a16="http://schemas.microsoft.com/office/drawing/2014/main" id="{5EF1056A-D203-4D1E-9388-27A2344A554D}"/>
+                <a16:creationId xmlns:a16="http://schemas.microsoft.com/office/drawing/2014/main" id="{E21DFAB0-20BF-4204-B6C5-952AABC9DE48}"/>
               </a:ext>
             </a:extLst>
           </p:cNvPr>
@@ -10760,7 +10760,7 @@
           <p:cNvPr id="18" name="">
             <a:extLst xmlns:a="http://schemas.openxmlformats.org/drawingml/2006/main">
               <a:ext uri="{FF2B5EF4-FFF2-40B4-BE49-F238E27FC236}">
-                <a16:creationId xmlns:a16="http://schemas.microsoft.com/office/drawing/2014/main" id="{14AF2D17-2EBB-40C4-BEF3-1F6ABCC16249}"/>
+                <a16:creationId xmlns:a16="http://schemas.microsoft.com/office/drawing/2014/main" id="{BDEF3480-591B-4912-A8B9-2778B15F085E}"/>
               </a:ext>
             </a:extLst>
           </p:cNvPr>
@@ -10822,7 +10822,7 @@
           <p:cNvPr id="19" name="">
             <a:extLst xmlns:a="http://schemas.openxmlformats.org/drawingml/2006/main">
               <a:ext uri="{FF2B5EF4-FFF2-40B4-BE49-F238E27FC236}">
-                <a16:creationId xmlns:a16="http://schemas.microsoft.com/office/drawing/2014/main" id="{A5CD5B3F-893B-4E41-8E97-A3E8B42B6A37}"/>
+                <a16:creationId xmlns:a16="http://schemas.microsoft.com/office/drawing/2014/main" id="{29DB55F3-86C2-4FE7-9E13-C5B7767C7B73}"/>
               </a:ext>
             </a:extLst>
           </p:cNvPr>
@@ -10884,7 +10884,7 @@
           <p:cNvPr id="20" name="">
             <a:extLst xmlns:a="http://schemas.openxmlformats.org/drawingml/2006/main">
               <a:ext uri="{FF2B5EF4-FFF2-40B4-BE49-F238E27FC236}">
-                <a16:creationId xmlns:a16="http://schemas.microsoft.com/office/drawing/2014/main" id="{19C12880-A7D8-434D-8012-BCD8A66133BC}"/>
+                <a16:creationId xmlns:a16="http://schemas.microsoft.com/office/drawing/2014/main" id="{0E2B7C61-9ABC-4461-82F7-31994707C2E3}"/>
               </a:ext>
             </a:extLst>
           </p:cNvPr>
@@ -10915,7 +10915,7 @@
           <p:cNvPr id="21" name="">
             <a:extLst xmlns:a="http://schemas.openxmlformats.org/drawingml/2006/main">
               <a:ext uri="{FF2B5EF4-FFF2-40B4-BE49-F238E27FC236}">
-                <a16:creationId xmlns:a16="http://schemas.microsoft.com/office/drawing/2014/main" id="{AB1213CF-25CF-455B-A029-1DF7AC090B28}"/>
+                <a16:creationId xmlns:a16="http://schemas.microsoft.com/office/drawing/2014/main" id="{6DBE4C1C-F735-41A9-9499-785F417705B5}"/>
               </a:ext>
             </a:extLst>
           </p:cNvPr>
@@ -10977,7 +10977,7 @@
           <p:cNvPr id="22" name="">
             <a:extLst xmlns:a="http://schemas.openxmlformats.org/drawingml/2006/main">
               <a:ext uri="{FF2B5EF4-FFF2-40B4-BE49-F238E27FC236}">
-                <a16:creationId xmlns:a16="http://schemas.microsoft.com/office/drawing/2014/main" id="{D8BCED27-88FC-4975-A25A-2F7CF16E80D2}"/>
+                <a16:creationId xmlns:a16="http://schemas.microsoft.com/office/drawing/2014/main" id="{765B46A9-FED2-4EA1-969C-1015EDE5925A}"/>
               </a:ext>
             </a:extLst>
           </p:cNvPr>
@@ -11039,7 +11039,7 @@
           <p:cNvPr id="23" name="">
             <a:extLst xmlns:a="http://schemas.openxmlformats.org/drawingml/2006/main">
               <a:ext uri="{FF2B5EF4-FFF2-40B4-BE49-F238E27FC236}">
-                <a16:creationId xmlns:a16="http://schemas.microsoft.com/office/drawing/2014/main" id="{B856EF4E-E8AF-4CF9-BAB8-F3D136F64C32}"/>
+                <a16:creationId xmlns:a16="http://schemas.microsoft.com/office/drawing/2014/main" id="{761BCB29-CDC5-42CA-B94B-FBBCF3B17A51}"/>
               </a:ext>
             </a:extLst>
           </p:cNvPr>
@@ -11101,7 +11101,7 @@
     </p:spTree>
     <p:extLst>
       <p:ext uri="{BB962C8B-B14F-4D97-AF65-F5344CB8AC3E}">
-        <p14:creationId xmlns:p14="http://schemas.microsoft.com/office/powerpoint/2010/main" val="510978112"/>
+        <p14:creationId xmlns:p14="http://schemas.microsoft.com/office/powerpoint/2010/main" val="1580662013"/>
       </p:ext>
     </p:extLst>
   </p:cSld>
@@ -11132,7 +11132,7 @@
           <p:cNvPr id="22" name="">
             <a:extLst xmlns:a="http://schemas.openxmlformats.org/drawingml/2006/main">
               <a:ext uri="{FF2B5EF4-FFF2-40B4-BE49-F238E27FC236}">
-                <a16:creationId xmlns:a16="http://schemas.microsoft.com/office/drawing/2014/main" id="{4BE075D0-2A44-4257-AE7B-44134BFFB96A}"/>
+                <a16:creationId xmlns:a16="http://schemas.microsoft.com/office/drawing/2014/main" id="{18DDB959-7245-4590-9CA1-632BE86D7601}"/>
               </a:ext>
             </a:extLst>
           </p:cNvPr>
@@ -11163,7 +11163,7 @@
           <p:cNvPr id="2" name="">
             <a:extLst xmlns:a="http://schemas.openxmlformats.org/drawingml/2006/main">
               <a:ext uri="{FF2B5EF4-FFF2-40B4-BE49-F238E27FC236}">
-                <a16:creationId xmlns:a16="http://schemas.microsoft.com/office/drawing/2014/main" id="{152BB3BF-014B-4506-BCA6-439BFC3BB7E0}"/>
+                <a16:creationId xmlns:a16="http://schemas.microsoft.com/office/drawing/2014/main" id="{50982A1B-2454-402F-B427-0FEDE43FA4EF}"/>
               </a:ext>
             </a:extLst>
           </p:cNvPr>
@@ -11225,7 +11225,7 @@
           <p:cNvPr id="3" name="">
             <a:extLst xmlns:a="http://schemas.openxmlformats.org/drawingml/2006/main">
               <a:ext uri="{FF2B5EF4-FFF2-40B4-BE49-F238E27FC236}">
-                <a16:creationId xmlns:a16="http://schemas.microsoft.com/office/drawing/2014/main" id="{00D283F1-1EFE-4BB8-8E51-4ABBEE3B8850}"/>
+                <a16:creationId xmlns:a16="http://schemas.microsoft.com/office/drawing/2014/main" id="{D096DDAB-46CE-49FA-AB28-4A2A999A695B}"/>
               </a:ext>
             </a:extLst>
           </p:cNvPr>
@@ -11259,7 +11259,7 @@
                 <a:spcPct val="108000"/>
               </a:lnSpc>
               <a:buNone/>
-              <a:defRPr sz="3150" b="1">
+              <a:defRPr sz="2250" b="1">
                 <a:solidFill>
                   <a:srgbClr val="071426"/>
                 </a:solidFill>
@@ -11269,7 +11269,7 @@
               </a:defRPr>
             </a:pPr>
             <a:r>
-              <a:rPr sz="3150" b="1">
+              <a:rPr sz="2250" b="1">
                 <a:solidFill>
                   <a:srgbClr val="071426"/>
                 </a:solidFill>
@@ -11287,7 +11287,7 @@
           <p:cNvPr id="4" name="">
             <a:extLst xmlns:a="http://schemas.openxmlformats.org/drawingml/2006/main">
               <a:ext uri="{FF2B5EF4-FFF2-40B4-BE49-F238E27FC236}">
-                <a16:creationId xmlns:a16="http://schemas.microsoft.com/office/drawing/2014/main" id="{8A521989-070F-45E3-88A6-972CBAAEDCCE}"/>
+                <a16:creationId xmlns:a16="http://schemas.microsoft.com/office/drawing/2014/main" id="{7C4758D5-153C-4966-8071-93FE803A7D8D}"/>
               </a:ext>
             </a:extLst>
           </p:cNvPr>
@@ -11322,7 +11322,7 @@
           <p:nvPr/>
         </p:nvPicPr>
         <p:blipFill>
-          <a:blip xmlns:r="http://schemas.openxmlformats.org/officeDocument/2006/relationships" xmlns:a="http://schemas.openxmlformats.org/drawingml/2006/main" r:embed="R307a5c94b1e14621"/>
+          <a:blip xmlns:r="http://schemas.openxmlformats.org/officeDocument/2006/relationships" xmlns:a="http://schemas.openxmlformats.org/drawingml/2006/main" r:embed="Rc3ed5ad1c1c34f7a"/>
           <a:srcRect xmlns:a="http://schemas.openxmlformats.org/drawingml/2006/main" l="0" t="0" r="0" b="0"/>
           <a:stretch xmlns:a="http://schemas.openxmlformats.org/drawingml/2006/main">
             <a:fillRect l="0" t="0" r="0" b="0"/>
@@ -11343,7 +11343,7 @@
           <p:cNvPr id="6" name="">
             <a:extLst xmlns:a="http://schemas.openxmlformats.org/drawingml/2006/main">
               <a:ext uri="{FF2B5EF4-FFF2-40B4-BE49-F238E27FC236}">
-                <a16:creationId xmlns:a16="http://schemas.microsoft.com/office/drawing/2014/main" id="{2C510B2E-3738-46D5-82D0-A36CCDECD5C6}"/>
+                <a16:creationId xmlns:a16="http://schemas.microsoft.com/office/drawing/2014/main" id="{9FF74EF7-A0B8-4E5D-8B68-BBC460C81AAD}"/>
               </a:ext>
             </a:extLst>
           </p:cNvPr>
@@ -11405,7 +11405,7 @@
           <p:cNvPr id="7" name="">
             <a:extLst xmlns:a="http://schemas.openxmlformats.org/drawingml/2006/main">
               <a:ext uri="{FF2B5EF4-FFF2-40B4-BE49-F238E27FC236}">
-                <a16:creationId xmlns:a16="http://schemas.microsoft.com/office/drawing/2014/main" id="{EDDF6739-618C-40E3-B37C-C122A45B19CA}"/>
+                <a16:creationId xmlns:a16="http://schemas.microsoft.com/office/drawing/2014/main" id="{FC92C248-C8CC-49F8-BB18-B0D0114978DF}"/>
               </a:ext>
             </a:extLst>
           </p:cNvPr>
@@ -11467,19 +11467,19 @@
           <p:cNvPr id="8" name="">
             <a:extLst xmlns:a="http://schemas.openxmlformats.org/drawingml/2006/main">
               <a:ext uri="{FF2B5EF4-FFF2-40B4-BE49-F238E27FC236}">
-                <a16:creationId xmlns:a16="http://schemas.microsoft.com/office/drawing/2014/main" id="{B15172DB-0AE5-47B6-8E5E-2FA18AE6218B}"/>
-              </a:ext>
-            </a:extLst>
-          </p:cNvPr>
-          <p:cNvSpPr>
-            <a:spLocks xmlns:a="http://schemas.openxmlformats.org/drawingml/2006/main" noGrp="1"/>
-          </p:cNvSpPr>
-          <p:nvPr/>
-        </p:nvSpPr>
-        <p:spPr>
-          <a:xfrm xmlns:a="http://schemas.openxmlformats.org/drawingml/2006/main">
-            <a:off x="609600" y="1847850"/>
-            <a:ext cx="10972800" cy="495300"/>
+                <a16:creationId xmlns:a16="http://schemas.microsoft.com/office/drawing/2014/main" id="{587B390F-9833-458D-AF7B-2C00C5F682DA}"/>
+              </a:ext>
+            </a:extLst>
+          </p:cNvPr>
+          <p:cNvSpPr>
+            <a:spLocks xmlns:a="http://schemas.openxmlformats.org/drawingml/2006/main" noGrp="1"/>
+          </p:cNvSpPr>
+          <p:nvPr/>
+        </p:nvSpPr>
+        <p:spPr>
+          <a:xfrm xmlns:a="http://schemas.openxmlformats.org/drawingml/2006/main">
+            <a:off x="609600" y="1752600"/>
+            <a:ext cx="10972800" cy="400050"/>
           </a:xfrm>
           <a:prstGeom xmlns:a="http://schemas.openxmlformats.org/drawingml/2006/main" prst="rect">
             <a:avLst/>
@@ -11501,7 +11501,7 @@
                 <a:spcPct val="108000"/>
               </a:lnSpc>
               <a:buNone/>
-              <a:defRPr sz="1875" b="1">
+              <a:defRPr sz="1575" b="1">
                 <a:solidFill>
                   <a:srgbClr val="1B4F78"/>
                 </a:solidFill>
@@ -11511,7 +11511,7 @@
               </a:defRPr>
             </a:pPr>
             <a:r>
-              <a:rPr sz="1875" b="1">
+              <a:rPr sz="1575" b="1">
                 <a:solidFill>
                   <a:srgbClr val="1B4F78"/>
                 </a:solidFill>
@@ -11529,23 +11529,23 @@
           <p:cNvPr id="9" name="">
             <a:extLst xmlns:a="http://schemas.openxmlformats.org/drawingml/2006/main">
               <a:ext uri="{FF2B5EF4-FFF2-40B4-BE49-F238E27FC236}">
-                <a16:creationId xmlns:a16="http://schemas.microsoft.com/office/drawing/2014/main" id="{6CA05242-C31C-4F26-90DE-DEB6A8D58F75}"/>
-              </a:ext>
-            </a:extLst>
-          </p:cNvPr>
-          <p:cNvSpPr>
-            <a:spLocks xmlns:a="http://schemas.openxmlformats.org/drawingml/2006/main" noGrp="1"/>
-          </p:cNvSpPr>
-          <p:nvPr/>
-        </p:nvSpPr>
-        <p:spPr>
-          <a:xfrm xmlns:a="http://schemas.openxmlformats.org/drawingml/2006/main">
-            <a:off x="609600" y="1885950"/>
-            <a:ext cx="5400675" cy="1962150"/>
+                <a16:creationId xmlns:a16="http://schemas.microsoft.com/office/drawing/2014/main" id="{90336BE9-8D74-4CDD-804D-140F2038D049}"/>
+              </a:ext>
+            </a:extLst>
+          </p:cNvPr>
+          <p:cNvSpPr>
+            <a:spLocks xmlns:a="http://schemas.openxmlformats.org/drawingml/2006/main" noGrp="1"/>
+          </p:cNvSpPr>
+          <p:nvPr/>
+        </p:nvSpPr>
+        <p:spPr>
+          <a:xfrm xmlns:a="http://schemas.openxmlformats.org/drawingml/2006/main">
+            <a:off x="609600" y="2266950"/>
+            <a:ext cx="5400675" cy="1571625"/>
           </a:xfrm>
           <a:prstGeom xmlns:a="http://schemas.openxmlformats.org/drawingml/2006/main" prst="roundRect">
             <a:avLst>
-              <a:gd name="adj" fmla="val 8738"/>
+              <a:gd name="adj" fmla="val 10909"/>
             </a:avLst>
           </a:prstGeom>
           <a:solidFill xmlns:a="http://schemas.openxmlformats.org/drawingml/2006/main">
@@ -11564,19 +11564,19 @@
           <p:cNvPr id="10" name="">
             <a:extLst xmlns:a="http://schemas.openxmlformats.org/drawingml/2006/main">
               <a:ext uri="{FF2B5EF4-FFF2-40B4-BE49-F238E27FC236}">
-                <a16:creationId xmlns:a16="http://schemas.microsoft.com/office/drawing/2014/main" id="{FDE99416-4DDF-450D-8E96-3F7577B46E61}"/>
-              </a:ext>
-            </a:extLst>
-          </p:cNvPr>
-          <p:cNvSpPr>
-            <a:spLocks xmlns:a="http://schemas.openxmlformats.org/drawingml/2006/main" noGrp="1"/>
-          </p:cNvSpPr>
-          <p:nvPr/>
-        </p:nvSpPr>
-        <p:spPr>
-          <a:xfrm xmlns:a="http://schemas.openxmlformats.org/drawingml/2006/main">
-            <a:off x="609600" y="1885950"/>
-            <a:ext cx="66675" cy="1962150"/>
+                <a16:creationId xmlns:a16="http://schemas.microsoft.com/office/drawing/2014/main" id="{6F56926F-DF07-44F1-93F4-394F9263FF1C}"/>
+              </a:ext>
+            </a:extLst>
+          </p:cNvPr>
+          <p:cNvSpPr>
+            <a:spLocks xmlns:a="http://schemas.openxmlformats.org/drawingml/2006/main" noGrp="1"/>
+          </p:cNvSpPr>
+          <p:nvPr/>
+        </p:nvSpPr>
+        <p:spPr>
+          <a:xfrm xmlns:a="http://schemas.openxmlformats.org/drawingml/2006/main">
+            <a:off x="609600" y="2266950"/>
+            <a:ext cx="66675" cy="1571625"/>
           </a:xfrm>
           <a:prstGeom xmlns:a="http://schemas.openxmlformats.org/drawingml/2006/main" prst="rect">
             <a:avLst/>
@@ -11595,18 +11595,18 @@
           <p:cNvPr id="11" name="">
             <a:extLst xmlns:a="http://schemas.openxmlformats.org/drawingml/2006/main">
               <a:ext uri="{FF2B5EF4-FFF2-40B4-BE49-F238E27FC236}">
-                <a16:creationId xmlns:a16="http://schemas.microsoft.com/office/drawing/2014/main" id="{7A86985E-669F-47BD-AB81-5FA5F5E0599F}"/>
-              </a:ext>
-            </a:extLst>
-          </p:cNvPr>
-          <p:cNvSpPr>
-            <a:spLocks xmlns:a="http://schemas.openxmlformats.org/drawingml/2006/main" noGrp="1"/>
-          </p:cNvSpPr>
-          <p:nvPr/>
-        </p:nvSpPr>
-        <p:spPr>
-          <a:xfrm xmlns:a="http://schemas.openxmlformats.org/drawingml/2006/main">
-            <a:off x="819150" y="2038350"/>
+                <a16:creationId xmlns:a16="http://schemas.microsoft.com/office/drawing/2014/main" id="{EBDF84A2-8896-42DD-BCBE-172F83EDE18D}"/>
+              </a:ext>
+            </a:extLst>
+          </p:cNvPr>
+          <p:cNvSpPr>
+            <a:spLocks xmlns:a="http://schemas.openxmlformats.org/drawingml/2006/main" noGrp="1"/>
+          </p:cNvSpPr>
+          <p:nvPr/>
+        </p:nvSpPr>
+        <p:spPr>
+          <a:xfrm xmlns:a="http://schemas.openxmlformats.org/drawingml/2006/main">
+            <a:off x="819150" y="2419350"/>
             <a:ext cx="5038725" cy="419100"/>
           </a:xfrm>
           <a:prstGeom xmlns:a="http://schemas.openxmlformats.org/drawingml/2006/main" prst="rect">
@@ -11657,23 +11657,23 @@
           <p:cNvPr id="12" name="">
             <a:extLst xmlns:a="http://schemas.openxmlformats.org/drawingml/2006/main">
               <a:ext uri="{FF2B5EF4-FFF2-40B4-BE49-F238E27FC236}">
-                <a16:creationId xmlns:a16="http://schemas.microsoft.com/office/drawing/2014/main" id="{BDFDC40C-FAAC-4E44-9DEA-3A6306F0E335}"/>
-              </a:ext>
-            </a:extLst>
-          </p:cNvPr>
-          <p:cNvSpPr>
-            <a:spLocks xmlns:a="http://schemas.openxmlformats.org/drawingml/2006/main" noGrp="1"/>
-          </p:cNvSpPr>
-          <p:nvPr/>
-        </p:nvSpPr>
-        <p:spPr>
-          <a:xfrm xmlns:a="http://schemas.openxmlformats.org/drawingml/2006/main">
-            <a:off x="6181725" y="1885950"/>
-            <a:ext cx="5400675" cy="1962150"/>
+                <a16:creationId xmlns:a16="http://schemas.microsoft.com/office/drawing/2014/main" id="{1EF841CD-4C23-4D51-AD35-90EF29F63AB3}"/>
+              </a:ext>
+            </a:extLst>
+          </p:cNvPr>
+          <p:cNvSpPr>
+            <a:spLocks xmlns:a="http://schemas.openxmlformats.org/drawingml/2006/main" noGrp="1"/>
+          </p:cNvSpPr>
+          <p:nvPr/>
+        </p:nvSpPr>
+        <p:spPr>
+          <a:xfrm xmlns:a="http://schemas.openxmlformats.org/drawingml/2006/main">
+            <a:off x="6181725" y="2266950"/>
+            <a:ext cx="5400675" cy="1571625"/>
           </a:xfrm>
           <a:prstGeom xmlns:a="http://schemas.openxmlformats.org/drawingml/2006/main" prst="roundRect">
             <a:avLst>
-              <a:gd name="adj" fmla="val 8738"/>
+              <a:gd name="adj" fmla="val 10909"/>
             </a:avLst>
           </a:prstGeom>
           <a:solidFill xmlns:a="http://schemas.openxmlformats.org/drawingml/2006/main">
@@ -11692,19 +11692,19 @@
           <p:cNvPr id="13" name="">
             <a:extLst xmlns:a="http://schemas.openxmlformats.org/drawingml/2006/main">
               <a:ext uri="{FF2B5EF4-FFF2-40B4-BE49-F238E27FC236}">
-                <a16:creationId xmlns:a16="http://schemas.microsoft.com/office/drawing/2014/main" id="{CD2F4711-9A58-469B-AC48-13704B6973BE}"/>
-              </a:ext>
-            </a:extLst>
-          </p:cNvPr>
-          <p:cNvSpPr>
-            <a:spLocks xmlns:a="http://schemas.openxmlformats.org/drawingml/2006/main" noGrp="1"/>
-          </p:cNvSpPr>
-          <p:nvPr/>
-        </p:nvSpPr>
-        <p:spPr>
-          <a:xfrm xmlns:a="http://schemas.openxmlformats.org/drawingml/2006/main">
-            <a:off x="6181725" y="1885950"/>
-            <a:ext cx="66675" cy="1962150"/>
+                <a16:creationId xmlns:a16="http://schemas.microsoft.com/office/drawing/2014/main" id="{8186216A-C598-4BB4-B9E4-598AE083EC8D}"/>
+              </a:ext>
+            </a:extLst>
+          </p:cNvPr>
+          <p:cNvSpPr>
+            <a:spLocks xmlns:a="http://schemas.openxmlformats.org/drawingml/2006/main" noGrp="1"/>
+          </p:cNvSpPr>
+          <p:nvPr/>
+        </p:nvSpPr>
+        <p:spPr>
+          <a:xfrm xmlns:a="http://schemas.openxmlformats.org/drawingml/2006/main">
+            <a:off x="6181725" y="2266950"/>
+            <a:ext cx="66675" cy="1571625"/>
           </a:xfrm>
           <a:prstGeom xmlns:a="http://schemas.openxmlformats.org/drawingml/2006/main" prst="rect">
             <a:avLst/>
@@ -11723,18 +11723,18 @@
           <p:cNvPr id="14" name="">
             <a:extLst xmlns:a="http://schemas.openxmlformats.org/drawingml/2006/main">
               <a:ext uri="{FF2B5EF4-FFF2-40B4-BE49-F238E27FC236}">
-                <a16:creationId xmlns:a16="http://schemas.microsoft.com/office/drawing/2014/main" id="{D56A7102-20D4-4175-AB97-8287224B86BC}"/>
-              </a:ext>
-            </a:extLst>
-          </p:cNvPr>
-          <p:cNvSpPr>
-            <a:spLocks xmlns:a="http://schemas.openxmlformats.org/drawingml/2006/main" noGrp="1"/>
-          </p:cNvSpPr>
-          <p:nvPr/>
-        </p:nvSpPr>
-        <p:spPr>
-          <a:xfrm xmlns:a="http://schemas.openxmlformats.org/drawingml/2006/main">
-            <a:off x="6391275" y="2038350"/>
+                <a16:creationId xmlns:a16="http://schemas.microsoft.com/office/drawing/2014/main" id="{B59F4F34-38F2-4457-8DFF-A742F9614152}"/>
+              </a:ext>
+            </a:extLst>
+          </p:cNvPr>
+          <p:cNvSpPr>
+            <a:spLocks xmlns:a="http://schemas.openxmlformats.org/drawingml/2006/main" noGrp="1"/>
+          </p:cNvSpPr>
+          <p:nvPr/>
+        </p:nvSpPr>
+        <p:spPr>
+          <a:xfrm xmlns:a="http://schemas.openxmlformats.org/drawingml/2006/main">
+            <a:off x="6391275" y="2419350"/>
             <a:ext cx="5038725" cy="419100"/>
           </a:xfrm>
           <a:prstGeom xmlns:a="http://schemas.openxmlformats.org/drawingml/2006/main" prst="rect">
@@ -11785,23 +11785,23 @@
           <p:cNvPr id="15" name="">
             <a:extLst xmlns:a="http://schemas.openxmlformats.org/drawingml/2006/main">
               <a:ext uri="{FF2B5EF4-FFF2-40B4-BE49-F238E27FC236}">
-                <a16:creationId xmlns:a16="http://schemas.microsoft.com/office/drawing/2014/main" id="{F21C81FC-2177-44CF-89B3-94546ECBDDAC}"/>
-              </a:ext>
-            </a:extLst>
-          </p:cNvPr>
-          <p:cNvSpPr>
-            <a:spLocks xmlns:a="http://schemas.openxmlformats.org/drawingml/2006/main" noGrp="1"/>
-          </p:cNvSpPr>
-          <p:nvPr/>
-        </p:nvSpPr>
-        <p:spPr>
-          <a:xfrm xmlns:a="http://schemas.openxmlformats.org/drawingml/2006/main">
-            <a:off x="609600" y="4019550"/>
-            <a:ext cx="5400675" cy="1962150"/>
+                <a16:creationId xmlns:a16="http://schemas.microsoft.com/office/drawing/2014/main" id="{D0D5A060-EDCA-4E41-8512-B420D9C15747}"/>
+              </a:ext>
+            </a:extLst>
+          </p:cNvPr>
+          <p:cNvSpPr>
+            <a:spLocks xmlns:a="http://schemas.openxmlformats.org/drawingml/2006/main" noGrp="1"/>
+          </p:cNvSpPr>
+          <p:nvPr/>
+        </p:nvSpPr>
+        <p:spPr>
+          <a:xfrm xmlns:a="http://schemas.openxmlformats.org/drawingml/2006/main">
+            <a:off x="609600" y="4010025"/>
+            <a:ext cx="5400675" cy="1571625"/>
           </a:xfrm>
           <a:prstGeom xmlns:a="http://schemas.openxmlformats.org/drawingml/2006/main" prst="roundRect">
             <a:avLst>
-              <a:gd name="adj" fmla="val 8738"/>
+              <a:gd name="adj" fmla="val 10909"/>
             </a:avLst>
           </a:prstGeom>
           <a:solidFill xmlns:a="http://schemas.openxmlformats.org/drawingml/2006/main">
@@ -11820,19 +11820,19 @@
           <p:cNvPr id="16" name="">
             <a:extLst xmlns:a="http://schemas.openxmlformats.org/drawingml/2006/main">
               <a:ext uri="{FF2B5EF4-FFF2-40B4-BE49-F238E27FC236}">
-                <a16:creationId xmlns:a16="http://schemas.microsoft.com/office/drawing/2014/main" id="{6130C6BC-2D34-4F0C-95E4-4740A6772843}"/>
-              </a:ext>
-            </a:extLst>
-          </p:cNvPr>
-          <p:cNvSpPr>
-            <a:spLocks xmlns:a="http://schemas.openxmlformats.org/drawingml/2006/main" noGrp="1"/>
-          </p:cNvSpPr>
-          <p:nvPr/>
-        </p:nvSpPr>
-        <p:spPr>
-          <a:xfrm xmlns:a="http://schemas.openxmlformats.org/drawingml/2006/main">
-            <a:off x="609600" y="4019550"/>
-            <a:ext cx="66675" cy="1962150"/>
+                <a16:creationId xmlns:a16="http://schemas.microsoft.com/office/drawing/2014/main" id="{4ACA134C-66DB-4378-96FA-DF4D99DD5C2B}"/>
+              </a:ext>
+            </a:extLst>
+          </p:cNvPr>
+          <p:cNvSpPr>
+            <a:spLocks xmlns:a="http://schemas.openxmlformats.org/drawingml/2006/main" noGrp="1"/>
+          </p:cNvSpPr>
+          <p:nvPr/>
+        </p:nvSpPr>
+        <p:spPr>
+          <a:xfrm xmlns:a="http://schemas.openxmlformats.org/drawingml/2006/main">
+            <a:off x="609600" y="4010025"/>
+            <a:ext cx="66675" cy="1571625"/>
           </a:xfrm>
           <a:prstGeom xmlns:a="http://schemas.openxmlformats.org/drawingml/2006/main" prst="rect">
             <a:avLst/>
@@ -11851,18 +11851,18 @@
           <p:cNvPr id="17" name="">
             <a:extLst xmlns:a="http://schemas.openxmlformats.org/drawingml/2006/main">
               <a:ext uri="{FF2B5EF4-FFF2-40B4-BE49-F238E27FC236}">
-                <a16:creationId xmlns:a16="http://schemas.microsoft.com/office/drawing/2014/main" id="{73910C92-D16D-4E6F-9904-AA03460ABCFB}"/>
-              </a:ext>
-            </a:extLst>
-          </p:cNvPr>
-          <p:cNvSpPr>
-            <a:spLocks xmlns:a="http://schemas.openxmlformats.org/drawingml/2006/main" noGrp="1"/>
-          </p:cNvSpPr>
-          <p:nvPr/>
-        </p:nvSpPr>
-        <p:spPr>
-          <a:xfrm xmlns:a="http://schemas.openxmlformats.org/drawingml/2006/main">
-            <a:off x="819150" y="4171950"/>
+                <a16:creationId xmlns:a16="http://schemas.microsoft.com/office/drawing/2014/main" id="{4AE94679-2561-4B83-B239-83DAFF5B9331}"/>
+              </a:ext>
+            </a:extLst>
+          </p:cNvPr>
+          <p:cNvSpPr>
+            <a:spLocks xmlns:a="http://schemas.openxmlformats.org/drawingml/2006/main" noGrp="1"/>
+          </p:cNvSpPr>
+          <p:nvPr/>
+        </p:nvSpPr>
+        <p:spPr>
+          <a:xfrm xmlns:a="http://schemas.openxmlformats.org/drawingml/2006/main">
+            <a:off x="819150" y="4162425"/>
             <a:ext cx="5038725" cy="419100"/>
           </a:xfrm>
           <a:prstGeom xmlns:a="http://schemas.openxmlformats.org/drawingml/2006/main" prst="rect">
@@ -11913,23 +11913,23 @@
           <p:cNvPr id="18" name="">
             <a:extLst xmlns:a="http://schemas.openxmlformats.org/drawingml/2006/main">
               <a:ext uri="{FF2B5EF4-FFF2-40B4-BE49-F238E27FC236}">
-                <a16:creationId xmlns:a16="http://schemas.microsoft.com/office/drawing/2014/main" id="{1E82676E-FF27-4CF1-B74F-D464CAEBE2F1}"/>
-              </a:ext>
-            </a:extLst>
-          </p:cNvPr>
-          <p:cNvSpPr>
-            <a:spLocks xmlns:a="http://schemas.openxmlformats.org/drawingml/2006/main" noGrp="1"/>
-          </p:cNvSpPr>
-          <p:nvPr/>
-        </p:nvSpPr>
-        <p:spPr>
-          <a:xfrm xmlns:a="http://schemas.openxmlformats.org/drawingml/2006/main">
-            <a:off x="6181725" y="4019550"/>
-            <a:ext cx="5400675" cy="1962150"/>
+                <a16:creationId xmlns:a16="http://schemas.microsoft.com/office/drawing/2014/main" id="{1B7D3C89-378B-4FFF-82A4-FE20FE29C651}"/>
+              </a:ext>
+            </a:extLst>
+          </p:cNvPr>
+          <p:cNvSpPr>
+            <a:spLocks xmlns:a="http://schemas.openxmlformats.org/drawingml/2006/main" noGrp="1"/>
+          </p:cNvSpPr>
+          <p:nvPr/>
+        </p:nvSpPr>
+        <p:spPr>
+          <a:xfrm xmlns:a="http://schemas.openxmlformats.org/drawingml/2006/main">
+            <a:off x="6181725" y="4010025"/>
+            <a:ext cx="5400675" cy="1571625"/>
           </a:xfrm>
           <a:prstGeom xmlns:a="http://schemas.openxmlformats.org/drawingml/2006/main" prst="roundRect">
             <a:avLst>
-              <a:gd name="adj" fmla="val 8738"/>
+              <a:gd name="adj" fmla="val 10909"/>
             </a:avLst>
           </a:prstGeom>
           <a:solidFill xmlns:a="http://schemas.openxmlformats.org/drawingml/2006/main">
@@ -11948,19 +11948,19 @@
           <p:cNvPr id="19" name="">
             <a:extLst xmlns:a="http://schemas.openxmlformats.org/drawingml/2006/main">
               <a:ext uri="{FF2B5EF4-FFF2-40B4-BE49-F238E27FC236}">
-                <a16:creationId xmlns:a16="http://schemas.microsoft.com/office/drawing/2014/main" id="{B6C6A4EC-3573-416E-B946-7C7074C7115D}"/>
-              </a:ext>
-            </a:extLst>
-          </p:cNvPr>
-          <p:cNvSpPr>
-            <a:spLocks xmlns:a="http://schemas.openxmlformats.org/drawingml/2006/main" noGrp="1"/>
-          </p:cNvSpPr>
-          <p:nvPr/>
-        </p:nvSpPr>
-        <p:spPr>
-          <a:xfrm xmlns:a="http://schemas.openxmlformats.org/drawingml/2006/main">
-            <a:off x="6181725" y="4019550"/>
-            <a:ext cx="66675" cy="1962150"/>
+                <a16:creationId xmlns:a16="http://schemas.microsoft.com/office/drawing/2014/main" id="{2A6D30FB-BEA0-4545-948D-E8C2C944AD78}"/>
+              </a:ext>
+            </a:extLst>
+          </p:cNvPr>
+          <p:cNvSpPr>
+            <a:spLocks xmlns:a="http://schemas.openxmlformats.org/drawingml/2006/main" noGrp="1"/>
+          </p:cNvSpPr>
+          <p:nvPr/>
+        </p:nvSpPr>
+        <p:spPr>
+          <a:xfrm xmlns:a="http://schemas.openxmlformats.org/drawingml/2006/main">
+            <a:off x="6181725" y="4010025"/>
+            <a:ext cx="66675" cy="1571625"/>
           </a:xfrm>
           <a:prstGeom xmlns:a="http://schemas.openxmlformats.org/drawingml/2006/main" prst="rect">
             <a:avLst/>
@@ -11979,18 +11979,18 @@
           <p:cNvPr id="20" name="">
             <a:extLst xmlns:a="http://schemas.openxmlformats.org/drawingml/2006/main">
               <a:ext uri="{FF2B5EF4-FFF2-40B4-BE49-F238E27FC236}">
-                <a16:creationId xmlns:a16="http://schemas.microsoft.com/office/drawing/2014/main" id="{9EB0775A-DB9E-45F5-9B0E-3C35B26E8FA6}"/>
-              </a:ext>
-            </a:extLst>
-          </p:cNvPr>
-          <p:cNvSpPr>
-            <a:spLocks xmlns:a="http://schemas.openxmlformats.org/drawingml/2006/main" noGrp="1"/>
-          </p:cNvSpPr>
-          <p:nvPr/>
-        </p:nvSpPr>
-        <p:spPr>
-          <a:xfrm xmlns:a="http://schemas.openxmlformats.org/drawingml/2006/main">
-            <a:off x="6391275" y="4171950"/>
+                <a16:creationId xmlns:a16="http://schemas.microsoft.com/office/drawing/2014/main" id="{B512F1DF-6CD2-420F-A50F-12C192F542EE}"/>
+              </a:ext>
+            </a:extLst>
+          </p:cNvPr>
+          <p:cNvSpPr>
+            <a:spLocks xmlns:a="http://schemas.openxmlformats.org/drawingml/2006/main" noGrp="1"/>
+          </p:cNvSpPr>
+          <p:nvPr/>
+        </p:nvSpPr>
+        <p:spPr>
+          <a:xfrm xmlns:a="http://schemas.openxmlformats.org/drawingml/2006/main">
+            <a:off x="6391275" y="4162425"/>
             <a:ext cx="5038725" cy="419100"/>
           </a:xfrm>
           <a:prstGeom xmlns:a="http://schemas.openxmlformats.org/drawingml/2006/main" prst="rect">
@@ -12041,19 +12041,19 @@
           <p:cNvPr id="21" name="">
             <a:extLst xmlns:a="http://schemas.openxmlformats.org/drawingml/2006/main">
               <a:ext uri="{FF2B5EF4-FFF2-40B4-BE49-F238E27FC236}">
-                <a16:creationId xmlns:a16="http://schemas.microsoft.com/office/drawing/2014/main" id="{265284F9-25F4-40E9-A2A0-D19043104073}"/>
-              </a:ext>
-            </a:extLst>
-          </p:cNvPr>
-          <p:cNvSpPr>
-            <a:spLocks xmlns:a="http://schemas.openxmlformats.org/drawingml/2006/main" noGrp="1"/>
-          </p:cNvSpPr>
-          <p:nvPr/>
-        </p:nvSpPr>
-        <p:spPr>
-          <a:xfrm xmlns:a="http://schemas.openxmlformats.org/drawingml/2006/main">
-            <a:off x="609600" y="5943600"/>
-            <a:ext cx="10972800" cy="361950"/>
+                <a16:creationId xmlns:a16="http://schemas.microsoft.com/office/drawing/2014/main" id="{2BBEEB95-4068-479A-92F4-D34DD9AADA69}"/>
+              </a:ext>
+            </a:extLst>
+          </p:cNvPr>
+          <p:cNvSpPr>
+            <a:spLocks xmlns:a="http://schemas.openxmlformats.org/drawingml/2006/main" noGrp="1"/>
+          </p:cNvSpPr>
+          <p:nvPr/>
+        </p:nvSpPr>
+        <p:spPr>
+          <a:xfrm xmlns:a="http://schemas.openxmlformats.org/drawingml/2006/main">
+            <a:off x="609600" y="5753100"/>
+            <a:ext cx="10972800" cy="457200"/>
           </a:xfrm>
           <a:prstGeom xmlns:a="http://schemas.openxmlformats.org/drawingml/2006/main" prst="rect">
             <a:avLst/>
@@ -12103,7 +12103,7 @@
     </p:spTree>
     <p:extLst>
       <p:ext uri="{BB962C8B-B14F-4D97-AF65-F5344CB8AC3E}">
-        <p14:creationId xmlns:p14="http://schemas.microsoft.com/office/powerpoint/2010/main" val="2082905192"/>
+        <p14:creationId xmlns:p14="http://schemas.microsoft.com/office/powerpoint/2010/main" val="227094597"/>
       </p:ext>
     </p:extLst>
   </p:cSld>
@@ -12134,7 +12134,7 @@
           <p:cNvPr id="22" name="">
             <a:extLst xmlns:a="http://schemas.openxmlformats.org/drawingml/2006/main">
               <a:ext uri="{FF2B5EF4-FFF2-40B4-BE49-F238E27FC236}">
-                <a16:creationId xmlns:a16="http://schemas.microsoft.com/office/drawing/2014/main" id="{EBF65EA9-C31D-4736-9D4C-1D66FB6CDB87}"/>
+                <a16:creationId xmlns:a16="http://schemas.microsoft.com/office/drawing/2014/main" id="{C7302785-38B1-4EAF-9F9D-75D06A95CA34}"/>
               </a:ext>
             </a:extLst>
           </p:cNvPr>
@@ -12165,7 +12165,7 @@
           <p:cNvPr id="2" name="">
             <a:extLst xmlns:a="http://schemas.openxmlformats.org/drawingml/2006/main">
               <a:ext uri="{FF2B5EF4-FFF2-40B4-BE49-F238E27FC236}">
-                <a16:creationId xmlns:a16="http://schemas.microsoft.com/office/drawing/2014/main" id="{469657D2-F101-40B6-86EC-67A5B098A775}"/>
+                <a16:creationId xmlns:a16="http://schemas.microsoft.com/office/drawing/2014/main" id="{A0BD294F-2F9B-49DD-AF24-2349073A36E9}"/>
               </a:ext>
             </a:extLst>
           </p:cNvPr>
@@ -12227,7 +12227,7 @@
           <p:cNvPr id="3" name="">
             <a:extLst xmlns:a="http://schemas.openxmlformats.org/drawingml/2006/main">
               <a:ext uri="{FF2B5EF4-FFF2-40B4-BE49-F238E27FC236}">
-                <a16:creationId xmlns:a16="http://schemas.microsoft.com/office/drawing/2014/main" id="{C70CB154-C4E5-4039-9BFE-49273F0F88CF}"/>
+                <a16:creationId xmlns:a16="http://schemas.microsoft.com/office/drawing/2014/main" id="{B3E628ED-357E-4801-81B4-AB38AB9765EF}"/>
               </a:ext>
             </a:extLst>
           </p:cNvPr>
@@ -12289,7 +12289,7 @@
           <p:cNvPr id="4" name="">
             <a:extLst xmlns:a="http://schemas.openxmlformats.org/drawingml/2006/main">
               <a:ext uri="{FF2B5EF4-FFF2-40B4-BE49-F238E27FC236}">
-                <a16:creationId xmlns:a16="http://schemas.microsoft.com/office/drawing/2014/main" id="{C87E0CBD-244B-4147-877F-290F7DFF3430}"/>
+                <a16:creationId xmlns:a16="http://schemas.microsoft.com/office/drawing/2014/main" id="{CB87ED31-C14E-4E4F-B4E4-2686DA6937D1}"/>
               </a:ext>
             </a:extLst>
           </p:cNvPr>
@@ -12324,7 +12324,7 @@
           <p:nvPr/>
         </p:nvPicPr>
         <p:blipFill>
-          <a:blip xmlns:r="http://schemas.openxmlformats.org/officeDocument/2006/relationships" xmlns:a="http://schemas.openxmlformats.org/drawingml/2006/main" r:embed="Raae6dce9d46a489d"/>
+          <a:blip xmlns:r="http://schemas.openxmlformats.org/officeDocument/2006/relationships" xmlns:a="http://schemas.openxmlformats.org/drawingml/2006/main" r:embed="R61870a81422d40aa"/>
           <a:srcRect xmlns:a="http://schemas.openxmlformats.org/drawingml/2006/main" l="0" t="0" r="0" b="0"/>
           <a:stretch xmlns:a="http://schemas.openxmlformats.org/drawingml/2006/main">
             <a:fillRect l="0" t="0" r="0" b="0"/>
@@ -12345,7 +12345,7 @@
           <p:cNvPr id="6" name="">
             <a:extLst xmlns:a="http://schemas.openxmlformats.org/drawingml/2006/main">
               <a:ext uri="{FF2B5EF4-FFF2-40B4-BE49-F238E27FC236}">
-                <a16:creationId xmlns:a16="http://schemas.microsoft.com/office/drawing/2014/main" id="{E4A288EA-0C4B-4E87-A074-96CF8C3B4A2D}"/>
+                <a16:creationId xmlns:a16="http://schemas.microsoft.com/office/drawing/2014/main" id="{3BB31CCB-1B77-48C1-9C97-154ABEAD9F7C}"/>
               </a:ext>
             </a:extLst>
           </p:cNvPr>
@@ -12407,7 +12407,7 @@
           <p:cNvPr id="7" name="">
             <a:extLst xmlns:a="http://schemas.openxmlformats.org/drawingml/2006/main">
               <a:ext uri="{FF2B5EF4-FFF2-40B4-BE49-F238E27FC236}">
-                <a16:creationId xmlns:a16="http://schemas.microsoft.com/office/drawing/2014/main" id="{9E2A3FD7-FABE-41AA-94AE-4DD930CDEC6E}"/>
+                <a16:creationId xmlns:a16="http://schemas.microsoft.com/office/drawing/2014/main" id="{AE33EEF5-8861-435E-A3FE-7F6A88A2EC3E}"/>
               </a:ext>
             </a:extLst>
           </p:cNvPr>
@@ -12469,19 +12469,19 @@
           <p:cNvPr id="8" name="">
             <a:extLst xmlns:a="http://schemas.openxmlformats.org/drawingml/2006/main">
               <a:ext uri="{FF2B5EF4-FFF2-40B4-BE49-F238E27FC236}">
-                <a16:creationId xmlns:a16="http://schemas.microsoft.com/office/drawing/2014/main" id="{EEF57D00-8DDC-4971-B7EA-882E64FD9970}"/>
-              </a:ext>
-            </a:extLst>
-          </p:cNvPr>
-          <p:cNvSpPr>
-            <a:spLocks xmlns:a="http://schemas.openxmlformats.org/drawingml/2006/main" noGrp="1"/>
-          </p:cNvSpPr>
-          <p:nvPr/>
-        </p:nvSpPr>
-        <p:spPr>
-          <a:xfrm xmlns:a="http://schemas.openxmlformats.org/drawingml/2006/main">
-            <a:off x="609600" y="1790700"/>
-            <a:ext cx="10972800" cy="419100"/>
+                <a16:creationId xmlns:a16="http://schemas.microsoft.com/office/drawing/2014/main" id="{FDEFF8E6-5B8C-4295-9B4B-DE840C69B3CB}"/>
+              </a:ext>
+            </a:extLst>
+          </p:cNvPr>
+          <p:cNvSpPr>
+            <a:spLocks xmlns:a="http://schemas.openxmlformats.org/drawingml/2006/main" noGrp="1"/>
+          </p:cNvSpPr>
+          <p:nvPr/>
+        </p:nvSpPr>
+        <p:spPr>
+          <a:xfrm xmlns:a="http://schemas.openxmlformats.org/drawingml/2006/main">
+            <a:off x="609600" y="1752600"/>
+            <a:ext cx="10972800" cy="400050"/>
           </a:xfrm>
           <a:prstGeom xmlns:a="http://schemas.openxmlformats.org/drawingml/2006/main" prst="rect">
             <a:avLst/>
@@ -12503,7 +12503,7 @@
                 <a:spcPct val="108000"/>
               </a:lnSpc>
               <a:buNone/>
-              <a:defRPr sz="1650" b="1">
+              <a:defRPr sz="1575" b="1">
                 <a:solidFill>
                   <a:srgbClr val="1B4F78"/>
                 </a:solidFill>
@@ -12513,7 +12513,7 @@
               </a:defRPr>
             </a:pPr>
             <a:r>
-              <a:rPr sz="1650" b="1">
+              <a:rPr sz="1575" b="1">
                 <a:solidFill>
                   <a:srgbClr val="1B4F78"/>
                 </a:solidFill>
@@ -12531,19 +12531,19 @@
           <p:cNvPr id="9" name="">
             <a:extLst xmlns:a="http://schemas.openxmlformats.org/drawingml/2006/main">
               <a:ext uri="{FF2B5EF4-FFF2-40B4-BE49-F238E27FC236}">
-                <a16:creationId xmlns:a16="http://schemas.microsoft.com/office/drawing/2014/main" id="{D1BFC3E2-4696-425D-BBEA-C98EF9F132FA}"/>
-              </a:ext>
-            </a:extLst>
-          </p:cNvPr>
-          <p:cNvSpPr>
-            <a:spLocks xmlns:a="http://schemas.openxmlformats.org/drawingml/2006/main" noGrp="1"/>
-          </p:cNvSpPr>
-          <p:nvPr/>
-        </p:nvSpPr>
-        <p:spPr>
-          <a:xfrm xmlns:a="http://schemas.openxmlformats.org/drawingml/2006/main">
-            <a:off x="609600" y="1885950"/>
-            <a:ext cx="2614613" cy="4095750"/>
+                <a16:creationId xmlns:a16="http://schemas.microsoft.com/office/drawing/2014/main" id="{6F207BB1-FDD1-4249-9A22-F7681ADCE405}"/>
+              </a:ext>
+            </a:extLst>
+          </p:cNvPr>
+          <p:cNvSpPr>
+            <a:spLocks xmlns:a="http://schemas.openxmlformats.org/drawingml/2006/main" noGrp="1"/>
+          </p:cNvSpPr>
+          <p:nvPr/>
+        </p:nvSpPr>
+        <p:spPr>
+          <a:xfrm xmlns:a="http://schemas.openxmlformats.org/drawingml/2006/main">
+            <a:off x="609600" y="2324100"/>
+            <a:ext cx="2614613" cy="3238500"/>
           </a:xfrm>
           <a:prstGeom xmlns:a="http://schemas.openxmlformats.org/drawingml/2006/main" prst="roundRect">
             <a:avLst>
@@ -12566,19 +12566,19 @@
           <p:cNvPr id="10" name="">
             <a:extLst xmlns:a="http://schemas.openxmlformats.org/drawingml/2006/main">
               <a:ext uri="{FF2B5EF4-FFF2-40B4-BE49-F238E27FC236}">
-                <a16:creationId xmlns:a16="http://schemas.microsoft.com/office/drawing/2014/main" id="{45862467-6878-4ACD-AEB0-42B279BAB47C}"/>
-              </a:ext>
-            </a:extLst>
-          </p:cNvPr>
-          <p:cNvSpPr>
-            <a:spLocks xmlns:a="http://schemas.openxmlformats.org/drawingml/2006/main" noGrp="1"/>
-          </p:cNvSpPr>
-          <p:nvPr/>
-        </p:nvSpPr>
-        <p:spPr>
-          <a:xfrm xmlns:a="http://schemas.openxmlformats.org/drawingml/2006/main">
-            <a:off x="609600" y="1885950"/>
-            <a:ext cx="66675" cy="4095750"/>
+                <a16:creationId xmlns:a16="http://schemas.microsoft.com/office/drawing/2014/main" id="{C546C4E2-B062-406A-84CE-49CC53CA5D0D}"/>
+              </a:ext>
+            </a:extLst>
+          </p:cNvPr>
+          <p:cNvSpPr>
+            <a:spLocks xmlns:a="http://schemas.openxmlformats.org/drawingml/2006/main" noGrp="1"/>
+          </p:cNvSpPr>
+          <p:nvPr/>
+        </p:nvSpPr>
+        <p:spPr>
+          <a:xfrm xmlns:a="http://schemas.openxmlformats.org/drawingml/2006/main">
+            <a:off x="609600" y="2324100"/>
+            <a:ext cx="66675" cy="3238500"/>
           </a:xfrm>
           <a:prstGeom xmlns:a="http://schemas.openxmlformats.org/drawingml/2006/main" prst="rect">
             <a:avLst/>
@@ -12597,19 +12597,19 @@
           <p:cNvPr id="11" name="">
             <a:extLst xmlns:a="http://schemas.openxmlformats.org/drawingml/2006/main">
               <a:ext uri="{FF2B5EF4-FFF2-40B4-BE49-F238E27FC236}">
-                <a16:creationId xmlns:a16="http://schemas.microsoft.com/office/drawing/2014/main" id="{94860CC5-6EE6-4650-87F4-E6F32C7F135A}"/>
-              </a:ext>
-            </a:extLst>
-          </p:cNvPr>
-          <p:cNvSpPr>
-            <a:spLocks xmlns:a="http://schemas.openxmlformats.org/drawingml/2006/main" noGrp="1"/>
-          </p:cNvSpPr>
-          <p:nvPr/>
-        </p:nvSpPr>
-        <p:spPr>
-          <a:xfrm xmlns:a="http://schemas.openxmlformats.org/drawingml/2006/main">
-            <a:off x="819150" y="2038350"/>
-            <a:ext cx="2252663" cy="419100"/>
+                <a16:creationId xmlns:a16="http://schemas.microsoft.com/office/drawing/2014/main" id="{D147149D-1946-4703-BA8C-8016C7CE9A7E}"/>
+              </a:ext>
+            </a:extLst>
+          </p:cNvPr>
+          <p:cNvSpPr>
+            <a:spLocks xmlns:a="http://schemas.openxmlformats.org/drawingml/2006/main" noGrp="1"/>
+          </p:cNvSpPr>
+          <p:nvPr/>
+        </p:nvSpPr>
+        <p:spPr>
+          <a:xfrm xmlns:a="http://schemas.openxmlformats.org/drawingml/2006/main">
+            <a:off x="819150" y="2590800"/>
+            <a:ext cx="2252663" cy="819150"/>
           </a:xfrm>
           <a:prstGeom xmlns:a="http://schemas.openxmlformats.org/drawingml/2006/main" prst="rect">
             <a:avLst/>
@@ -12622,7 +12622,7 @@
         </p:spPr>
         <p:txBody>
           <a:bodyPr xmlns:a="http://schemas.openxmlformats.org/drawingml/2006/main" lIns="76200" tIns="57150" rIns="76200" bIns="57150" anchor="ctr">
-            <a:normAutofit fontScale="61289"/>
+            <a:normAutofit fontScale="100000"/>
           </a:bodyPr>
           <a:lstStyle xmlns:a="http://schemas.openxmlformats.org/drawingml/2006/main"/>
           <a:p xmlns:a="http://schemas.openxmlformats.org/drawingml/2006/main">
@@ -12631,7 +12631,7 @@
                 <a:spcPct val="108000"/>
               </a:lnSpc>
               <a:buNone/>
-              <a:defRPr sz="1650" b="1">
+              <a:defRPr sz="1350" b="1">
                 <a:solidFill>
                   <a:srgbClr val="071426"/>
                 </a:solidFill>
@@ -12641,7 +12641,7 @@
               </a:defRPr>
             </a:pPr>
             <a:r>
-              <a:rPr sz="1650" b="1">
+              <a:rPr sz="1350" b="1">
                 <a:solidFill>
                   <a:srgbClr val="071426"/>
                 </a:solidFill>
@@ -12659,19 +12659,19 @@
           <p:cNvPr id="12" name="">
             <a:extLst xmlns:a="http://schemas.openxmlformats.org/drawingml/2006/main">
               <a:ext uri="{FF2B5EF4-FFF2-40B4-BE49-F238E27FC236}">
-                <a16:creationId xmlns:a16="http://schemas.microsoft.com/office/drawing/2014/main" id="{D727388A-E6D1-4202-8911-6E0881ABFF6A}"/>
-              </a:ext>
-            </a:extLst>
-          </p:cNvPr>
-          <p:cNvSpPr>
-            <a:spLocks xmlns:a="http://schemas.openxmlformats.org/drawingml/2006/main" noGrp="1"/>
-          </p:cNvSpPr>
-          <p:nvPr/>
-        </p:nvSpPr>
-        <p:spPr>
-          <a:xfrm xmlns:a="http://schemas.openxmlformats.org/drawingml/2006/main">
-            <a:off x="3395663" y="1885950"/>
-            <a:ext cx="2614613" cy="4095750"/>
+                <a16:creationId xmlns:a16="http://schemas.microsoft.com/office/drawing/2014/main" id="{3DA11E29-E3B9-4074-B904-B2431234AFCD}"/>
+              </a:ext>
+            </a:extLst>
+          </p:cNvPr>
+          <p:cNvSpPr>
+            <a:spLocks xmlns:a="http://schemas.openxmlformats.org/drawingml/2006/main" noGrp="1"/>
+          </p:cNvSpPr>
+          <p:nvPr/>
+        </p:nvSpPr>
+        <p:spPr>
+          <a:xfrm xmlns:a="http://schemas.openxmlformats.org/drawingml/2006/main">
+            <a:off x="3395663" y="2324100"/>
+            <a:ext cx="2614613" cy="3238500"/>
           </a:xfrm>
           <a:prstGeom xmlns:a="http://schemas.openxmlformats.org/drawingml/2006/main" prst="roundRect">
             <a:avLst>
@@ -12694,19 +12694,19 @@
           <p:cNvPr id="13" name="">
             <a:extLst xmlns:a="http://schemas.openxmlformats.org/drawingml/2006/main">
               <a:ext uri="{FF2B5EF4-FFF2-40B4-BE49-F238E27FC236}">
-                <a16:creationId xmlns:a16="http://schemas.microsoft.com/office/drawing/2014/main" id="{045F6BD6-0F86-48A3-9688-036D203F7D44}"/>
-              </a:ext>
-            </a:extLst>
-          </p:cNvPr>
-          <p:cNvSpPr>
-            <a:spLocks xmlns:a="http://schemas.openxmlformats.org/drawingml/2006/main" noGrp="1"/>
-          </p:cNvSpPr>
-          <p:nvPr/>
-        </p:nvSpPr>
-        <p:spPr>
-          <a:xfrm xmlns:a="http://schemas.openxmlformats.org/drawingml/2006/main">
-            <a:off x="3395663" y="1885950"/>
-            <a:ext cx="66675" cy="4095750"/>
+                <a16:creationId xmlns:a16="http://schemas.microsoft.com/office/drawing/2014/main" id="{7A3421E2-96B0-46FA-9B28-526EA6D1DEEA}"/>
+              </a:ext>
+            </a:extLst>
+          </p:cNvPr>
+          <p:cNvSpPr>
+            <a:spLocks xmlns:a="http://schemas.openxmlformats.org/drawingml/2006/main" noGrp="1"/>
+          </p:cNvSpPr>
+          <p:nvPr/>
+        </p:nvSpPr>
+        <p:spPr>
+          <a:xfrm xmlns:a="http://schemas.openxmlformats.org/drawingml/2006/main">
+            <a:off x="3395663" y="2324100"/>
+            <a:ext cx="66675" cy="3238500"/>
           </a:xfrm>
           <a:prstGeom xmlns:a="http://schemas.openxmlformats.org/drawingml/2006/main" prst="rect">
             <a:avLst/>
@@ -12725,19 +12725,19 @@
           <p:cNvPr id="14" name="">
             <a:extLst xmlns:a="http://schemas.openxmlformats.org/drawingml/2006/main">
               <a:ext uri="{FF2B5EF4-FFF2-40B4-BE49-F238E27FC236}">
-                <a16:creationId xmlns:a16="http://schemas.microsoft.com/office/drawing/2014/main" id="{049F6E39-6E48-4BCD-A5A2-C7688205B2B5}"/>
-              </a:ext>
-            </a:extLst>
-          </p:cNvPr>
-          <p:cNvSpPr>
-            <a:spLocks xmlns:a="http://schemas.openxmlformats.org/drawingml/2006/main" noGrp="1"/>
-          </p:cNvSpPr>
-          <p:nvPr/>
-        </p:nvSpPr>
-        <p:spPr>
-          <a:xfrm xmlns:a="http://schemas.openxmlformats.org/drawingml/2006/main">
-            <a:off x="3605213" y="2038350"/>
-            <a:ext cx="2252663" cy="419100"/>
+                <a16:creationId xmlns:a16="http://schemas.microsoft.com/office/drawing/2014/main" id="{E3F3E503-7AA4-46DC-8248-36260F947A1B}"/>
+              </a:ext>
+            </a:extLst>
+          </p:cNvPr>
+          <p:cNvSpPr>
+            <a:spLocks xmlns:a="http://schemas.openxmlformats.org/drawingml/2006/main" noGrp="1"/>
+          </p:cNvSpPr>
+          <p:nvPr/>
+        </p:nvSpPr>
+        <p:spPr>
+          <a:xfrm xmlns:a="http://schemas.openxmlformats.org/drawingml/2006/main">
+            <a:off x="3605213" y="2590800"/>
+            <a:ext cx="2252663" cy="819150"/>
           </a:xfrm>
           <a:prstGeom xmlns:a="http://schemas.openxmlformats.org/drawingml/2006/main" prst="rect">
             <a:avLst/>
@@ -12750,7 +12750,7 @@
         </p:spPr>
         <p:txBody>
           <a:bodyPr xmlns:a="http://schemas.openxmlformats.org/drawingml/2006/main" lIns="76200" tIns="57150" rIns="76200" bIns="57150" anchor="ctr">
-            <a:normAutofit fontScale="88802"/>
+            <a:normAutofit fontScale="100000"/>
           </a:bodyPr>
           <a:lstStyle xmlns:a="http://schemas.openxmlformats.org/drawingml/2006/main"/>
           <a:p xmlns:a="http://schemas.openxmlformats.org/drawingml/2006/main">
@@ -12759,7 +12759,7 @@
                 <a:spcPct val="108000"/>
               </a:lnSpc>
               <a:buNone/>
-              <a:defRPr sz="1650" b="1">
+              <a:defRPr sz="1350" b="1">
                 <a:solidFill>
                   <a:srgbClr val="071426"/>
                 </a:solidFill>
@@ -12769,7 +12769,7 @@
               </a:defRPr>
             </a:pPr>
             <a:r>
-              <a:rPr sz="1650" b="1">
+              <a:rPr sz="1350" b="1">
                 <a:solidFill>
                   <a:srgbClr val="071426"/>
                 </a:solidFill>
@@ -12787,19 +12787,19 @@
           <p:cNvPr id="15" name="">
             <a:extLst xmlns:a="http://schemas.openxmlformats.org/drawingml/2006/main">
               <a:ext uri="{FF2B5EF4-FFF2-40B4-BE49-F238E27FC236}">
-                <a16:creationId xmlns:a16="http://schemas.microsoft.com/office/drawing/2014/main" id="{6676C81E-9810-44AC-8A80-28C39BFEBAC3}"/>
-              </a:ext>
-            </a:extLst>
-          </p:cNvPr>
-          <p:cNvSpPr>
-            <a:spLocks xmlns:a="http://schemas.openxmlformats.org/drawingml/2006/main" noGrp="1"/>
-          </p:cNvSpPr>
-          <p:nvPr/>
-        </p:nvSpPr>
-        <p:spPr>
-          <a:xfrm xmlns:a="http://schemas.openxmlformats.org/drawingml/2006/main">
-            <a:off x="6181725" y="1885950"/>
-            <a:ext cx="2614613" cy="4095750"/>
+                <a16:creationId xmlns:a16="http://schemas.microsoft.com/office/drawing/2014/main" id="{F1E9051D-E829-4531-AF93-E5172CC9E6B6}"/>
+              </a:ext>
+            </a:extLst>
+          </p:cNvPr>
+          <p:cNvSpPr>
+            <a:spLocks xmlns:a="http://schemas.openxmlformats.org/drawingml/2006/main" noGrp="1"/>
+          </p:cNvSpPr>
+          <p:nvPr/>
+        </p:nvSpPr>
+        <p:spPr>
+          <a:xfrm xmlns:a="http://schemas.openxmlformats.org/drawingml/2006/main">
+            <a:off x="6181725" y="2324100"/>
+            <a:ext cx="2614613" cy="3238500"/>
           </a:xfrm>
           <a:prstGeom xmlns:a="http://schemas.openxmlformats.org/drawingml/2006/main" prst="roundRect">
             <a:avLst>
@@ -12822,19 +12822,19 @@
           <p:cNvPr id="16" name="">
             <a:extLst xmlns:a="http://schemas.openxmlformats.org/drawingml/2006/main">
               <a:ext uri="{FF2B5EF4-FFF2-40B4-BE49-F238E27FC236}">
-                <a16:creationId xmlns:a16="http://schemas.microsoft.com/office/drawing/2014/main" id="{8A796E13-8423-410B-83A4-B6A0C7D475D0}"/>
-              </a:ext>
-            </a:extLst>
-          </p:cNvPr>
-          <p:cNvSpPr>
-            <a:spLocks xmlns:a="http://schemas.openxmlformats.org/drawingml/2006/main" noGrp="1"/>
-          </p:cNvSpPr>
-          <p:nvPr/>
-        </p:nvSpPr>
-        <p:spPr>
-          <a:xfrm xmlns:a="http://schemas.openxmlformats.org/drawingml/2006/main">
-            <a:off x="6181725" y="1885950"/>
-            <a:ext cx="66675" cy="4095750"/>
+                <a16:creationId xmlns:a16="http://schemas.microsoft.com/office/drawing/2014/main" id="{16664E30-73E0-42D9-9E38-D1FE9DDCC662}"/>
+              </a:ext>
+            </a:extLst>
+          </p:cNvPr>
+          <p:cNvSpPr>
+            <a:spLocks xmlns:a="http://schemas.openxmlformats.org/drawingml/2006/main" noGrp="1"/>
+          </p:cNvSpPr>
+          <p:nvPr/>
+        </p:nvSpPr>
+        <p:spPr>
+          <a:xfrm xmlns:a="http://schemas.openxmlformats.org/drawingml/2006/main">
+            <a:off x="6181725" y="2324100"/>
+            <a:ext cx="66675" cy="3238500"/>
           </a:xfrm>
           <a:prstGeom xmlns:a="http://schemas.openxmlformats.org/drawingml/2006/main" prst="rect">
             <a:avLst/>
@@ -12853,19 +12853,19 @@
           <p:cNvPr id="17" name="">
             <a:extLst xmlns:a="http://schemas.openxmlformats.org/drawingml/2006/main">
               <a:ext uri="{FF2B5EF4-FFF2-40B4-BE49-F238E27FC236}">
-                <a16:creationId xmlns:a16="http://schemas.microsoft.com/office/drawing/2014/main" id="{7A56B448-CAF3-4630-86B0-AFA29BDF2665}"/>
-              </a:ext>
-            </a:extLst>
-          </p:cNvPr>
-          <p:cNvSpPr>
-            <a:spLocks xmlns:a="http://schemas.openxmlformats.org/drawingml/2006/main" noGrp="1"/>
-          </p:cNvSpPr>
-          <p:nvPr/>
-        </p:nvSpPr>
-        <p:spPr>
-          <a:xfrm xmlns:a="http://schemas.openxmlformats.org/drawingml/2006/main">
-            <a:off x="6391275" y="2038350"/>
-            <a:ext cx="2252663" cy="419100"/>
+                <a16:creationId xmlns:a16="http://schemas.microsoft.com/office/drawing/2014/main" id="{0BF1C23E-F25C-4909-9583-C23A5E7A7FFE}"/>
+              </a:ext>
+            </a:extLst>
+          </p:cNvPr>
+          <p:cNvSpPr>
+            <a:spLocks xmlns:a="http://schemas.openxmlformats.org/drawingml/2006/main" noGrp="1"/>
+          </p:cNvSpPr>
+          <p:nvPr/>
+        </p:nvSpPr>
+        <p:spPr>
+          <a:xfrm xmlns:a="http://schemas.openxmlformats.org/drawingml/2006/main">
+            <a:off x="6391275" y="2590800"/>
+            <a:ext cx="2252663" cy="819150"/>
           </a:xfrm>
           <a:prstGeom xmlns:a="http://schemas.openxmlformats.org/drawingml/2006/main" prst="rect">
             <a:avLst/>
@@ -12887,7 +12887,7 @@
                 <a:spcPct val="108000"/>
               </a:lnSpc>
               <a:buNone/>
-              <a:defRPr sz="1650" b="1">
+              <a:defRPr sz="1350" b="1">
                 <a:solidFill>
                   <a:srgbClr val="071426"/>
                 </a:solidFill>
@@ -12897,7 +12897,7 @@
               </a:defRPr>
             </a:pPr>
             <a:r>
-              <a:rPr sz="1650" b="1">
+              <a:rPr sz="1350" b="1">
                 <a:solidFill>
                   <a:srgbClr val="071426"/>
                 </a:solidFill>
@@ -12915,19 +12915,19 @@
           <p:cNvPr id="18" name="">
             <a:extLst xmlns:a="http://schemas.openxmlformats.org/drawingml/2006/main">
               <a:ext uri="{FF2B5EF4-FFF2-40B4-BE49-F238E27FC236}">
-                <a16:creationId xmlns:a16="http://schemas.microsoft.com/office/drawing/2014/main" id="{48B5B2B7-B956-4CBD-ACA1-3B2398B9F892}"/>
-              </a:ext>
-            </a:extLst>
-          </p:cNvPr>
-          <p:cNvSpPr>
-            <a:spLocks xmlns:a="http://schemas.openxmlformats.org/drawingml/2006/main" noGrp="1"/>
-          </p:cNvSpPr>
-          <p:nvPr/>
-        </p:nvSpPr>
-        <p:spPr>
-          <a:xfrm xmlns:a="http://schemas.openxmlformats.org/drawingml/2006/main">
-            <a:off x="8967788" y="1885950"/>
-            <a:ext cx="2614613" cy="4095750"/>
+                <a16:creationId xmlns:a16="http://schemas.microsoft.com/office/drawing/2014/main" id="{2365E371-6DC3-4BD9-AFEF-8550E7916B11}"/>
+              </a:ext>
+            </a:extLst>
+          </p:cNvPr>
+          <p:cNvSpPr>
+            <a:spLocks xmlns:a="http://schemas.openxmlformats.org/drawingml/2006/main" noGrp="1"/>
+          </p:cNvSpPr>
+          <p:nvPr/>
+        </p:nvSpPr>
+        <p:spPr>
+          <a:xfrm xmlns:a="http://schemas.openxmlformats.org/drawingml/2006/main">
+            <a:off x="8967788" y="2324100"/>
+            <a:ext cx="2614613" cy="3238500"/>
           </a:xfrm>
           <a:prstGeom xmlns:a="http://schemas.openxmlformats.org/drawingml/2006/main" prst="roundRect">
             <a:avLst>
@@ -12950,19 +12950,19 @@
           <p:cNvPr id="19" name="">
             <a:extLst xmlns:a="http://schemas.openxmlformats.org/drawingml/2006/main">
               <a:ext uri="{FF2B5EF4-FFF2-40B4-BE49-F238E27FC236}">
-                <a16:creationId xmlns:a16="http://schemas.microsoft.com/office/drawing/2014/main" id="{18C9D469-3BE8-4C53-96BC-AE69771E5FFC}"/>
-              </a:ext>
-            </a:extLst>
-          </p:cNvPr>
-          <p:cNvSpPr>
-            <a:spLocks xmlns:a="http://schemas.openxmlformats.org/drawingml/2006/main" noGrp="1"/>
-          </p:cNvSpPr>
-          <p:nvPr/>
-        </p:nvSpPr>
-        <p:spPr>
-          <a:xfrm xmlns:a="http://schemas.openxmlformats.org/drawingml/2006/main">
-            <a:off x="8967788" y="1885950"/>
-            <a:ext cx="66675" cy="4095750"/>
+                <a16:creationId xmlns:a16="http://schemas.microsoft.com/office/drawing/2014/main" id="{0B1E0DF9-5F9B-4722-9B70-A2931270EEE5}"/>
+              </a:ext>
+            </a:extLst>
+          </p:cNvPr>
+          <p:cNvSpPr>
+            <a:spLocks xmlns:a="http://schemas.openxmlformats.org/drawingml/2006/main" noGrp="1"/>
+          </p:cNvSpPr>
+          <p:nvPr/>
+        </p:nvSpPr>
+        <p:spPr>
+          <a:xfrm xmlns:a="http://schemas.openxmlformats.org/drawingml/2006/main">
+            <a:off x="8967788" y="2324100"/>
+            <a:ext cx="66675" cy="3238500"/>
           </a:xfrm>
           <a:prstGeom xmlns:a="http://schemas.openxmlformats.org/drawingml/2006/main" prst="rect">
             <a:avLst/>
@@ -12981,19 +12981,19 @@
           <p:cNvPr id="20" name="">
             <a:extLst xmlns:a="http://schemas.openxmlformats.org/drawingml/2006/main">
               <a:ext uri="{FF2B5EF4-FFF2-40B4-BE49-F238E27FC236}">
-                <a16:creationId xmlns:a16="http://schemas.microsoft.com/office/drawing/2014/main" id="{2631ABFF-AE67-4D71-84E6-470F2ACD91E8}"/>
-              </a:ext>
-            </a:extLst>
-          </p:cNvPr>
-          <p:cNvSpPr>
-            <a:spLocks xmlns:a="http://schemas.openxmlformats.org/drawingml/2006/main" noGrp="1"/>
-          </p:cNvSpPr>
-          <p:nvPr/>
-        </p:nvSpPr>
-        <p:spPr>
-          <a:xfrm xmlns:a="http://schemas.openxmlformats.org/drawingml/2006/main">
-            <a:off x="9177338" y="2038350"/>
-            <a:ext cx="2252663" cy="419100"/>
+                <a16:creationId xmlns:a16="http://schemas.microsoft.com/office/drawing/2014/main" id="{8398CDD0-76ED-438E-BA64-3A72CE26B619}"/>
+              </a:ext>
+            </a:extLst>
+          </p:cNvPr>
+          <p:cNvSpPr>
+            <a:spLocks xmlns:a="http://schemas.openxmlformats.org/drawingml/2006/main" noGrp="1"/>
+          </p:cNvSpPr>
+          <p:nvPr/>
+        </p:nvSpPr>
+        <p:spPr>
+          <a:xfrm xmlns:a="http://schemas.openxmlformats.org/drawingml/2006/main">
+            <a:off x="9177338" y="2590800"/>
+            <a:ext cx="2252663" cy="819150"/>
           </a:xfrm>
           <a:prstGeom xmlns:a="http://schemas.openxmlformats.org/drawingml/2006/main" prst="rect">
             <a:avLst/>
@@ -13015,7 +13015,7 @@
                 <a:spcPct val="108000"/>
               </a:lnSpc>
               <a:buNone/>
-              <a:defRPr sz="1650" b="1">
+              <a:defRPr sz="1350" b="1">
                 <a:solidFill>
                   <a:srgbClr val="071426"/>
                 </a:solidFill>
@@ -13025,7 +13025,7 @@
               </a:defRPr>
             </a:pPr>
             <a:r>
-              <a:rPr sz="1650" b="1">
+              <a:rPr sz="1350" b="1">
                 <a:solidFill>
                   <a:srgbClr val="071426"/>
                 </a:solidFill>
@@ -13043,24 +13043,26 @@
           <p:cNvPr id="21" name="">
             <a:extLst xmlns:a="http://schemas.openxmlformats.org/drawingml/2006/main">
               <a:ext uri="{FF2B5EF4-FFF2-40B4-BE49-F238E27FC236}">
-                <a16:creationId xmlns:a16="http://schemas.microsoft.com/office/drawing/2014/main" id="{C932D64E-D5AE-4E89-A3D6-40205CE982B2}"/>
-              </a:ext>
-            </a:extLst>
-          </p:cNvPr>
-          <p:cNvSpPr>
-            <a:spLocks xmlns:a="http://schemas.openxmlformats.org/drawingml/2006/main" noGrp="1"/>
-          </p:cNvSpPr>
-          <p:nvPr/>
-        </p:nvSpPr>
-        <p:spPr>
-          <a:xfrm xmlns:a="http://schemas.openxmlformats.org/drawingml/2006/main">
-            <a:off x="609600" y="5943600"/>
-            <a:ext cx="10972800" cy="342900"/>
-          </a:xfrm>
-          <a:prstGeom xmlns:a="http://schemas.openxmlformats.org/drawingml/2006/main" prst="rect">
-            <a:avLst/>
-          </a:prstGeom>
-          <a:noFill xmlns:a="http://schemas.openxmlformats.org/drawingml/2006/main"/>
+                <a16:creationId xmlns:a16="http://schemas.microsoft.com/office/drawing/2014/main" id="{8E920317-3BF2-499E-B552-82ABBC9F8186}"/>
+              </a:ext>
+            </a:extLst>
+          </p:cNvPr>
+          <p:cNvSpPr>
+            <a:spLocks xmlns:a="http://schemas.openxmlformats.org/drawingml/2006/main" noGrp="1"/>
+          </p:cNvSpPr>
+          <p:nvPr/>
+        </p:nvSpPr>
+        <p:spPr>
+          <a:xfrm xmlns:a="http://schemas.openxmlformats.org/drawingml/2006/main">
+            <a:off x="609600" y="5810250"/>
+            <a:ext cx="10972800" cy="457200"/>
+          </a:xfrm>
+          <a:prstGeom xmlns:a="http://schemas.openxmlformats.org/drawingml/2006/main" prst="rect">
+            <a:avLst/>
+          </a:prstGeom>
+          <a:solidFill xmlns:a="http://schemas.openxmlformats.org/drawingml/2006/main">
+            <a:srgbClr val="FFF7E6"/>
+          </a:solidFill>
           <a:ln xmlns:a="http://schemas.openxmlformats.org/drawingml/2006/main" w="0">
             <a:noFill/>
             <a:prstDash val="solid"/>
@@ -13103,7 +13105,7 @@
     </p:spTree>
     <p:extLst>
       <p:ext uri="{BB962C8B-B14F-4D97-AF65-F5344CB8AC3E}">
-        <p14:creationId xmlns:p14="http://schemas.microsoft.com/office/powerpoint/2010/main" val="1954788021"/>
+        <p14:creationId xmlns:p14="http://schemas.microsoft.com/office/powerpoint/2010/main" val="254871375"/>
       </p:ext>
     </p:extLst>
   </p:cSld>
@@ -13131,10 +13133,10 @@
       </p:grpSpPr>
       <p:sp>
         <p:nvSpPr>
-          <p:cNvPr id="26" name="">
-            <a:extLst xmlns:a="http://schemas.openxmlformats.org/drawingml/2006/main">
-              <a:ext uri="{FF2B5EF4-FFF2-40B4-BE49-F238E27FC236}">
-                <a16:creationId xmlns:a16="http://schemas.microsoft.com/office/drawing/2014/main" id="{83C9CD43-E187-4CE8-95B1-19B76DA0DCD3}"/>
+          <p:cNvPr id="22" name="">
+            <a:extLst xmlns:a="http://schemas.openxmlformats.org/drawingml/2006/main">
+              <a:ext uri="{FF2B5EF4-FFF2-40B4-BE49-F238E27FC236}">
+                <a16:creationId xmlns:a16="http://schemas.microsoft.com/office/drawing/2014/main" id="{9A0CF764-FF44-4DBE-9708-0B79BEB68163}"/>
               </a:ext>
             </a:extLst>
           </p:cNvPr>
@@ -13165,7 +13167,7 @@
           <p:cNvPr id="2" name="">
             <a:extLst xmlns:a="http://schemas.openxmlformats.org/drawingml/2006/main">
               <a:ext uri="{FF2B5EF4-FFF2-40B4-BE49-F238E27FC236}">
-                <a16:creationId xmlns:a16="http://schemas.microsoft.com/office/drawing/2014/main" id="{1308D933-91C6-4B63-A825-D74E3AC310D4}"/>
+                <a16:creationId xmlns:a16="http://schemas.microsoft.com/office/drawing/2014/main" id="{C1DE043C-C7B8-4748-A8DC-AC212C397935}"/>
               </a:ext>
             </a:extLst>
           </p:cNvPr>
@@ -13217,7 +13219,7 @@
                 <a:ea typeface="Aptos"/>
                 <a:cs typeface="Aptos"/>
               </a:rPr>
-              <a:t>PROTOCOL</a:t>
+              <a:t>MONETARY CONSTITUTION</a:t>
             </a:r>
           </a:p>
         </p:txBody>
@@ -13227,7 +13229,7 @@
           <p:cNvPr id="3" name="">
             <a:extLst xmlns:a="http://schemas.openxmlformats.org/drawingml/2006/main">
               <a:ext uri="{FF2B5EF4-FFF2-40B4-BE49-F238E27FC236}">
-                <a16:creationId xmlns:a16="http://schemas.microsoft.com/office/drawing/2014/main" id="{D8623BEA-9424-42AF-8EDE-0F6E93CCB9C6}"/>
+                <a16:creationId xmlns:a16="http://schemas.microsoft.com/office/drawing/2014/main" id="{3D1AD7C6-731C-45AC-984F-EA00A321D132}"/>
               </a:ext>
             </a:extLst>
           </p:cNvPr>
@@ -13261,7 +13263,7 @@
                 <a:spcPct val="108000"/>
               </a:lnSpc>
               <a:buNone/>
-              <a:defRPr sz="3150" b="1">
+              <a:defRPr sz="2550" b="1">
                 <a:solidFill>
                   <a:srgbClr val="071426"/>
                 </a:solidFill>
@@ -13271,7 +13273,7 @@
               </a:defRPr>
             </a:pPr>
             <a:r>
-              <a:rPr sz="3150" b="1">
+              <a:rPr sz="2550" b="1">
                 <a:solidFill>
                   <a:srgbClr val="071426"/>
                 </a:solidFill>
@@ -13289,7 +13291,7 @@
           <p:cNvPr id="4" name="">
             <a:extLst xmlns:a="http://schemas.openxmlformats.org/drawingml/2006/main">
               <a:ext uri="{FF2B5EF4-FFF2-40B4-BE49-F238E27FC236}">
-                <a16:creationId xmlns:a16="http://schemas.microsoft.com/office/drawing/2014/main" id="{F422D286-F900-4C81-A182-24CA086297C8}"/>
+                <a16:creationId xmlns:a16="http://schemas.microsoft.com/office/drawing/2014/main" id="{EE97A299-8A02-4AD8-B16C-06575B692B10}"/>
               </a:ext>
             </a:extLst>
           </p:cNvPr>
@@ -13317,14 +13319,14 @@
       </p:sp>
       <p:pic>
         <p:nvPicPr>
-          <p:cNvPr id="30" name=""/>
+          <p:cNvPr id="26" name=""/>
           <p:cNvPicPr>
             <a:picLocks xmlns:a="http://schemas.openxmlformats.org/drawingml/2006/main" noChangeAspect="1"/>
           </p:cNvPicPr>
           <p:nvPr/>
         </p:nvPicPr>
         <p:blipFill>
-          <a:blip xmlns:r="http://schemas.openxmlformats.org/officeDocument/2006/relationships" xmlns:a="http://schemas.openxmlformats.org/drawingml/2006/main" r:embed="R7c70c45e056a4804"/>
+          <a:blip xmlns:r="http://schemas.openxmlformats.org/officeDocument/2006/relationships" xmlns:a="http://schemas.openxmlformats.org/drawingml/2006/main" r:embed="Rd1d978fb41494e55"/>
           <a:srcRect xmlns:a="http://schemas.openxmlformats.org/drawingml/2006/main" l="0" t="0" r="0" b="0"/>
           <a:stretch xmlns:a="http://schemas.openxmlformats.org/drawingml/2006/main">
             <a:fillRect l="0" t="0" r="0" b="0"/>
@@ -13345,7 +13347,7 @@
           <p:cNvPr id="6" name="">
             <a:extLst xmlns:a="http://schemas.openxmlformats.org/drawingml/2006/main">
               <a:ext uri="{FF2B5EF4-FFF2-40B4-BE49-F238E27FC236}">
-                <a16:creationId xmlns:a16="http://schemas.microsoft.com/office/drawing/2014/main" id="{820AB167-8689-40FC-AD65-67B892011B5F}"/>
+                <a16:creationId xmlns:a16="http://schemas.microsoft.com/office/drawing/2014/main" id="{D278B784-6006-47D3-8F0A-787B8DD51627}"/>
               </a:ext>
             </a:extLst>
           </p:cNvPr>
@@ -13407,7 +13409,7 @@
           <p:cNvPr id="7" name="">
             <a:extLst xmlns:a="http://schemas.openxmlformats.org/drawingml/2006/main">
               <a:ext uri="{FF2B5EF4-FFF2-40B4-BE49-F238E27FC236}">
-                <a16:creationId xmlns:a16="http://schemas.microsoft.com/office/drawing/2014/main" id="{7FBE1DE0-5D51-4724-9D68-BE909364DC54}"/>
+                <a16:creationId xmlns:a16="http://schemas.microsoft.com/office/drawing/2014/main" id="{B918C799-949D-41E6-9968-A4DAB2381D25}"/>
               </a:ext>
             </a:extLst>
           </p:cNvPr>
@@ -13469,19 +13471,19 @@
           <p:cNvPr id="8" name="">
             <a:extLst xmlns:a="http://schemas.openxmlformats.org/drawingml/2006/main">
               <a:ext uri="{FF2B5EF4-FFF2-40B4-BE49-F238E27FC236}">
-                <a16:creationId xmlns:a16="http://schemas.microsoft.com/office/drawing/2014/main" id="{69B2A830-E74A-41A2-B781-42B199A26521}"/>
-              </a:ext>
-            </a:extLst>
-          </p:cNvPr>
-          <p:cNvSpPr>
-            <a:spLocks xmlns:a="http://schemas.openxmlformats.org/drawingml/2006/main" noGrp="1"/>
-          </p:cNvSpPr>
-          <p:nvPr/>
-        </p:nvSpPr>
-        <p:spPr>
-          <a:xfrm xmlns:a="http://schemas.openxmlformats.org/drawingml/2006/main">
-            <a:off x="609600" y="1885950"/>
-            <a:ext cx="10972800" cy="1085850"/>
+                <a16:creationId xmlns:a16="http://schemas.microsoft.com/office/drawing/2014/main" id="{D1833435-D054-4CAC-B5B3-024C3C68A24B}"/>
+              </a:ext>
+            </a:extLst>
+          </p:cNvPr>
+          <p:cNvSpPr>
+            <a:spLocks xmlns:a="http://schemas.openxmlformats.org/drawingml/2006/main" noGrp="1"/>
+          </p:cNvSpPr>
+          <p:nvPr/>
+        </p:nvSpPr>
+        <p:spPr>
+          <a:xfrm xmlns:a="http://schemas.openxmlformats.org/drawingml/2006/main">
+            <a:off x="609600" y="1752600"/>
+            <a:ext cx="10972800" cy="781050"/>
           </a:xfrm>
           <a:prstGeom xmlns:a="http://schemas.openxmlformats.org/drawingml/2006/main" prst="rect">
             <a:avLst/>
@@ -13505,7 +13507,7 @@
                 <a:spcPct val="108000"/>
               </a:lnSpc>
               <a:buNone/>
-              <a:defRPr sz="4050" b="1">
+              <a:defRPr sz="3300" b="1">
                 <a:solidFill>
                   <a:srgbClr val="D9A84E"/>
                 </a:solidFill>
@@ -13515,7 +13517,7 @@
               </a:defRPr>
             </a:pPr>
             <a:r>
-              <a:rPr sz="4050" b="1">
+              <a:rPr sz="3300" b="1">
                 <a:solidFill>
                   <a:srgbClr val="D9A84E"/>
                 </a:solidFill>
@@ -13533,19 +13535,19 @@
           <p:cNvPr id="9" name="">
             <a:extLst xmlns:a="http://schemas.openxmlformats.org/drawingml/2006/main">
               <a:ext uri="{FF2B5EF4-FFF2-40B4-BE49-F238E27FC236}">
-                <a16:creationId xmlns:a16="http://schemas.microsoft.com/office/drawing/2014/main" id="{14A356BB-992E-4D6C-A27D-E3BDE0D7EF4F}"/>
-              </a:ext>
-            </a:extLst>
-          </p:cNvPr>
-          <p:cNvSpPr>
-            <a:spLocks xmlns:a="http://schemas.openxmlformats.org/drawingml/2006/main" noGrp="1"/>
-          </p:cNvSpPr>
-          <p:nvPr/>
-        </p:nvSpPr>
-        <p:spPr>
-          <a:xfrm xmlns:a="http://schemas.openxmlformats.org/drawingml/2006/main">
-            <a:off x="609600" y="1885950"/>
-            <a:ext cx="2614613" cy="4095750"/>
+                <a16:creationId xmlns:a16="http://schemas.microsoft.com/office/drawing/2014/main" id="{A86D2A19-8614-4F52-BD5C-E9589998FA51}"/>
+              </a:ext>
+            </a:extLst>
+          </p:cNvPr>
+          <p:cNvSpPr>
+            <a:spLocks xmlns:a="http://schemas.openxmlformats.org/drawingml/2006/main" noGrp="1"/>
+          </p:cNvSpPr>
+          <p:nvPr/>
+        </p:nvSpPr>
+        <p:spPr>
+          <a:xfrm xmlns:a="http://schemas.openxmlformats.org/drawingml/2006/main">
+            <a:off x="609600" y="2724150"/>
+            <a:ext cx="2614613" cy="2781300"/>
           </a:xfrm>
           <a:prstGeom xmlns:a="http://schemas.openxmlformats.org/drawingml/2006/main" prst="roundRect">
             <a:avLst>
@@ -13568,19 +13570,19 @@
           <p:cNvPr id="10" name="">
             <a:extLst xmlns:a="http://schemas.openxmlformats.org/drawingml/2006/main">
               <a:ext uri="{FF2B5EF4-FFF2-40B4-BE49-F238E27FC236}">
-                <a16:creationId xmlns:a16="http://schemas.microsoft.com/office/drawing/2014/main" id="{1CA53D59-788B-45E2-8DA2-486A0F763595}"/>
-              </a:ext>
-            </a:extLst>
-          </p:cNvPr>
-          <p:cNvSpPr>
-            <a:spLocks xmlns:a="http://schemas.openxmlformats.org/drawingml/2006/main" noGrp="1"/>
-          </p:cNvSpPr>
-          <p:nvPr/>
-        </p:nvSpPr>
-        <p:spPr>
-          <a:xfrm xmlns:a="http://schemas.openxmlformats.org/drawingml/2006/main">
-            <a:off x="609600" y="1885950"/>
-            <a:ext cx="66675" cy="4095750"/>
+                <a16:creationId xmlns:a16="http://schemas.microsoft.com/office/drawing/2014/main" id="{6F0B8DBE-82B8-4DF7-A7A2-7EFF0CF4BFA0}"/>
+              </a:ext>
+            </a:extLst>
+          </p:cNvPr>
+          <p:cNvSpPr>
+            <a:spLocks xmlns:a="http://schemas.openxmlformats.org/drawingml/2006/main" noGrp="1"/>
+          </p:cNvSpPr>
+          <p:nvPr/>
+        </p:nvSpPr>
+        <p:spPr>
+          <a:xfrm xmlns:a="http://schemas.openxmlformats.org/drawingml/2006/main">
+            <a:off x="609600" y="2724150"/>
+            <a:ext cx="66675" cy="2781300"/>
           </a:xfrm>
           <a:prstGeom xmlns:a="http://schemas.openxmlformats.org/drawingml/2006/main" prst="rect">
             <a:avLst/>
@@ -13599,19 +13601,19 @@
           <p:cNvPr id="11" name="">
             <a:extLst xmlns:a="http://schemas.openxmlformats.org/drawingml/2006/main">
               <a:ext uri="{FF2B5EF4-FFF2-40B4-BE49-F238E27FC236}">
-                <a16:creationId xmlns:a16="http://schemas.microsoft.com/office/drawing/2014/main" id="{89B37DC0-6119-47A6-9316-2C0EB761B4AC}"/>
-              </a:ext>
-            </a:extLst>
-          </p:cNvPr>
-          <p:cNvSpPr>
-            <a:spLocks xmlns:a="http://schemas.openxmlformats.org/drawingml/2006/main" noGrp="1"/>
-          </p:cNvSpPr>
-          <p:nvPr/>
-        </p:nvSpPr>
-        <p:spPr>
-          <a:xfrm xmlns:a="http://schemas.openxmlformats.org/drawingml/2006/main">
-            <a:off x="819150" y="2038350"/>
-            <a:ext cx="2252663" cy="419100"/>
+                <a16:creationId xmlns:a16="http://schemas.microsoft.com/office/drawing/2014/main" id="{45464600-FC14-4859-AEE7-C821F0643A6C}"/>
+              </a:ext>
+            </a:extLst>
+          </p:cNvPr>
+          <p:cNvSpPr>
+            <a:spLocks xmlns:a="http://schemas.openxmlformats.org/drawingml/2006/main" noGrp="1"/>
+          </p:cNvSpPr>
+          <p:nvPr/>
+        </p:nvSpPr>
+        <p:spPr>
+          <a:xfrm xmlns:a="http://schemas.openxmlformats.org/drawingml/2006/main">
+            <a:off x="819150" y="2952750"/>
+            <a:ext cx="2252663" cy="2133600"/>
           </a:xfrm>
           <a:prstGeom xmlns:a="http://schemas.openxmlformats.org/drawingml/2006/main" prst="rect">
             <a:avLst/>
@@ -13633,7 +13635,7 @@
                 <a:spcPct val="108000"/>
               </a:lnSpc>
               <a:buNone/>
-              <a:defRPr sz="1650" b="1">
+              <a:defRPr sz="1575" b="1">
                 <a:solidFill>
                   <a:srgbClr val="071426"/>
                 </a:solidFill>
@@ -13643,7 +13645,7 @@
               </a:defRPr>
             </a:pPr>
             <a:r>
-              <a:rPr sz="1650" b="1">
+              <a:rPr sz="1575" b="1">
                 <a:solidFill>
                   <a:srgbClr val="071426"/>
                 </a:solidFill>
@@ -13651,7 +13653,34 @@
                 <a:ea typeface="Aptos Display"/>
                 <a:cs typeface="Aptos Display"/>
               </a:rPr>
-              <a:t>D</a:t>
+              <a:t>D —</a:t>
+            </a:r>
+          </a:p>
+          <a:p xmlns:a="http://schemas.openxmlformats.org/drawingml/2006/main">
+            <a:pPr algn="l">
+              <a:lnSpc>
+                <a:spcPct val="108000"/>
+              </a:lnSpc>
+              <a:buNone/>
+              <a:defRPr sz="1575" b="1">
+                <a:solidFill>
+                  <a:srgbClr val="071426"/>
+                </a:solidFill>
+                <a:latin typeface="Aptos Display"/>
+                <a:ea typeface="Aptos Display"/>
+                <a:cs typeface="Aptos Display"/>
+              </a:defRPr>
+            </a:pPr>
+            <a:r>
+              <a:rPr sz="1575" b="1">
+                <a:solidFill>
+                  <a:srgbClr val="071426"/>
+                </a:solidFill>
+                <a:latin typeface="Aptos Display"/>
+                <a:ea typeface="Aptos Display"/>
+                <a:cs typeface="Aptos Display"/>
+              </a:rPr>
+              <a:t>digital, freely circulating</a:t>
             </a:r>
           </a:p>
         </p:txBody>
@@ -13661,81 +13690,19 @@
           <p:cNvPr id="12" name="">
             <a:extLst xmlns:a="http://schemas.openxmlformats.org/drawingml/2006/main">
               <a:ext uri="{FF2B5EF4-FFF2-40B4-BE49-F238E27FC236}">
-                <a16:creationId xmlns:a16="http://schemas.microsoft.com/office/drawing/2014/main" id="{6600C577-768F-4161-88E4-F41A88BC1479}"/>
-              </a:ext>
-            </a:extLst>
-          </p:cNvPr>
-          <p:cNvSpPr>
-            <a:spLocks xmlns:a="http://schemas.openxmlformats.org/drawingml/2006/main" noGrp="1"/>
-          </p:cNvSpPr>
-          <p:nvPr/>
-        </p:nvSpPr>
-        <p:spPr>
-          <a:xfrm xmlns:a="http://schemas.openxmlformats.org/drawingml/2006/main">
-            <a:off x="819150" y="2466975"/>
-            <a:ext cx="2252663" cy="3390900"/>
-          </a:xfrm>
-          <a:prstGeom xmlns:a="http://schemas.openxmlformats.org/drawingml/2006/main" prst="rect">
-            <a:avLst/>
-          </a:prstGeom>
-          <a:noFill xmlns:a="http://schemas.openxmlformats.org/drawingml/2006/main"/>
-          <a:ln xmlns:a="http://schemas.openxmlformats.org/drawingml/2006/main" w="0">
-            <a:noFill/>
-            <a:prstDash val="solid"/>
-          </a:ln>
-        </p:spPr>
-        <p:txBody>
-          <a:bodyPr xmlns:a="http://schemas.openxmlformats.org/drawingml/2006/main" lIns="76200" tIns="57150" rIns="76200" bIns="57150" anchor="ctr">
-            <a:normAutofit fontScale="100000"/>
-          </a:bodyPr>
-          <a:lstStyle xmlns:a="http://schemas.openxmlformats.org/drawingml/2006/main"/>
-          <a:p xmlns:a="http://schemas.openxmlformats.org/drawingml/2006/main">
-            <a:pPr algn="l">
-              <a:lnSpc>
-                <a:spcPct val="108000"/>
-              </a:lnSpc>
-              <a:buNone/>
-              <a:defRPr sz="1275" b="0">
-                <a:solidFill>
-                  <a:srgbClr val="5F6B7A"/>
-                </a:solidFill>
-                <a:latin typeface="Aptos"/>
-                <a:ea typeface="Aptos"/>
-                <a:cs typeface="Aptos"/>
-              </a:defRPr>
-            </a:pPr>
-            <a:r>
-              <a:rPr sz="1275" b="0">
-                <a:solidFill>
-                  <a:srgbClr val="5F6B7A"/>
-                </a:solidFill>
-                <a:latin typeface="Aptos"/>
-                <a:ea typeface="Aptos"/>
-                <a:cs typeface="Aptos"/>
-              </a:rPr>
-              <a:t>digital, freely circulating</a:t>
-            </a:r>
-          </a:p>
-        </p:txBody>
-      </p:sp>
-      <p:sp>
-        <p:nvSpPr>
-          <p:cNvPr id="13" name="">
-            <a:extLst xmlns:a="http://schemas.openxmlformats.org/drawingml/2006/main">
-              <a:ext uri="{FF2B5EF4-FFF2-40B4-BE49-F238E27FC236}">
-                <a16:creationId xmlns:a16="http://schemas.microsoft.com/office/drawing/2014/main" id="{0898D717-457F-479E-8EF7-F5E2BAA726E9}"/>
-              </a:ext>
-            </a:extLst>
-          </p:cNvPr>
-          <p:cNvSpPr>
-            <a:spLocks xmlns:a="http://schemas.openxmlformats.org/drawingml/2006/main" noGrp="1"/>
-          </p:cNvSpPr>
-          <p:nvPr/>
-        </p:nvSpPr>
-        <p:spPr>
-          <a:xfrm xmlns:a="http://schemas.openxmlformats.org/drawingml/2006/main">
-            <a:off x="3395663" y="1885950"/>
-            <a:ext cx="2614613" cy="4095750"/>
+                <a16:creationId xmlns:a16="http://schemas.microsoft.com/office/drawing/2014/main" id="{5044F6C4-E9E5-4980-86C1-56F994411DC2}"/>
+              </a:ext>
+            </a:extLst>
+          </p:cNvPr>
+          <p:cNvSpPr>
+            <a:spLocks xmlns:a="http://schemas.openxmlformats.org/drawingml/2006/main" noGrp="1"/>
+          </p:cNvSpPr>
+          <p:nvPr/>
+        </p:nvSpPr>
+        <p:spPr>
+          <a:xfrm xmlns:a="http://schemas.openxmlformats.org/drawingml/2006/main">
+            <a:off x="3395663" y="2724150"/>
+            <a:ext cx="2614613" cy="2781300"/>
           </a:xfrm>
           <a:prstGeom xmlns:a="http://schemas.openxmlformats.org/drawingml/2006/main" prst="roundRect">
             <a:avLst>
@@ -13755,22 +13722,22 @@
       </p:sp>
       <p:sp>
         <p:nvSpPr>
-          <p:cNvPr id="14" name="">
-            <a:extLst xmlns:a="http://schemas.openxmlformats.org/drawingml/2006/main">
-              <a:ext uri="{FF2B5EF4-FFF2-40B4-BE49-F238E27FC236}">
-                <a16:creationId xmlns:a16="http://schemas.microsoft.com/office/drawing/2014/main" id="{65C593F8-5CB9-4BB2-9297-BC4678E5C0AC}"/>
-              </a:ext>
-            </a:extLst>
-          </p:cNvPr>
-          <p:cNvSpPr>
-            <a:spLocks xmlns:a="http://schemas.openxmlformats.org/drawingml/2006/main" noGrp="1"/>
-          </p:cNvSpPr>
-          <p:nvPr/>
-        </p:nvSpPr>
-        <p:spPr>
-          <a:xfrm xmlns:a="http://schemas.openxmlformats.org/drawingml/2006/main">
-            <a:off x="3395663" y="1885950"/>
-            <a:ext cx="66675" cy="4095750"/>
+          <p:cNvPr id="13" name="">
+            <a:extLst xmlns:a="http://schemas.openxmlformats.org/drawingml/2006/main">
+              <a:ext uri="{FF2B5EF4-FFF2-40B4-BE49-F238E27FC236}">
+                <a16:creationId xmlns:a16="http://schemas.microsoft.com/office/drawing/2014/main" id="{54EDEEA4-FBA4-4815-B50F-6361A1F0EAC0}"/>
+              </a:ext>
+            </a:extLst>
+          </p:cNvPr>
+          <p:cNvSpPr>
+            <a:spLocks xmlns:a="http://schemas.openxmlformats.org/drawingml/2006/main" noGrp="1"/>
+          </p:cNvSpPr>
+          <p:nvPr/>
+        </p:nvSpPr>
+        <p:spPr>
+          <a:xfrm xmlns:a="http://schemas.openxmlformats.org/drawingml/2006/main">
+            <a:off x="3395663" y="2724150"/>
+            <a:ext cx="66675" cy="2781300"/>
           </a:xfrm>
           <a:prstGeom xmlns:a="http://schemas.openxmlformats.org/drawingml/2006/main" prst="rect">
             <a:avLst/>
@@ -13786,22 +13753,22 @@
       </p:sp>
       <p:sp>
         <p:nvSpPr>
-          <p:cNvPr id="15" name="">
-            <a:extLst xmlns:a="http://schemas.openxmlformats.org/drawingml/2006/main">
-              <a:ext uri="{FF2B5EF4-FFF2-40B4-BE49-F238E27FC236}">
-                <a16:creationId xmlns:a16="http://schemas.microsoft.com/office/drawing/2014/main" id="{4851721A-8A07-459B-B238-0E0A2078323B}"/>
-              </a:ext>
-            </a:extLst>
-          </p:cNvPr>
-          <p:cNvSpPr>
-            <a:spLocks xmlns:a="http://schemas.openxmlformats.org/drawingml/2006/main" noGrp="1"/>
-          </p:cNvSpPr>
-          <p:nvPr/>
-        </p:nvSpPr>
-        <p:spPr>
-          <a:xfrm xmlns:a="http://schemas.openxmlformats.org/drawingml/2006/main">
-            <a:off x="3605213" y="2038350"/>
-            <a:ext cx="2252663" cy="419100"/>
+          <p:cNvPr id="14" name="">
+            <a:extLst xmlns:a="http://schemas.openxmlformats.org/drawingml/2006/main">
+              <a:ext uri="{FF2B5EF4-FFF2-40B4-BE49-F238E27FC236}">
+                <a16:creationId xmlns:a16="http://schemas.microsoft.com/office/drawing/2014/main" id="{DCA2A37B-D6EA-4DD3-8268-0DBCC5447058}"/>
+              </a:ext>
+            </a:extLst>
+          </p:cNvPr>
+          <p:cNvSpPr>
+            <a:spLocks xmlns:a="http://schemas.openxmlformats.org/drawingml/2006/main" noGrp="1"/>
+          </p:cNvSpPr>
+          <p:nvPr/>
+        </p:nvSpPr>
+        <p:spPr>
+          <a:xfrm xmlns:a="http://schemas.openxmlformats.org/drawingml/2006/main">
+            <a:off x="3605213" y="2952750"/>
+            <a:ext cx="2252663" cy="2133600"/>
           </a:xfrm>
           <a:prstGeom xmlns:a="http://schemas.openxmlformats.org/drawingml/2006/main" prst="rect">
             <a:avLst/>
@@ -13823,7 +13790,7 @@
                 <a:spcPct val="108000"/>
               </a:lnSpc>
               <a:buNone/>
-              <a:defRPr sz="1650" b="1">
+              <a:defRPr sz="1575" b="1">
                 <a:solidFill>
                   <a:srgbClr val="071426"/>
                 </a:solidFill>
@@ -13833,7 +13800,7 @@
               </a:defRPr>
             </a:pPr>
             <a:r>
-              <a:rPr sz="1650" b="1">
+              <a:rPr sz="1575" b="1">
                 <a:solidFill>
                   <a:srgbClr val="071426"/>
                 </a:solidFill>
@@ -13841,67 +13808,32 @@
                 <a:ea typeface="Aptos Display"/>
                 <a:cs typeface="Aptos Display"/>
               </a:rPr>
-              <a:t>P</a:t>
-            </a:r>
-          </a:p>
-        </p:txBody>
-      </p:sp>
-      <p:sp>
-        <p:nvSpPr>
-          <p:cNvPr id="16" name="">
-            <a:extLst xmlns:a="http://schemas.openxmlformats.org/drawingml/2006/main">
-              <a:ext uri="{FF2B5EF4-FFF2-40B4-BE49-F238E27FC236}">
-                <a16:creationId xmlns:a16="http://schemas.microsoft.com/office/drawing/2014/main" id="{31D99EC7-1F7D-4D45-8706-E69E0BAAC20F}"/>
-              </a:ext>
-            </a:extLst>
-          </p:cNvPr>
-          <p:cNvSpPr>
-            <a:spLocks xmlns:a="http://schemas.openxmlformats.org/drawingml/2006/main" noGrp="1"/>
-          </p:cNvSpPr>
-          <p:nvPr/>
-        </p:nvSpPr>
-        <p:spPr>
-          <a:xfrm xmlns:a="http://schemas.openxmlformats.org/drawingml/2006/main">
-            <a:off x="3605213" y="2466975"/>
-            <a:ext cx="2252663" cy="3390900"/>
-          </a:xfrm>
-          <a:prstGeom xmlns:a="http://schemas.openxmlformats.org/drawingml/2006/main" prst="rect">
-            <a:avLst/>
-          </a:prstGeom>
-          <a:noFill xmlns:a="http://schemas.openxmlformats.org/drawingml/2006/main"/>
-          <a:ln xmlns:a="http://schemas.openxmlformats.org/drawingml/2006/main" w="0">
-            <a:noFill/>
-            <a:prstDash val="solid"/>
-          </a:ln>
-        </p:spPr>
-        <p:txBody>
-          <a:bodyPr xmlns:a="http://schemas.openxmlformats.org/drawingml/2006/main" lIns="76200" tIns="57150" rIns="76200" bIns="57150" anchor="ctr">
-            <a:normAutofit fontScale="100000"/>
-          </a:bodyPr>
-          <a:lstStyle xmlns:a="http://schemas.openxmlformats.org/drawingml/2006/main"/>
+              <a:t>P —</a:t>
+            </a:r>
+          </a:p>
           <a:p xmlns:a="http://schemas.openxmlformats.org/drawingml/2006/main">
             <a:pPr algn="l">
               <a:lnSpc>
                 <a:spcPct val="108000"/>
               </a:lnSpc>
               <a:buNone/>
-              <a:defRPr sz="1275" b="0">
-                <a:solidFill>
-                  <a:srgbClr val="5F6B7A"/>
-                </a:solidFill>
-                <a:latin typeface="Aptos"/>
-                <a:ea typeface="Aptos"/>
-                <a:cs typeface="Aptos"/>
-              </a:defRPr>
-            </a:pPr>
-            <a:r>
-              <a:rPr sz="1275" b="0">
-                <a:solidFill>
-                  <a:srgbClr val="5F6B7A"/>
-                </a:solidFill>
-                <a:latin typeface="Aptos"/>
-                <a:ea typeface="Aptos"/>
-                <a:cs typeface="Aptos"/>
+              <a:defRPr sz="1575" b="1">
+                <a:solidFill>
+                  <a:srgbClr val="071426"/>
+                </a:solidFill>
+                <a:latin typeface="Aptos Display"/>
+                <a:ea typeface="Aptos Display"/>
+                <a:cs typeface="Aptos Display"/>
+              </a:defRPr>
+            </a:pPr>
+            <a:r>
+              <a:rPr sz="1575" b="1">
+                <a:solidFill>
+                  <a:srgbClr val="071426"/>
+                </a:solidFill>
+                <a:latin typeface="Aptos Display"/>
+                <a:ea typeface="Aptos Display"/>
+                <a:cs typeface="Aptos Display"/>
               </a:rPr>
               <a:t>locked for paper and metal</a:t>
             </a:r>
@@ -13910,22 +13842,22 @@
       </p:sp>
       <p:sp>
         <p:nvSpPr>
-          <p:cNvPr id="17" name="">
-            <a:extLst xmlns:a="http://schemas.openxmlformats.org/drawingml/2006/main">
-              <a:ext uri="{FF2B5EF4-FFF2-40B4-BE49-F238E27FC236}">
-                <a16:creationId xmlns:a16="http://schemas.microsoft.com/office/drawing/2014/main" id="{DC4CF340-269F-45F5-9CEF-E4CEEBB77641}"/>
-              </a:ext>
-            </a:extLst>
-          </p:cNvPr>
-          <p:cNvSpPr>
-            <a:spLocks xmlns:a="http://schemas.openxmlformats.org/drawingml/2006/main" noGrp="1"/>
-          </p:cNvSpPr>
-          <p:nvPr/>
-        </p:nvSpPr>
-        <p:spPr>
-          <a:xfrm xmlns:a="http://schemas.openxmlformats.org/drawingml/2006/main">
-            <a:off x="6181725" y="1885950"/>
-            <a:ext cx="2614613" cy="4095750"/>
+          <p:cNvPr id="15" name="">
+            <a:extLst xmlns:a="http://schemas.openxmlformats.org/drawingml/2006/main">
+              <a:ext uri="{FF2B5EF4-FFF2-40B4-BE49-F238E27FC236}">
+                <a16:creationId xmlns:a16="http://schemas.microsoft.com/office/drawing/2014/main" id="{288619BC-794B-462B-8633-0977EFF9EA27}"/>
+              </a:ext>
+            </a:extLst>
+          </p:cNvPr>
+          <p:cNvSpPr>
+            <a:spLocks xmlns:a="http://schemas.openxmlformats.org/drawingml/2006/main" noGrp="1"/>
+          </p:cNvSpPr>
+          <p:nvPr/>
+        </p:nvSpPr>
+        <p:spPr>
+          <a:xfrm xmlns:a="http://schemas.openxmlformats.org/drawingml/2006/main">
+            <a:off x="6181725" y="2724150"/>
+            <a:ext cx="2614613" cy="2781300"/>
           </a:xfrm>
           <a:prstGeom xmlns:a="http://schemas.openxmlformats.org/drawingml/2006/main" prst="roundRect">
             <a:avLst>
@@ -13945,22 +13877,22 @@
       </p:sp>
       <p:sp>
         <p:nvSpPr>
-          <p:cNvPr id="18" name="">
-            <a:extLst xmlns:a="http://schemas.openxmlformats.org/drawingml/2006/main">
-              <a:ext uri="{FF2B5EF4-FFF2-40B4-BE49-F238E27FC236}">
-                <a16:creationId xmlns:a16="http://schemas.microsoft.com/office/drawing/2014/main" id="{9C07E71A-A17C-4AF9-9832-5D72B9C688E9}"/>
-              </a:ext>
-            </a:extLst>
-          </p:cNvPr>
-          <p:cNvSpPr>
-            <a:spLocks xmlns:a="http://schemas.openxmlformats.org/drawingml/2006/main" noGrp="1"/>
-          </p:cNvSpPr>
-          <p:nvPr/>
-        </p:nvSpPr>
-        <p:spPr>
-          <a:xfrm xmlns:a="http://schemas.openxmlformats.org/drawingml/2006/main">
-            <a:off x="6181725" y="1885950"/>
-            <a:ext cx="66675" cy="4095750"/>
+          <p:cNvPr id="16" name="">
+            <a:extLst xmlns:a="http://schemas.openxmlformats.org/drawingml/2006/main">
+              <a:ext uri="{FF2B5EF4-FFF2-40B4-BE49-F238E27FC236}">
+                <a16:creationId xmlns:a16="http://schemas.microsoft.com/office/drawing/2014/main" id="{F5A3F9CD-6A18-4590-9E55-1088C042E372}"/>
+              </a:ext>
+            </a:extLst>
+          </p:cNvPr>
+          <p:cNvSpPr>
+            <a:spLocks xmlns:a="http://schemas.openxmlformats.org/drawingml/2006/main" noGrp="1"/>
+          </p:cNvSpPr>
+          <p:nvPr/>
+        </p:nvSpPr>
+        <p:spPr>
+          <a:xfrm xmlns:a="http://schemas.openxmlformats.org/drawingml/2006/main">
+            <a:off x="6181725" y="2724150"/>
+            <a:ext cx="66675" cy="2781300"/>
           </a:xfrm>
           <a:prstGeom xmlns:a="http://schemas.openxmlformats.org/drawingml/2006/main" prst="rect">
             <a:avLst/>
@@ -13976,22 +13908,22 @@
       </p:sp>
       <p:sp>
         <p:nvSpPr>
-          <p:cNvPr id="19" name="">
-            <a:extLst xmlns:a="http://schemas.openxmlformats.org/drawingml/2006/main">
-              <a:ext uri="{FF2B5EF4-FFF2-40B4-BE49-F238E27FC236}">
-                <a16:creationId xmlns:a16="http://schemas.microsoft.com/office/drawing/2014/main" id="{37FE69D6-A0D0-476F-A357-FFE985E12220}"/>
-              </a:ext>
-            </a:extLst>
-          </p:cNvPr>
-          <p:cNvSpPr>
-            <a:spLocks xmlns:a="http://schemas.openxmlformats.org/drawingml/2006/main" noGrp="1"/>
-          </p:cNvSpPr>
-          <p:nvPr/>
-        </p:nvSpPr>
-        <p:spPr>
-          <a:xfrm xmlns:a="http://schemas.openxmlformats.org/drawingml/2006/main">
-            <a:off x="6391275" y="2038350"/>
-            <a:ext cx="2252663" cy="419100"/>
+          <p:cNvPr id="17" name="">
+            <a:extLst xmlns:a="http://schemas.openxmlformats.org/drawingml/2006/main">
+              <a:ext uri="{FF2B5EF4-FFF2-40B4-BE49-F238E27FC236}">
+                <a16:creationId xmlns:a16="http://schemas.microsoft.com/office/drawing/2014/main" id="{FD43A9CA-3ED5-4FD2-B09C-ED27475B471D}"/>
+              </a:ext>
+            </a:extLst>
+          </p:cNvPr>
+          <p:cNvSpPr>
+            <a:spLocks xmlns:a="http://schemas.openxmlformats.org/drawingml/2006/main" noGrp="1"/>
+          </p:cNvSpPr>
+          <p:nvPr/>
+        </p:nvSpPr>
+        <p:spPr>
+          <a:xfrm xmlns:a="http://schemas.openxmlformats.org/drawingml/2006/main">
+            <a:off x="6391275" y="2952750"/>
+            <a:ext cx="2252663" cy="2133600"/>
           </a:xfrm>
           <a:prstGeom xmlns:a="http://schemas.openxmlformats.org/drawingml/2006/main" prst="rect">
             <a:avLst/>
@@ -14013,7 +13945,7 @@
                 <a:spcPct val="108000"/>
               </a:lnSpc>
               <a:buNone/>
-              <a:defRPr sz="1650" b="1">
+              <a:defRPr sz="1575" b="1">
                 <a:solidFill>
                   <a:srgbClr val="071426"/>
                 </a:solidFill>
@@ -14023,7 +13955,7 @@
               </a:defRPr>
             </a:pPr>
             <a:r>
-              <a:rPr sz="1650" b="1">
+              <a:rPr sz="1575" b="1">
                 <a:solidFill>
                   <a:srgbClr val="071426"/>
                 </a:solidFill>
@@ -14031,67 +13963,32 @@
                 <a:ea typeface="Aptos Display"/>
                 <a:cs typeface="Aptos Display"/>
               </a:rPr>
-              <a:t>O</a:t>
-            </a:r>
-          </a:p>
-        </p:txBody>
-      </p:sp>
-      <p:sp>
-        <p:nvSpPr>
-          <p:cNvPr id="20" name="">
-            <a:extLst xmlns:a="http://schemas.openxmlformats.org/drawingml/2006/main">
-              <a:ext uri="{FF2B5EF4-FFF2-40B4-BE49-F238E27FC236}">
-                <a16:creationId xmlns:a16="http://schemas.microsoft.com/office/drawing/2014/main" id="{42C4B556-0AE2-4F04-865D-32F3621817DA}"/>
-              </a:ext>
-            </a:extLst>
-          </p:cNvPr>
-          <p:cNvSpPr>
-            <a:spLocks xmlns:a="http://schemas.openxmlformats.org/drawingml/2006/main" noGrp="1"/>
-          </p:cNvSpPr>
-          <p:nvPr/>
-        </p:nvSpPr>
-        <p:spPr>
-          <a:xfrm xmlns:a="http://schemas.openxmlformats.org/drawingml/2006/main">
-            <a:off x="6391275" y="2466975"/>
-            <a:ext cx="2252663" cy="3390900"/>
-          </a:xfrm>
-          <a:prstGeom xmlns:a="http://schemas.openxmlformats.org/drawingml/2006/main" prst="rect">
-            <a:avLst/>
-          </a:prstGeom>
-          <a:noFill xmlns:a="http://schemas.openxmlformats.org/drawingml/2006/main"/>
-          <a:ln xmlns:a="http://schemas.openxmlformats.org/drawingml/2006/main" w="0">
-            <a:noFill/>
-            <a:prstDash val="solid"/>
-          </a:ln>
-        </p:spPr>
-        <p:txBody>
-          <a:bodyPr xmlns:a="http://schemas.openxmlformats.org/drawingml/2006/main" lIns="76200" tIns="57150" rIns="76200" bIns="57150" anchor="ctr">
-            <a:normAutofit fontScale="100000"/>
-          </a:bodyPr>
-          <a:lstStyle xmlns:a="http://schemas.openxmlformats.org/drawingml/2006/main"/>
+              <a:t>O —</a:t>
+            </a:r>
+          </a:p>
           <a:p xmlns:a="http://schemas.openxmlformats.org/drawingml/2006/main">
             <a:pPr algn="l">
               <a:lnSpc>
                 <a:spcPct val="108000"/>
               </a:lnSpc>
               <a:buNone/>
-              <a:defRPr sz="1275" b="0">
-                <a:solidFill>
-                  <a:srgbClr val="5F6B7A"/>
-                </a:solidFill>
-                <a:latin typeface="Aptos"/>
-                <a:ea typeface="Aptos"/>
-                <a:cs typeface="Aptos"/>
-              </a:defRPr>
-            </a:pPr>
-            <a:r>
-              <a:rPr sz="1275" b="0">
-                <a:solidFill>
-                  <a:srgbClr val="5F6B7A"/>
-                </a:solidFill>
-                <a:latin typeface="Aptos"/>
-                <a:ea typeface="Aptos"/>
-                <a:cs typeface="Aptos"/>
+              <a:defRPr sz="1575" b="1">
+                <a:solidFill>
+                  <a:srgbClr val="071426"/>
+                </a:solidFill>
+                <a:latin typeface="Aptos Display"/>
+                <a:ea typeface="Aptos Display"/>
+                <a:cs typeface="Aptos Display"/>
+              </a:defRPr>
+            </a:pPr>
+            <a:r>
+              <a:rPr sz="1575" b="1">
+                <a:solidFill>
+                  <a:srgbClr val="071426"/>
+                </a:solidFill>
+                <a:latin typeface="Aptos Display"/>
+                <a:ea typeface="Aptos Display"/>
+                <a:cs typeface="Aptos Display"/>
               </a:rPr>
               <a:t>locked for offline payment</a:t>
             </a:r>
@@ -14100,22 +13997,22 @@
       </p:sp>
       <p:sp>
         <p:nvSpPr>
-          <p:cNvPr id="21" name="">
-            <a:extLst xmlns:a="http://schemas.openxmlformats.org/drawingml/2006/main">
-              <a:ext uri="{FF2B5EF4-FFF2-40B4-BE49-F238E27FC236}">
-                <a16:creationId xmlns:a16="http://schemas.microsoft.com/office/drawing/2014/main" id="{3AB58FFA-3623-4221-A0B7-117C8A18D711}"/>
-              </a:ext>
-            </a:extLst>
-          </p:cNvPr>
-          <p:cNvSpPr>
-            <a:spLocks xmlns:a="http://schemas.openxmlformats.org/drawingml/2006/main" noGrp="1"/>
-          </p:cNvSpPr>
-          <p:nvPr/>
-        </p:nvSpPr>
-        <p:spPr>
-          <a:xfrm xmlns:a="http://schemas.openxmlformats.org/drawingml/2006/main">
-            <a:off x="8967788" y="1885950"/>
-            <a:ext cx="2614613" cy="4095750"/>
+          <p:cNvPr id="18" name="">
+            <a:extLst xmlns:a="http://schemas.openxmlformats.org/drawingml/2006/main">
+              <a:ext uri="{FF2B5EF4-FFF2-40B4-BE49-F238E27FC236}">
+                <a16:creationId xmlns:a16="http://schemas.microsoft.com/office/drawing/2014/main" id="{8DC53B7D-FC41-47AA-9DBE-B0101F013A7A}"/>
+              </a:ext>
+            </a:extLst>
+          </p:cNvPr>
+          <p:cNvSpPr>
+            <a:spLocks xmlns:a="http://schemas.openxmlformats.org/drawingml/2006/main" noGrp="1"/>
+          </p:cNvSpPr>
+          <p:nvPr/>
+        </p:nvSpPr>
+        <p:spPr>
+          <a:xfrm xmlns:a="http://schemas.openxmlformats.org/drawingml/2006/main">
+            <a:off x="8967788" y="2724150"/>
+            <a:ext cx="2614613" cy="2781300"/>
           </a:xfrm>
           <a:prstGeom xmlns:a="http://schemas.openxmlformats.org/drawingml/2006/main" prst="roundRect">
             <a:avLst>
@@ -14135,22 +14032,22 @@
       </p:sp>
       <p:sp>
         <p:nvSpPr>
-          <p:cNvPr id="22" name="">
-            <a:extLst xmlns:a="http://schemas.openxmlformats.org/drawingml/2006/main">
-              <a:ext uri="{FF2B5EF4-FFF2-40B4-BE49-F238E27FC236}">
-                <a16:creationId xmlns:a16="http://schemas.microsoft.com/office/drawing/2014/main" id="{72EC50E3-E7C2-4BD4-B1E0-F891D44F1DDD}"/>
-              </a:ext>
-            </a:extLst>
-          </p:cNvPr>
-          <p:cNvSpPr>
-            <a:spLocks xmlns:a="http://schemas.openxmlformats.org/drawingml/2006/main" noGrp="1"/>
-          </p:cNvSpPr>
-          <p:nvPr/>
-        </p:nvSpPr>
-        <p:spPr>
-          <a:xfrm xmlns:a="http://schemas.openxmlformats.org/drawingml/2006/main">
-            <a:off x="8967788" y="1885950"/>
-            <a:ext cx="66675" cy="4095750"/>
+          <p:cNvPr id="19" name="">
+            <a:extLst xmlns:a="http://schemas.openxmlformats.org/drawingml/2006/main">
+              <a:ext uri="{FF2B5EF4-FFF2-40B4-BE49-F238E27FC236}">
+                <a16:creationId xmlns:a16="http://schemas.microsoft.com/office/drawing/2014/main" id="{20A43BE2-F763-44FC-A8E0-689AD49EC38B}"/>
+              </a:ext>
+            </a:extLst>
+          </p:cNvPr>
+          <p:cNvSpPr>
+            <a:spLocks xmlns:a="http://schemas.openxmlformats.org/drawingml/2006/main" noGrp="1"/>
+          </p:cNvSpPr>
+          <p:nvPr/>
+        </p:nvSpPr>
+        <p:spPr>
+          <a:xfrm xmlns:a="http://schemas.openxmlformats.org/drawingml/2006/main">
+            <a:off x="8967788" y="2724150"/>
+            <a:ext cx="66675" cy="2781300"/>
           </a:xfrm>
           <a:prstGeom xmlns:a="http://schemas.openxmlformats.org/drawingml/2006/main" prst="rect">
             <a:avLst/>
@@ -14166,22 +14063,22 @@
       </p:sp>
       <p:sp>
         <p:nvSpPr>
-          <p:cNvPr id="23" name="">
-            <a:extLst xmlns:a="http://schemas.openxmlformats.org/drawingml/2006/main">
-              <a:ext uri="{FF2B5EF4-FFF2-40B4-BE49-F238E27FC236}">
-                <a16:creationId xmlns:a16="http://schemas.microsoft.com/office/drawing/2014/main" id="{912C2C42-C628-40CA-B974-BAA5CCE48417}"/>
-              </a:ext>
-            </a:extLst>
-          </p:cNvPr>
-          <p:cNvSpPr>
-            <a:spLocks xmlns:a="http://schemas.openxmlformats.org/drawingml/2006/main" noGrp="1"/>
-          </p:cNvSpPr>
-          <p:nvPr/>
-        </p:nvSpPr>
-        <p:spPr>
-          <a:xfrm xmlns:a="http://schemas.openxmlformats.org/drawingml/2006/main">
-            <a:off x="9177338" y="2038350"/>
-            <a:ext cx="2252663" cy="419100"/>
+          <p:cNvPr id="20" name="">
+            <a:extLst xmlns:a="http://schemas.openxmlformats.org/drawingml/2006/main">
+              <a:ext uri="{FF2B5EF4-FFF2-40B4-BE49-F238E27FC236}">
+                <a16:creationId xmlns:a16="http://schemas.microsoft.com/office/drawing/2014/main" id="{10296261-7140-4514-B232-6CD289B744CF}"/>
+              </a:ext>
+            </a:extLst>
+          </p:cNvPr>
+          <p:cNvSpPr>
+            <a:spLocks xmlns:a="http://schemas.openxmlformats.org/drawingml/2006/main" noGrp="1"/>
+          </p:cNvSpPr>
+          <p:nvPr/>
+        </p:nvSpPr>
+        <p:spPr>
+          <a:xfrm xmlns:a="http://schemas.openxmlformats.org/drawingml/2006/main">
+            <a:off x="9177338" y="2952750"/>
+            <a:ext cx="2252663" cy="2133600"/>
           </a:xfrm>
           <a:prstGeom xmlns:a="http://schemas.openxmlformats.org/drawingml/2006/main" prst="rect">
             <a:avLst/>
@@ -14203,7 +14100,7 @@
                 <a:spcPct val="108000"/>
               </a:lnSpc>
               <a:buNone/>
-              <a:defRPr sz="1650" b="1">
+              <a:defRPr sz="1575" b="1">
                 <a:solidFill>
                   <a:srgbClr val="071426"/>
                 </a:solidFill>
@@ -14213,7 +14110,7 @@
               </a:defRPr>
             </a:pPr>
             <a:r>
-              <a:rPr sz="1650" b="1">
+              <a:rPr sz="1575" b="1">
                 <a:solidFill>
                   <a:srgbClr val="071426"/>
                 </a:solidFill>
@@ -14221,34 +14118,63 @@
                 <a:ea typeface="Aptos Display"/>
                 <a:cs typeface="Aptos Display"/>
               </a:rPr>
-              <a:t>E</a:t>
-            </a:r>
-          </a:p>
-        </p:txBody>
-      </p:sp>
-      <p:sp>
-        <p:nvSpPr>
-          <p:cNvPr id="24" name="">
-            <a:extLst xmlns:a="http://schemas.openxmlformats.org/drawingml/2006/main">
-              <a:ext uri="{FF2B5EF4-FFF2-40B4-BE49-F238E27FC236}">
-                <a16:creationId xmlns:a16="http://schemas.microsoft.com/office/drawing/2014/main" id="{E4A6835E-7923-494A-B5E0-02E4B54B4CD8}"/>
-              </a:ext>
-            </a:extLst>
-          </p:cNvPr>
-          <p:cNvSpPr>
-            <a:spLocks xmlns:a="http://schemas.openxmlformats.org/drawingml/2006/main" noGrp="1"/>
-          </p:cNvSpPr>
-          <p:nvPr/>
-        </p:nvSpPr>
-        <p:spPr>
-          <a:xfrm xmlns:a="http://schemas.openxmlformats.org/drawingml/2006/main">
-            <a:off x="9177338" y="2466975"/>
-            <a:ext cx="2252663" cy="3390900"/>
-          </a:xfrm>
-          <a:prstGeom xmlns:a="http://schemas.openxmlformats.org/drawingml/2006/main" prst="rect">
-            <a:avLst/>
-          </a:prstGeom>
-          <a:noFill xmlns:a="http://schemas.openxmlformats.org/drawingml/2006/main"/>
+              <a:t>E —</a:t>
+            </a:r>
+          </a:p>
+          <a:p xmlns:a="http://schemas.openxmlformats.org/drawingml/2006/main">
+            <a:pPr algn="l">
+              <a:lnSpc>
+                <a:spcPct val="108000"/>
+              </a:lnSpc>
+              <a:buNone/>
+              <a:defRPr sz="1575" b="1">
+                <a:solidFill>
+                  <a:srgbClr val="071426"/>
+                </a:solidFill>
+                <a:latin typeface="Aptos Display"/>
+                <a:ea typeface="Aptos Display"/>
+                <a:cs typeface="Aptos Display"/>
+              </a:defRPr>
+            </a:pPr>
+            <a:r>
+              <a:rPr sz="1575" b="1">
+                <a:solidFill>
+                  <a:srgbClr val="071426"/>
+                </a:solidFill>
+                <a:latin typeface="Aptos Display"/>
+                <a:ea typeface="Aptos Display"/>
+                <a:cs typeface="Aptos Display"/>
+              </a:rPr>
+              <a:t>narrowly defined special states</a:t>
+            </a:r>
+          </a:p>
+        </p:txBody>
+      </p:sp>
+      <p:sp>
+        <p:nvSpPr>
+          <p:cNvPr id="21" name="">
+            <a:extLst xmlns:a="http://schemas.openxmlformats.org/drawingml/2006/main">
+              <a:ext uri="{FF2B5EF4-FFF2-40B4-BE49-F238E27FC236}">
+                <a16:creationId xmlns:a16="http://schemas.microsoft.com/office/drawing/2014/main" id="{41D40809-F030-4251-97E5-A8DED3C384FB}"/>
+              </a:ext>
+            </a:extLst>
+          </p:cNvPr>
+          <p:cNvSpPr>
+            <a:spLocks xmlns:a="http://schemas.openxmlformats.org/drawingml/2006/main" noGrp="1"/>
+          </p:cNvSpPr>
+          <p:nvPr/>
+        </p:nvSpPr>
+        <p:spPr>
+          <a:xfrm xmlns:a="http://schemas.openxmlformats.org/drawingml/2006/main">
+            <a:off x="609600" y="5753100"/>
+            <a:ext cx="10972800" cy="495300"/>
+          </a:xfrm>
+          <a:prstGeom xmlns:a="http://schemas.openxmlformats.org/drawingml/2006/main" prst="rect">
+            <a:avLst/>
+          </a:prstGeom>
+          <a:solidFill xmlns:a="http://schemas.openxmlformats.org/drawingml/2006/main">
+            <a:srgbClr val="FFF7E6"/>
+          </a:solidFill>
           <a:ln xmlns:a="http://schemas.openxmlformats.org/drawingml/2006/main" w="0">
             <a:noFill/>
             <a:prstDash val="solid"/>
@@ -14260,68 +14186,6 @@
           </a:bodyPr>
           <a:lstStyle xmlns:a="http://schemas.openxmlformats.org/drawingml/2006/main"/>
           <a:p xmlns:a="http://schemas.openxmlformats.org/drawingml/2006/main">
-            <a:pPr algn="l">
-              <a:lnSpc>
-                <a:spcPct val="108000"/>
-              </a:lnSpc>
-              <a:buNone/>
-              <a:defRPr sz="1275" b="0">
-                <a:solidFill>
-                  <a:srgbClr val="5F6B7A"/>
-                </a:solidFill>
-                <a:latin typeface="Aptos"/>
-                <a:ea typeface="Aptos"/>
-                <a:cs typeface="Aptos"/>
-              </a:defRPr>
-            </a:pPr>
-            <a:r>
-              <a:rPr sz="1275" b="0">
-                <a:solidFill>
-                  <a:srgbClr val="5F6B7A"/>
-                </a:solidFill>
-                <a:latin typeface="Aptos"/>
-                <a:ea typeface="Aptos"/>
-                <a:cs typeface="Aptos"/>
-              </a:rPr>
-              <a:t>narrowly defined special states</a:t>
-            </a:r>
-          </a:p>
-        </p:txBody>
-      </p:sp>
-      <p:sp>
-        <p:nvSpPr>
-          <p:cNvPr id="25" name="">
-            <a:extLst xmlns:a="http://schemas.openxmlformats.org/drawingml/2006/main">
-              <a:ext uri="{FF2B5EF4-FFF2-40B4-BE49-F238E27FC236}">
-                <a16:creationId xmlns:a16="http://schemas.microsoft.com/office/drawing/2014/main" id="{2680513D-2325-4ADA-BCF9-BB5695EBCA3B}"/>
-              </a:ext>
-            </a:extLst>
-          </p:cNvPr>
-          <p:cNvSpPr>
-            <a:spLocks xmlns:a="http://schemas.openxmlformats.org/drawingml/2006/main" noGrp="1"/>
-          </p:cNvSpPr>
-          <p:nvPr/>
-        </p:nvSpPr>
-        <p:spPr>
-          <a:xfrm xmlns:a="http://schemas.openxmlformats.org/drawingml/2006/main">
-            <a:off x="609600" y="5943600"/>
-            <a:ext cx="10972800" cy="342900"/>
-          </a:xfrm>
-          <a:prstGeom xmlns:a="http://schemas.openxmlformats.org/drawingml/2006/main" prst="rect">
-            <a:avLst/>
-          </a:prstGeom>
-          <a:noFill xmlns:a="http://schemas.openxmlformats.org/drawingml/2006/main"/>
-          <a:ln xmlns:a="http://schemas.openxmlformats.org/drawingml/2006/main" w="0">
-            <a:noFill/>
-            <a:prstDash val="solid"/>
-          </a:ln>
-        </p:spPr>
-        <p:txBody>
-          <a:bodyPr xmlns:a="http://schemas.openxmlformats.org/drawingml/2006/main" lIns="76200" tIns="57150" rIns="76200" bIns="57150" anchor="ctr">
-            <a:normAutofit fontScale="100000"/>
-          </a:bodyPr>
-          <a:lstStyle xmlns:a="http://schemas.openxmlformats.org/drawingml/2006/main"/>
-          <a:p xmlns:a="http://schemas.openxmlformats.org/drawingml/2006/main">
             <a:pPr algn="ctr">
               <a:lnSpc>
                 <a:spcPct val="108000"/>
@@ -14353,7 +14217,7 @@
     </p:spTree>
     <p:extLst>
       <p:ext uri="{BB962C8B-B14F-4D97-AF65-F5344CB8AC3E}">
-        <p14:creationId xmlns:p14="http://schemas.microsoft.com/office/powerpoint/2010/main" val="808101744"/>
+        <p14:creationId xmlns:p14="http://schemas.microsoft.com/office/powerpoint/2010/main" val="296195878"/>
       </p:ext>
     </p:extLst>
   </p:cSld>
@@ -14384,7 +14248,7 @@
           <p:cNvPr id="25" name="">
             <a:extLst xmlns:a="http://schemas.openxmlformats.org/drawingml/2006/main">
               <a:ext uri="{FF2B5EF4-FFF2-40B4-BE49-F238E27FC236}">
-                <a16:creationId xmlns:a16="http://schemas.microsoft.com/office/drawing/2014/main" id="{8C61D99B-8F49-4F18-A86F-1D1F954CFA65}"/>
+                <a16:creationId xmlns:a16="http://schemas.microsoft.com/office/drawing/2014/main" id="{FC88C5B9-14AF-4D41-843B-74911B9BD408}"/>
               </a:ext>
             </a:extLst>
           </p:cNvPr>
@@ -14415,7 +14279,7 @@
           <p:cNvPr id="2" name="">
             <a:extLst xmlns:a="http://schemas.openxmlformats.org/drawingml/2006/main">
               <a:ext uri="{FF2B5EF4-FFF2-40B4-BE49-F238E27FC236}">
-                <a16:creationId xmlns:a16="http://schemas.microsoft.com/office/drawing/2014/main" id="{F51EDB65-7CF3-4B8C-9197-D72978B8C80C}"/>
+                <a16:creationId xmlns:a16="http://schemas.microsoft.com/office/drawing/2014/main" id="{5F101570-1799-4033-AE01-DDEA36179ACC}"/>
               </a:ext>
             </a:extLst>
           </p:cNvPr>
@@ -14477,7 +14341,7 @@
           <p:cNvPr id="3" name="">
             <a:extLst xmlns:a="http://schemas.openxmlformats.org/drawingml/2006/main">
               <a:ext uri="{FF2B5EF4-FFF2-40B4-BE49-F238E27FC236}">
-                <a16:creationId xmlns:a16="http://schemas.microsoft.com/office/drawing/2014/main" id="{D7787F61-1D31-476D-A7EF-703E240D036E}"/>
+                <a16:creationId xmlns:a16="http://schemas.microsoft.com/office/drawing/2014/main" id="{086D3892-62E9-4214-8694-E4015ECF3F0D}"/>
               </a:ext>
             </a:extLst>
           </p:cNvPr>
@@ -14539,7 +14403,7 @@
           <p:cNvPr id="4" name="">
             <a:extLst xmlns:a="http://schemas.openxmlformats.org/drawingml/2006/main">
               <a:ext uri="{FF2B5EF4-FFF2-40B4-BE49-F238E27FC236}">
-                <a16:creationId xmlns:a16="http://schemas.microsoft.com/office/drawing/2014/main" id="{C8B43881-0B29-432D-8F0D-042D70169FDF}"/>
+                <a16:creationId xmlns:a16="http://schemas.microsoft.com/office/drawing/2014/main" id="{E27E3166-8B9B-4DDF-B8D2-7568727B2F5E}"/>
               </a:ext>
             </a:extLst>
           </p:cNvPr>
@@ -14574,7 +14438,7 @@
           <p:nvPr/>
         </p:nvPicPr>
         <p:blipFill>
-          <a:blip xmlns:r="http://schemas.openxmlformats.org/officeDocument/2006/relationships" xmlns:a="http://schemas.openxmlformats.org/drawingml/2006/main" r:embed="R985103af3ca24651"/>
+          <a:blip xmlns:r="http://schemas.openxmlformats.org/officeDocument/2006/relationships" xmlns:a="http://schemas.openxmlformats.org/drawingml/2006/main" r:embed="R45f1fb383466405b"/>
           <a:srcRect xmlns:a="http://schemas.openxmlformats.org/drawingml/2006/main" l="0" t="0" r="0" b="0"/>
           <a:stretch xmlns:a="http://schemas.openxmlformats.org/drawingml/2006/main">
             <a:fillRect l="0" t="0" r="0" b="0"/>
@@ -14595,7 +14459,7 @@
           <p:cNvPr id="6" name="">
             <a:extLst xmlns:a="http://schemas.openxmlformats.org/drawingml/2006/main">
               <a:ext uri="{FF2B5EF4-FFF2-40B4-BE49-F238E27FC236}">
-                <a16:creationId xmlns:a16="http://schemas.microsoft.com/office/drawing/2014/main" id="{B11FF0D9-5995-4906-82C5-DC8168B6716F}"/>
+                <a16:creationId xmlns:a16="http://schemas.microsoft.com/office/drawing/2014/main" id="{C68FFBC7-F440-40E6-AB20-BA0920962E10}"/>
               </a:ext>
             </a:extLst>
           </p:cNvPr>
@@ -14657,7 +14521,7 @@
           <p:cNvPr id="7" name="">
             <a:extLst xmlns:a="http://schemas.openxmlformats.org/drawingml/2006/main">
               <a:ext uri="{FF2B5EF4-FFF2-40B4-BE49-F238E27FC236}">
-                <a16:creationId xmlns:a16="http://schemas.microsoft.com/office/drawing/2014/main" id="{6843CDA9-652A-4477-B6EE-FC81957E2EB9}"/>
+                <a16:creationId xmlns:a16="http://schemas.microsoft.com/office/drawing/2014/main" id="{ABD651C5-F44C-4920-8591-15BBF8220FFB}"/>
               </a:ext>
             </a:extLst>
           </p:cNvPr>
@@ -14719,7 +14583,7 @@
           <p:cNvPr id="8" name="">
             <a:extLst xmlns:a="http://schemas.openxmlformats.org/drawingml/2006/main">
               <a:ext uri="{FF2B5EF4-FFF2-40B4-BE49-F238E27FC236}">
-                <a16:creationId xmlns:a16="http://schemas.microsoft.com/office/drawing/2014/main" id="{320178FF-1E00-4D4B-9D6D-AE6CDCF7F0A7}"/>
+                <a16:creationId xmlns:a16="http://schemas.microsoft.com/office/drawing/2014/main" id="{A9EAB22B-D6DA-42E6-898C-D7C293C0D80D}"/>
               </a:ext>
             </a:extLst>
           </p:cNvPr>
@@ -14731,11 +14595,11 @@
         <p:spPr>
           <a:xfrm xmlns:a="http://schemas.openxmlformats.org/drawingml/2006/main">
             <a:off x="609600" y="1952625"/>
-            <a:ext cx="3143250" cy="3619500"/>
+            <a:ext cx="2857500" cy="3333750"/>
           </a:xfrm>
           <a:prstGeom xmlns:a="http://schemas.openxmlformats.org/drawingml/2006/main" prst="roundRect">
             <a:avLst>
-              <a:gd name="adj" fmla="val 6061"/>
+              <a:gd name="adj" fmla="val 6667"/>
             </a:avLst>
           </a:prstGeom>
           <a:solidFill xmlns:a="http://schemas.openxmlformats.org/drawingml/2006/main">
@@ -14752,19 +14616,19 @@
           <p:cNvPr id="9" name="">
             <a:extLst xmlns:a="http://schemas.openxmlformats.org/drawingml/2006/main">
               <a:ext uri="{FF2B5EF4-FFF2-40B4-BE49-F238E27FC236}">
-                <a16:creationId xmlns:a16="http://schemas.microsoft.com/office/drawing/2014/main" id="{460E1505-C858-49F1-9514-B9DC3A5B7A11}"/>
-              </a:ext>
-            </a:extLst>
-          </p:cNvPr>
-          <p:cNvSpPr>
-            <a:spLocks xmlns:a="http://schemas.openxmlformats.org/drawingml/2006/main" noGrp="1"/>
-          </p:cNvSpPr>
-          <p:nvPr/>
-        </p:nvSpPr>
-        <p:spPr>
-          <a:xfrm xmlns:a="http://schemas.openxmlformats.org/drawingml/2006/main">
-            <a:off x="895350" y="2400300"/>
-            <a:ext cx="2571750" cy="781050"/>
+                <a16:creationId xmlns:a16="http://schemas.microsoft.com/office/drawing/2014/main" id="{43F7B669-3B0B-4505-A9DE-84357A1D6FD3}"/>
+              </a:ext>
+            </a:extLst>
+          </p:cNvPr>
+          <p:cNvSpPr>
+            <a:spLocks xmlns:a="http://schemas.openxmlformats.org/drawingml/2006/main" noGrp="1"/>
+          </p:cNvSpPr>
+          <p:nvPr/>
+        </p:nvSpPr>
+        <p:spPr>
+          <a:xfrm xmlns:a="http://schemas.openxmlformats.org/drawingml/2006/main">
+            <a:off x="838200" y="2324100"/>
+            <a:ext cx="2400300" cy="685800"/>
           </a:xfrm>
           <a:prstGeom xmlns:a="http://schemas.openxmlformats.org/drawingml/2006/main" prst="rect">
             <a:avLst/>
@@ -14786,7 +14650,7 @@
                 <a:spcPct val="108000"/>
               </a:lnSpc>
               <a:buNone/>
-              <a:defRPr sz="3750" b="1">
+              <a:defRPr sz="3450" b="1">
                 <a:solidFill>
                   <a:srgbClr val="F0C873"/>
                 </a:solidFill>
@@ -14796,7 +14660,7 @@
               </a:defRPr>
             </a:pPr>
             <a:r>
-              <a:rPr sz="3750" b="1">
+              <a:rPr sz="3450" b="1">
                 <a:solidFill>
                   <a:srgbClr val="F0C873"/>
                 </a:solidFill>
@@ -14814,19 +14678,19 @@
           <p:cNvPr id="10" name="">
             <a:extLst xmlns:a="http://schemas.openxmlformats.org/drawingml/2006/main">
               <a:ext uri="{FF2B5EF4-FFF2-40B4-BE49-F238E27FC236}">
-                <a16:creationId xmlns:a16="http://schemas.microsoft.com/office/drawing/2014/main" id="{B557C655-9084-4688-AF5A-18411E2CF257}"/>
-              </a:ext>
-            </a:extLst>
-          </p:cNvPr>
-          <p:cNvSpPr>
-            <a:spLocks xmlns:a="http://schemas.openxmlformats.org/drawingml/2006/main" noGrp="1"/>
-          </p:cNvSpPr>
-          <p:nvPr/>
-        </p:nvSpPr>
-        <p:spPr>
-          <a:xfrm xmlns:a="http://schemas.openxmlformats.org/drawingml/2006/main">
-            <a:off x="895350" y="3333750"/>
-            <a:ext cx="2571750" cy="1066800"/>
+                <a16:creationId xmlns:a16="http://schemas.microsoft.com/office/drawing/2014/main" id="{FDCFB4EE-7F56-4619-AD9C-449C7AF4A75C}"/>
+              </a:ext>
+            </a:extLst>
+          </p:cNvPr>
+          <p:cNvSpPr>
+            <a:spLocks xmlns:a="http://schemas.openxmlformats.org/drawingml/2006/main" noGrp="1"/>
+          </p:cNvSpPr>
+          <p:nvPr/>
+        </p:nvSpPr>
+        <p:spPr>
+          <a:xfrm xmlns:a="http://schemas.openxmlformats.org/drawingml/2006/main">
+            <a:off x="838200" y="3143250"/>
+            <a:ext cx="2400300" cy="952500"/>
           </a:xfrm>
           <a:prstGeom xmlns:a="http://schemas.openxmlformats.org/drawingml/2006/main" prst="rect">
             <a:avLst/>
@@ -14848,7 +14712,7 @@
                 <a:spcPct val="108000"/>
               </a:lnSpc>
               <a:buNone/>
-              <a:defRPr sz="1575" b="1">
+              <a:defRPr sz="1500" b="1">
                 <a:solidFill>
                   <a:srgbClr val="FFFFFF"/>
                 </a:solidFill>
@@ -14858,7 +14722,7 @@
               </a:defRPr>
             </a:pPr>
             <a:r>
-              <a:rPr sz="1575" b="1">
+              <a:rPr sz="1500" b="1">
                 <a:solidFill>
                   <a:srgbClr val="FFFFFF"/>
                 </a:solidFill>
@@ -14875,7 +14739,7 @@
                 <a:spcPct val="108000"/>
               </a:lnSpc>
               <a:buNone/>
-              <a:defRPr sz="1575" b="1">
+              <a:defRPr sz="1500" b="1">
                 <a:solidFill>
                   <a:srgbClr val="FFFFFF"/>
                 </a:solidFill>
@@ -14885,7 +14749,7 @@
               </a:defRPr>
             </a:pPr>
             <a:r>
-              <a:rPr sz="1575" b="1">
+              <a:rPr sz="1500" b="1">
                 <a:solidFill>
                   <a:srgbClr val="FFFFFF"/>
                 </a:solidFill>
@@ -14903,19 +14767,19 @@
           <p:cNvPr id="11" name="">
             <a:extLst xmlns:a="http://schemas.openxmlformats.org/drawingml/2006/main">
               <a:ext uri="{FF2B5EF4-FFF2-40B4-BE49-F238E27FC236}">
-                <a16:creationId xmlns:a16="http://schemas.microsoft.com/office/drawing/2014/main" id="{B711EA45-2E82-46DF-A4E5-03A772D101FF}"/>
-              </a:ext>
-            </a:extLst>
-          </p:cNvPr>
-          <p:cNvSpPr>
-            <a:spLocks xmlns:a="http://schemas.openxmlformats.org/drawingml/2006/main" noGrp="1"/>
-          </p:cNvSpPr>
-          <p:nvPr/>
-        </p:nvSpPr>
-        <p:spPr>
-          <a:xfrm xmlns:a="http://schemas.openxmlformats.org/drawingml/2006/main">
-            <a:off x="895350" y="4667250"/>
-            <a:ext cx="2571750" cy="571500"/>
+                <a16:creationId xmlns:a16="http://schemas.microsoft.com/office/drawing/2014/main" id="{D7AD78BB-FC34-4908-9475-375E8E41F9BE}"/>
+              </a:ext>
+            </a:extLst>
+          </p:cNvPr>
+          <p:cNvSpPr>
+            <a:spLocks xmlns:a="http://schemas.openxmlformats.org/drawingml/2006/main" noGrp="1"/>
+          </p:cNvSpPr>
+          <p:nvPr/>
+        </p:nvSpPr>
+        <p:spPr>
+          <a:xfrm xmlns:a="http://schemas.openxmlformats.org/drawingml/2006/main">
+            <a:off x="838200" y="4419600"/>
+            <a:ext cx="2400300" cy="552450"/>
           </a:xfrm>
           <a:prstGeom xmlns:a="http://schemas.openxmlformats.org/drawingml/2006/main" prst="rect">
             <a:avLst/>
@@ -14992,23 +14856,23 @@
           <p:cNvPr id="12" name="">
             <a:extLst xmlns:a="http://schemas.openxmlformats.org/drawingml/2006/main">
               <a:ext uri="{FF2B5EF4-FFF2-40B4-BE49-F238E27FC236}">
-                <a16:creationId xmlns:a16="http://schemas.microsoft.com/office/drawing/2014/main" id="{87555C4B-27F3-43E5-AC85-795EEF4D26B8}"/>
-              </a:ext>
-            </a:extLst>
-          </p:cNvPr>
-          <p:cNvSpPr>
-            <a:spLocks xmlns:a="http://schemas.openxmlformats.org/drawingml/2006/main" noGrp="1"/>
-          </p:cNvSpPr>
-          <p:nvPr/>
-        </p:nvSpPr>
-        <p:spPr>
-          <a:xfrm xmlns:a="http://schemas.openxmlformats.org/drawingml/2006/main">
-            <a:off x="609600" y="1885950"/>
-            <a:ext cx="5400675" cy="1962150"/>
+                <a16:creationId xmlns:a16="http://schemas.microsoft.com/office/drawing/2014/main" id="{82AAADDF-F7DA-49AB-96E6-C4BDD82E9DAC}"/>
+              </a:ext>
+            </a:extLst>
+          </p:cNvPr>
+          <p:cNvSpPr>
+            <a:spLocks xmlns:a="http://schemas.openxmlformats.org/drawingml/2006/main" noGrp="1"/>
+          </p:cNvSpPr>
+          <p:nvPr/>
+        </p:nvSpPr>
+        <p:spPr>
+          <a:xfrm xmlns:a="http://schemas.openxmlformats.org/drawingml/2006/main">
+            <a:off x="3714750" y="1952625"/>
+            <a:ext cx="3848100" cy="1581150"/>
           </a:xfrm>
           <a:prstGeom xmlns:a="http://schemas.openxmlformats.org/drawingml/2006/main" prst="roundRect">
             <a:avLst>
-              <a:gd name="adj" fmla="val 8738"/>
+              <a:gd name="adj" fmla="val 10843"/>
             </a:avLst>
           </a:prstGeom>
           <a:solidFill xmlns:a="http://schemas.openxmlformats.org/drawingml/2006/main">
@@ -15027,19 +14891,19 @@
           <p:cNvPr id="13" name="">
             <a:extLst xmlns:a="http://schemas.openxmlformats.org/drawingml/2006/main">
               <a:ext uri="{FF2B5EF4-FFF2-40B4-BE49-F238E27FC236}">
-                <a16:creationId xmlns:a16="http://schemas.microsoft.com/office/drawing/2014/main" id="{CA13A9E1-281B-4C15-8D22-D28C25DE4F62}"/>
-              </a:ext>
-            </a:extLst>
-          </p:cNvPr>
-          <p:cNvSpPr>
-            <a:spLocks xmlns:a="http://schemas.openxmlformats.org/drawingml/2006/main" noGrp="1"/>
-          </p:cNvSpPr>
-          <p:nvPr/>
-        </p:nvSpPr>
-        <p:spPr>
-          <a:xfrm xmlns:a="http://schemas.openxmlformats.org/drawingml/2006/main">
-            <a:off x="609600" y="1885950"/>
-            <a:ext cx="66675" cy="1962150"/>
+                <a16:creationId xmlns:a16="http://schemas.microsoft.com/office/drawing/2014/main" id="{3D03F3EA-543F-41F3-A7E6-F9DC43F8BBDF}"/>
+              </a:ext>
+            </a:extLst>
+          </p:cNvPr>
+          <p:cNvSpPr>
+            <a:spLocks xmlns:a="http://schemas.openxmlformats.org/drawingml/2006/main" noGrp="1"/>
+          </p:cNvSpPr>
+          <p:nvPr/>
+        </p:nvSpPr>
+        <p:spPr>
+          <a:xfrm xmlns:a="http://schemas.openxmlformats.org/drawingml/2006/main">
+            <a:off x="3714750" y="1952625"/>
+            <a:ext cx="66675" cy="1581150"/>
           </a:xfrm>
           <a:prstGeom xmlns:a="http://schemas.openxmlformats.org/drawingml/2006/main" prst="rect">
             <a:avLst/>
@@ -15058,19 +14922,19 @@
           <p:cNvPr id="14" name="">
             <a:extLst xmlns:a="http://schemas.openxmlformats.org/drawingml/2006/main">
               <a:ext uri="{FF2B5EF4-FFF2-40B4-BE49-F238E27FC236}">
-                <a16:creationId xmlns:a16="http://schemas.microsoft.com/office/drawing/2014/main" id="{65D4A6F9-7645-4F29-A353-92F9BD82A447}"/>
-              </a:ext>
-            </a:extLst>
-          </p:cNvPr>
-          <p:cNvSpPr>
-            <a:spLocks xmlns:a="http://schemas.openxmlformats.org/drawingml/2006/main" noGrp="1"/>
-          </p:cNvSpPr>
-          <p:nvPr/>
-        </p:nvSpPr>
-        <p:spPr>
-          <a:xfrm xmlns:a="http://schemas.openxmlformats.org/drawingml/2006/main">
-            <a:off x="819150" y="2038350"/>
-            <a:ext cx="5038725" cy="419100"/>
+                <a16:creationId xmlns:a16="http://schemas.microsoft.com/office/drawing/2014/main" id="{6483C0E8-B082-44BA-AF5D-FB8A7BF1FFF1}"/>
+              </a:ext>
+            </a:extLst>
+          </p:cNvPr>
+          <p:cNvSpPr>
+            <a:spLocks xmlns:a="http://schemas.openxmlformats.org/drawingml/2006/main" noGrp="1"/>
+          </p:cNvSpPr>
+          <p:nvPr/>
+        </p:nvSpPr>
+        <p:spPr>
+          <a:xfrm xmlns:a="http://schemas.openxmlformats.org/drawingml/2006/main">
+            <a:off x="3924300" y="2105025"/>
+            <a:ext cx="3486150" cy="419100"/>
           </a:xfrm>
           <a:prstGeom xmlns:a="http://schemas.openxmlformats.org/drawingml/2006/main" prst="rect">
             <a:avLst/>
@@ -15083,7 +14947,7 @@
         </p:spPr>
         <p:txBody>
           <a:bodyPr xmlns:a="http://schemas.openxmlformats.org/drawingml/2006/main" lIns="76200" tIns="57150" rIns="76200" bIns="57150" anchor="ctr">
-            <a:normAutofit fontScale="81111"/>
+            <a:normAutofit fontScale="56117"/>
           </a:bodyPr>
           <a:lstStyle xmlns:a="http://schemas.openxmlformats.org/drawingml/2006/main"/>
           <a:p xmlns:a="http://schemas.openxmlformats.org/drawingml/2006/main">
@@ -15120,23 +14984,23 @@
           <p:cNvPr id="15" name="">
             <a:extLst xmlns:a="http://schemas.openxmlformats.org/drawingml/2006/main">
               <a:ext uri="{FF2B5EF4-FFF2-40B4-BE49-F238E27FC236}">
-                <a16:creationId xmlns:a16="http://schemas.microsoft.com/office/drawing/2014/main" id="{0AD7199B-302E-4EC4-9127-BD35EA7F26F0}"/>
-              </a:ext>
-            </a:extLst>
-          </p:cNvPr>
-          <p:cNvSpPr>
-            <a:spLocks xmlns:a="http://schemas.openxmlformats.org/drawingml/2006/main" noGrp="1"/>
-          </p:cNvSpPr>
-          <p:nvPr/>
-        </p:nvSpPr>
-        <p:spPr>
-          <a:xfrm xmlns:a="http://schemas.openxmlformats.org/drawingml/2006/main">
-            <a:off x="6181725" y="1885950"/>
-            <a:ext cx="5400675" cy="1962150"/>
+                <a16:creationId xmlns:a16="http://schemas.microsoft.com/office/drawing/2014/main" id="{12F7EBCE-EDD0-439C-A22D-AFB8EDCAD143}"/>
+              </a:ext>
+            </a:extLst>
+          </p:cNvPr>
+          <p:cNvSpPr>
+            <a:spLocks xmlns:a="http://schemas.openxmlformats.org/drawingml/2006/main" noGrp="1"/>
+          </p:cNvSpPr>
+          <p:nvPr/>
+        </p:nvSpPr>
+        <p:spPr>
+          <a:xfrm xmlns:a="http://schemas.openxmlformats.org/drawingml/2006/main">
+            <a:off x="7734300" y="1952625"/>
+            <a:ext cx="3848100" cy="1581150"/>
           </a:xfrm>
           <a:prstGeom xmlns:a="http://schemas.openxmlformats.org/drawingml/2006/main" prst="roundRect">
             <a:avLst>
-              <a:gd name="adj" fmla="val 8738"/>
+              <a:gd name="adj" fmla="val 10843"/>
             </a:avLst>
           </a:prstGeom>
           <a:solidFill xmlns:a="http://schemas.openxmlformats.org/drawingml/2006/main">
@@ -15155,19 +15019,19 @@
           <p:cNvPr id="16" name="">
             <a:extLst xmlns:a="http://schemas.openxmlformats.org/drawingml/2006/main">
               <a:ext uri="{FF2B5EF4-FFF2-40B4-BE49-F238E27FC236}">
-                <a16:creationId xmlns:a16="http://schemas.microsoft.com/office/drawing/2014/main" id="{5FA64088-8D42-40A0-9528-DDEE810783FB}"/>
-              </a:ext>
-            </a:extLst>
-          </p:cNvPr>
-          <p:cNvSpPr>
-            <a:spLocks xmlns:a="http://schemas.openxmlformats.org/drawingml/2006/main" noGrp="1"/>
-          </p:cNvSpPr>
-          <p:nvPr/>
-        </p:nvSpPr>
-        <p:spPr>
-          <a:xfrm xmlns:a="http://schemas.openxmlformats.org/drawingml/2006/main">
-            <a:off x="6181725" y="1885950"/>
-            <a:ext cx="66675" cy="1962150"/>
+                <a16:creationId xmlns:a16="http://schemas.microsoft.com/office/drawing/2014/main" id="{17A5399C-1E15-407C-8B91-2EC970338702}"/>
+              </a:ext>
+            </a:extLst>
+          </p:cNvPr>
+          <p:cNvSpPr>
+            <a:spLocks xmlns:a="http://schemas.openxmlformats.org/drawingml/2006/main" noGrp="1"/>
+          </p:cNvSpPr>
+          <p:nvPr/>
+        </p:nvSpPr>
+        <p:spPr>
+          <a:xfrm xmlns:a="http://schemas.openxmlformats.org/drawingml/2006/main">
+            <a:off x="7734300" y="1952625"/>
+            <a:ext cx="66675" cy="1581150"/>
           </a:xfrm>
           <a:prstGeom xmlns:a="http://schemas.openxmlformats.org/drawingml/2006/main" prst="rect">
             <a:avLst/>
@@ -15186,19 +15050,19 @@
           <p:cNvPr id="17" name="">
             <a:extLst xmlns:a="http://schemas.openxmlformats.org/drawingml/2006/main">
               <a:ext uri="{FF2B5EF4-FFF2-40B4-BE49-F238E27FC236}">
-                <a16:creationId xmlns:a16="http://schemas.microsoft.com/office/drawing/2014/main" id="{9DC388F3-D7C4-4CC2-B75B-9095B4C3A16C}"/>
-              </a:ext>
-            </a:extLst>
-          </p:cNvPr>
-          <p:cNvSpPr>
-            <a:spLocks xmlns:a="http://schemas.openxmlformats.org/drawingml/2006/main" noGrp="1"/>
-          </p:cNvSpPr>
-          <p:nvPr/>
-        </p:nvSpPr>
-        <p:spPr>
-          <a:xfrm xmlns:a="http://schemas.openxmlformats.org/drawingml/2006/main">
-            <a:off x="6391275" y="2038350"/>
-            <a:ext cx="5038725" cy="419100"/>
+                <a16:creationId xmlns:a16="http://schemas.microsoft.com/office/drawing/2014/main" id="{8D955A29-B969-4CF8-A3D3-5C7E16B54F2E}"/>
+              </a:ext>
+            </a:extLst>
+          </p:cNvPr>
+          <p:cNvSpPr>
+            <a:spLocks xmlns:a="http://schemas.openxmlformats.org/drawingml/2006/main" noGrp="1"/>
+          </p:cNvSpPr>
+          <p:nvPr/>
+        </p:nvSpPr>
+        <p:spPr>
+          <a:xfrm xmlns:a="http://schemas.openxmlformats.org/drawingml/2006/main">
+            <a:off x="7943850" y="2105025"/>
+            <a:ext cx="3486150" cy="419100"/>
           </a:xfrm>
           <a:prstGeom xmlns:a="http://schemas.openxmlformats.org/drawingml/2006/main" prst="rect">
             <a:avLst/>
@@ -15211,7 +15075,7 @@
         </p:spPr>
         <p:txBody>
           <a:bodyPr xmlns:a="http://schemas.openxmlformats.org/drawingml/2006/main" lIns="76200" tIns="57150" rIns="76200" bIns="57150" anchor="ctr">
-            <a:normAutofit fontScale="100000"/>
+            <a:normAutofit fontScale="72670"/>
           </a:bodyPr>
           <a:lstStyle xmlns:a="http://schemas.openxmlformats.org/drawingml/2006/main"/>
           <a:p xmlns:a="http://schemas.openxmlformats.org/drawingml/2006/main">
@@ -15248,23 +15112,23 @@
           <p:cNvPr id="18" name="">
             <a:extLst xmlns:a="http://schemas.openxmlformats.org/drawingml/2006/main">
               <a:ext uri="{FF2B5EF4-FFF2-40B4-BE49-F238E27FC236}">
-                <a16:creationId xmlns:a16="http://schemas.microsoft.com/office/drawing/2014/main" id="{65F2844E-465E-4699-98C8-79B3DB193261}"/>
-              </a:ext>
-            </a:extLst>
-          </p:cNvPr>
-          <p:cNvSpPr>
-            <a:spLocks xmlns:a="http://schemas.openxmlformats.org/drawingml/2006/main" noGrp="1"/>
-          </p:cNvSpPr>
-          <p:nvPr/>
-        </p:nvSpPr>
-        <p:spPr>
-          <a:xfrm xmlns:a="http://schemas.openxmlformats.org/drawingml/2006/main">
-            <a:off x="609600" y="4019550"/>
-            <a:ext cx="5400675" cy="1962150"/>
+                <a16:creationId xmlns:a16="http://schemas.microsoft.com/office/drawing/2014/main" id="{B91363B1-169C-4F3F-8EAE-98093C9F802E}"/>
+              </a:ext>
+            </a:extLst>
+          </p:cNvPr>
+          <p:cNvSpPr>
+            <a:spLocks xmlns:a="http://schemas.openxmlformats.org/drawingml/2006/main" noGrp="1"/>
+          </p:cNvSpPr>
+          <p:nvPr/>
+        </p:nvSpPr>
+        <p:spPr>
+          <a:xfrm xmlns:a="http://schemas.openxmlformats.org/drawingml/2006/main">
+            <a:off x="3714750" y="3705225"/>
+            <a:ext cx="3848100" cy="1581150"/>
           </a:xfrm>
           <a:prstGeom xmlns:a="http://schemas.openxmlformats.org/drawingml/2006/main" prst="roundRect">
             <a:avLst>
-              <a:gd name="adj" fmla="val 8738"/>
+              <a:gd name="adj" fmla="val 10843"/>
             </a:avLst>
           </a:prstGeom>
           <a:solidFill xmlns:a="http://schemas.openxmlformats.org/drawingml/2006/main">
@@ -15283,19 +15147,19 @@
           <p:cNvPr id="19" name="">
             <a:extLst xmlns:a="http://schemas.openxmlformats.org/drawingml/2006/main">
               <a:ext uri="{FF2B5EF4-FFF2-40B4-BE49-F238E27FC236}">
-                <a16:creationId xmlns:a16="http://schemas.microsoft.com/office/drawing/2014/main" id="{0BDD08F8-392E-4B9B-9986-1B485C5F23BC}"/>
-              </a:ext>
-            </a:extLst>
-          </p:cNvPr>
-          <p:cNvSpPr>
-            <a:spLocks xmlns:a="http://schemas.openxmlformats.org/drawingml/2006/main" noGrp="1"/>
-          </p:cNvSpPr>
-          <p:nvPr/>
-        </p:nvSpPr>
-        <p:spPr>
-          <a:xfrm xmlns:a="http://schemas.openxmlformats.org/drawingml/2006/main">
-            <a:off x="609600" y="4019550"/>
-            <a:ext cx="66675" cy="1962150"/>
+                <a16:creationId xmlns:a16="http://schemas.microsoft.com/office/drawing/2014/main" id="{99ADADDA-FC54-4BA8-A98F-DFD5F1F78FAC}"/>
+              </a:ext>
+            </a:extLst>
+          </p:cNvPr>
+          <p:cNvSpPr>
+            <a:spLocks xmlns:a="http://schemas.openxmlformats.org/drawingml/2006/main" noGrp="1"/>
+          </p:cNvSpPr>
+          <p:nvPr/>
+        </p:nvSpPr>
+        <p:spPr>
+          <a:xfrm xmlns:a="http://schemas.openxmlformats.org/drawingml/2006/main">
+            <a:off x="3714750" y="3705225"/>
+            <a:ext cx="66675" cy="1581150"/>
           </a:xfrm>
           <a:prstGeom xmlns:a="http://schemas.openxmlformats.org/drawingml/2006/main" prst="rect">
             <a:avLst/>
@@ -15314,19 +15178,19 @@
           <p:cNvPr id="20" name="">
             <a:extLst xmlns:a="http://schemas.openxmlformats.org/drawingml/2006/main">
               <a:ext uri="{FF2B5EF4-FFF2-40B4-BE49-F238E27FC236}">
-                <a16:creationId xmlns:a16="http://schemas.microsoft.com/office/drawing/2014/main" id="{1B6F82A2-7A39-4375-AD6D-2E455E0491D3}"/>
-              </a:ext>
-            </a:extLst>
-          </p:cNvPr>
-          <p:cNvSpPr>
-            <a:spLocks xmlns:a="http://schemas.openxmlformats.org/drawingml/2006/main" noGrp="1"/>
-          </p:cNvSpPr>
-          <p:nvPr/>
-        </p:nvSpPr>
-        <p:spPr>
-          <a:xfrm xmlns:a="http://schemas.openxmlformats.org/drawingml/2006/main">
-            <a:off x="819150" y="4171950"/>
-            <a:ext cx="5038725" cy="419100"/>
+                <a16:creationId xmlns:a16="http://schemas.microsoft.com/office/drawing/2014/main" id="{F0958504-54DB-46F5-B945-B0FF5238B5A1}"/>
+              </a:ext>
+            </a:extLst>
+          </p:cNvPr>
+          <p:cNvSpPr>
+            <a:spLocks xmlns:a="http://schemas.openxmlformats.org/drawingml/2006/main" noGrp="1"/>
+          </p:cNvSpPr>
+          <p:nvPr/>
+        </p:nvSpPr>
+        <p:spPr>
+          <a:xfrm xmlns:a="http://schemas.openxmlformats.org/drawingml/2006/main">
+            <a:off x="3924300" y="3857625"/>
+            <a:ext cx="3486150" cy="419100"/>
           </a:xfrm>
           <a:prstGeom xmlns:a="http://schemas.openxmlformats.org/drawingml/2006/main" prst="rect">
             <a:avLst/>
@@ -15339,7 +15203,7 @@
         </p:spPr>
         <p:txBody>
           <a:bodyPr xmlns:a="http://schemas.openxmlformats.org/drawingml/2006/main" lIns="76200" tIns="57150" rIns="76200" bIns="57150" anchor="ctr">
-            <a:normAutofit fontScale="100000"/>
+            <a:normAutofit fontScale="93593"/>
           </a:bodyPr>
           <a:lstStyle xmlns:a="http://schemas.openxmlformats.org/drawingml/2006/main"/>
           <a:p xmlns:a="http://schemas.openxmlformats.org/drawingml/2006/main">
@@ -15376,23 +15240,23 @@
           <p:cNvPr id="21" name="">
             <a:extLst xmlns:a="http://schemas.openxmlformats.org/drawingml/2006/main">
               <a:ext uri="{FF2B5EF4-FFF2-40B4-BE49-F238E27FC236}">
-                <a16:creationId xmlns:a16="http://schemas.microsoft.com/office/drawing/2014/main" id="{B2721F09-9782-495C-AF55-B6B0FBDAE4A6}"/>
-              </a:ext>
-            </a:extLst>
-          </p:cNvPr>
-          <p:cNvSpPr>
-            <a:spLocks xmlns:a="http://schemas.openxmlformats.org/drawingml/2006/main" noGrp="1"/>
-          </p:cNvSpPr>
-          <p:nvPr/>
-        </p:nvSpPr>
-        <p:spPr>
-          <a:xfrm xmlns:a="http://schemas.openxmlformats.org/drawingml/2006/main">
-            <a:off x="6181725" y="4019550"/>
-            <a:ext cx="5400675" cy="1962150"/>
+                <a16:creationId xmlns:a16="http://schemas.microsoft.com/office/drawing/2014/main" id="{59872580-FF70-4C5D-B639-37D2FEDCC95B}"/>
+              </a:ext>
+            </a:extLst>
+          </p:cNvPr>
+          <p:cNvSpPr>
+            <a:spLocks xmlns:a="http://schemas.openxmlformats.org/drawingml/2006/main" noGrp="1"/>
+          </p:cNvSpPr>
+          <p:nvPr/>
+        </p:nvSpPr>
+        <p:spPr>
+          <a:xfrm xmlns:a="http://schemas.openxmlformats.org/drawingml/2006/main">
+            <a:off x="7734300" y="3705225"/>
+            <a:ext cx="3848100" cy="1581150"/>
           </a:xfrm>
           <a:prstGeom xmlns:a="http://schemas.openxmlformats.org/drawingml/2006/main" prst="roundRect">
             <a:avLst>
-              <a:gd name="adj" fmla="val 8738"/>
+              <a:gd name="adj" fmla="val 10843"/>
             </a:avLst>
           </a:prstGeom>
           <a:solidFill xmlns:a="http://schemas.openxmlformats.org/drawingml/2006/main">
@@ -15411,19 +15275,19 @@
           <p:cNvPr id="22" name="">
             <a:extLst xmlns:a="http://schemas.openxmlformats.org/drawingml/2006/main">
               <a:ext uri="{FF2B5EF4-FFF2-40B4-BE49-F238E27FC236}">
-                <a16:creationId xmlns:a16="http://schemas.microsoft.com/office/drawing/2014/main" id="{FDBC8FB2-DCCF-43E3-A54A-49DCB86BCFBF}"/>
-              </a:ext>
-            </a:extLst>
-          </p:cNvPr>
-          <p:cNvSpPr>
-            <a:spLocks xmlns:a="http://schemas.openxmlformats.org/drawingml/2006/main" noGrp="1"/>
-          </p:cNvSpPr>
-          <p:nvPr/>
-        </p:nvSpPr>
-        <p:spPr>
-          <a:xfrm xmlns:a="http://schemas.openxmlformats.org/drawingml/2006/main">
-            <a:off x="6181725" y="4019550"/>
-            <a:ext cx="66675" cy="1962150"/>
+                <a16:creationId xmlns:a16="http://schemas.microsoft.com/office/drawing/2014/main" id="{4E997217-817D-4015-A6F7-D2F334C86649}"/>
+              </a:ext>
+            </a:extLst>
+          </p:cNvPr>
+          <p:cNvSpPr>
+            <a:spLocks xmlns:a="http://schemas.openxmlformats.org/drawingml/2006/main" noGrp="1"/>
+          </p:cNvSpPr>
+          <p:nvPr/>
+        </p:nvSpPr>
+        <p:spPr>
+          <a:xfrm xmlns:a="http://schemas.openxmlformats.org/drawingml/2006/main">
+            <a:off x="7734300" y="3705225"/>
+            <a:ext cx="66675" cy="1581150"/>
           </a:xfrm>
           <a:prstGeom xmlns:a="http://schemas.openxmlformats.org/drawingml/2006/main" prst="rect">
             <a:avLst/>
@@ -15442,24 +15306,88 @@
           <p:cNvPr id="23" name="">
             <a:extLst xmlns:a="http://schemas.openxmlformats.org/drawingml/2006/main">
               <a:ext uri="{FF2B5EF4-FFF2-40B4-BE49-F238E27FC236}">
-                <a16:creationId xmlns:a16="http://schemas.microsoft.com/office/drawing/2014/main" id="{E87E337B-F5FE-4C72-A8B6-293007B8A6AB}"/>
-              </a:ext>
-            </a:extLst>
-          </p:cNvPr>
-          <p:cNvSpPr>
-            <a:spLocks xmlns:a="http://schemas.openxmlformats.org/drawingml/2006/main" noGrp="1"/>
-          </p:cNvSpPr>
-          <p:nvPr/>
-        </p:nvSpPr>
-        <p:spPr>
-          <a:xfrm xmlns:a="http://schemas.openxmlformats.org/drawingml/2006/main">
-            <a:off x="6391275" y="4171950"/>
-            <a:ext cx="5038725" cy="419100"/>
+                <a16:creationId xmlns:a16="http://schemas.microsoft.com/office/drawing/2014/main" id="{943499A2-08DC-425F-A85B-BF752BB47035}"/>
+              </a:ext>
+            </a:extLst>
+          </p:cNvPr>
+          <p:cNvSpPr>
+            <a:spLocks xmlns:a="http://schemas.openxmlformats.org/drawingml/2006/main" noGrp="1"/>
+          </p:cNvSpPr>
+          <p:nvPr/>
+        </p:nvSpPr>
+        <p:spPr>
+          <a:xfrm xmlns:a="http://schemas.openxmlformats.org/drawingml/2006/main">
+            <a:off x="7943850" y="3857625"/>
+            <a:ext cx="3486150" cy="419100"/>
           </a:xfrm>
           <a:prstGeom xmlns:a="http://schemas.openxmlformats.org/drawingml/2006/main" prst="rect">
             <a:avLst/>
           </a:prstGeom>
           <a:noFill xmlns:a="http://schemas.openxmlformats.org/drawingml/2006/main"/>
+          <a:ln xmlns:a="http://schemas.openxmlformats.org/drawingml/2006/main" w="0">
+            <a:noFill/>
+            <a:prstDash val="solid"/>
+          </a:ln>
+        </p:spPr>
+        <p:txBody>
+          <a:bodyPr xmlns:a="http://schemas.openxmlformats.org/drawingml/2006/main" lIns="76200" tIns="57150" rIns="76200" bIns="57150" anchor="ctr">
+            <a:normAutofit fontScale="69020"/>
+          </a:bodyPr>
+          <a:lstStyle xmlns:a="http://schemas.openxmlformats.org/drawingml/2006/main"/>
+          <a:p xmlns:a="http://schemas.openxmlformats.org/drawingml/2006/main">
+            <a:pPr algn="l">
+              <a:lnSpc>
+                <a:spcPct val="108000"/>
+              </a:lnSpc>
+              <a:buNone/>
+              <a:defRPr sz="1650" b="1">
+                <a:solidFill>
+                  <a:srgbClr val="071426"/>
+                </a:solidFill>
+                <a:latin typeface="Aptos Display"/>
+                <a:ea typeface="Aptos Display"/>
+                <a:cs typeface="Aptos Display"/>
+              </a:defRPr>
+            </a:pPr>
+            <a:r>
+              <a:rPr sz="1650" b="1">
+                <a:solidFill>
+                  <a:srgbClr val="071426"/>
+                </a:solidFill>
+                <a:latin typeface="Aptos Display"/>
+                <a:ea typeface="Aptos Display"/>
+                <a:cs typeface="Aptos Display"/>
+              </a:rPr>
+              <a:t>parallel payments without a global balance store</a:t>
+            </a:r>
+          </a:p>
+        </p:txBody>
+      </p:sp>
+      <p:sp>
+        <p:nvSpPr>
+          <p:cNvPr id="24" name="">
+            <a:extLst xmlns:a="http://schemas.openxmlformats.org/drawingml/2006/main">
+              <a:ext uri="{FF2B5EF4-FFF2-40B4-BE49-F238E27FC236}">
+                <a16:creationId xmlns:a16="http://schemas.microsoft.com/office/drawing/2014/main" id="{E7F8E629-EB6F-4BC1-8867-870876F42284}"/>
+              </a:ext>
+            </a:extLst>
+          </p:cNvPr>
+          <p:cNvSpPr>
+            <a:spLocks xmlns:a="http://schemas.openxmlformats.org/drawingml/2006/main" noGrp="1"/>
+          </p:cNvSpPr>
+          <p:nvPr/>
+        </p:nvSpPr>
+        <p:spPr>
+          <a:xfrm xmlns:a="http://schemas.openxmlformats.org/drawingml/2006/main">
+            <a:off x="609600" y="5505450"/>
+            <a:ext cx="10972800" cy="666750"/>
+          </a:xfrm>
+          <a:prstGeom xmlns:a="http://schemas.openxmlformats.org/drawingml/2006/main" prst="rect">
+            <a:avLst/>
+          </a:prstGeom>
+          <a:solidFill xmlns:a="http://schemas.openxmlformats.org/drawingml/2006/main">
+            <a:srgbClr val="FFF7E6"/>
+          </a:solidFill>
           <a:ln xmlns:a="http://schemas.openxmlformats.org/drawingml/2006/main" w="0">
             <a:noFill/>
             <a:prstDash val="solid"/>
@@ -15471,71 +15399,7 @@
           </a:bodyPr>
           <a:lstStyle xmlns:a="http://schemas.openxmlformats.org/drawingml/2006/main"/>
           <a:p xmlns:a="http://schemas.openxmlformats.org/drawingml/2006/main">
-            <a:pPr algn="l">
-              <a:lnSpc>
-                <a:spcPct val="108000"/>
-              </a:lnSpc>
-              <a:buNone/>
-              <a:defRPr sz="1650" b="1">
-                <a:solidFill>
-                  <a:srgbClr val="071426"/>
-                </a:solidFill>
-                <a:latin typeface="Aptos Display"/>
-                <a:ea typeface="Aptos Display"/>
-                <a:cs typeface="Aptos Display"/>
-              </a:defRPr>
-            </a:pPr>
-            <a:r>
-              <a:rPr sz="1650" b="1">
-                <a:solidFill>
-                  <a:srgbClr val="071426"/>
-                </a:solidFill>
-                <a:latin typeface="Aptos Display"/>
-                <a:ea typeface="Aptos Display"/>
-                <a:cs typeface="Aptos Display"/>
-              </a:rPr>
-              <a:t>parallel payments without a global balance store</a:t>
-            </a:r>
-          </a:p>
-        </p:txBody>
-      </p:sp>
-      <p:sp>
-        <p:nvSpPr>
-          <p:cNvPr id="24" name="">
-            <a:extLst xmlns:a="http://schemas.openxmlformats.org/drawingml/2006/main">
-              <a:ext uri="{FF2B5EF4-FFF2-40B4-BE49-F238E27FC236}">
-                <a16:creationId xmlns:a16="http://schemas.microsoft.com/office/drawing/2014/main" id="{A7A81E71-7990-4039-BA05-70C4E10258B6}"/>
-              </a:ext>
-            </a:extLst>
-          </p:cNvPr>
-          <p:cNvSpPr>
-            <a:spLocks xmlns:a="http://schemas.openxmlformats.org/drawingml/2006/main" noGrp="1"/>
-          </p:cNvSpPr>
-          <p:nvPr/>
-        </p:nvSpPr>
-        <p:spPr>
-          <a:xfrm xmlns:a="http://schemas.openxmlformats.org/drawingml/2006/main">
-            <a:off x="4000500" y="5791200"/>
-            <a:ext cx="7581900" cy="457200"/>
-          </a:xfrm>
-          <a:prstGeom xmlns:a="http://schemas.openxmlformats.org/drawingml/2006/main" prst="rect">
-            <a:avLst/>
-          </a:prstGeom>
-          <a:solidFill xmlns:a="http://schemas.openxmlformats.org/drawingml/2006/main">
-            <a:srgbClr val="FFF7E6"/>
-          </a:solidFill>
-          <a:ln xmlns:a="http://schemas.openxmlformats.org/drawingml/2006/main" w="0">
-            <a:noFill/>
-            <a:prstDash val="solid"/>
-          </a:ln>
-        </p:spPr>
-        <p:txBody>
-          <a:bodyPr xmlns:a="http://schemas.openxmlformats.org/drawingml/2006/main" lIns="76200" tIns="57150" rIns="76200" bIns="57150" anchor="ctr">
-            <a:normAutofit fontScale="100000"/>
-          </a:bodyPr>
-          <a:lstStyle xmlns:a="http://schemas.openxmlformats.org/drawingml/2006/main"/>
-          <a:p xmlns:a="http://schemas.openxmlformats.org/drawingml/2006/main">
-            <a:pPr algn="l">
+            <a:pPr algn="ctr">
               <a:lnSpc>
                 <a:spcPct val="108000"/>
               </a:lnSpc>
@@ -15566,7 +15430,7 @@
     </p:spTree>
     <p:extLst>
       <p:ext uri="{BB962C8B-B14F-4D97-AF65-F5344CB8AC3E}">
-        <p14:creationId xmlns:p14="http://schemas.microsoft.com/office/powerpoint/2010/main" val="1552002607"/>
+        <p14:creationId xmlns:p14="http://schemas.microsoft.com/office/powerpoint/2010/main" val="1135793849"/>
       </p:ext>
     </p:extLst>
   </p:cSld>
@@ -15597,7 +15461,7 @@
           <p:cNvPr id="29" name="">
             <a:extLst xmlns:a="http://schemas.openxmlformats.org/drawingml/2006/main">
               <a:ext uri="{FF2B5EF4-FFF2-40B4-BE49-F238E27FC236}">
-                <a16:creationId xmlns:a16="http://schemas.microsoft.com/office/drawing/2014/main" id="{87C408FE-5888-43FD-BE7F-B6AD3879DF44}"/>
+                <a16:creationId xmlns:a16="http://schemas.microsoft.com/office/drawing/2014/main" id="{8A53330D-1261-4337-852F-394193090BE3}"/>
               </a:ext>
             </a:extLst>
           </p:cNvPr>
@@ -15628,7 +15492,7 @@
           <p:cNvPr id="2" name="">
             <a:extLst xmlns:a="http://schemas.openxmlformats.org/drawingml/2006/main">
               <a:ext uri="{FF2B5EF4-FFF2-40B4-BE49-F238E27FC236}">
-                <a16:creationId xmlns:a16="http://schemas.microsoft.com/office/drawing/2014/main" id="{C0D93811-FFE6-4B20-8FC5-CDF6D06C07F1}"/>
+                <a16:creationId xmlns:a16="http://schemas.microsoft.com/office/drawing/2014/main" id="{E5FE086C-0909-460A-ABD4-9B6ABBFA2FC8}"/>
               </a:ext>
             </a:extLst>
           </p:cNvPr>
@@ -15690,7 +15554,7 @@
           <p:cNvPr id="3" name="">
             <a:extLst xmlns:a="http://schemas.openxmlformats.org/drawingml/2006/main">
               <a:ext uri="{FF2B5EF4-FFF2-40B4-BE49-F238E27FC236}">
-                <a16:creationId xmlns:a16="http://schemas.microsoft.com/office/drawing/2014/main" id="{69AD8496-9F2A-49F6-9FFA-6BB7922C4AB7}"/>
+                <a16:creationId xmlns:a16="http://schemas.microsoft.com/office/drawing/2014/main" id="{96D6BA43-CF00-4668-BEDB-3F1C4F92900D}"/>
               </a:ext>
             </a:extLst>
           </p:cNvPr>
@@ -15752,7 +15616,7 @@
           <p:cNvPr id="4" name="">
             <a:extLst xmlns:a="http://schemas.openxmlformats.org/drawingml/2006/main">
               <a:ext uri="{FF2B5EF4-FFF2-40B4-BE49-F238E27FC236}">
-                <a16:creationId xmlns:a16="http://schemas.microsoft.com/office/drawing/2014/main" id="{D6FB42EB-644D-4A94-A40D-360B9DD0CE8A}"/>
+                <a16:creationId xmlns:a16="http://schemas.microsoft.com/office/drawing/2014/main" id="{046BD872-9F0E-49B4-8F8D-DF1D3F33C0EB}"/>
               </a:ext>
             </a:extLst>
           </p:cNvPr>
@@ -15787,7 +15651,7 @@
           <p:nvPr/>
         </p:nvPicPr>
         <p:blipFill>
-          <a:blip xmlns:r="http://schemas.openxmlformats.org/officeDocument/2006/relationships" xmlns:a="http://schemas.openxmlformats.org/drawingml/2006/main" r:embed="R449f8a2f1aeb4e66"/>
+          <a:blip xmlns:r="http://schemas.openxmlformats.org/officeDocument/2006/relationships" xmlns:a="http://schemas.openxmlformats.org/drawingml/2006/main" r:embed="R119647b05bb745f8"/>
           <a:srcRect xmlns:a="http://schemas.openxmlformats.org/drawingml/2006/main" l="0" t="0" r="0" b="0"/>
           <a:stretch xmlns:a="http://schemas.openxmlformats.org/drawingml/2006/main">
             <a:fillRect l="0" t="0" r="0" b="0"/>
@@ -15808,7 +15672,7 @@
           <p:cNvPr id="6" name="">
             <a:extLst xmlns:a="http://schemas.openxmlformats.org/drawingml/2006/main">
               <a:ext uri="{FF2B5EF4-FFF2-40B4-BE49-F238E27FC236}">
-                <a16:creationId xmlns:a16="http://schemas.microsoft.com/office/drawing/2014/main" id="{E7C14340-1F5A-4D27-A2EE-3F11BD88FD4A}"/>
+                <a16:creationId xmlns:a16="http://schemas.microsoft.com/office/drawing/2014/main" id="{DAA594D5-D81F-4DAE-B0E7-EA25F4445651}"/>
               </a:ext>
             </a:extLst>
           </p:cNvPr>
@@ -15870,7 +15734,7 @@
           <p:cNvPr id="7" name="">
             <a:extLst xmlns:a="http://schemas.openxmlformats.org/drawingml/2006/main">
               <a:ext uri="{FF2B5EF4-FFF2-40B4-BE49-F238E27FC236}">
-                <a16:creationId xmlns:a16="http://schemas.microsoft.com/office/drawing/2014/main" id="{FFE50DA8-7C80-4DD7-97A8-24DC66443E0B}"/>
+                <a16:creationId xmlns:a16="http://schemas.microsoft.com/office/drawing/2014/main" id="{DAAFC5D5-A25A-4416-B158-4DEFEEE6A10F}"/>
               </a:ext>
             </a:extLst>
           </p:cNvPr>
@@ -15932,7 +15796,7 @@
           <p:cNvPr id="8" name="">
             <a:extLst xmlns:a="http://schemas.openxmlformats.org/drawingml/2006/main">
               <a:ext uri="{FF2B5EF4-FFF2-40B4-BE49-F238E27FC236}">
-                <a16:creationId xmlns:a16="http://schemas.microsoft.com/office/drawing/2014/main" id="{894DC971-8EB6-492A-92E7-1B192A417A95}"/>
+                <a16:creationId xmlns:a16="http://schemas.microsoft.com/office/drawing/2014/main" id="{7CDEB40B-9529-49EE-A197-934D21D04435}"/>
               </a:ext>
             </a:extLst>
           </p:cNvPr>
@@ -15967,7 +15831,7 @@
           <p:cNvPr id="9" name="">
             <a:extLst xmlns:a="http://schemas.openxmlformats.org/drawingml/2006/main">
               <a:ext uri="{FF2B5EF4-FFF2-40B4-BE49-F238E27FC236}">
-                <a16:creationId xmlns:a16="http://schemas.microsoft.com/office/drawing/2014/main" id="{48847E12-C62C-4107-B61E-1514FC05511E}"/>
+                <a16:creationId xmlns:a16="http://schemas.microsoft.com/office/drawing/2014/main" id="{02ED5A82-BB13-4BB6-9137-EDAC32BB5FF0}"/>
               </a:ext>
             </a:extLst>
           </p:cNvPr>
@@ -15998,7 +15862,7 @@
           <p:cNvPr id="10" name="">
             <a:extLst xmlns:a="http://schemas.openxmlformats.org/drawingml/2006/main">
               <a:ext uri="{FF2B5EF4-FFF2-40B4-BE49-F238E27FC236}">
-                <a16:creationId xmlns:a16="http://schemas.microsoft.com/office/drawing/2014/main" id="{7DC7B251-65BE-4535-B86D-4EA2F9313DE0}"/>
+                <a16:creationId xmlns:a16="http://schemas.microsoft.com/office/drawing/2014/main" id="{86BB0108-298D-4982-B5C6-9E711344DB92}"/>
               </a:ext>
             </a:extLst>
           </p:cNvPr>
@@ -16060,7 +15924,7 @@
           <p:cNvPr id="11" name="">
             <a:extLst xmlns:a="http://schemas.openxmlformats.org/drawingml/2006/main">
               <a:ext uri="{FF2B5EF4-FFF2-40B4-BE49-F238E27FC236}">
-                <a16:creationId xmlns:a16="http://schemas.microsoft.com/office/drawing/2014/main" id="{CA6D942D-4C2D-408C-8E47-83A2F04F5A6C}"/>
+                <a16:creationId xmlns:a16="http://schemas.microsoft.com/office/drawing/2014/main" id="{124EE3BE-22BF-46EE-8FE5-773017FD110E}"/>
               </a:ext>
             </a:extLst>
           </p:cNvPr>
@@ -16122,7 +15986,7 @@
           <p:cNvPr id="12" name="">
             <a:extLst xmlns:a="http://schemas.openxmlformats.org/drawingml/2006/main">
               <a:ext uri="{FF2B5EF4-FFF2-40B4-BE49-F238E27FC236}">
-                <a16:creationId xmlns:a16="http://schemas.microsoft.com/office/drawing/2014/main" id="{AD06E470-6A97-4062-AB15-519DF3DBB370}"/>
+                <a16:creationId xmlns:a16="http://schemas.microsoft.com/office/drawing/2014/main" id="{FE53F9FB-7CCE-47C7-8D55-47BA5BE16098}"/>
               </a:ext>
             </a:extLst>
           </p:cNvPr>
@@ -16157,7 +16021,7 @@
           <p:cNvPr id="13" name="">
             <a:extLst xmlns:a="http://schemas.openxmlformats.org/drawingml/2006/main">
               <a:ext uri="{FF2B5EF4-FFF2-40B4-BE49-F238E27FC236}">
-                <a16:creationId xmlns:a16="http://schemas.microsoft.com/office/drawing/2014/main" id="{D591CBCF-3393-4B78-A71C-5BA563EA8C64}"/>
+                <a16:creationId xmlns:a16="http://schemas.microsoft.com/office/drawing/2014/main" id="{938E9C4D-CD58-45CD-860D-EE1E6D7F6D72}"/>
               </a:ext>
             </a:extLst>
           </p:cNvPr>
@@ -16188,7 +16052,7 @@
           <p:cNvPr id="14" name="">
             <a:extLst xmlns:a="http://schemas.openxmlformats.org/drawingml/2006/main">
               <a:ext uri="{FF2B5EF4-FFF2-40B4-BE49-F238E27FC236}">
-                <a16:creationId xmlns:a16="http://schemas.microsoft.com/office/drawing/2014/main" id="{01F5C2E5-F629-4A27-BB26-D56F00E436D2}"/>
+                <a16:creationId xmlns:a16="http://schemas.microsoft.com/office/drawing/2014/main" id="{7A0E36F5-D3A8-4D4A-9866-1782B285DD04}"/>
               </a:ext>
             </a:extLst>
           </p:cNvPr>
@@ -16250,7 +16114,7 @@
           <p:cNvPr id="15" name="">
             <a:extLst xmlns:a="http://schemas.openxmlformats.org/drawingml/2006/main">
               <a:ext uri="{FF2B5EF4-FFF2-40B4-BE49-F238E27FC236}">
-                <a16:creationId xmlns:a16="http://schemas.microsoft.com/office/drawing/2014/main" id="{7FE0C818-00C5-43A3-AC7E-CCE121BCD127}"/>
+                <a16:creationId xmlns:a16="http://schemas.microsoft.com/office/drawing/2014/main" id="{61AF2C95-E30A-49C3-89A5-6C36FC01FD4D}"/>
               </a:ext>
             </a:extLst>
           </p:cNvPr>
@@ -16312,7 +16176,7 @@
           <p:cNvPr id="16" name="">
             <a:extLst xmlns:a="http://schemas.openxmlformats.org/drawingml/2006/main">
               <a:ext uri="{FF2B5EF4-FFF2-40B4-BE49-F238E27FC236}">
-                <a16:creationId xmlns:a16="http://schemas.microsoft.com/office/drawing/2014/main" id="{D4850575-D81E-4538-9F29-E946CD20E381}"/>
+                <a16:creationId xmlns:a16="http://schemas.microsoft.com/office/drawing/2014/main" id="{52EC082D-D0D0-4845-AFFC-33D69279201F}"/>
               </a:ext>
             </a:extLst>
           </p:cNvPr>
@@ -16347,7 +16211,7 @@
           <p:cNvPr id="17" name="">
             <a:extLst xmlns:a="http://schemas.openxmlformats.org/drawingml/2006/main">
               <a:ext uri="{FF2B5EF4-FFF2-40B4-BE49-F238E27FC236}">
-                <a16:creationId xmlns:a16="http://schemas.microsoft.com/office/drawing/2014/main" id="{89D466DC-8B93-4AAF-AEDC-D66306CA85FC}"/>
+                <a16:creationId xmlns:a16="http://schemas.microsoft.com/office/drawing/2014/main" id="{EA9D3EF1-5A93-417A-8BC5-4D1CCDEDA0A7}"/>
               </a:ext>
             </a:extLst>
           </p:cNvPr>
@@ -16378,7 +16242,7 @@
           <p:cNvPr id="18" name="">
             <a:extLst xmlns:a="http://schemas.openxmlformats.org/drawingml/2006/main">
               <a:ext uri="{FF2B5EF4-FFF2-40B4-BE49-F238E27FC236}">
-                <a16:creationId xmlns:a16="http://schemas.microsoft.com/office/drawing/2014/main" id="{95C1B561-D031-49F5-88C7-CB6C75CF6D1B}"/>
+                <a16:creationId xmlns:a16="http://schemas.microsoft.com/office/drawing/2014/main" id="{137421F0-62C4-4DA9-9E9D-19247182DFEC}"/>
               </a:ext>
             </a:extLst>
           </p:cNvPr>
@@ -16440,7 +16304,7 @@
           <p:cNvPr id="19" name="">
             <a:extLst xmlns:a="http://schemas.openxmlformats.org/drawingml/2006/main">
               <a:ext uri="{FF2B5EF4-FFF2-40B4-BE49-F238E27FC236}">
-                <a16:creationId xmlns:a16="http://schemas.microsoft.com/office/drawing/2014/main" id="{A539E399-AE25-4A69-95BB-59932C4101B5}"/>
+                <a16:creationId xmlns:a16="http://schemas.microsoft.com/office/drawing/2014/main" id="{69DEE6A0-A98D-4075-BFE8-0CF71D92F798}"/>
               </a:ext>
             </a:extLst>
           </p:cNvPr>
@@ -16502,7 +16366,7 @@
           <p:cNvPr id="20" name="">
             <a:extLst xmlns:a="http://schemas.openxmlformats.org/drawingml/2006/main">
               <a:ext uri="{FF2B5EF4-FFF2-40B4-BE49-F238E27FC236}">
-                <a16:creationId xmlns:a16="http://schemas.microsoft.com/office/drawing/2014/main" id="{CECE7845-A224-4C53-A6BD-9980767F09BA}"/>
+                <a16:creationId xmlns:a16="http://schemas.microsoft.com/office/drawing/2014/main" id="{C18C4C01-DA00-45EC-BBF4-7EB7168B7E1D}"/>
               </a:ext>
             </a:extLst>
           </p:cNvPr>
@@ -16537,7 +16401,7 @@
           <p:cNvPr id="21" name="">
             <a:extLst xmlns:a="http://schemas.openxmlformats.org/drawingml/2006/main">
               <a:ext uri="{FF2B5EF4-FFF2-40B4-BE49-F238E27FC236}">
-                <a16:creationId xmlns:a16="http://schemas.microsoft.com/office/drawing/2014/main" id="{2FDE8D2E-6CBA-44F4-80B6-54B12AF926E5}"/>
+                <a16:creationId xmlns:a16="http://schemas.microsoft.com/office/drawing/2014/main" id="{E6A0DA75-945A-4880-A8D5-027189908AA5}"/>
               </a:ext>
             </a:extLst>
           </p:cNvPr>
@@ -16568,7 +16432,7 @@
           <p:cNvPr id="22" name="">
             <a:extLst xmlns:a="http://schemas.openxmlformats.org/drawingml/2006/main">
               <a:ext uri="{FF2B5EF4-FFF2-40B4-BE49-F238E27FC236}">
-                <a16:creationId xmlns:a16="http://schemas.microsoft.com/office/drawing/2014/main" id="{B1A6416A-73DA-4485-A76D-E9D0AD75771F}"/>
+                <a16:creationId xmlns:a16="http://schemas.microsoft.com/office/drawing/2014/main" id="{DB17CAAC-A451-4998-BD96-973967BBD4C9}"/>
               </a:ext>
             </a:extLst>
           </p:cNvPr>
@@ -16630,7 +16494,7 @@
           <p:cNvPr id="23" name="">
             <a:extLst xmlns:a="http://schemas.openxmlformats.org/drawingml/2006/main">
               <a:ext uri="{FF2B5EF4-FFF2-40B4-BE49-F238E27FC236}">
-                <a16:creationId xmlns:a16="http://schemas.microsoft.com/office/drawing/2014/main" id="{EB231F7F-29FB-443E-81AD-B8FFE6BEA54B}"/>
+                <a16:creationId xmlns:a16="http://schemas.microsoft.com/office/drawing/2014/main" id="{D944CF38-1D49-4066-AC60-3AD1FDDDB234}"/>
               </a:ext>
             </a:extLst>
           </p:cNvPr>
@@ -16692,7 +16556,7 @@
           <p:cNvPr id="24" name="">
             <a:extLst xmlns:a="http://schemas.openxmlformats.org/drawingml/2006/main">
               <a:ext uri="{FF2B5EF4-FFF2-40B4-BE49-F238E27FC236}">
-                <a16:creationId xmlns:a16="http://schemas.microsoft.com/office/drawing/2014/main" id="{2F0AAC10-6EBC-45CF-AB5E-51A6499912DD}"/>
+                <a16:creationId xmlns:a16="http://schemas.microsoft.com/office/drawing/2014/main" id="{EA9DCFDF-5E59-43D7-970D-DEBBB4BEE6E3}"/>
               </a:ext>
             </a:extLst>
           </p:cNvPr>
@@ -16727,7 +16591,7 @@
           <p:cNvPr id="25" name="">
             <a:extLst xmlns:a="http://schemas.openxmlformats.org/drawingml/2006/main">
               <a:ext uri="{FF2B5EF4-FFF2-40B4-BE49-F238E27FC236}">
-                <a16:creationId xmlns:a16="http://schemas.microsoft.com/office/drawing/2014/main" id="{A8A90602-00E7-45F4-BFFF-643EBBABAC01}"/>
+                <a16:creationId xmlns:a16="http://schemas.microsoft.com/office/drawing/2014/main" id="{F010DD4C-FBCC-4545-B19F-A1E0C4700B60}"/>
               </a:ext>
             </a:extLst>
           </p:cNvPr>
@@ -16758,7 +16622,7 @@
           <p:cNvPr id="26" name="">
             <a:extLst xmlns:a="http://schemas.openxmlformats.org/drawingml/2006/main">
               <a:ext uri="{FF2B5EF4-FFF2-40B4-BE49-F238E27FC236}">
-                <a16:creationId xmlns:a16="http://schemas.microsoft.com/office/drawing/2014/main" id="{A2AA21E7-6AD3-4184-A0AC-DE1C4189E1F0}"/>
+                <a16:creationId xmlns:a16="http://schemas.microsoft.com/office/drawing/2014/main" id="{C2751937-E9A1-4F4C-B2C1-CB8ABC9FF507}"/>
               </a:ext>
             </a:extLst>
           </p:cNvPr>
@@ -16820,7 +16684,7 @@
           <p:cNvPr id="27" name="">
             <a:extLst xmlns:a="http://schemas.openxmlformats.org/drawingml/2006/main">
               <a:ext uri="{FF2B5EF4-FFF2-40B4-BE49-F238E27FC236}">
-                <a16:creationId xmlns:a16="http://schemas.microsoft.com/office/drawing/2014/main" id="{F06DCBE0-C792-49B7-947C-1B49FB06F7D3}"/>
+                <a16:creationId xmlns:a16="http://schemas.microsoft.com/office/drawing/2014/main" id="{08373230-65E8-4EED-B4AC-EDCF4ED4CF7C}"/>
               </a:ext>
             </a:extLst>
           </p:cNvPr>
@@ -16882,7 +16746,7 @@
           <p:cNvPr id="28" name="">
             <a:extLst xmlns:a="http://schemas.openxmlformats.org/drawingml/2006/main">
               <a:ext uri="{FF2B5EF4-FFF2-40B4-BE49-F238E27FC236}">
-                <a16:creationId xmlns:a16="http://schemas.microsoft.com/office/drawing/2014/main" id="{A684C69B-EAF2-4456-AA0D-692DC4520E96}"/>
+                <a16:creationId xmlns:a16="http://schemas.microsoft.com/office/drawing/2014/main" id="{DAD40D8D-7C7B-4383-86CA-EB104D833624}"/>
               </a:ext>
             </a:extLst>
           </p:cNvPr>
@@ -16944,7 +16808,7 @@
     </p:spTree>
     <p:extLst>
       <p:ext uri="{BB962C8B-B14F-4D97-AF65-F5344CB8AC3E}">
-        <p14:creationId xmlns:p14="http://schemas.microsoft.com/office/powerpoint/2010/main" val="1465982582"/>
+        <p14:creationId xmlns:p14="http://schemas.microsoft.com/office/powerpoint/2010/main" val="1222687541"/>
       </p:ext>
     </p:extLst>
   </p:cSld>
@@ -16975,7 +16839,7 @@
           <p:cNvPr id="28" name="">
             <a:extLst xmlns:a="http://schemas.openxmlformats.org/drawingml/2006/main">
               <a:ext uri="{FF2B5EF4-FFF2-40B4-BE49-F238E27FC236}">
-                <a16:creationId xmlns:a16="http://schemas.microsoft.com/office/drawing/2014/main" id="{BEF9D078-A9A6-4A51-924A-B23DA701BAAF}"/>
+                <a16:creationId xmlns:a16="http://schemas.microsoft.com/office/drawing/2014/main" id="{0F3B9D6D-17B3-4212-8C00-AE4088274508}"/>
               </a:ext>
             </a:extLst>
           </p:cNvPr>
@@ -17006,7 +16870,7 @@
           <p:cNvPr id="2" name="">
             <a:extLst xmlns:a="http://schemas.openxmlformats.org/drawingml/2006/main">
               <a:ext uri="{FF2B5EF4-FFF2-40B4-BE49-F238E27FC236}">
-                <a16:creationId xmlns:a16="http://schemas.microsoft.com/office/drawing/2014/main" id="{408B4F03-C312-4625-85C9-A22E79545BCA}"/>
+                <a16:creationId xmlns:a16="http://schemas.microsoft.com/office/drawing/2014/main" id="{FA779091-96A0-4979-B205-6B4A9B2BB376}"/>
               </a:ext>
             </a:extLst>
           </p:cNvPr>
@@ -17068,7 +16932,7 @@
           <p:cNvPr id="3" name="">
             <a:extLst xmlns:a="http://schemas.openxmlformats.org/drawingml/2006/main">
               <a:ext uri="{FF2B5EF4-FFF2-40B4-BE49-F238E27FC236}">
-                <a16:creationId xmlns:a16="http://schemas.microsoft.com/office/drawing/2014/main" id="{EDEBE03D-6AE5-4346-9DDD-930EC26FE410}"/>
+                <a16:creationId xmlns:a16="http://schemas.microsoft.com/office/drawing/2014/main" id="{CB9958AE-7FA3-4ACD-B736-D73685A5A4EE}"/>
               </a:ext>
             </a:extLst>
           </p:cNvPr>
@@ -17102,7 +16966,7 @@
                 <a:spcPct val="108000"/>
               </a:lnSpc>
               <a:buNone/>
-              <a:defRPr sz="3150" b="1">
+              <a:defRPr sz="2550" b="1">
                 <a:solidFill>
                   <a:srgbClr val="071426"/>
                 </a:solidFill>
@@ -17112,7 +16976,7 @@
               </a:defRPr>
             </a:pPr>
             <a:r>
-              <a:rPr sz="3150" b="1">
+              <a:rPr sz="2550" b="1">
                 <a:solidFill>
                   <a:srgbClr val="071426"/>
                 </a:solidFill>
@@ -17130,7 +16994,7 @@
           <p:cNvPr id="4" name="">
             <a:extLst xmlns:a="http://schemas.openxmlformats.org/drawingml/2006/main">
               <a:ext uri="{FF2B5EF4-FFF2-40B4-BE49-F238E27FC236}">
-                <a16:creationId xmlns:a16="http://schemas.microsoft.com/office/drawing/2014/main" id="{F540684B-AE92-4D8D-A47B-F2C7DAE09F1E}"/>
+                <a16:creationId xmlns:a16="http://schemas.microsoft.com/office/drawing/2014/main" id="{5CB0C695-BACA-469B-9570-278B2585AF49}"/>
               </a:ext>
             </a:extLst>
           </p:cNvPr>
@@ -17165,7 +17029,7 @@
           <p:nvPr/>
         </p:nvPicPr>
         <p:blipFill>
-          <a:blip xmlns:r="http://schemas.openxmlformats.org/officeDocument/2006/relationships" xmlns:a="http://schemas.openxmlformats.org/drawingml/2006/main" r:embed="R0e93c40001ef4b2b"/>
+          <a:blip xmlns:r="http://schemas.openxmlformats.org/officeDocument/2006/relationships" xmlns:a="http://schemas.openxmlformats.org/drawingml/2006/main" r:embed="Rc833d4e6e3264782"/>
           <a:srcRect xmlns:a="http://schemas.openxmlformats.org/drawingml/2006/main" l="0" t="0" r="0" b="0"/>
           <a:stretch xmlns:a="http://schemas.openxmlformats.org/drawingml/2006/main">
             <a:fillRect l="0" t="0" r="0" b="0"/>
@@ -17186,7 +17050,7 @@
           <p:cNvPr id="6" name="">
             <a:extLst xmlns:a="http://schemas.openxmlformats.org/drawingml/2006/main">
               <a:ext uri="{FF2B5EF4-FFF2-40B4-BE49-F238E27FC236}">
-                <a16:creationId xmlns:a16="http://schemas.microsoft.com/office/drawing/2014/main" id="{AA6A4E42-1CA1-4F7B-94E3-AB119291429D}"/>
+                <a16:creationId xmlns:a16="http://schemas.microsoft.com/office/drawing/2014/main" id="{C0BF8AE1-EF23-4127-B1CE-488D1CB6893A}"/>
               </a:ext>
             </a:extLst>
           </p:cNvPr>
@@ -17248,7 +17112,7 @@
           <p:cNvPr id="7" name="">
             <a:extLst xmlns:a="http://schemas.openxmlformats.org/drawingml/2006/main">
               <a:ext uri="{FF2B5EF4-FFF2-40B4-BE49-F238E27FC236}">
-                <a16:creationId xmlns:a16="http://schemas.microsoft.com/office/drawing/2014/main" id="{6B4217AA-54C5-413F-AFE6-30C7E5D2D336}"/>
+                <a16:creationId xmlns:a16="http://schemas.microsoft.com/office/drawing/2014/main" id="{5CC66A46-36D9-417C-B123-AF74E8FC66C1}"/>
               </a:ext>
             </a:extLst>
           </p:cNvPr>
@@ -17310,7 +17174,7 @@
           <p:cNvPr id="8" name="">
             <a:extLst xmlns:a="http://schemas.openxmlformats.org/drawingml/2006/main">
               <a:ext uri="{FF2B5EF4-FFF2-40B4-BE49-F238E27FC236}">
-                <a16:creationId xmlns:a16="http://schemas.microsoft.com/office/drawing/2014/main" id="{980AA472-651B-4163-958B-890F5E406B37}"/>
+                <a16:creationId xmlns:a16="http://schemas.microsoft.com/office/drawing/2014/main" id="{2302DDA4-FB71-4782-B3EF-5E6D4B67C4EF}"/>
               </a:ext>
             </a:extLst>
           </p:cNvPr>
@@ -17345,7 +17209,7 @@
           <p:cNvPr id="9" name="">
             <a:extLst xmlns:a="http://schemas.openxmlformats.org/drawingml/2006/main">
               <a:ext uri="{FF2B5EF4-FFF2-40B4-BE49-F238E27FC236}">
-                <a16:creationId xmlns:a16="http://schemas.microsoft.com/office/drawing/2014/main" id="{862B863E-B1F8-44D1-9AE1-E6E703C464E1}"/>
+                <a16:creationId xmlns:a16="http://schemas.microsoft.com/office/drawing/2014/main" id="{C9EDBD8E-66C4-4C32-A779-1D105EB9A7FA}"/>
               </a:ext>
             </a:extLst>
           </p:cNvPr>
@@ -17376,7 +17240,7 @@
           <p:cNvPr id="10" name="">
             <a:extLst xmlns:a="http://schemas.openxmlformats.org/drawingml/2006/main">
               <a:ext uri="{FF2B5EF4-FFF2-40B4-BE49-F238E27FC236}">
-                <a16:creationId xmlns:a16="http://schemas.microsoft.com/office/drawing/2014/main" id="{09AF760D-B968-4F77-AD1E-4E7AF8C5D211}"/>
+                <a16:creationId xmlns:a16="http://schemas.microsoft.com/office/drawing/2014/main" id="{D2B4F95A-9BD0-4943-B03D-A801084097A9}"/>
               </a:ext>
             </a:extLst>
           </p:cNvPr>
@@ -17438,7 +17302,7 @@
           <p:cNvPr id="11" name="">
             <a:extLst xmlns:a="http://schemas.openxmlformats.org/drawingml/2006/main">
               <a:ext uri="{FF2B5EF4-FFF2-40B4-BE49-F238E27FC236}">
-                <a16:creationId xmlns:a16="http://schemas.microsoft.com/office/drawing/2014/main" id="{5AC6E7EB-3F9D-473E-A148-B2EA1EDE1285}"/>
+                <a16:creationId xmlns:a16="http://schemas.microsoft.com/office/drawing/2014/main" id="{F8539229-A424-4D63-BF77-D8892D229C14}"/>
               </a:ext>
             </a:extLst>
           </p:cNvPr>
@@ -17500,7 +17364,7 @@
           <p:cNvPr id="12" name="">
             <a:extLst xmlns:a="http://schemas.openxmlformats.org/drawingml/2006/main">
               <a:ext uri="{FF2B5EF4-FFF2-40B4-BE49-F238E27FC236}">
-                <a16:creationId xmlns:a16="http://schemas.microsoft.com/office/drawing/2014/main" id="{BC9578E5-A437-42E7-B15A-024D57F3494A}"/>
+                <a16:creationId xmlns:a16="http://schemas.microsoft.com/office/drawing/2014/main" id="{D9A9E077-9390-4031-8CEC-DC69AF586CDC}"/>
               </a:ext>
             </a:extLst>
           </p:cNvPr>
@@ -17535,7 +17399,7 @@
           <p:cNvPr id="13" name="">
             <a:extLst xmlns:a="http://schemas.openxmlformats.org/drawingml/2006/main">
               <a:ext uri="{FF2B5EF4-FFF2-40B4-BE49-F238E27FC236}">
-                <a16:creationId xmlns:a16="http://schemas.microsoft.com/office/drawing/2014/main" id="{FF359545-3D8D-494B-A39F-0729ECA24898}"/>
+                <a16:creationId xmlns:a16="http://schemas.microsoft.com/office/drawing/2014/main" id="{A0B9A01D-D103-43C3-9D71-6FCD63C499D8}"/>
               </a:ext>
             </a:extLst>
           </p:cNvPr>
@@ -17566,7 +17430,7 @@
           <p:cNvPr id="14" name="">
             <a:extLst xmlns:a="http://schemas.openxmlformats.org/drawingml/2006/main">
               <a:ext uri="{FF2B5EF4-FFF2-40B4-BE49-F238E27FC236}">
-                <a16:creationId xmlns:a16="http://schemas.microsoft.com/office/drawing/2014/main" id="{8F08D3CA-050E-464A-8079-4D6A9D2007CC}"/>
+                <a16:creationId xmlns:a16="http://schemas.microsoft.com/office/drawing/2014/main" id="{8B232588-5D3D-4673-B1A9-B006ADC9DCB9}"/>
               </a:ext>
             </a:extLst>
           </p:cNvPr>
@@ -17628,7 +17492,7 @@
           <p:cNvPr id="15" name="">
             <a:extLst xmlns:a="http://schemas.openxmlformats.org/drawingml/2006/main">
               <a:ext uri="{FF2B5EF4-FFF2-40B4-BE49-F238E27FC236}">
-                <a16:creationId xmlns:a16="http://schemas.microsoft.com/office/drawing/2014/main" id="{17C080C7-2FB6-4A21-B343-36FB0733740A}"/>
+                <a16:creationId xmlns:a16="http://schemas.microsoft.com/office/drawing/2014/main" id="{1FE56EA5-A6D5-4978-B5D8-DBEFDB838A29}"/>
               </a:ext>
             </a:extLst>
           </p:cNvPr>
@@ -17690,7 +17554,7 @@
           <p:cNvPr id="16" name="">
             <a:extLst xmlns:a="http://schemas.openxmlformats.org/drawingml/2006/main">
               <a:ext uri="{FF2B5EF4-FFF2-40B4-BE49-F238E27FC236}">
-                <a16:creationId xmlns:a16="http://schemas.microsoft.com/office/drawing/2014/main" id="{981F6708-60A8-4B06-9525-8518618BD7C8}"/>
+                <a16:creationId xmlns:a16="http://schemas.microsoft.com/office/drawing/2014/main" id="{060B1003-A52E-4B99-9365-CA95B11DFAC6}"/>
               </a:ext>
             </a:extLst>
           </p:cNvPr>
@@ -17725,7 +17589,7 @@
           <p:cNvPr id="17" name="">
             <a:extLst xmlns:a="http://schemas.openxmlformats.org/drawingml/2006/main">
               <a:ext uri="{FF2B5EF4-FFF2-40B4-BE49-F238E27FC236}">
-                <a16:creationId xmlns:a16="http://schemas.microsoft.com/office/drawing/2014/main" id="{A8ABEC5D-2E7F-4745-8EAC-BA18A5DA7D03}"/>
+                <a16:creationId xmlns:a16="http://schemas.microsoft.com/office/drawing/2014/main" id="{BDE0F423-E6BA-4BAA-B5D5-3678B56145F1}"/>
               </a:ext>
             </a:extLst>
           </p:cNvPr>
@@ -17756,7 +17620,7 @@
           <p:cNvPr id="18" name="">
             <a:extLst xmlns:a="http://schemas.openxmlformats.org/drawingml/2006/main">
               <a:ext uri="{FF2B5EF4-FFF2-40B4-BE49-F238E27FC236}">
-                <a16:creationId xmlns:a16="http://schemas.microsoft.com/office/drawing/2014/main" id="{97E569C6-2CF1-4C2F-98B9-AD0057BA39FD}"/>
+                <a16:creationId xmlns:a16="http://schemas.microsoft.com/office/drawing/2014/main" id="{E49D6186-2FD8-4C30-B89F-01A7B9F3CAD1}"/>
               </a:ext>
             </a:extLst>
           </p:cNvPr>
@@ -17818,7 +17682,7 @@
           <p:cNvPr id="19" name="">
             <a:extLst xmlns:a="http://schemas.openxmlformats.org/drawingml/2006/main">
               <a:ext uri="{FF2B5EF4-FFF2-40B4-BE49-F238E27FC236}">
-                <a16:creationId xmlns:a16="http://schemas.microsoft.com/office/drawing/2014/main" id="{8F11CF96-E47F-4661-9ABD-55135C49670B}"/>
+                <a16:creationId xmlns:a16="http://schemas.microsoft.com/office/drawing/2014/main" id="{68BDE7D5-1A90-4BF9-A67A-46A64D2C02D1}"/>
               </a:ext>
             </a:extLst>
           </p:cNvPr>
@@ -17880,7 +17744,7 @@
           <p:cNvPr id="20" name="">
             <a:extLst xmlns:a="http://schemas.openxmlformats.org/drawingml/2006/main">
               <a:ext uri="{FF2B5EF4-FFF2-40B4-BE49-F238E27FC236}">
-                <a16:creationId xmlns:a16="http://schemas.microsoft.com/office/drawing/2014/main" id="{F7B1081C-1B09-4EFF-A8E1-4CCA609D14CC}"/>
+                <a16:creationId xmlns:a16="http://schemas.microsoft.com/office/drawing/2014/main" id="{4F8851C2-1CD1-4BED-A727-261C2C7026C5}"/>
               </a:ext>
             </a:extLst>
           </p:cNvPr>
@@ -17915,7 +17779,7 @@
           <p:cNvPr id="21" name="">
             <a:extLst xmlns:a="http://schemas.openxmlformats.org/drawingml/2006/main">
               <a:ext uri="{FF2B5EF4-FFF2-40B4-BE49-F238E27FC236}">
-                <a16:creationId xmlns:a16="http://schemas.microsoft.com/office/drawing/2014/main" id="{C99F40B8-86BC-4BE3-95FD-C5E3CFF93F00}"/>
+                <a16:creationId xmlns:a16="http://schemas.microsoft.com/office/drawing/2014/main" id="{AB03DC17-5B85-417C-AAAC-A42CFB57E5E9}"/>
               </a:ext>
             </a:extLst>
           </p:cNvPr>
@@ -17946,7 +17810,7 @@
           <p:cNvPr id="22" name="">
             <a:extLst xmlns:a="http://schemas.openxmlformats.org/drawingml/2006/main">
               <a:ext uri="{FF2B5EF4-FFF2-40B4-BE49-F238E27FC236}">
-                <a16:creationId xmlns:a16="http://schemas.microsoft.com/office/drawing/2014/main" id="{5817BCA2-5FCE-4CB9-B4B8-DCD767822C75}"/>
+                <a16:creationId xmlns:a16="http://schemas.microsoft.com/office/drawing/2014/main" id="{7ADF36D4-1DE4-487F-B2EE-2D6533AE3CE2}"/>
               </a:ext>
             </a:extLst>
           </p:cNvPr>
@@ -18008,7 +17872,7 @@
           <p:cNvPr id="23" name="">
             <a:extLst xmlns:a="http://schemas.openxmlformats.org/drawingml/2006/main">
               <a:ext uri="{FF2B5EF4-FFF2-40B4-BE49-F238E27FC236}">
-                <a16:creationId xmlns:a16="http://schemas.microsoft.com/office/drawing/2014/main" id="{D8D461D6-177D-4050-8353-845237620B92}"/>
+                <a16:creationId xmlns:a16="http://schemas.microsoft.com/office/drawing/2014/main" id="{2D6F4512-A871-467C-BD2B-E57ED780630D}"/>
               </a:ext>
             </a:extLst>
           </p:cNvPr>
@@ -18070,7 +17934,7 @@
           <p:cNvPr id="24" name="">
             <a:extLst xmlns:a="http://schemas.openxmlformats.org/drawingml/2006/main">
               <a:ext uri="{FF2B5EF4-FFF2-40B4-BE49-F238E27FC236}">
-                <a16:creationId xmlns:a16="http://schemas.microsoft.com/office/drawing/2014/main" id="{7B2C1EAA-A2D8-44FE-9374-59A4530D513B}"/>
+                <a16:creationId xmlns:a16="http://schemas.microsoft.com/office/drawing/2014/main" id="{4024ED34-9BEA-4691-9322-5D389A2BC29B}"/>
               </a:ext>
             </a:extLst>
           </p:cNvPr>
@@ -18105,7 +17969,7 @@
           <p:cNvPr id="25" name="">
             <a:extLst xmlns:a="http://schemas.openxmlformats.org/drawingml/2006/main">
               <a:ext uri="{FF2B5EF4-FFF2-40B4-BE49-F238E27FC236}">
-                <a16:creationId xmlns:a16="http://schemas.microsoft.com/office/drawing/2014/main" id="{57C2E765-A5F2-4F1D-AB69-5C5DE4777F56}"/>
+                <a16:creationId xmlns:a16="http://schemas.microsoft.com/office/drawing/2014/main" id="{07374404-E3CC-4BB4-A617-1994E8D2F9AD}"/>
               </a:ext>
             </a:extLst>
           </p:cNvPr>
@@ -18136,7 +18000,7 @@
           <p:cNvPr id="26" name="">
             <a:extLst xmlns:a="http://schemas.openxmlformats.org/drawingml/2006/main">
               <a:ext uri="{FF2B5EF4-FFF2-40B4-BE49-F238E27FC236}">
-                <a16:creationId xmlns:a16="http://schemas.microsoft.com/office/drawing/2014/main" id="{23CF95A3-053D-4CAB-B33E-9B2718285A3F}"/>
+                <a16:creationId xmlns:a16="http://schemas.microsoft.com/office/drawing/2014/main" id="{7974E6C1-FC55-42E8-82B1-5444F2BCED3F}"/>
               </a:ext>
             </a:extLst>
           </p:cNvPr>
@@ -18198,7 +18062,7 @@
           <p:cNvPr id="27" name="">
             <a:extLst xmlns:a="http://schemas.openxmlformats.org/drawingml/2006/main">
               <a:ext uri="{FF2B5EF4-FFF2-40B4-BE49-F238E27FC236}">
-                <a16:creationId xmlns:a16="http://schemas.microsoft.com/office/drawing/2014/main" id="{84A28076-7C92-44CC-879F-6A8A11C56271}"/>
+                <a16:creationId xmlns:a16="http://schemas.microsoft.com/office/drawing/2014/main" id="{A45CC0B2-E3E2-4068-A02F-E2C70EE1E9FA}"/>
               </a:ext>
             </a:extLst>
           </p:cNvPr>
@@ -18260,7 +18124,7 @@
     </p:spTree>
     <p:extLst>
       <p:ext uri="{BB962C8B-B14F-4D97-AF65-F5344CB8AC3E}">
-        <p14:creationId xmlns:p14="http://schemas.microsoft.com/office/powerpoint/2010/main" val="412132902"/>
+        <p14:creationId xmlns:p14="http://schemas.microsoft.com/office/powerpoint/2010/main" val="540813398"/>
       </p:ext>
     </p:extLst>
   </p:cSld>
@@ -18291,7 +18155,7 @@
           <p:cNvPr id="22" name="">
             <a:extLst xmlns:a="http://schemas.openxmlformats.org/drawingml/2006/main">
               <a:ext uri="{FF2B5EF4-FFF2-40B4-BE49-F238E27FC236}">
-                <a16:creationId xmlns:a16="http://schemas.microsoft.com/office/drawing/2014/main" id="{49BC8FCF-B9CF-4F73-873E-597A08A101BF}"/>
+                <a16:creationId xmlns:a16="http://schemas.microsoft.com/office/drawing/2014/main" id="{83590C63-666F-4587-A18A-5B229998DA8A}"/>
               </a:ext>
             </a:extLst>
           </p:cNvPr>
@@ -18322,7 +18186,7 @@
           <p:cNvPr id="2" name="">
             <a:extLst xmlns:a="http://schemas.openxmlformats.org/drawingml/2006/main">
               <a:ext uri="{FF2B5EF4-FFF2-40B4-BE49-F238E27FC236}">
-                <a16:creationId xmlns:a16="http://schemas.microsoft.com/office/drawing/2014/main" id="{B82E6D27-C84D-46C3-ACDD-C3606A87E09D}"/>
+                <a16:creationId xmlns:a16="http://schemas.microsoft.com/office/drawing/2014/main" id="{BB32BF9F-0988-429A-876D-D001C19D475B}"/>
               </a:ext>
             </a:extLst>
           </p:cNvPr>
@@ -18374,7 +18238,7 @@
                 <a:ea typeface="Aptos"/>
                 <a:cs typeface="Aptos"/>
               </a:rPr>
-              <a:t>CASH</a:t>
+              <a:t>OFFLINE</a:t>
             </a:r>
           </a:p>
         </p:txBody>
@@ -18384,7 +18248,7 @@
           <p:cNvPr id="3" name="">
             <a:extLst xmlns:a="http://schemas.openxmlformats.org/drawingml/2006/main">
               <a:ext uri="{FF2B5EF4-FFF2-40B4-BE49-F238E27FC236}">
-                <a16:creationId xmlns:a16="http://schemas.microsoft.com/office/drawing/2014/main" id="{C548479E-CA2A-4BC7-98E3-EAF769AE8905}"/>
+                <a16:creationId xmlns:a16="http://schemas.microsoft.com/office/drawing/2014/main" id="{21C14CC9-4FBA-4DA3-8D55-7FEB5B34B933}"/>
               </a:ext>
             </a:extLst>
           </p:cNvPr>
@@ -18446,7 +18310,7 @@
           <p:cNvPr id="4" name="">
             <a:extLst xmlns:a="http://schemas.openxmlformats.org/drawingml/2006/main">
               <a:ext uri="{FF2B5EF4-FFF2-40B4-BE49-F238E27FC236}">
-                <a16:creationId xmlns:a16="http://schemas.microsoft.com/office/drawing/2014/main" id="{F555F45E-EB21-468F-A3F0-E120FA2A348B}"/>
+                <a16:creationId xmlns:a16="http://schemas.microsoft.com/office/drawing/2014/main" id="{ABCF217C-4FEF-45F9-98C1-E32DC0C05B1B}"/>
               </a:ext>
             </a:extLst>
           </p:cNvPr>
@@ -18481,7 +18345,7 @@
           <p:nvPr/>
         </p:nvPicPr>
         <p:blipFill>
-          <a:blip xmlns:r="http://schemas.openxmlformats.org/officeDocument/2006/relationships" xmlns:a="http://schemas.openxmlformats.org/drawingml/2006/main" r:embed="Rf63d238ff3d84719"/>
+          <a:blip xmlns:r="http://schemas.openxmlformats.org/officeDocument/2006/relationships" xmlns:a="http://schemas.openxmlformats.org/drawingml/2006/main" r:embed="Rc424391e804d4ec7"/>
           <a:srcRect xmlns:a="http://schemas.openxmlformats.org/drawingml/2006/main" l="0" t="0" r="0" b="0"/>
           <a:stretch xmlns:a="http://schemas.openxmlformats.org/drawingml/2006/main">
             <a:fillRect l="0" t="0" r="0" b="0"/>
@@ -18502,7 +18366,7 @@
           <p:cNvPr id="6" name="">
             <a:extLst xmlns:a="http://schemas.openxmlformats.org/drawingml/2006/main">
               <a:ext uri="{FF2B5EF4-FFF2-40B4-BE49-F238E27FC236}">
-                <a16:creationId xmlns:a16="http://schemas.microsoft.com/office/drawing/2014/main" id="{5D78303D-45FD-4135-BA51-EEE5F584663E}"/>
+                <a16:creationId xmlns:a16="http://schemas.microsoft.com/office/drawing/2014/main" id="{1E737B58-B24B-42AD-8A78-FFEF24D5856D}"/>
               </a:ext>
             </a:extLst>
           </p:cNvPr>
@@ -18564,7 +18428,7 @@
           <p:cNvPr id="7" name="">
             <a:extLst xmlns:a="http://schemas.openxmlformats.org/drawingml/2006/main">
               <a:ext uri="{FF2B5EF4-FFF2-40B4-BE49-F238E27FC236}">
-                <a16:creationId xmlns:a16="http://schemas.microsoft.com/office/drawing/2014/main" id="{B377495C-8A00-4592-9532-2EB776879CF4}"/>
+                <a16:creationId xmlns:a16="http://schemas.microsoft.com/office/drawing/2014/main" id="{DE2244F4-06B7-49CC-BB26-061E3C48EAE8}"/>
               </a:ext>
             </a:extLst>
           </p:cNvPr>
@@ -18626,19 +18490,19 @@
           <p:cNvPr id="8" name="">
             <a:extLst xmlns:a="http://schemas.openxmlformats.org/drawingml/2006/main">
               <a:ext uri="{FF2B5EF4-FFF2-40B4-BE49-F238E27FC236}">
-                <a16:creationId xmlns:a16="http://schemas.microsoft.com/office/drawing/2014/main" id="{3D2D8625-D9F3-4DBD-BEAC-C257FE0307BF}"/>
-              </a:ext>
-            </a:extLst>
-          </p:cNvPr>
-          <p:cNvSpPr>
-            <a:spLocks xmlns:a="http://schemas.openxmlformats.org/drawingml/2006/main" noGrp="1"/>
-          </p:cNvSpPr>
-          <p:nvPr/>
-        </p:nvSpPr>
-        <p:spPr>
-          <a:xfrm xmlns:a="http://schemas.openxmlformats.org/drawingml/2006/main">
-            <a:off x="609600" y="1885950"/>
-            <a:ext cx="2614613" cy="4095750"/>
+                <a16:creationId xmlns:a16="http://schemas.microsoft.com/office/drawing/2014/main" id="{C42472C0-7D91-428E-97C9-DD60EF38D095}"/>
+              </a:ext>
+            </a:extLst>
+          </p:cNvPr>
+          <p:cNvSpPr>
+            <a:spLocks xmlns:a="http://schemas.openxmlformats.org/drawingml/2006/main" noGrp="1"/>
+          </p:cNvSpPr>
+          <p:nvPr/>
+        </p:nvSpPr>
+        <p:spPr>
+          <a:xfrm xmlns:a="http://schemas.openxmlformats.org/drawingml/2006/main">
+            <a:off x="609600" y="2038350"/>
+            <a:ext cx="2614613" cy="2667000"/>
           </a:xfrm>
           <a:prstGeom xmlns:a="http://schemas.openxmlformats.org/drawingml/2006/main" prst="roundRect">
             <a:avLst>
@@ -18661,19 +18525,19 @@
           <p:cNvPr id="9" name="">
             <a:extLst xmlns:a="http://schemas.openxmlformats.org/drawingml/2006/main">
               <a:ext uri="{FF2B5EF4-FFF2-40B4-BE49-F238E27FC236}">
-                <a16:creationId xmlns:a16="http://schemas.microsoft.com/office/drawing/2014/main" id="{1E3CA885-E43D-4A9A-B1D4-827E890D283E}"/>
-              </a:ext>
-            </a:extLst>
-          </p:cNvPr>
-          <p:cNvSpPr>
-            <a:spLocks xmlns:a="http://schemas.openxmlformats.org/drawingml/2006/main" noGrp="1"/>
-          </p:cNvSpPr>
-          <p:nvPr/>
-        </p:nvSpPr>
-        <p:spPr>
-          <a:xfrm xmlns:a="http://schemas.openxmlformats.org/drawingml/2006/main">
-            <a:off x="609600" y="1885950"/>
-            <a:ext cx="66675" cy="4095750"/>
+                <a16:creationId xmlns:a16="http://schemas.microsoft.com/office/drawing/2014/main" id="{1E3A77C9-38DD-4413-A5EC-7CCED28AB1AF}"/>
+              </a:ext>
+            </a:extLst>
+          </p:cNvPr>
+          <p:cNvSpPr>
+            <a:spLocks xmlns:a="http://schemas.openxmlformats.org/drawingml/2006/main" noGrp="1"/>
+          </p:cNvSpPr>
+          <p:nvPr/>
+        </p:nvSpPr>
+        <p:spPr>
+          <a:xfrm xmlns:a="http://schemas.openxmlformats.org/drawingml/2006/main">
+            <a:off x="609600" y="2038350"/>
+            <a:ext cx="66675" cy="2667000"/>
           </a:xfrm>
           <a:prstGeom xmlns:a="http://schemas.openxmlformats.org/drawingml/2006/main" prst="rect">
             <a:avLst/>
@@ -18692,18 +18556,18 @@
           <p:cNvPr id="10" name="">
             <a:extLst xmlns:a="http://schemas.openxmlformats.org/drawingml/2006/main">
               <a:ext uri="{FF2B5EF4-FFF2-40B4-BE49-F238E27FC236}">
-                <a16:creationId xmlns:a16="http://schemas.microsoft.com/office/drawing/2014/main" id="{C7840529-6C75-4A35-843C-5920C331407A}"/>
-              </a:ext>
-            </a:extLst>
-          </p:cNvPr>
-          <p:cNvSpPr>
-            <a:spLocks xmlns:a="http://schemas.openxmlformats.org/drawingml/2006/main" noGrp="1"/>
-          </p:cNvSpPr>
-          <p:nvPr/>
-        </p:nvSpPr>
-        <p:spPr>
-          <a:xfrm xmlns:a="http://schemas.openxmlformats.org/drawingml/2006/main">
-            <a:off x="819150" y="2038350"/>
+                <a16:creationId xmlns:a16="http://schemas.microsoft.com/office/drawing/2014/main" id="{9B763B66-28AB-4E92-94D1-B218699A3B83}"/>
+              </a:ext>
+            </a:extLst>
+          </p:cNvPr>
+          <p:cNvSpPr>
+            <a:spLocks xmlns:a="http://schemas.openxmlformats.org/drawingml/2006/main" noGrp="1"/>
+          </p:cNvSpPr>
+          <p:nvPr/>
+        </p:nvSpPr>
+        <p:spPr>
+          <a:xfrm xmlns:a="http://schemas.openxmlformats.org/drawingml/2006/main">
+            <a:off x="819150" y="2190750"/>
             <a:ext cx="2252663" cy="419100"/>
           </a:xfrm>
           <a:prstGeom xmlns:a="http://schemas.openxmlformats.org/drawingml/2006/main" prst="rect">
@@ -18754,19 +18618,19 @@
           <p:cNvPr id="11" name="">
             <a:extLst xmlns:a="http://schemas.openxmlformats.org/drawingml/2006/main">
               <a:ext uri="{FF2B5EF4-FFF2-40B4-BE49-F238E27FC236}">
-                <a16:creationId xmlns:a16="http://schemas.microsoft.com/office/drawing/2014/main" id="{E9BC0E07-273A-4E86-ADEA-8881C18D38A4}"/>
-              </a:ext>
-            </a:extLst>
-          </p:cNvPr>
-          <p:cNvSpPr>
-            <a:spLocks xmlns:a="http://schemas.openxmlformats.org/drawingml/2006/main" noGrp="1"/>
-          </p:cNvSpPr>
-          <p:nvPr/>
-        </p:nvSpPr>
-        <p:spPr>
-          <a:xfrm xmlns:a="http://schemas.openxmlformats.org/drawingml/2006/main">
-            <a:off x="3395663" y="1885950"/>
-            <a:ext cx="2614613" cy="4095750"/>
+                <a16:creationId xmlns:a16="http://schemas.microsoft.com/office/drawing/2014/main" id="{DA97A4AC-5F08-4460-A764-D8FF20A5325D}"/>
+              </a:ext>
+            </a:extLst>
+          </p:cNvPr>
+          <p:cNvSpPr>
+            <a:spLocks xmlns:a="http://schemas.openxmlformats.org/drawingml/2006/main" noGrp="1"/>
+          </p:cNvSpPr>
+          <p:nvPr/>
+        </p:nvSpPr>
+        <p:spPr>
+          <a:xfrm xmlns:a="http://schemas.openxmlformats.org/drawingml/2006/main">
+            <a:off x="3395663" y="2038350"/>
+            <a:ext cx="2614613" cy="2667000"/>
           </a:xfrm>
           <a:prstGeom xmlns:a="http://schemas.openxmlformats.org/drawingml/2006/main" prst="roundRect">
             <a:avLst>
@@ -18789,19 +18653,19 @@
           <p:cNvPr id="12" name="">
             <a:extLst xmlns:a="http://schemas.openxmlformats.org/drawingml/2006/main">
               <a:ext uri="{FF2B5EF4-FFF2-40B4-BE49-F238E27FC236}">
-                <a16:creationId xmlns:a16="http://schemas.microsoft.com/office/drawing/2014/main" id="{F57FE7C1-C8AA-4A79-BCED-EC277D9A2BAB}"/>
-              </a:ext>
-            </a:extLst>
-          </p:cNvPr>
-          <p:cNvSpPr>
-            <a:spLocks xmlns:a="http://schemas.openxmlformats.org/drawingml/2006/main" noGrp="1"/>
-          </p:cNvSpPr>
-          <p:nvPr/>
-        </p:nvSpPr>
-        <p:spPr>
-          <a:xfrm xmlns:a="http://schemas.openxmlformats.org/drawingml/2006/main">
-            <a:off x="3395663" y="1885950"/>
-            <a:ext cx="66675" cy="4095750"/>
+                <a16:creationId xmlns:a16="http://schemas.microsoft.com/office/drawing/2014/main" id="{787D9D1E-4698-40B6-83BF-E00F224EFC51}"/>
+              </a:ext>
+            </a:extLst>
+          </p:cNvPr>
+          <p:cNvSpPr>
+            <a:spLocks xmlns:a="http://schemas.openxmlformats.org/drawingml/2006/main" noGrp="1"/>
+          </p:cNvSpPr>
+          <p:nvPr/>
+        </p:nvSpPr>
+        <p:spPr>
+          <a:xfrm xmlns:a="http://schemas.openxmlformats.org/drawingml/2006/main">
+            <a:off x="3395663" y="2038350"/>
+            <a:ext cx="66675" cy="2667000"/>
           </a:xfrm>
           <a:prstGeom xmlns:a="http://schemas.openxmlformats.org/drawingml/2006/main" prst="rect">
             <a:avLst/>
@@ -18820,18 +18684,18 @@
           <p:cNvPr id="13" name="">
             <a:extLst xmlns:a="http://schemas.openxmlformats.org/drawingml/2006/main">
               <a:ext uri="{FF2B5EF4-FFF2-40B4-BE49-F238E27FC236}">
-                <a16:creationId xmlns:a16="http://schemas.microsoft.com/office/drawing/2014/main" id="{528AB94E-89A0-40BF-81BF-8DC0950DF38C}"/>
-              </a:ext>
-            </a:extLst>
-          </p:cNvPr>
-          <p:cNvSpPr>
-            <a:spLocks xmlns:a="http://schemas.openxmlformats.org/drawingml/2006/main" noGrp="1"/>
-          </p:cNvSpPr>
-          <p:nvPr/>
-        </p:nvSpPr>
-        <p:spPr>
-          <a:xfrm xmlns:a="http://schemas.openxmlformats.org/drawingml/2006/main">
-            <a:off x="3605213" y="2038350"/>
+                <a16:creationId xmlns:a16="http://schemas.microsoft.com/office/drawing/2014/main" id="{9133C499-E932-410D-8BE6-44443B48B6A1}"/>
+              </a:ext>
+            </a:extLst>
+          </p:cNvPr>
+          <p:cNvSpPr>
+            <a:spLocks xmlns:a="http://schemas.openxmlformats.org/drawingml/2006/main" noGrp="1"/>
+          </p:cNvSpPr>
+          <p:nvPr/>
+        </p:nvSpPr>
+        <p:spPr>
+          <a:xfrm xmlns:a="http://schemas.openxmlformats.org/drawingml/2006/main">
+            <a:off x="3605213" y="2190750"/>
             <a:ext cx="2252663" cy="419100"/>
           </a:xfrm>
           <a:prstGeom xmlns:a="http://schemas.openxmlformats.org/drawingml/2006/main" prst="rect">
@@ -18882,19 +18746,19 @@
           <p:cNvPr id="14" name="">
             <a:extLst xmlns:a="http://schemas.openxmlformats.org/drawingml/2006/main">
               <a:ext uri="{FF2B5EF4-FFF2-40B4-BE49-F238E27FC236}">
-                <a16:creationId xmlns:a16="http://schemas.microsoft.com/office/drawing/2014/main" id="{DD716FF3-7753-4938-8E2E-025E7E248B37}"/>
-              </a:ext>
-            </a:extLst>
-          </p:cNvPr>
-          <p:cNvSpPr>
-            <a:spLocks xmlns:a="http://schemas.openxmlformats.org/drawingml/2006/main" noGrp="1"/>
-          </p:cNvSpPr>
-          <p:nvPr/>
-        </p:nvSpPr>
-        <p:spPr>
-          <a:xfrm xmlns:a="http://schemas.openxmlformats.org/drawingml/2006/main">
-            <a:off x="6181725" y="1885950"/>
-            <a:ext cx="2614613" cy="4095750"/>
+                <a16:creationId xmlns:a16="http://schemas.microsoft.com/office/drawing/2014/main" id="{B3B42E34-2928-42FC-A35A-7A72A4F22017}"/>
+              </a:ext>
+            </a:extLst>
+          </p:cNvPr>
+          <p:cNvSpPr>
+            <a:spLocks xmlns:a="http://schemas.openxmlformats.org/drawingml/2006/main" noGrp="1"/>
+          </p:cNvSpPr>
+          <p:nvPr/>
+        </p:nvSpPr>
+        <p:spPr>
+          <a:xfrm xmlns:a="http://schemas.openxmlformats.org/drawingml/2006/main">
+            <a:off x="6181725" y="2038350"/>
+            <a:ext cx="2614613" cy="2667000"/>
           </a:xfrm>
           <a:prstGeom xmlns:a="http://schemas.openxmlformats.org/drawingml/2006/main" prst="roundRect">
             <a:avLst>
@@ -18917,19 +18781,19 @@
           <p:cNvPr id="15" name="">
             <a:extLst xmlns:a="http://schemas.openxmlformats.org/drawingml/2006/main">
               <a:ext uri="{FF2B5EF4-FFF2-40B4-BE49-F238E27FC236}">
-                <a16:creationId xmlns:a16="http://schemas.microsoft.com/office/drawing/2014/main" id="{CD06DD14-0A2C-4160-93FE-D3243B4B5594}"/>
-              </a:ext>
-            </a:extLst>
-          </p:cNvPr>
-          <p:cNvSpPr>
-            <a:spLocks xmlns:a="http://schemas.openxmlformats.org/drawingml/2006/main" noGrp="1"/>
-          </p:cNvSpPr>
-          <p:nvPr/>
-        </p:nvSpPr>
-        <p:spPr>
-          <a:xfrm xmlns:a="http://schemas.openxmlformats.org/drawingml/2006/main">
-            <a:off x="6181725" y="1885950"/>
-            <a:ext cx="66675" cy="4095750"/>
+                <a16:creationId xmlns:a16="http://schemas.microsoft.com/office/drawing/2014/main" id="{F912B478-4EE8-4C9C-B966-79F57000D0D4}"/>
+              </a:ext>
+            </a:extLst>
+          </p:cNvPr>
+          <p:cNvSpPr>
+            <a:spLocks xmlns:a="http://schemas.openxmlformats.org/drawingml/2006/main" noGrp="1"/>
+          </p:cNvSpPr>
+          <p:nvPr/>
+        </p:nvSpPr>
+        <p:spPr>
+          <a:xfrm xmlns:a="http://schemas.openxmlformats.org/drawingml/2006/main">
+            <a:off x="6181725" y="2038350"/>
+            <a:ext cx="66675" cy="2667000"/>
           </a:xfrm>
           <a:prstGeom xmlns:a="http://schemas.openxmlformats.org/drawingml/2006/main" prst="rect">
             <a:avLst/>
@@ -18948,18 +18812,18 @@
           <p:cNvPr id="16" name="">
             <a:extLst xmlns:a="http://schemas.openxmlformats.org/drawingml/2006/main">
               <a:ext uri="{FF2B5EF4-FFF2-40B4-BE49-F238E27FC236}">
-                <a16:creationId xmlns:a16="http://schemas.microsoft.com/office/drawing/2014/main" id="{1BC57999-7F0C-43B2-B463-14A713DB0DB2}"/>
-              </a:ext>
-            </a:extLst>
-          </p:cNvPr>
-          <p:cNvSpPr>
-            <a:spLocks xmlns:a="http://schemas.openxmlformats.org/drawingml/2006/main" noGrp="1"/>
-          </p:cNvSpPr>
-          <p:nvPr/>
-        </p:nvSpPr>
-        <p:spPr>
-          <a:xfrm xmlns:a="http://schemas.openxmlformats.org/drawingml/2006/main">
-            <a:off x="6391275" y="2038350"/>
+                <a16:creationId xmlns:a16="http://schemas.microsoft.com/office/drawing/2014/main" id="{7AB3AE55-4448-4F07-95DA-E360360A46DC}"/>
+              </a:ext>
+            </a:extLst>
+          </p:cNvPr>
+          <p:cNvSpPr>
+            <a:spLocks xmlns:a="http://schemas.openxmlformats.org/drawingml/2006/main" noGrp="1"/>
+          </p:cNvSpPr>
+          <p:nvPr/>
+        </p:nvSpPr>
+        <p:spPr>
+          <a:xfrm xmlns:a="http://schemas.openxmlformats.org/drawingml/2006/main">
+            <a:off x="6391275" y="2190750"/>
             <a:ext cx="2252663" cy="419100"/>
           </a:xfrm>
           <a:prstGeom xmlns:a="http://schemas.openxmlformats.org/drawingml/2006/main" prst="rect">
@@ -19010,19 +18874,19 @@
           <p:cNvPr id="17" name="">
             <a:extLst xmlns:a="http://schemas.openxmlformats.org/drawingml/2006/main">
               <a:ext uri="{FF2B5EF4-FFF2-40B4-BE49-F238E27FC236}">
-                <a16:creationId xmlns:a16="http://schemas.microsoft.com/office/drawing/2014/main" id="{139B23AF-5BCA-417C-BCF3-CA23FDB00DE3}"/>
-              </a:ext>
-            </a:extLst>
-          </p:cNvPr>
-          <p:cNvSpPr>
-            <a:spLocks xmlns:a="http://schemas.openxmlformats.org/drawingml/2006/main" noGrp="1"/>
-          </p:cNvSpPr>
-          <p:nvPr/>
-        </p:nvSpPr>
-        <p:spPr>
-          <a:xfrm xmlns:a="http://schemas.openxmlformats.org/drawingml/2006/main">
-            <a:off x="8967788" y="1885950"/>
-            <a:ext cx="2614613" cy="4095750"/>
+                <a16:creationId xmlns:a16="http://schemas.microsoft.com/office/drawing/2014/main" id="{1B77AFC6-0C64-43E1-B3A4-E710B75B5E14}"/>
+              </a:ext>
+            </a:extLst>
+          </p:cNvPr>
+          <p:cNvSpPr>
+            <a:spLocks xmlns:a="http://schemas.openxmlformats.org/drawingml/2006/main" noGrp="1"/>
+          </p:cNvSpPr>
+          <p:nvPr/>
+        </p:nvSpPr>
+        <p:spPr>
+          <a:xfrm xmlns:a="http://schemas.openxmlformats.org/drawingml/2006/main">
+            <a:off x="8967788" y="2038350"/>
+            <a:ext cx="2614613" cy="2667000"/>
           </a:xfrm>
           <a:prstGeom xmlns:a="http://schemas.openxmlformats.org/drawingml/2006/main" prst="roundRect">
             <a:avLst>
@@ -19045,19 +18909,19 @@
           <p:cNvPr id="18" name="">
             <a:extLst xmlns:a="http://schemas.openxmlformats.org/drawingml/2006/main">
               <a:ext uri="{FF2B5EF4-FFF2-40B4-BE49-F238E27FC236}">
-                <a16:creationId xmlns:a16="http://schemas.microsoft.com/office/drawing/2014/main" id="{4762510E-73D8-4F8C-B09B-099F95E0CA5B}"/>
-              </a:ext>
-            </a:extLst>
-          </p:cNvPr>
-          <p:cNvSpPr>
-            <a:spLocks xmlns:a="http://schemas.openxmlformats.org/drawingml/2006/main" noGrp="1"/>
-          </p:cNvSpPr>
-          <p:nvPr/>
-        </p:nvSpPr>
-        <p:spPr>
-          <a:xfrm xmlns:a="http://schemas.openxmlformats.org/drawingml/2006/main">
-            <a:off x="8967788" y="1885950"/>
-            <a:ext cx="66675" cy="4095750"/>
+                <a16:creationId xmlns:a16="http://schemas.microsoft.com/office/drawing/2014/main" id="{01C49C24-47C8-41C8-8302-0C33D02CFBCF}"/>
+              </a:ext>
+            </a:extLst>
+          </p:cNvPr>
+          <p:cNvSpPr>
+            <a:spLocks xmlns:a="http://schemas.openxmlformats.org/drawingml/2006/main" noGrp="1"/>
+          </p:cNvSpPr>
+          <p:nvPr/>
+        </p:nvSpPr>
+        <p:spPr>
+          <a:xfrm xmlns:a="http://schemas.openxmlformats.org/drawingml/2006/main">
+            <a:off x="8967788" y="2038350"/>
+            <a:ext cx="66675" cy="2667000"/>
           </a:xfrm>
           <a:prstGeom xmlns:a="http://schemas.openxmlformats.org/drawingml/2006/main" prst="rect">
             <a:avLst/>
@@ -19076,18 +18940,18 @@
           <p:cNvPr id="19" name="">
             <a:extLst xmlns:a="http://schemas.openxmlformats.org/drawingml/2006/main">
               <a:ext uri="{FF2B5EF4-FFF2-40B4-BE49-F238E27FC236}">
-                <a16:creationId xmlns:a16="http://schemas.microsoft.com/office/drawing/2014/main" id="{43B85E3A-8EB5-4167-8B96-097C383649A4}"/>
-              </a:ext>
-            </a:extLst>
-          </p:cNvPr>
-          <p:cNvSpPr>
-            <a:spLocks xmlns:a="http://schemas.openxmlformats.org/drawingml/2006/main" noGrp="1"/>
-          </p:cNvSpPr>
-          <p:nvPr/>
-        </p:nvSpPr>
-        <p:spPr>
-          <a:xfrm xmlns:a="http://schemas.openxmlformats.org/drawingml/2006/main">
-            <a:off x="9177338" y="2038350"/>
+                <a16:creationId xmlns:a16="http://schemas.microsoft.com/office/drawing/2014/main" id="{F6B95766-5C26-478F-98F0-725F45475556}"/>
+              </a:ext>
+            </a:extLst>
+          </p:cNvPr>
+          <p:cNvSpPr>
+            <a:spLocks xmlns:a="http://schemas.openxmlformats.org/drawingml/2006/main" noGrp="1"/>
+          </p:cNvSpPr>
+          <p:nvPr/>
+        </p:nvSpPr>
+        <p:spPr>
+          <a:xfrm xmlns:a="http://schemas.openxmlformats.org/drawingml/2006/main">
+            <a:off x="9177338" y="2190750"/>
             <a:ext cx="2252663" cy="419100"/>
           </a:xfrm>
           <a:prstGeom xmlns:a="http://schemas.openxmlformats.org/drawingml/2006/main" prst="rect">
@@ -19138,19 +19002,19 @@
           <p:cNvPr id="20" name="">
             <a:extLst xmlns:a="http://schemas.openxmlformats.org/drawingml/2006/main">
               <a:ext uri="{FF2B5EF4-FFF2-40B4-BE49-F238E27FC236}">
-                <a16:creationId xmlns:a16="http://schemas.microsoft.com/office/drawing/2014/main" id="{C40778E9-4599-43D6-9AB1-E697DFA76D0D}"/>
-              </a:ext>
-            </a:extLst>
-          </p:cNvPr>
-          <p:cNvSpPr>
-            <a:spLocks xmlns:a="http://schemas.openxmlformats.org/drawingml/2006/main" noGrp="1"/>
-          </p:cNvSpPr>
-          <p:nvPr/>
-        </p:nvSpPr>
-        <p:spPr>
-          <a:xfrm xmlns:a="http://schemas.openxmlformats.org/drawingml/2006/main">
-            <a:off x="609600" y="4953000"/>
-            <a:ext cx="10972800" cy="514350"/>
+                <a16:creationId xmlns:a16="http://schemas.microsoft.com/office/drawing/2014/main" id="{1092D43A-21A6-4C21-8975-86B4FB33A937}"/>
+              </a:ext>
+            </a:extLst>
+          </p:cNvPr>
+          <p:cNvSpPr>
+            <a:spLocks xmlns:a="http://schemas.openxmlformats.org/drawingml/2006/main" noGrp="1"/>
+          </p:cNvSpPr>
+          <p:nvPr/>
+        </p:nvSpPr>
+        <p:spPr>
+          <a:xfrm xmlns:a="http://schemas.openxmlformats.org/drawingml/2006/main">
+            <a:off x="609600" y="4838700"/>
+            <a:ext cx="10972800" cy="457200"/>
           </a:xfrm>
           <a:prstGeom xmlns:a="http://schemas.openxmlformats.org/drawingml/2006/main" prst="rect">
             <a:avLst/>
@@ -19172,7 +19036,7 @@
                 <a:spcPct val="108000"/>
               </a:lnSpc>
               <a:buNone/>
-              <a:defRPr sz="1350" b="0">
+              <a:defRPr sz="1275" b="0">
                 <a:solidFill>
                   <a:srgbClr val="5F6B7A"/>
                 </a:solidFill>
@@ -19182,7 +19046,7 @@
               </a:defRPr>
             </a:pPr>
             <a:r>
-              <a:rPr sz="1350" b="0">
+              <a:rPr sz="1275" b="0">
                 <a:solidFill>
                   <a:srgbClr val="5F6B7A"/>
                 </a:solidFill>
@@ -19200,19 +19064,19 @@
           <p:cNvPr id="21" name="">
             <a:extLst xmlns:a="http://schemas.openxmlformats.org/drawingml/2006/main">
               <a:ext uri="{FF2B5EF4-FFF2-40B4-BE49-F238E27FC236}">
-                <a16:creationId xmlns:a16="http://schemas.microsoft.com/office/drawing/2014/main" id="{1DDA3552-7C10-43F9-A870-174FB710BEA4}"/>
-              </a:ext>
-            </a:extLst>
-          </p:cNvPr>
-          <p:cNvSpPr>
-            <a:spLocks xmlns:a="http://schemas.openxmlformats.org/drawingml/2006/main" noGrp="1"/>
-          </p:cNvSpPr>
-          <p:nvPr/>
-        </p:nvSpPr>
-        <p:spPr>
-          <a:xfrm xmlns:a="http://schemas.openxmlformats.org/drawingml/2006/main">
-            <a:off x="609600" y="5657850"/>
-            <a:ext cx="10972800" cy="609600"/>
+                <a16:creationId xmlns:a16="http://schemas.microsoft.com/office/drawing/2014/main" id="{FA19953B-3E16-4BFD-9663-A3DFF268C7E2}"/>
+              </a:ext>
+            </a:extLst>
+          </p:cNvPr>
+          <p:cNvSpPr>
+            <a:spLocks xmlns:a="http://schemas.openxmlformats.org/drawingml/2006/main" noGrp="1"/>
+          </p:cNvSpPr>
+          <p:nvPr/>
+        </p:nvSpPr>
+        <p:spPr>
+          <a:xfrm xmlns:a="http://schemas.openxmlformats.org/drawingml/2006/main">
+            <a:off x="609600" y="5467350"/>
+            <a:ext cx="10972800" cy="723900"/>
           </a:xfrm>
           <a:prstGeom xmlns:a="http://schemas.openxmlformats.org/drawingml/2006/main" prst="rect">
             <a:avLst/>
@@ -19262,7 +19126,7 @@
     </p:spTree>
     <p:extLst>
       <p:ext uri="{BB962C8B-B14F-4D97-AF65-F5344CB8AC3E}">
-        <p14:creationId xmlns:p14="http://schemas.microsoft.com/office/powerpoint/2010/main" val="1908544123"/>
+        <p14:creationId xmlns:p14="http://schemas.microsoft.com/office/powerpoint/2010/main" val="715837572"/>
       </p:ext>
     </p:extLst>
   </p:cSld>
@@ -19293,7 +19157,7 @@
           <p:cNvPr id="33" name="">
             <a:extLst xmlns:a="http://schemas.openxmlformats.org/drawingml/2006/main">
               <a:ext uri="{FF2B5EF4-FFF2-40B4-BE49-F238E27FC236}">
-                <a16:creationId xmlns:a16="http://schemas.microsoft.com/office/drawing/2014/main" id="{04CD33F8-0F36-4DDF-8BFE-C87B6F53F54F}"/>
+                <a16:creationId xmlns:a16="http://schemas.microsoft.com/office/drawing/2014/main" id="{C839797A-EB74-4FD4-BAE1-85FECBB9C0F7}"/>
               </a:ext>
             </a:extLst>
           </p:cNvPr>
@@ -19324,7 +19188,7 @@
           <p:cNvPr id="2" name="">
             <a:extLst xmlns:a="http://schemas.openxmlformats.org/drawingml/2006/main">
               <a:ext uri="{FF2B5EF4-FFF2-40B4-BE49-F238E27FC236}">
-                <a16:creationId xmlns:a16="http://schemas.microsoft.com/office/drawing/2014/main" id="{BFC347ED-920A-4C9D-B8FA-D97DB9E1D911}"/>
+                <a16:creationId xmlns:a16="http://schemas.microsoft.com/office/drawing/2014/main" id="{83B9C2A0-FFDA-40F2-B2DC-9A969627742F}"/>
               </a:ext>
             </a:extLst>
           </p:cNvPr>
@@ -19376,7 +19240,7 @@
                 <a:ea typeface="Aptos"/>
                 <a:cs typeface="Aptos"/>
               </a:rPr>
-              <a:t>OFFLINE</a:t>
+              <a:t>GOVERNANCE</a:t>
             </a:r>
           </a:p>
         </p:txBody>
@@ -19386,7 +19250,7 @@
           <p:cNvPr id="3" name="">
             <a:extLst xmlns:a="http://schemas.openxmlformats.org/drawingml/2006/main">
               <a:ext uri="{FF2B5EF4-FFF2-40B4-BE49-F238E27FC236}">
-                <a16:creationId xmlns:a16="http://schemas.microsoft.com/office/drawing/2014/main" id="{04843353-758E-426C-B8FD-F305D5FCE543}"/>
+                <a16:creationId xmlns:a16="http://schemas.microsoft.com/office/drawing/2014/main" id="{6AF1ACFC-0727-4085-9D8D-FE3F0078C2B8}"/>
               </a:ext>
             </a:extLst>
           </p:cNvPr>
@@ -19420,7 +19284,7 @@
                 <a:spcPct val="108000"/>
               </a:lnSpc>
               <a:buNone/>
-              <a:defRPr sz="3150" b="1">
+              <a:defRPr sz="2550" b="1">
                 <a:solidFill>
                   <a:srgbClr val="071426"/>
                 </a:solidFill>
@@ -19430,7 +19294,7 @@
               </a:defRPr>
             </a:pPr>
             <a:r>
-              <a:rPr sz="3150" b="1">
+              <a:rPr sz="2550" b="1">
                 <a:solidFill>
                   <a:srgbClr val="071426"/>
                 </a:solidFill>
@@ -19448,7 +19312,7 @@
           <p:cNvPr id="4" name="">
             <a:extLst xmlns:a="http://schemas.openxmlformats.org/drawingml/2006/main">
               <a:ext uri="{FF2B5EF4-FFF2-40B4-BE49-F238E27FC236}">
-                <a16:creationId xmlns:a16="http://schemas.microsoft.com/office/drawing/2014/main" id="{84497F65-ED2C-4742-99B8-5BC298E31FD7}"/>
+                <a16:creationId xmlns:a16="http://schemas.microsoft.com/office/drawing/2014/main" id="{A37957E5-1597-4A0D-9972-9E3136D20B21}"/>
               </a:ext>
             </a:extLst>
           </p:cNvPr>
@@ -19483,7 +19347,7 @@
           <p:nvPr/>
         </p:nvPicPr>
         <p:blipFill>
-          <a:blip xmlns:r="http://schemas.openxmlformats.org/officeDocument/2006/relationships" xmlns:a="http://schemas.openxmlformats.org/drawingml/2006/main" r:embed="Rd0699d62e3ee459f"/>
+          <a:blip xmlns:r="http://schemas.openxmlformats.org/officeDocument/2006/relationships" xmlns:a="http://schemas.openxmlformats.org/drawingml/2006/main" r:embed="Ree71be41ab1f401e"/>
           <a:srcRect xmlns:a="http://schemas.openxmlformats.org/drawingml/2006/main" l="0" t="0" r="0" b="0"/>
           <a:stretch xmlns:a="http://schemas.openxmlformats.org/drawingml/2006/main">
             <a:fillRect l="0" t="0" r="0" b="0"/>
@@ -19504,7 +19368,7 @@
           <p:cNvPr id="6" name="">
             <a:extLst xmlns:a="http://schemas.openxmlformats.org/drawingml/2006/main">
               <a:ext uri="{FF2B5EF4-FFF2-40B4-BE49-F238E27FC236}">
-                <a16:creationId xmlns:a16="http://schemas.microsoft.com/office/drawing/2014/main" id="{FBBE89C1-7D25-4531-8E3C-27CF36FC48EC}"/>
+                <a16:creationId xmlns:a16="http://schemas.microsoft.com/office/drawing/2014/main" id="{37588DC3-1A38-47CB-B487-E57BB82F52EE}"/>
               </a:ext>
             </a:extLst>
           </p:cNvPr>
@@ -19566,7 +19430,7 @@
           <p:cNvPr id="7" name="">
             <a:extLst xmlns:a="http://schemas.openxmlformats.org/drawingml/2006/main">
               <a:ext uri="{FF2B5EF4-FFF2-40B4-BE49-F238E27FC236}">
-                <a16:creationId xmlns:a16="http://schemas.microsoft.com/office/drawing/2014/main" id="{BF23EB09-CABA-47A5-B7F9-61AAC0F43AAE}"/>
+                <a16:creationId xmlns:a16="http://schemas.microsoft.com/office/drawing/2014/main" id="{55A72E32-E38D-4C97-BABD-113173B69B37}"/>
               </a:ext>
             </a:extLst>
           </p:cNvPr>
@@ -19628,7 +19492,7 @@
           <p:cNvPr id="8" name="">
             <a:extLst xmlns:a="http://schemas.openxmlformats.org/drawingml/2006/main">
               <a:ext uri="{FF2B5EF4-FFF2-40B4-BE49-F238E27FC236}">
-                <a16:creationId xmlns:a16="http://schemas.microsoft.com/office/drawing/2014/main" id="{692DD302-2EBF-4FA5-B950-0D99EFEBE74D}"/>
+                <a16:creationId xmlns:a16="http://schemas.microsoft.com/office/drawing/2014/main" id="{48802765-D2E0-44AA-8F10-25F33EF368D7}"/>
               </a:ext>
             </a:extLst>
           </p:cNvPr>
@@ -19659,7 +19523,7 @@
           <p:cNvPr id="9" name="">
             <a:extLst xmlns:a="http://schemas.openxmlformats.org/drawingml/2006/main">
               <a:ext uri="{FF2B5EF4-FFF2-40B4-BE49-F238E27FC236}">
-                <a16:creationId xmlns:a16="http://schemas.microsoft.com/office/drawing/2014/main" id="{FD07286F-C587-4862-9E59-D07BF4EC48E7}"/>
+                <a16:creationId xmlns:a16="http://schemas.microsoft.com/office/drawing/2014/main" id="{D398C441-E53E-49AC-8AAA-96726942AADC}"/>
               </a:ext>
             </a:extLst>
           </p:cNvPr>
@@ -19721,7 +19585,7 @@
           <p:cNvPr id="10" name="">
             <a:extLst xmlns:a="http://schemas.openxmlformats.org/drawingml/2006/main">
               <a:ext uri="{FF2B5EF4-FFF2-40B4-BE49-F238E27FC236}">
-                <a16:creationId xmlns:a16="http://schemas.microsoft.com/office/drawing/2014/main" id="{07410233-9DB3-4370-9701-9CEB3888CADF}"/>
+                <a16:creationId xmlns:a16="http://schemas.microsoft.com/office/drawing/2014/main" id="{5982FF44-A48B-47BC-AE50-D8273F1E5D26}"/>
               </a:ext>
             </a:extLst>
           </p:cNvPr>
@@ -19756,7 +19620,7 @@
           <p:cNvPr id="11" name="">
             <a:extLst xmlns:a="http://schemas.openxmlformats.org/drawingml/2006/main">
               <a:ext uri="{FF2B5EF4-FFF2-40B4-BE49-F238E27FC236}">
-                <a16:creationId xmlns:a16="http://schemas.microsoft.com/office/drawing/2014/main" id="{6EC8DBC8-0765-41D6-ABBC-7E6BAB913C51}"/>
+                <a16:creationId xmlns:a16="http://schemas.microsoft.com/office/drawing/2014/main" id="{6805A669-BD15-4362-AA07-E492430D7520}"/>
               </a:ext>
             </a:extLst>
           </p:cNvPr>
@@ -19787,7 +19651,7 @@
           <p:cNvPr id="12" name="">
             <a:extLst xmlns:a="http://schemas.openxmlformats.org/drawingml/2006/main">
               <a:ext uri="{FF2B5EF4-FFF2-40B4-BE49-F238E27FC236}">
-                <a16:creationId xmlns:a16="http://schemas.microsoft.com/office/drawing/2014/main" id="{508A89B0-BDBD-4629-B016-00E7E173DD53}"/>
+                <a16:creationId xmlns:a16="http://schemas.microsoft.com/office/drawing/2014/main" id="{C3401BE9-08BF-4739-82AF-01B8A9DB9273}"/>
               </a:ext>
             </a:extLst>
           </p:cNvPr>
@@ -19849,7 +19713,7 @@
           <p:cNvPr id="13" name="">
             <a:extLst xmlns:a="http://schemas.openxmlformats.org/drawingml/2006/main">
               <a:ext uri="{FF2B5EF4-FFF2-40B4-BE49-F238E27FC236}">
-                <a16:creationId xmlns:a16="http://schemas.microsoft.com/office/drawing/2014/main" id="{253640F3-86B6-434A-BA4B-AF07AC1859BB}"/>
+                <a16:creationId xmlns:a16="http://schemas.microsoft.com/office/drawing/2014/main" id="{040AB092-0A11-4B22-9D42-5B59D1A2F3B4}"/>
               </a:ext>
             </a:extLst>
           </p:cNvPr>
@@ -19901,7 +19765,7 @@
                 <a:ea typeface="Aptos"/>
                 <a:cs typeface="Aptos"/>
               </a:rPr>
-              <a:t>testnet/bugfixes</a:t>
+              <a:t>testnet/bugfixes · 4 of 7 · 48 hours</a:t>
             </a:r>
           </a:p>
         </p:txBody>
@@ -19911,7 +19775,7 @@
           <p:cNvPr id="14" name="">
             <a:extLst xmlns:a="http://schemas.openxmlformats.org/drawingml/2006/main">
               <a:ext uri="{FF2B5EF4-FFF2-40B4-BE49-F238E27FC236}">
-                <a16:creationId xmlns:a16="http://schemas.microsoft.com/office/drawing/2014/main" id="{92AAD5DA-F8AB-45AB-853A-06CE468798D2}"/>
+                <a16:creationId xmlns:a16="http://schemas.microsoft.com/office/drawing/2014/main" id="{3A60287C-A044-49DB-9539-F7054C66B2C4}"/>
               </a:ext>
             </a:extLst>
           </p:cNvPr>
@@ -19942,7 +19806,7 @@
           <p:cNvPr id="15" name="">
             <a:extLst xmlns:a="http://schemas.openxmlformats.org/drawingml/2006/main">
               <a:ext uri="{FF2B5EF4-FFF2-40B4-BE49-F238E27FC236}">
-                <a16:creationId xmlns:a16="http://schemas.microsoft.com/office/drawing/2014/main" id="{CAD964AE-2E5C-4A39-AC01-81B21B785E03}"/>
+                <a16:creationId xmlns:a16="http://schemas.microsoft.com/office/drawing/2014/main" id="{BA576EB3-071D-4895-A836-CB88C8FAC68E}"/>
               </a:ext>
             </a:extLst>
           </p:cNvPr>
@@ -20004,7 +19868,7 @@
           <p:cNvPr id="16" name="">
             <a:extLst xmlns:a="http://schemas.openxmlformats.org/drawingml/2006/main">
               <a:ext uri="{FF2B5EF4-FFF2-40B4-BE49-F238E27FC236}">
-                <a16:creationId xmlns:a16="http://schemas.microsoft.com/office/drawing/2014/main" id="{E72831E9-FE7A-4A3D-860E-022F7E8C6B9D}"/>
+                <a16:creationId xmlns:a16="http://schemas.microsoft.com/office/drawing/2014/main" id="{9707A403-1BD8-4F8C-BD25-6D282F3E4C89}"/>
               </a:ext>
             </a:extLst>
           </p:cNvPr>
@@ -20039,7 +19903,7 @@
           <p:cNvPr id="17" name="">
             <a:extLst xmlns:a="http://schemas.openxmlformats.org/drawingml/2006/main">
               <a:ext uri="{FF2B5EF4-FFF2-40B4-BE49-F238E27FC236}">
-                <a16:creationId xmlns:a16="http://schemas.microsoft.com/office/drawing/2014/main" id="{A2EBAE54-32D7-44E4-8164-7218A881E14A}"/>
+                <a16:creationId xmlns:a16="http://schemas.microsoft.com/office/drawing/2014/main" id="{79C21868-295D-43B4-9186-5A65BEF53E36}"/>
               </a:ext>
             </a:extLst>
           </p:cNvPr>
@@ -20070,7 +19934,7 @@
           <p:cNvPr id="18" name="">
             <a:extLst xmlns:a="http://schemas.openxmlformats.org/drawingml/2006/main">
               <a:ext uri="{FF2B5EF4-FFF2-40B4-BE49-F238E27FC236}">
-                <a16:creationId xmlns:a16="http://schemas.microsoft.com/office/drawing/2014/main" id="{F4FF83F0-2A1E-40DD-BF5B-C07B35F7B34A}"/>
+                <a16:creationId xmlns:a16="http://schemas.microsoft.com/office/drawing/2014/main" id="{103122DB-6CC7-4E4A-B9EA-88F0ED799612}"/>
               </a:ext>
             </a:extLst>
           </p:cNvPr>
@@ -20132,7 +19996,7 @@
           <p:cNvPr id="19" name="">
             <a:extLst xmlns:a="http://schemas.openxmlformats.org/drawingml/2006/main">
               <a:ext uri="{FF2B5EF4-FFF2-40B4-BE49-F238E27FC236}">
-                <a16:creationId xmlns:a16="http://schemas.microsoft.com/office/drawing/2014/main" id="{0F1BB083-6A44-4361-B13C-B250156300F2}"/>
+                <a16:creationId xmlns:a16="http://schemas.microsoft.com/office/drawing/2014/main" id="{B01B2ADF-5FAB-4EF2-BBF1-FDFBDE290193}"/>
               </a:ext>
             </a:extLst>
           </p:cNvPr>
@@ -20184,7 +20048,7 @@
                 <a:ea typeface="Aptos"/>
                 <a:cs typeface="Aptos"/>
               </a:rPr>
-              <a:t>security only</a:t>
+              <a:t>security only · 5 of 9 · 14 days</a:t>
             </a:r>
           </a:p>
         </p:txBody>
@@ -20194,7 +20058,7 @@
           <p:cNvPr id="20" name="">
             <a:extLst xmlns:a="http://schemas.openxmlformats.org/drawingml/2006/main">
               <a:ext uri="{FF2B5EF4-FFF2-40B4-BE49-F238E27FC236}">
-                <a16:creationId xmlns:a16="http://schemas.microsoft.com/office/drawing/2014/main" id="{FA20A267-B497-4E56-847B-32831421C583}"/>
+                <a16:creationId xmlns:a16="http://schemas.microsoft.com/office/drawing/2014/main" id="{D2F9CE54-A829-44E5-9C8A-515EBFB8F935}"/>
               </a:ext>
             </a:extLst>
           </p:cNvPr>
@@ -20225,7 +20089,7 @@
           <p:cNvPr id="21" name="">
             <a:extLst xmlns:a="http://schemas.openxmlformats.org/drawingml/2006/main">
               <a:ext uri="{FF2B5EF4-FFF2-40B4-BE49-F238E27FC236}">
-                <a16:creationId xmlns:a16="http://schemas.microsoft.com/office/drawing/2014/main" id="{F37F686F-CEB9-4EBF-98AF-11A971FBF63A}"/>
+                <a16:creationId xmlns:a16="http://schemas.microsoft.com/office/drawing/2014/main" id="{EEEFC306-1089-47B8-90F4-4308E24E6D9D}"/>
               </a:ext>
             </a:extLst>
           </p:cNvPr>
@@ -20287,7 +20151,7 @@
           <p:cNvPr id="22" name="">
             <a:extLst xmlns:a="http://schemas.openxmlformats.org/drawingml/2006/main">
               <a:ext uri="{FF2B5EF4-FFF2-40B4-BE49-F238E27FC236}">
-                <a16:creationId xmlns:a16="http://schemas.microsoft.com/office/drawing/2014/main" id="{1FF60005-19E9-4B4E-9B79-7737DA8982D4}"/>
+                <a16:creationId xmlns:a16="http://schemas.microsoft.com/office/drawing/2014/main" id="{F1BE957F-52A1-4D74-BA0A-FF04FEE1F176}"/>
               </a:ext>
             </a:extLst>
           </p:cNvPr>
@@ -20322,7 +20186,7 @@
           <p:cNvPr id="23" name="">
             <a:extLst xmlns:a="http://schemas.openxmlformats.org/drawingml/2006/main">
               <a:ext uri="{FF2B5EF4-FFF2-40B4-BE49-F238E27FC236}">
-                <a16:creationId xmlns:a16="http://schemas.microsoft.com/office/drawing/2014/main" id="{B7B9DEC6-77C9-4B65-9B15-ADF9F1A98115}"/>
+                <a16:creationId xmlns:a16="http://schemas.microsoft.com/office/drawing/2014/main" id="{BD0BDAE7-1BE3-4540-B4E9-6C2A574FEF88}"/>
               </a:ext>
             </a:extLst>
           </p:cNvPr>
@@ -20353,7 +20217,7 @@
           <p:cNvPr id="24" name="">
             <a:extLst xmlns:a="http://schemas.openxmlformats.org/drawingml/2006/main">
               <a:ext uri="{FF2B5EF4-FFF2-40B4-BE49-F238E27FC236}">
-                <a16:creationId xmlns:a16="http://schemas.microsoft.com/office/drawing/2014/main" id="{79C919CB-1B73-4D45-AEBA-D9EAEF4C1B33}"/>
+                <a16:creationId xmlns:a16="http://schemas.microsoft.com/office/drawing/2014/main" id="{E3B2A890-544C-4583-8C51-A1A299528F67}"/>
               </a:ext>
             </a:extLst>
           </p:cNvPr>
@@ -20415,7 +20279,7 @@
           <p:cNvPr id="25" name="">
             <a:extLst xmlns:a="http://schemas.openxmlformats.org/drawingml/2006/main">
               <a:ext uri="{FF2B5EF4-FFF2-40B4-BE49-F238E27FC236}">
-                <a16:creationId xmlns:a16="http://schemas.microsoft.com/office/drawing/2014/main" id="{592B6EC0-9340-4A80-851D-D974018DA494}"/>
+                <a16:creationId xmlns:a16="http://schemas.microsoft.com/office/drawing/2014/main" id="{1F79C4E5-1F4A-482D-B000-8FE19E9329E9}"/>
               </a:ext>
             </a:extLst>
           </p:cNvPr>
@@ -20467,7 +20331,7 @@
                 <a:ea typeface="Aptos"/>
                 <a:cs typeface="Aptos"/>
               </a:rPr>
-              <a:t>handover</a:t>
+              <a:t>handover · 6 of 11 · 30 days</a:t>
             </a:r>
           </a:p>
         </p:txBody>
@@ -20477,7 +20341,7 @@
           <p:cNvPr id="26" name="">
             <a:extLst xmlns:a="http://schemas.openxmlformats.org/drawingml/2006/main">
               <a:ext uri="{FF2B5EF4-FFF2-40B4-BE49-F238E27FC236}">
-                <a16:creationId xmlns:a16="http://schemas.microsoft.com/office/drawing/2014/main" id="{38F5DA78-046B-479F-99EE-BC182F18E2F3}"/>
+                <a16:creationId xmlns:a16="http://schemas.microsoft.com/office/drawing/2014/main" id="{FA4B40AE-64E8-454F-8A0F-9DEC34195CBE}"/>
               </a:ext>
             </a:extLst>
           </p:cNvPr>
@@ -20508,7 +20372,7 @@
           <p:cNvPr id="27" name="">
             <a:extLst xmlns:a="http://schemas.openxmlformats.org/drawingml/2006/main">
               <a:ext uri="{FF2B5EF4-FFF2-40B4-BE49-F238E27FC236}">
-                <a16:creationId xmlns:a16="http://schemas.microsoft.com/office/drawing/2014/main" id="{81C4776D-AB1A-4503-9F96-63B5A85E89D8}"/>
+                <a16:creationId xmlns:a16="http://schemas.microsoft.com/office/drawing/2014/main" id="{D8CD626E-F46C-4DCC-AF9B-027369252C5E}"/>
               </a:ext>
             </a:extLst>
           </p:cNvPr>
@@ -20570,7 +20434,7 @@
           <p:cNvPr id="28" name="">
             <a:extLst xmlns:a="http://schemas.openxmlformats.org/drawingml/2006/main">
               <a:ext uri="{FF2B5EF4-FFF2-40B4-BE49-F238E27FC236}">
-                <a16:creationId xmlns:a16="http://schemas.microsoft.com/office/drawing/2014/main" id="{F09A58A9-7C1B-4902-B963-27E215B072E7}"/>
+                <a16:creationId xmlns:a16="http://schemas.microsoft.com/office/drawing/2014/main" id="{0670D7AD-7EF0-408A-984B-28B9FB5305A8}"/>
               </a:ext>
             </a:extLst>
           </p:cNvPr>
@@ -20605,7 +20469,7 @@
           <p:cNvPr id="29" name="">
             <a:extLst xmlns:a="http://schemas.openxmlformats.org/drawingml/2006/main">
               <a:ext uri="{FF2B5EF4-FFF2-40B4-BE49-F238E27FC236}">
-                <a16:creationId xmlns:a16="http://schemas.microsoft.com/office/drawing/2014/main" id="{1C395091-0D50-40A4-A77C-793B938FF2C4}"/>
+                <a16:creationId xmlns:a16="http://schemas.microsoft.com/office/drawing/2014/main" id="{631AECEB-DC9D-4959-BDEB-B9274214F903}"/>
               </a:ext>
             </a:extLst>
           </p:cNvPr>
@@ -20636,7 +20500,7 @@
           <p:cNvPr id="30" name="">
             <a:extLst xmlns:a="http://schemas.openxmlformats.org/drawingml/2006/main">
               <a:ext uri="{FF2B5EF4-FFF2-40B4-BE49-F238E27FC236}">
-                <a16:creationId xmlns:a16="http://schemas.microsoft.com/office/drawing/2014/main" id="{1127A2E5-361B-46EF-B30B-B0CFDE8F597F}"/>
+                <a16:creationId xmlns:a16="http://schemas.microsoft.com/office/drawing/2014/main" id="{F95BB2E1-E2A6-4976-9E59-117018F37DC5}"/>
               </a:ext>
             </a:extLst>
           </p:cNvPr>
@@ -20698,7 +20562,7 @@
           <p:cNvPr id="31" name="">
             <a:extLst xmlns:a="http://schemas.openxmlformats.org/drawingml/2006/main">
               <a:ext uri="{FF2B5EF4-FFF2-40B4-BE49-F238E27FC236}">
-                <a16:creationId xmlns:a16="http://schemas.microsoft.com/office/drawing/2014/main" id="{293E2FE4-DB6E-4A5B-8158-E5330A00C052}"/>
+                <a16:creationId xmlns:a16="http://schemas.microsoft.com/office/drawing/2014/main" id="{7FD9770B-631C-4C0D-98BE-7E79C25889EC}"/>
               </a:ext>
             </a:extLst>
           </p:cNvPr>
@@ -20760,7 +20624,7 @@
           <p:cNvPr id="32" name="">
             <a:extLst xmlns:a="http://schemas.openxmlformats.org/drawingml/2006/main">
               <a:ext uri="{FF2B5EF4-FFF2-40B4-BE49-F238E27FC236}">
-                <a16:creationId xmlns:a16="http://schemas.microsoft.com/office/drawing/2014/main" id="{173F06B9-DB5C-4E4D-ACA4-11D3D2270DF2}"/>
+                <a16:creationId xmlns:a16="http://schemas.microsoft.com/office/drawing/2014/main" id="{009E3F69-1BD3-4804-AF50-FDE87748CFFA}"/>
               </a:ext>
             </a:extLst>
           </p:cNvPr>
@@ -20822,7 +20686,7 @@
     </p:spTree>
     <p:extLst>
       <p:ext uri="{BB962C8B-B14F-4D97-AF65-F5344CB8AC3E}">
-        <p14:creationId xmlns:p14="http://schemas.microsoft.com/office/powerpoint/2010/main" val="1679378201"/>
+        <p14:creationId xmlns:p14="http://schemas.microsoft.com/office/powerpoint/2010/main" val="1179784344"/>
       </p:ext>
     </p:extLst>
   </p:cSld>
